--- a/docs/SageAI_Tech_Pitch.pptx
+++ b/docs/SageAI_Tech_Pitch.pptx
@@ -4710,7 +4710,7 @@
                   <a:srgbClr val="0D1B2A"/>
                 </a:solidFill>
               </a:rPr>
-              <a:t>▸  New solution in &lt; 5 min: copy medtech/ · edit 3 YAML files · run make run PROJECT=&lt;name&gt;</a:t>
+              <a:t>New solution in &lt; 5 min: copy medtech/ · edit 3 YAML files · run make run PROJECT=&lt;name&gt;</a:t>
             </a:r>
           </a:p>
         </p:txBody>
@@ -4744,7 +4744,7 @@
                   <a:srgbClr val="0D1B2A"/>
                 </a:solidFill>
               </a:rPr>
-              <a:t>▸  New agent role: add YAML block to prompts.yaml + entry to tasks.yaml — no Python required</a:t>
+              <a:t>New agent role: add YAML block to prompts.yaml + entry to tasks.yaml — no Python required</a:t>
             </a:r>
           </a:p>
         </p:txBody>
@@ -4778,7 +4778,7 @@
                   <a:srgbClr val="0D1B2A"/>
                 </a:solidFill>
               </a:rPr>
-              <a:t>▸  Hot-reload YAML via /edit-solution-yaml skill — backend reloads without restart</a:t>
+              <a:t>Hot-reload YAML via /edit-solution-yaml skill — backend reloads without restart</a:t>
             </a:r>
           </a:p>
         </p:txBody>
@@ -5751,7 +5751,7 @@
                   <a:srgbClr val="7B4F00"/>
                 </a:solidFill>
               </a:rPr>
-              <a:t>⚠️  COST DISCLAIMER — All financial figures, FTE savings, and ROI estimates on this slide are based on internal assumptions and industry benchmarks. They must be validated and replaced with actual measured data before any business decision is made.</a:t>
+              <a:t>IMPORTANT: All financial figures, FTE savings, and ROI estimates on this slide are based on internal assumptions and industry benchmarks. They must be validated and replaced with actual measured data before any business decision is made.</a:t>
             </a:r>
           </a:p>
         </p:txBody>
@@ -6033,7 +6033,7 @@
                   <a:srgbClr val="FFFFFF"/>
                 </a:solidFill>
               </a:rPr>
-              <a:t>•  Features to build inside your application</a:t>
+              <a:t>Features to build inside your application</a:t>
             </a:r>
           </a:p>
         </p:txBody>
@@ -6067,7 +6067,7 @@
                   <a:srgbClr val="FFFFFF"/>
                 </a:solidFill>
               </a:rPr>
-              <a:t>•  Owned by the builder's team</a:t>
+              <a:t>Owned by the builder's team</a:t>
             </a:r>
           </a:p>
         </p:txBody>
@@ -6101,7 +6101,7 @@
                   <a:srgbClr val="FFFFFF"/>
                 </a:solidFill>
               </a:rPr>
-              <a:t>•  Full SAGE workflow: Log → AI plan → Approve → Implement</a:t>
+              <a:t>Full SAGE workflow: Log → AI plan → Approve → Implement</a:t>
             </a:r>
           </a:p>
         </p:txBody>
@@ -6135,7 +6135,7 @@
                   <a:srgbClr val="FFFFFF"/>
                 </a:solidFill>
               </a:rPr>
-              <a:t>•  Planner Agent decomposes and prioritises</a:t>
+              <a:t>Planner Agent decomposes and prioritises</a:t>
             </a:r>
           </a:p>
         </p:txBody>
@@ -6169,7 +6169,7 @@
                   <a:srgbClr val="FFFFFF"/>
                 </a:solidFill>
               </a:rPr>
-              <a:t>•  Visible in: Improvements → Solution Backlog tab</a:t>
+              <a:t>Visible in: Improvements → Solution Backlog tab</a:t>
             </a:r>
           </a:p>
         </p:txBody>
@@ -6314,7 +6314,7 @@
                   <a:srgbClr val="FFFFFF"/>
                 </a:solidFill>
               </a:rPr>
-              <a:t>•  Improvements to the SAGE platform itself</a:t>
+              <a:t>Improvements to the SAGE platform itself</a:t>
             </a:r>
           </a:p>
         </p:txBody>
@@ -6348,7 +6348,7 @@
                   <a:srgbClr val="FFFFFF"/>
                 </a:solidFill>
               </a:rPr>
-              <a:t>•  Community contributions</a:t>
+              <a:t>Community contributions</a:t>
             </a:r>
           </a:p>
         </p:txBody>
@@ -6382,7 +6382,7 @@
                   <a:srgbClr val="FFFFFF"/>
                 </a:solidFill>
               </a:rPr>
-              <a:t>•  Raised as GitHub Issues on the SAGE repo</a:t>
+              <a:t>Raised as GitHub Issues on the SAGE repo</a:t>
             </a:r>
           </a:p>
         </p:txBody>
@@ -6416,7 +6416,7 @@
                   <a:srgbClr val="FFFFFF"/>
                 </a:solidFill>
               </a:rPr>
-              <a:t>•  Open-source community picks them up</a:t>
+              <a:t>Open-source community picks them up</a:t>
             </a:r>
           </a:p>
         </p:txBody>
@@ -6450,7 +6450,7 @@
                   <a:srgbClr val="FFFFFF"/>
                 </a:solidFill>
               </a:rPr>
-              <a:t>•  Visible in: Improvements → SAGE Framework Ideas tab</a:t>
+              <a:t>Visible in: Improvements → SAGE Framework Ideas tab</a:t>
             </a:r>
           </a:p>
         </p:txBody>
@@ -10738,7 +10738,7 @@
                   <a:srgbClr val="FFFFFF"/>
                 </a:solidFill>
               </a:rPr>
-              <a:t>•  prompt: the input to send to the agent</a:t>
+              <a:t>prompt: the input to send to the agent</a:t>
             </a:r>
           </a:p>
         </p:txBody>
@@ -10772,7 +10772,7 @@
                   <a:srgbClr val="FFFFFF"/>
                 </a:solidFill>
               </a:rPr>
-              <a:t>•  expected_keywords: list of terms that must appear</a:t>
+              <a:t>expected_keywords: list of terms that must appear</a:t>
             </a:r>
           </a:p>
         </p:txBody>
@@ -10806,7 +10806,7 @@
                   <a:srgbClr val="FFFFFF"/>
                 </a:solidFill>
               </a:rPr>
-              <a:t>•  max_response_length: optional brevity constraint</a:t>
+              <a:t>max_response_length: optional brevity constraint</a:t>
             </a:r>
           </a:p>
         </p:txBody>
@@ -10840,7 +10840,7 @@
                   <a:srgbClr val="FFFFFF"/>
                 </a:solidFill>
               </a:rPr>
-              <a:t>•  Scoring: 70 pts keyword coverage + 30 pts length</a:t>
+              <a:t>Scoring: 70 pts keyword coverage + 30 pts length</a:t>
             </a:r>
           </a:p>
         </p:txBody>
@@ -10985,7 +10985,7 @@
                   <a:srgbClr val="FFFFFF"/>
                 </a:solidFill>
               </a:rPr>
-              <a:t>•  GET  /eval/suites — list available suites</a:t>
+              <a:t>GET  /eval/suites — list available suites</a:t>
             </a:r>
           </a:p>
         </p:txBody>
@@ -11019,7 +11019,7 @@
                   <a:srgbClr val="FFFFFF"/>
                 </a:solidFill>
               </a:rPr>
-              <a:t>•  POST /eval/run   — run one or all suites</a:t>
+              <a:t>POST /eval/run   — run one or all suites</a:t>
             </a:r>
           </a:p>
         </p:txBody>
@@ -11053,7 +11053,7 @@
                   <a:srgbClr val="FFFFFF"/>
                 </a:solidFill>
               </a:rPr>
-              <a:t>•  GET  /eval/history — trend data per suite</a:t>
+              <a:t>GET  /eval/history — trend data per suite</a:t>
             </a:r>
           </a:p>
         </p:txBody>
@@ -11087,7 +11087,7 @@
                   <a:srgbClr val="FFFFFF"/>
                 </a:solidFill>
               </a:rPr>
-              <a:t>•  Scores 0–100; track regressions across LLM upgrades</a:t>
+              <a:t>Scores 0–100; track regressions across LLM upgrades</a:t>
             </a:r>
           </a:p>
         </p:txBody>
@@ -13665,7 +13665,7 @@
                             <a:srgbClr val="0D1B2A"/>
                           </a:solidFill>
                         </a:rPr>
-                        <a:t>0–4</a:t>
+                        <a:t>0-4</a:t>
                       </a:r>
                     </a:p>
                   </a:txBody>
@@ -13687,7 +13687,7 @@
                             <a:srgbClr val="0D1B2A"/>
                           </a:solidFill>
                         </a:rPr>
-                        <a:t>Core agents · API · Web UI · Approval gate · Audit log</a:t>
+                        <a:t>Core agents, API, Web UI, Approval gate, Audit log</a:t>
                       </a:r>
                     </a:p>
                   </a:txBody>
@@ -13709,7 +13709,7 @@
                             <a:srgbClr val="0D1B2A"/>
                           </a:solidFill>
                         </a:rPr>
-                        <a:t>✅ Complete</a:t>
+                        <a:t>Complete</a:t>
                       </a:r>
                     </a:p>
                   </a:txBody>
@@ -13777,7 +13777,7 @@
                             <a:srgbClr val="0D1B2A"/>
                           </a:solidFill>
                         </a:rPr>
-                        <a:t>✅ Complete</a:t>
+                        <a:t>Complete</a:t>
                       </a:r>
                     </a:p>
                   </a:txBody>
@@ -13823,7 +13823,7 @@
                             <a:srgbClr val="0D1B2A"/>
                           </a:solidFill>
                         </a:rPr>
-                        <a:t>Onboarding wizard — plain-language → YAML solution in 60 s</a:t>
+                        <a:t>Onboarding wizard — plain-language to YAML solution in 60 s</a:t>
                       </a:r>
                     </a:p>
                   </a:txBody>
@@ -13845,7 +13845,7 @@
                             <a:srgbClr val="0D1B2A"/>
                           </a:solidFill>
                         </a:rPr>
-                        <a:t>✅ Complete</a:t>
+                        <a:t>Complete</a:t>
                       </a:r>
                     </a:p>
                   </a:txBody>
@@ -13891,7 +13891,7 @@
                             <a:srgbClr val="0D1B2A"/>
                           </a:solidFill>
                         </a:rPr>
-                        <a:t>Knowledge base CRUD — list / add / delete / bulk / search</a:t>
+                        <a:t>Knowledge base CRUD — list, add, delete, bulk, search</a:t>
                       </a:r>
                     </a:p>
                   </a:txBody>
@@ -13913,7 +13913,7 @@
                             <a:srgbClr val="0D1B2A"/>
                           </a:solidFill>
                         </a:rPr>
-                        <a:t>✅ Complete</a:t>
+                        <a:t>Complete</a:t>
                       </a:r>
                     </a:p>
                   </a:txBody>
@@ -13981,7 +13981,7 @@
                             <a:srgbClr val="0D1B2A"/>
                           </a:solidFill>
                         </a:rPr>
-                        <a:t>✅ Complete</a:t>
+                        <a:t>Complete</a:t>
                       </a:r>
                     </a:p>
                   </a:txBody>
@@ -14027,7 +14027,7 @@
                             <a:srgbClr val="0D1B2A"/>
                           </a:solidFill>
                         </a:rPr>
-                        <a:t>Eval &amp; benchmarking — YAML test cases, 0–100 scoring, history</a:t>
+                        <a:t>Eval &amp; benchmarking — YAML test cases, 0-100 scoring, history</a:t>
                       </a:r>
                     </a:p>
                   </a:txBody>
@@ -14049,7 +14049,7 @@
                             <a:srgbClr val="0D1B2A"/>
                           </a:solidFill>
                         </a:rPr>
-                        <a:t>✅ Complete</a:t>
+                        <a:t>Complete</a:t>
                       </a:r>
                     </a:p>
                   </a:txBody>
@@ -14117,7 +14117,7 @@
                             <a:srgbClr val="0D1B2A"/>
                           </a:solidFill>
                         </a:rPr>
-                        <a:t>✅ Complete</a:t>
+                        <a:t>Complete</a:t>
                       </a:r>
                     </a:p>
                   </a:txBody>
@@ -14185,7 +14185,7 @@
                             <a:srgbClr val="0D1B2A"/>
                           </a:solidFill>
                         </a:rPr>
-                        <a:t>✅ Complete</a:t>
+                        <a:t>Complete</a:t>
                       </a:r>
                     </a:p>
                   </a:txBody>
@@ -14522,7 +14522,7 @@
                   <a:srgbClr val="FFFFFF"/>
                 </a:solidFill>
               </a:rPr>
-              <a:t>📂  github.com/your-org/sage</a:t>
+              <a:t>github.com/your-org/sage</a:t>
             </a:r>
           </a:p>
         </p:txBody>
@@ -14556,7 +14556,7 @@
                   <a:srgbClr val="FFFFFF"/>
                 </a:solidFill>
               </a:rPr>
-              <a:t>📖  /docs — SETUP.md · USER_GUIDE.md · ADDING_A_PROJECT.md</a:t>
+              <a:t>/docs — SETUP.md · USER_GUIDE.md · ADDING_A_PROJECT.md</a:t>
             </a:r>
           </a:p>
         </p:txBody>
@@ -14590,7 +14590,7 @@
                   <a:srgbClr val="FFFFFF"/>
                 </a:solidFill>
               </a:rPr>
-              <a:t>🧪  make test-all — full test suite in &lt; 2 min</a:t>
+              <a:t>make test-all — full test suite in under 2 min</a:t>
             </a:r>
           </a:p>
         </p:txBody>
@@ -14624,7 +14624,7 @@
                   <a:srgbClr val="FFFFFF"/>
                 </a:solidFill>
               </a:rPr>
-              <a:t>🚀  make run PROJECT=medtech — running in 60 seconds</a:t>
+              <a:t>make run PROJECT=medtech — running in 60 seconds</a:t>
             </a:r>
           </a:p>
         </p:txBody>
@@ -14658,7 +14658,7 @@
                   <a:srgbClr val="647487"/>
                 </a:solidFill>
               </a:rPr>
-              <a:t>⚠️  All performance figures and cost estimates are assumption-based — validate before decisions.</a:t>
+              <a:t>All performance figures and cost estimates are assumption-based — validate before decisions.</a:t>
             </a:r>
           </a:p>
         </p:txBody>
@@ -18104,7 +18104,7 @@
                   <a:srgbClr val="FFFFFF"/>
                 </a:solidFill>
               </a:rPr>
-              <a:t>•  Append-only — no deletes, ever</a:t>
+              <a:t>Append-only — no deletes, ever</a:t>
             </a:r>
           </a:p>
         </p:txBody>
@@ -18138,7 +18138,7 @@
                   <a:srgbClr val="FFFFFF"/>
                 </a:solidFill>
               </a:rPr>
-              <a:t>•  UUID trace_id on every AI decision</a:t>
+              <a:t>UUID trace_id on every AI decision</a:t>
             </a:r>
           </a:p>
         </p:txBody>
@@ -18172,7 +18172,7 @@
                   <a:srgbClr val="FFFFFF"/>
                 </a:solidFill>
               </a:rPr>
-              <a:t>•  Full event: input · output · approval · feedback</a:t>
+              <a:t>Full event: input · output · approval · feedback</a:t>
             </a:r>
           </a:p>
         </p:txBody>
@@ -18206,7 +18206,7 @@
                   <a:srgbClr val="FFFFFF"/>
                 </a:solidFill>
               </a:rPr>
-              <a:t>•  Queryable for KPI dashboards</a:t>
+              <a:t>Queryable for KPI dashboards</a:t>
             </a:r>
           </a:p>
         </p:txBody>
@@ -18240,7 +18240,7 @@
                   <a:srgbClr val="FFFFFF"/>
                 </a:solidFill>
               </a:rPr>
-              <a:t>•  FDA 21 CFR Part 11 / ISO 13485 compliant</a:t>
+              <a:t>FDA 21 CFR Part 11 / ISO 13485 compliant</a:t>
             </a:r>
           </a:p>
         </p:txBody>
@@ -18385,7 +18385,7 @@
                   <a:srgbClr val="FFFFFF"/>
                 </a:solidFill>
               </a:rPr>
-              <a:t>•  Prior analyses stored as embeddings</a:t>
+              <a:t>Prior analyses stored as embeddings</a:t>
             </a:r>
           </a:p>
         </p:txBody>
@@ -18419,7 +18419,7 @@
                   <a:srgbClr val="FFFFFF"/>
                 </a:solidFill>
               </a:rPr>
-              <a:t>•  Searched before every LLM call</a:t>
+              <a:t>Searched before every LLM call</a:t>
             </a:r>
           </a:p>
         </p:txBody>
@@ -18453,7 +18453,7 @@
                   <a:srgbClr val="FFFFFF"/>
                 </a:solidFill>
               </a:rPr>
-              <a:t>•  Updated after every human correction</a:t>
+              <a:t>Updated after every human correction</a:t>
             </a:r>
           </a:p>
         </p:txBody>
@@ -18487,7 +18487,7 @@
                   <a:srgbClr val="FFFFFF"/>
                 </a:solidFill>
               </a:rPr>
-              <a:t>•  No model retraining — behavioral improvement via retrieval</a:t>
+              <a:t>No model retraining — behavioral improvement via retrieval</a:t>
             </a:r>
           </a:p>
         </p:txBody>
@@ -18521,7 +18521,7 @@
                   <a:srgbClr val="FFFFFF"/>
                 </a:solidFill>
               </a:rPr>
-              <a:t>•  Memento principle: policy improves, LLM stays frozen</a:t>
+              <a:t>Memento principle: policy improves, LLM stays frozen</a:t>
             </a:r>
           </a:p>
         </p:txBody>
@@ -18555,7 +18555,7 @@
                   <a:srgbClr val="647487"/>
                 </a:solidFill>
               </a:rPr>
-              <a:t>←  divider  →</a:t>
+              <a:t>|</a:t>
             </a:r>
           </a:p>
         </p:txBody>
@@ -18900,7 +18900,7 @@
                             <a:srgbClr val="0D1B2A"/>
                           </a:solidFill>
                         </a:rPr>
-                        <a:t>GitLab (MRs · Issues · Pipelines · CI status)</a:t>
+                        <a:t>GitLab (MRs, Issues, Pipelines, CI status)</a:t>
                       </a:r>
                     </a:p>
                   </a:txBody>
@@ -18922,7 +18922,7 @@
                             <a:srgbClr val="0D1B2A"/>
                           </a:solidFill>
                         </a:rPr>
-                        <a:t>✅ Live</a:t>
+                        <a:t>Live</a:t>
                       </a:r>
                     </a:p>
                   </a:txBody>
@@ -18968,7 +18968,7 @@
                             <a:srgbClr val="0D1B2A"/>
                           </a:solidFill>
                         </a:rPr>
-                        <a:t>Microsoft Teams · Slack (Block Kit approvals · callbacks)</a:t>
+                        <a:t>Microsoft Teams, Slack (Block Kit approvals, callbacks)</a:t>
                       </a:r>
                     </a:p>
                   </a:txBody>
@@ -18990,7 +18990,7 @@
                             <a:srgbClr val="0D1B2A"/>
                           </a:solidFill>
                         </a:rPr>
-                        <a:t>✅ Live</a:t>
+                        <a:t>Live</a:t>
                       </a:r>
                     </a:p>
                   </a:txBody>
@@ -19058,7 +19058,7 @@
                             <a:srgbClr val="0D1B2A"/>
                           </a:solidFill>
                         </a:rPr>
-                        <a:t>✅ Live</a:t>
+                        <a:t>Live</a:t>
                       </a:r>
                     </a:p>
                   </a:txBody>
@@ -19104,7 +19104,7 @@
                             <a:srgbClr val="0D1B2A"/>
                           </a:solidFill>
                         </a:rPr>
-                        <a:t>Gemini CLI · Claude Code · Ollama · local · GenericCLI</a:t>
+                        <a:t>Gemini CLI, Claude Code, Ollama, local, GenericCLI</a:t>
                       </a:r>
                     </a:p>
                   </a:txBody>
@@ -19126,7 +19126,7 @@
                             <a:srgbClr val="0D1B2A"/>
                           </a:solidFill>
                         </a:rPr>
-                        <a:t>✅ No API key</a:t>
+                        <a:t>No API key</a:t>
                       </a:r>
                     </a:p>
                   </a:txBody>
@@ -19172,7 +19172,7 @@
                             <a:srgbClr val="0D1B2A"/>
                           </a:solidFill>
                         </a:rPr>
-                        <a:t>n8n webhook → SAGE task routing (HMAC-verified)</a:t>
+                        <a:t>n8n webhook to SAGE task routing (HMAC-verified)</a:t>
                       </a:r>
                     </a:p>
                   </a:txBody>
@@ -19194,7 +19194,7 @@
                             <a:srgbClr val="0D1B2A"/>
                           </a:solidFill>
                         </a:rPr>
-                        <a:t>✅ Live</a:t>
+                        <a:t>Live</a:t>
                       </a:r>
                     </a:p>
                   </a:txBody>
@@ -19240,7 +19240,7 @@
                             <a:srgbClr val="0D1B2A"/>
                           </a:solidFill>
                         </a:rPr>
-                        <a:t>LangGraph (interrupt/resume) · Temporal (durable)</a:t>
+                        <a:t>LangGraph (interrupt/resume), Temporal (durable)</a:t>
                       </a:r>
                     </a:p>
                   </a:txBody>
@@ -19262,7 +19262,7 @@
                             <a:srgbClr val="0D1B2A"/>
                           </a:solidFill>
                         </a:rPr>
-                        <a:t>✅ Live</a:t>
+                        <a:t>Live</a:t>
                       </a:r>
                     </a:p>
                   </a:txBody>
@@ -19308,7 +19308,7 @@
                             <a:srgbClr val="0D1B2A"/>
                           </a:solidFill>
                         </a:rPr>
-                        <a:t>AutoGen plan → approve → execute in Docker sandbox</a:t>
+                        <a:t>AutoGen plan, approve, execute in Docker sandbox</a:t>
                       </a:r>
                     </a:p>
                   </a:txBody>
@@ -19330,7 +19330,7 @@
                             <a:srgbClr val="0D1B2A"/>
                           </a:solidFill>
                         </a:rPr>
-                        <a:t>✅ Live</a:t>
+                        <a:t>Live</a:t>
                       </a:r>
                     </a:p>
                   </a:txBody>
@@ -19376,7 +19376,7 @@
                             <a:srgbClr val="0D1B2A"/>
                           </a:solidFill>
                         </a:rPr>
-                        <a:t>Spira TM · REST webhook adapters</a:t>
+                        <a:t>Spira TM, REST webhook adapters</a:t>
                       </a:r>
                     </a:p>
                   </a:txBody>
@@ -19398,7 +19398,7 @@
                             <a:srgbClr val="0D1B2A"/>
                           </a:solidFill>
                         </a:rPr>
-                        <a:t>✅ Live</a:t>
+                        <a:t>Live</a:t>
                       </a:r>
                     </a:p>
                   </a:txBody>
@@ -19444,7 +19444,7 @@
                             <a:srgbClr val="0D1B2A"/>
                           </a:solidFill>
                         </a:rPr>
-                        <a:t>X-SAGE-Tenant header → per-team collection isolation</a:t>
+                        <a:t>X-SAGE-Tenant header, per-team collection isolation</a:t>
                       </a:r>
                     </a:p>
                   </a:txBody>
@@ -19466,7 +19466,7 @@
                             <a:srgbClr val="0D1B2A"/>
                           </a:solidFill>
                         </a:rPr>
-                        <a:t>✅ Live</a:t>
+                        <a:t>Live</a:t>
                       </a:r>
                     </a:p>
                   </a:txBody>
@@ -19534,7 +19534,7 @@
                             <a:srgbClr val="0D1B2A"/>
                           </a:solidFill>
                         </a:rPr>
-                        <a:t>✅ Ready</a:t>
+                        <a:t>Ready</a:t>
                       </a:r>
                     </a:p>
                   </a:txBody>

--- a/docs/SageAI_Tech_Pitch.pptx
+++ b/docs/SageAI_Tech_Pitch.pptx
@@ -26,6 +26,8 @@
     <p:sldId id="274" r:id="rId25"/>
     <p:sldId id="275" r:id="rId26"/>
     <p:sldId id="276" r:id="rId27"/>
+    <p:sldId id="279" r:id="rId30"/>
+    <p:sldId id="280" r:id="rId31"/>
     <p:sldId id="277" r:id="rId28"/>
     <p:sldId id="278" r:id="rId29"/>
   </p:sldIdLst>
@@ -4744,7 +4746,7 @@
                   <a:srgbClr val="0D1B2A"/>
                 </a:solidFill>
               </a:rPr>
-              <a:t>New agent role: add YAML block to prompts.yaml + entry to tasks.yaml — no Python required</a:t>
+              <a:t>New agent role: add YAML block to prompts.yaml + entry to tasks.yaml — no Python required — or use Hire Agent in the web UI, no YAML editing required</a:t>
             </a:r>
           </a:p>
         </p:txBody>
@@ -4778,7 +4780,7 @@
                   <a:srgbClr val="0D1B2A"/>
                 </a:solidFill>
               </a:rPr>
-              <a:t>Hot-reload YAML via /edit-solution-yaml skill — backend reloads without restart</a:t>
+              <a:t>Hot-reload YAML via /edit-solution-yaml skill — backend reloads without restart | Solution theming: add theme: block to project.yaml — sidebar, buttons, badges update instantly</a:t>
             </a:r>
           </a:p>
         </p:txBody>
@@ -8381,7 +8383,7 @@
                   <a:srgbClr val="FFFFFF"/>
                 </a:solidFill>
               </a:rPr>
-              <a:t>POST /onboarding/generate with a plain-language description + compliance standards</a:t>
+              <a:t>POST /onboarding/generate with a plain-language description + compliance standards | Web UI path: visit /onboarding — guided multi-turn conversation, LLM extracts domain info, Generate Solution button appears when ready</a:t>
             </a:r>
           </a:p>
         </p:txBody>
@@ -13522,7 +13524,7 @@
                   <a:srgbClr val="FFFFFF"/>
                 </a:solidFill>
               </a:rPr>
-              <a:t>Platform Completeness — 12 Integration Phases</a:t>
+              <a:t>Platform Completeness — 12+ Integration Phases</a:t>
             </a:r>
           </a:p>
         </p:txBody>
@@ -14660,6 +14662,1750 @@
               </a:rPr>
               <a:t>All performance figures and cost estimates are assumption-based — validate before decisions.</a:t>
             </a:r>
+          </a:p>
+        </p:txBody>
+      </p:sp>
+    </p:spTree>
+  </p:cSld>
+  <p:clrMapOvr>
+    <a:masterClrMapping/>
+  </p:clrMapOvr>
+</p:sld>
+</file>
+
+<file path=ppt/slides/slide24.xml><?xml version="1.0" encoding="utf-8"?>
+<p:sld xmlns:a="http://schemas.openxmlformats.org/drawingml/2006/main" xmlns:p="http://schemas.openxmlformats.org/presentationml/2006/main" xmlns:r="http://schemas.openxmlformats.org/officeDocument/2006/relationships">
+  <p:cSld>
+    <p:spTree>
+      <p:nvGrpSpPr>
+        <p:cNvPr id="1" name=""/>
+        <p:cNvGrpSpPr/>
+        <p:nvPr/>
+      </p:nvGrpSpPr>
+      <p:grpSpPr/>
+      <p:sp>
+        <p:nvSpPr>
+          <p:cNvPr id="24" name="TextBox 23"/>
+          <p:cNvSpPr txBox="1"/>
+          <p:nvPr/>
+        </p:nvSpPr>
+        <p:spPr>
+          <a:xfrm>
+            <a:off x="274320" y="6510528"/>
+            <a:ext cx="8229600" cy="274320"/>
+          </a:xfrm>
+          <a:prstGeom prst="rect">
+            <a:avLst/>
+          </a:prstGeom>
+          <a:noFill/>
+        </p:spPr>
+        <p:txBody>
+          <a:bodyPr wrap="square">
+            <a:spAutoFit/>
+          </a:bodyPr>
+          <a:lstStyle/>
+          <a:p>
+            <a:pPr algn="l"/>
+            <a:r>
+              <a:rPr sz="900" b="0" i="0">
+                <a:solidFill>
+                  <a:srgbClr val="647487"/>
+                </a:solidFill>
+              </a:rPr>
+              <a:t>SAGE[ai] — Confidential | March 2026</a:t>
+            </a:r>
+          </a:p>
+        </p:txBody>
+      </p:sp>
+      <p:sp>
+        <p:nvSpPr>
+          <p:cNvPr id="23" name="Rectangle 22"/>
+          <p:cNvSpPr/>
+          <p:nvPr/>
+        </p:nvSpPr>
+        <p:spPr>
+          <a:xfrm>
+            <a:off x="0" y="6492240"/>
+            <a:ext cx="12188952" cy="365760"/>
+          </a:xfrm>
+          <a:prstGeom prst="rect">
+            <a:avLst/>
+          </a:prstGeom>
+          <a:solidFill>
+            <a:srgbClr val="0D1B2A"/>
+          </a:solidFill>
+          <a:ln>
+            <a:noFill/>
+          </a:ln>
+        </p:spPr>
+        <p:style>
+          <a:lnRef idx="1">
+            <a:schemeClr val="accent1"/>
+          </a:lnRef>
+          <a:fillRef idx="3">
+            <a:schemeClr val="accent1"/>
+          </a:fillRef>
+          <a:effectRef idx="2">
+            <a:schemeClr val="accent1"/>
+          </a:effectRef>
+          <a:fontRef idx="minor">
+            <a:schemeClr val="lt1"/>
+          </a:fontRef>
+        </p:style>
+        <p:txBody>
+          <a:bodyPr rtlCol="0" anchor="ctr"/>
+          <a:lstStyle/>
+          <a:p>
+            <a:pPr algn="ctr"/>
+          </a:p>
+        </p:txBody>
+      </p:sp>
+      <p:sp>
+        <p:nvSpPr>
+          <p:cNvPr id="22" name="TextBox 21"/>
+          <p:cNvSpPr txBox="1"/>
+          <p:nvPr/>
+        </p:nvSpPr>
+        <p:spPr>
+          <a:xfrm>
+            <a:off x="3931920" y="5440680"/>
+            <a:ext cx="7955279" cy="457200"/>
+          </a:xfrm>
+          <a:prstGeom prst="rect">
+            <a:avLst/>
+          </a:prstGeom>
+          <a:noFill/>
+        </p:spPr>
+        <p:txBody>
+          <a:bodyPr wrap="square">
+            <a:spAutoFit/>
+          </a:bodyPr>
+          <a:lstStyle/>
+          <a:p>
+            <a:pPr algn="l"/>
+            <a:r>
+              <a:rPr sz="1300" b="0" i="0">
+                <a:solidFill>
+                  <a:srgbClr val="0D1B2A"/>
+                </a:solidFill>
+              </a:rPr>
+              <a:t>pip install composio-langchain + COMPOSIO_API_KEY — no per-tool code</a:t>
+            </a:r>
+          </a:p>
+        </p:txBody>
+      </p:sp>
+      <p:sp>
+        <p:nvSpPr>
+          <p:cNvPr id="21" name="TextBox 20"/>
+          <p:cNvSpPr txBox="1"/>
+          <p:nvPr/>
+        </p:nvSpPr>
+        <p:spPr>
+          <a:xfrm>
+            <a:off x="411480" y="5422392"/>
+            <a:ext cx="3291840" cy="457200"/>
+          </a:xfrm>
+          <a:prstGeom prst="rect">
+            <a:avLst/>
+          </a:prstGeom>
+          <a:noFill/>
+        </p:spPr>
+        <p:txBody>
+          <a:bodyPr wrap="square">
+            <a:spAutoFit/>
+          </a:bodyPr>
+          <a:lstStyle/>
+          <a:p>
+            <a:pPr algn="ctr"/>
+            <a:r>
+              <a:rPr sz="1200" b="1" i="0">
+                <a:solidFill>
+                  <a:srgbClr val="FFFFFF"/>
+                </a:solidFill>
+              </a:rPr>
+              <a:t>Zero Code</a:t>
+            </a:r>
+          </a:p>
+        </p:txBody>
+      </p:sp>
+      <p:sp>
+        <p:nvSpPr>
+          <p:cNvPr id="20" name="Rectangle 19"/>
+          <p:cNvSpPr/>
+          <p:nvPr/>
+        </p:nvSpPr>
+        <p:spPr>
+          <a:xfrm>
+            <a:off x="365760" y="5349240"/>
+            <a:ext cx="3383280" cy="594360"/>
+          </a:xfrm>
+          <a:prstGeom prst="rect">
+            <a:avLst/>
+          </a:prstGeom>
+          <a:solidFill>
+            <a:srgbClr val="00B4D8"/>
+          </a:solidFill>
+          <a:ln>
+            <a:noFill/>
+          </a:ln>
+        </p:spPr>
+        <p:style>
+          <a:lnRef idx="1">
+            <a:schemeClr val="accent1"/>
+          </a:lnRef>
+          <a:fillRef idx="3">
+            <a:schemeClr val="accent1"/>
+          </a:fillRef>
+          <a:effectRef idx="2">
+            <a:schemeClr val="accent1"/>
+          </a:effectRef>
+          <a:fontRef idx="minor">
+            <a:schemeClr val="lt1"/>
+          </a:fontRef>
+        </p:style>
+        <p:txBody>
+          <a:bodyPr rtlCol="0" anchor="ctr"/>
+          <a:lstStyle/>
+          <a:p>
+            <a:pPr algn="ctr"/>
+          </a:p>
+        </p:txBody>
+      </p:sp>
+      <p:sp>
+        <p:nvSpPr>
+          <p:cNvPr id="19" name="TextBox 18"/>
+          <p:cNvSpPr txBox="1"/>
+          <p:nvPr/>
+        </p:nvSpPr>
+        <p:spPr>
+          <a:xfrm>
+            <a:off x="3931920" y="4690872"/>
+            <a:ext cx="7955279" cy="457200"/>
+          </a:xfrm>
+          <a:prstGeom prst="rect">
+            <a:avLst/>
+          </a:prstGeom>
+          <a:noFill/>
+        </p:spPr>
+        <p:txBody>
+          <a:bodyPr wrap="square">
+            <a:spAutoFit/>
+          </a:bodyPr>
+          <a:lstStyle/>
+          <a:p>
+            <a:pPr algn="l"/>
+            <a:r>
+              <a:rPr sz="1300" b="0" i="0">
+                <a:solidFill>
+                  <a:srgbClr val="0D1B2A"/>
+                </a:solidFill>
+              </a:rPr>
+              <a:t>POST /integrations/composio/connect creates a proposal — approve on Dashboard</a:t>
+            </a:r>
+          </a:p>
+        </p:txBody>
+      </p:sp>
+      <p:sp>
+        <p:nvSpPr>
+          <p:cNvPr id="18" name="TextBox 17"/>
+          <p:cNvSpPr txBox="1"/>
+          <p:nvPr/>
+        </p:nvSpPr>
+        <p:spPr>
+          <a:xfrm>
+            <a:off x="411480" y="4672584"/>
+            <a:ext cx="3291840" cy="457200"/>
+          </a:xfrm>
+          <a:prstGeom prst="rect">
+            <a:avLst/>
+          </a:prstGeom>
+          <a:noFill/>
+        </p:spPr>
+        <p:txBody>
+          <a:bodyPr wrap="square">
+            <a:spAutoFit/>
+          </a:bodyPr>
+          <a:lstStyle/>
+          <a:p>
+            <a:pPr algn="ctr"/>
+            <a:r>
+              <a:rPr sz="1200" b="1" i="0">
+                <a:solidFill>
+                  <a:srgbClr val="FFFFFF"/>
+                </a:solidFill>
+              </a:rPr>
+              <a:t>HITL Connect</a:t>
+            </a:r>
+          </a:p>
+        </p:txBody>
+      </p:sp>
+      <p:sp>
+        <p:nvSpPr>
+          <p:cNvPr id="17" name="Rectangle 16"/>
+          <p:cNvSpPr/>
+          <p:nvPr/>
+        </p:nvSpPr>
+        <p:spPr>
+          <a:xfrm>
+            <a:off x="365760" y="4599432"/>
+            <a:ext cx="3383280" cy="594360"/>
+          </a:xfrm>
+          <a:prstGeom prst="rect">
+            <a:avLst/>
+          </a:prstGeom>
+          <a:solidFill>
+            <a:srgbClr val="00B4D8"/>
+          </a:solidFill>
+          <a:ln>
+            <a:noFill/>
+          </a:ln>
+        </p:spPr>
+        <p:style>
+          <a:lnRef idx="1">
+            <a:schemeClr val="accent1"/>
+          </a:lnRef>
+          <a:fillRef idx="3">
+            <a:schemeClr val="accent1"/>
+          </a:fillRef>
+          <a:effectRef idx="2">
+            <a:schemeClr val="accent1"/>
+          </a:effectRef>
+          <a:fontRef idx="minor">
+            <a:schemeClr val="lt1"/>
+          </a:fontRef>
+        </p:style>
+        <p:txBody>
+          <a:bodyPr rtlCol="0" anchor="ctr"/>
+          <a:lstStyle/>
+          <a:p>
+            <a:pPr algn="ctr"/>
+          </a:p>
+        </p:txBody>
+      </p:sp>
+      <p:sp>
+        <p:nvSpPr>
+          <p:cNvPr id="16" name="TextBox 15"/>
+          <p:cNvSpPr txBox="1"/>
+          <p:nvPr/>
+        </p:nvSpPr>
+        <p:spPr>
+          <a:xfrm>
+            <a:off x="3931920" y="3941064"/>
+            <a:ext cx="7955279" cy="457200"/>
+          </a:xfrm>
+          <a:prstGeom prst="rect">
+            <a:avLst/>
+          </a:prstGeom>
+          <a:noFill/>
+        </p:spPr>
+        <p:txBody>
+          <a:bodyPr wrap="square">
+            <a:spAutoFit/>
+          </a:bodyPr>
+          <a:lstStyle/>
+          <a:p>
+            <a:pPr algn="l"/>
+            <a:r>
+              <a:rPr sz="1300" b="0" i="0">
+                <a:solidFill>
+                  <a:srgbClr val="0D1B2A"/>
+                </a:solidFill>
+              </a:rPr>
+              <a:t>New Integrations page: connect apps via OAuth, see active tools per solution</a:t>
+            </a:r>
+          </a:p>
+        </p:txBody>
+      </p:sp>
+      <p:sp>
+        <p:nvSpPr>
+          <p:cNvPr id="15" name="TextBox 14"/>
+          <p:cNvSpPr txBox="1"/>
+          <p:nvPr/>
+        </p:nvSpPr>
+        <p:spPr>
+          <a:xfrm>
+            <a:off x="411480" y="3922776"/>
+            <a:ext cx="3291840" cy="457200"/>
+          </a:xfrm>
+          <a:prstGeom prst="rect">
+            <a:avLst/>
+          </a:prstGeom>
+          <a:noFill/>
+        </p:spPr>
+        <p:txBody>
+          <a:bodyPr wrap="square">
+            <a:spAutoFit/>
+          </a:bodyPr>
+          <a:lstStyle/>
+          <a:p>
+            <a:pPr algn="ctr"/>
+            <a:r>
+              <a:rPr sz="1200" b="1" i="0">
+                <a:solidFill>
+                  <a:srgbClr val="FFFFFF"/>
+                </a:solidFill>
+              </a:rPr>
+              <a:t>Web UI</a:t>
+            </a:r>
+          </a:p>
+        </p:txBody>
+      </p:sp>
+      <p:sp>
+        <p:nvSpPr>
+          <p:cNvPr id="14" name="Rectangle 13"/>
+          <p:cNvSpPr/>
+          <p:nvPr/>
+        </p:nvSpPr>
+        <p:spPr>
+          <a:xfrm>
+            <a:off x="365760" y="3849624"/>
+            <a:ext cx="3383280" cy="594360"/>
+          </a:xfrm>
+          <a:prstGeom prst="rect">
+            <a:avLst/>
+          </a:prstGeom>
+          <a:solidFill>
+            <a:srgbClr val="00B4D8"/>
+          </a:solidFill>
+          <a:ln>
+            <a:noFill/>
+          </a:ln>
+        </p:spPr>
+        <p:style>
+          <a:lnRef idx="1">
+            <a:schemeClr val="accent1"/>
+          </a:lnRef>
+          <a:fillRef idx="3">
+            <a:schemeClr val="accent1"/>
+          </a:fillRef>
+          <a:effectRef idx="2">
+            <a:schemeClr val="accent1"/>
+          </a:effectRef>
+          <a:fontRef idx="minor">
+            <a:schemeClr val="lt1"/>
+          </a:fontRef>
+        </p:style>
+        <p:txBody>
+          <a:bodyPr rtlCol="0" anchor="ctr"/>
+          <a:lstStyle/>
+          <a:p>
+            <a:pPr algn="ctr"/>
+          </a:p>
+        </p:txBody>
+      </p:sp>
+      <p:sp>
+        <p:nvSpPr>
+          <p:cNvPr id="13" name="TextBox 12"/>
+          <p:cNvSpPr txBox="1"/>
+          <p:nvPr/>
+        </p:nvSpPr>
+        <p:spPr>
+          <a:xfrm>
+            <a:off x="3931920" y="3191256"/>
+            <a:ext cx="7955279" cy="457200"/>
+          </a:xfrm>
+          <a:prstGeom prst="rect">
+            <a:avLst/>
+          </a:prstGeom>
+          <a:noFill/>
+        </p:spPr>
+        <p:txBody>
+          <a:bodyPr wrap="square">
+            <a:spAutoFit/>
+          </a:bodyPr>
+          <a:lstStyle/>
+          <a:p>
+            <a:pPr algn="l"/>
+            <a:r>
+              <a:rPr sz="1300" b="0" i="0">
+                <a:solidFill>
+                  <a:srgbClr val="0D1B2A"/>
+                </a:solidFill>
+              </a:rPr>
+              <a:t>Uses existing langchain_tools.py — composio:github in project.yaml integrations</a:t>
+            </a:r>
+          </a:p>
+        </p:txBody>
+      </p:sp>
+      <p:sp>
+        <p:nvSpPr>
+          <p:cNvPr id="12" name="TextBox 11"/>
+          <p:cNvSpPr txBox="1"/>
+          <p:nvPr/>
+        </p:nvSpPr>
+        <p:spPr>
+          <a:xfrm>
+            <a:off x="411480" y="3172968"/>
+            <a:ext cx="3291840" cy="457200"/>
+          </a:xfrm>
+          <a:prstGeom prst="rect">
+            <a:avLst/>
+          </a:prstGeom>
+          <a:noFill/>
+        </p:spPr>
+        <p:txBody>
+          <a:bodyPr wrap="square">
+            <a:spAutoFit/>
+          </a:bodyPr>
+          <a:lstStyle/>
+          <a:p>
+            <a:pPr algn="ctr"/>
+            <a:r>
+              <a:rPr sz="1200" b="1" i="0">
+                <a:solidFill>
+                  <a:srgbClr val="FFFFFF"/>
+                </a:solidFill>
+              </a:rPr>
+              <a:t>LangChain Native</a:t>
+            </a:r>
+          </a:p>
+        </p:txBody>
+      </p:sp>
+      <p:sp>
+        <p:nvSpPr>
+          <p:cNvPr id="11" name="Rectangle 10"/>
+          <p:cNvSpPr/>
+          <p:nvPr/>
+        </p:nvSpPr>
+        <p:spPr>
+          <a:xfrm>
+            <a:off x="365760" y="3099816"/>
+            <a:ext cx="3383280" cy="594360"/>
+          </a:xfrm>
+          <a:prstGeom prst="rect">
+            <a:avLst/>
+          </a:prstGeom>
+          <a:solidFill>
+            <a:srgbClr val="00B4D8"/>
+          </a:solidFill>
+          <a:ln>
+            <a:noFill/>
+          </a:ln>
+        </p:spPr>
+        <p:style>
+          <a:lnRef idx="1">
+            <a:schemeClr val="accent1"/>
+          </a:lnRef>
+          <a:fillRef idx="3">
+            <a:schemeClr val="accent1"/>
+          </a:fillRef>
+          <a:effectRef idx="2">
+            <a:schemeClr val="accent1"/>
+          </a:effectRef>
+          <a:fontRef idx="minor">
+            <a:schemeClr val="lt1"/>
+          </a:fontRef>
+        </p:style>
+        <p:txBody>
+          <a:bodyPr rtlCol="0" anchor="ctr"/>
+          <a:lstStyle/>
+          <a:p>
+            <a:pPr algn="ctr"/>
+          </a:p>
+        </p:txBody>
+      </p:sp>
+      <p:sp>
+        <p:nvSpPr>
+          <p:cNvPr id="10" name="TextBox 9"/>
+          <p:cNvSpPr txBox="1"/>
+          <p:nvPr/>
+        </p:nvSpPr>
+        <p:spPr>
+          <a:xfrm>
+            <a:off x="3931920" y="2441448"/>
+            <a:ext cx="7955279" cy="457200"/>
+          </a:xfrm>
+          <a:prstGeom prst="rect">
+            <a:avLst/>
+          </a:prstGeom>
+          <a:noFill/>
+        </p:spPr>
+        <p:txBody>
+          <a:bodyPr wrap="square">
+            <a:spAutoFit/>
+          </a:bodyPr>
+          <a:lstStyle/>
+          <a:p>
+            <a:pPr algn="l"/>
+            <a:r>
+              <a:rPr sz="1300" b="0" i="0">
+                <a:solidFill>
+                  <a:srgbClr val="0D1B2A"/>
+                </a:solidFill>
+              </a:rPr>
+              <a:t>Composio manages auth flows — SAGE never stores third-party credentials</a:t>
+            </a:r>
+          </a:p>
+        </p:txBody>
+      </p:sp>
+      <p:sp>
+        <p:nvSpPr>
+          <p:cNvPr id="9" name="TextBox 8"/>
+          <p:cNvSpPr txBox="1"/>
+          <p:nvPr/>
+        </p:nvSpPr>
+        <p:spPr>
+          <a:xfrm>
+            <a:off x="411480" y="2423160"/>
+            <a:ext cx="3291840" cy="457200"/>
+          </a:xfrm>
+          <a:prstGeom prst="rect">
+            <a:avLst/>
+          </a:prstGeom>
+          <a:noFill/>
+        </p:spPr>
+        <p:txBody>
+          <a:bodyPr wrap="square">
+            <a:spAutoFit/>
+          </a:bodyPr>
+          <a:lstStyle/>
+          <a:p>
+            <a:pPr algn="ctr"/>
+            <a:r>
+              <a:rPr sz="1200" b="1" i="0">
+                <a:solidFill>
+                  <a:srgbClr val="FFFFFF"/>
+                </a:solidFill>
+              </a:rPr>
+              <a:t>OAuth Handled</a:t>
+            </a:r>
+          </a:p>
+        </p:txBody>
+      </p:sp>
+      <p:sp>
+        <p:nvSpPr>
+          <p:cNvPr id="8" name="Rectangle 7"/>
+          <p:cNvSpPr/>
+          <p:nvPr/>
+        </p:nvSpPr>
+        <p:spPr>
+          <a:xfrm>
+            <a:off x="365760" y="2350008"/>
+            <a:ext cx="3383280" cy="594360"/>
+          </a:xfrm>
+          <a:prstGeom prst="rect">
+            <a:avLst/>
+          </a:prstGeom>
+          <a:solidFill>
+            <a:srgbClr val="00B4D8"/>
+          </a:solidFill>
+          <a:ln>
+            <a:noFill/>
+          </a:ln>
+        </p:spPr>
+        <p:style>
+          <a:lnRef idx="1">
+            <a:schemeClr val="accent1"/>
+          </a:lnRef>
+          <a:fillRef idx="3">
+            <a:schemeClr val="accent1"/>
+          </a:fillRef>
+          <a:effectRef idx="2">
+            <a:schemeClr val="accent1"/>
+          </a:effectRef>
+          <a:fontRef idx="minor">
+            <a:schemeClr val="lt1"/>
+          </a:fontRef>
+        </p:style>
+        <p:txBody>
+          <a:bodyPr rtlCol="0" anchor="ctr"/>
+          <a:lstStyle/>
+          <a:p>
+            <a:pPr algn="ctr"/>
+          </a:p>
+        </p:txBody>
+      </p:sp>
+      <p:sp>
+        <p:nvSpPr>
+          <p:cNvPr id="7" name="TextBox 6"/>
+          <p:cNvSpPr txBox="1"/>
+          <p:nvPr/>
+        </p:nvSpPr>
+        <p:spPr>
+          <a:xfrm>
+            <a:off x="3931920" y="1691640"/>
+            <a:ext cx="7955279" cy="457200"/>
+          </a:xfrm>
+          <a:prstGeom prst="rect">
+            <a:avLst/>
+          </a:prstGeom>
+          <a:noFill/>
+        </p:spPr>
+        <p:txBody>
+          <a:bodyPr wrap="square">
+            <a:spAutoFit/>
+          </a:bodyPr>
+          <a:lstStyle/>
+          <a:p>
+            <a:pPr algn="l"/>
+            <a:r>
+              <a:rPr sz="1300" b="0" i="0">
+                <a:solidFill>
+                  <a:srgbClr val="0D1B2A"/>
+                </a:solidFill>
+              </a:rPr>
+              <a:t>GitHub, GitLab, Jira, Linear, Slack, Notion, Confluence, Salesforce, HubSpot, Zendesk, Stripe, Google Workspace, and 90+ more</a:t>
+            </a:r>
+          </a:p>
+        </p:txBody>
+      </p:sp>
+      <p:sp>
+        <p:nvSpPr>
+          <p:cNvPr id="6" name="TextBox 5"/>
+          <p:cNvSpPr txBox="1"/>
+          <p:nvPr/>
+        </p:nvSpPr>
+        <p:spPr>
+          <a:xfrm>
+            <a:off x="411480" y="1673352"/>
+            <a:ext cx="3291840" cy="457200"/>
+          </a:xfrm>
+          <a:prstGeom prst="rect">
+            <a:avLst/>
+          </a:prstGeom>
+          <a:noFill/>
+        </p:spPr>
+        <p:txBody>
+          <a:bodyPr wrap="square">
+            <a:spAutoFit/>
+          </a:bodyPr>
+          <a:lstStyle/>
+          <a:p>
+            <a:pPr algn="ctr"/>
+            <a:r>
+              <a:rPr sz="1200" b="1" i="0">
+                <a:solidFill>
+                  <a:srgbClr val="FFFFFF"/>
+                </a:solidFill>
+              </a:rPr>
+              <a:t>100+ Apps</a:t>
+            </a:r>
+          </a:p>
+        </p:txBody>
+      </p:sp>
+      <p:sp>
+        <p:nvSpPr>
+          <p:cNvPr id="5" name="Rectangle 4"/>
+          <p:cNvSpPr/>
+          <p:nvPr/>
+        </p:nvSpPr>
+        <p:spPr>
+          <a:xfrm>
+            <a:off x="365760" y="1600200"/>
+            <a:ext cx="3383280" cy="594360"/>
+          </a:xfrm>
+          <a:prstGeom prst="rect">
+            <a:avLst/>
+          </a:prstGeom>
+          <a:solidFill>
+            <a:srgbClr val="00B4D8"/>
+          </a:solidFill>
+          <a:ln>
+            <a:noFill/>
+          </a:ln>
+        </p:spPr>
+        <p:style>
+          <a:lnRef idx="1">
+            <a:schemeClr val="accent1"/>
+          </a:lnRef>
+          <a:fillRef idx="3">
+            <a:schemeClr val="accent1"/>
+          </a:fillRef>
+          <a:effectRef idx="2">
+            <a:schemeClr val="accent1"/>
+          </a:effectRef>
+          <a:fontRef idx="minor">
+            <a:schemeClr val="lt1"/>
+          </a:fontRef>
+        </p:style>
+        <p:txBody>
+          <a:bodyPr rtlCol="0" anchor="ctr"/>
+          <a:lstStyle/>
+          <a:p>
+            <a:pPr algn="ctr"/>
+          </a:p>
+        </p:txBody>
+      </p:sp>
+      <p:sp>
+        <p:nvSpPr>
+          <p:cNvPr id="4" name="TextBox 3"/>
+          <p:cNvSpPr txBox="1"/>
+          <p:nvPr/>
+        </p:nvSpPr>
+        <p:spPr>
+          <a:xfrm>
+            <a:off x="411480" y="804672"/>
+            <a:ext cx="11338560" cy="438912"/>
+          </a:xfrm>
+          <a:prstGeom prst="rect">
+            <a:avLst/>
+          </a:prstGeom>
+          <a:noFill/>
+        </p:spPr>
+        <p:txBody>
+          <a:bodyPr wrap="square">
+            <a:spAutoFit/>
+          </a:bodyPr>
+          <a:lstStyle/>
+          <a:p>
+            <a:pPr algn="l"/>
+            <a:r>
+              <a:rPr sz="1600" b="0" i="0">
+                <a:solidFill>
+                  <a:srgbClr val="00B4D8"/>
+                </a:solidFill>
+              </a:rPr>
+              <a:t>Connect any SaaS tool to SAGE agents — OAuth handled, no per-integration credential code</a:t>
+            </a:r>
+          </a:p>
+        </p:txBody>
+      </p:sp>
+      <p:sp>
+        <p:nvSpPr>
+          <p:cNvPr id="3" name="TextBox 2"/>
+          <p:cNvSpPr txBox="1"/>
+          <p:nvPr/>
+        </p:nvSpPr>
+        <p:spPr>
+          <a:xfrm>
+            <a:off x="411480" y="109728"/>
+            <a:ext cx="11338560" cy="731520"/>
+          </a:xfrm>
+          <a:prstGeom prst="rect">
+            <a:avLst/>
+          </a:prstGeom>
+          <a:noFill/>
+        </p:spPr>
+        <p:txBody>
+          <a:bodyPr wrap="square">
+            <a:spAutoFit/>
+          </a:bodyPr>
+          <a:lstStyle/>
+          <a:p>
+            <a:pPr algn="l"/>
+            <a:r>
+              <a:rPr sz="3000" b="1" i="0">
+                <a:solidFill>
+                  <a:srgbClr val="FFFFFF"/>
+                </a:solidFill>
+              </a:rPr>
+              <a:t>Composio Integration — 100+ Tools in One Package</a:t>
+            </a:r>
+          </a:p>
+        </p:txBody>
+      </p:sp>
+      <p:sp>
+        <p:nvSpPr>
+          <p:cNvPr id="2" name="Rectangle 1"/>
+          <p:cNvSpPr/>
+          <p:nvPr/>
+        </p:nvSpPr>
+        <p:spPr>
+          <a:xfrm>
+            <a:off x="0" y="0"/>
+            <a:ext cx="12188952" cy="1325880"/>
+          </a:xfrm>
+          <a:prstGeom prst="rect">
+            <a:avLst/>
+          </a:prstGeom>
+          <a:solidFill>
+            <a:srgbClr val="0D1B2A"/>
+          </a:solidFill>
+          <a:ln>
+            <a:noFill/>
+          </a:ln>
+        </p:spPr>
+        <p:style>
+          <a:lnRef idx="1">
+            <a:schemeClr val="accent1"/>
+          </a:lnRef>
+          <a:fillRef idx="3">
+            <a:schemeClr val="accent1"/>
+          </a:fillRef>
+          <a:effectRef idx="2">
+            <a:schemeClr val="accent1"/>
+          </a:effectRef>
+          <a:fontRef idx="minor">
+            <a:schemeClr val="lt1"/>
+          </a:fontRef>
+        </p:style>
+        <p:txBody>
+          <a:bodyPr rtlCol="0" anchor="ctr"/>
+          <a:lstStyle/>
+          <a:p>
+            <a:pPr algn="ctr"/>
+          </a:p>
+        </p:txBody>
+      </p:sp>
+    </p:spTree>
+  </p:cSld>
+  <p:clrMapOvr>
+    <a:masterClrMapping/>
+  </p:clrMapOvr>
+</p:sld>
+</file>
+
+<file path=ppt/slides/slide25.xml><?xml version="1.0" encoding="utf-8"?>
+<p:sld xmlns:a="http://schemas.openxmlformats.org/drawingml/2006/main" xmlns:p="http://schemas.openxmlformats.org/presentationml/2006/main" xmlns:r="http://schemas.openxmlformats.org/officeDocument/2006/relationships">
+  <p:cSld>
+    <p:spTree>
+      <p:nvGrpSpPr>
+        <p:cNvPr id="1" name=""/>
+        <p:cNvGrpSpPr/>
+        <p:nvPr/>
+      </p:nvGrpSpPr>
+      <p:grpSpPr/>
+      <p:sp>
+        <p:nvSpPr>
+          <p:cNvPr id="24" name="TextBox 23"/>
+          <p:cNvSpPr txBox="1"/>
+          <p:nvPr/>
+        </p:nvSpPr>
+        <p:spPr>
+          <a:xfrm>
+            <a:off x="274320" y="6510528"/>
+            <a:ext cx="8229600" cy="274320"/>
+          </a:xfrm>
+          <a:prstGeom prst="rect">
+            <a:avLst/>
+          </a:prstGeom>
+          <a:noFill/>
+        </p:spPr>
+        <p:txBody>
+          <a:bodyPr wrap="square">
+            <a:spAutoFit/>
+          </a:bodyPr>
+          <a:lstStyle/>
+          <a:p>
+            <a:pPr algn="l"/>
+            <a:r>
+              <a:rPr sz="900" b="0" i="0">
+                <a:solidFill>
+                  <a:srgbClr val="647487"/>
+                </a:solidFill>
+              </a:rPr>
+              <a:t>SAGE[ai] — Confidential | March 2026</a:t>
+            </a:r>
+          </a:p>
+        </p:txBody>
+      </p:sp>
+      <p:sp>
+        <p:nvSpPr>
+          <p:cNvPr id="23" name="Rectangle 22"/>
+          <p:cNvSpPr/>
+          <p:nvPr/>
+        </p:nvSpPr>
+        <p:spPr>
+          <a:xfrm>
+            <a:off x="0" y="6492240"/>
+            <a:ext cx="12188952" cy="365760"/>
+          </a:xfrm>
+          <a:prstGeom prst="rect">
+            <a:avLst/>
+          </a:prstGeom>
+          <a:solidFill>
+            <a:srgbClr val="0D1B2A"/>
+          </a:solidFill>
+          <a:ln>
+            <a:noFill/>
+          </a:ln>
+        </p:spPr>
+        <p:style>
+          <a:lnRef idx="1">
+            <a:schemeClr val="accent1"/>
+          </a:lnRef>
+          <a:fillRef idx="3">
+            <a:schemeClr val="accent1"/>
+          </a:fillRef>
+          <a:effectRef idx="2">
+            <a:schemeClr val="accent1"/>
+          </a:effectRef>
+          <a:fontRef idx="minor">
+            <a:schemeClr val="lt1"/>
+          </a:fontRef>
+        </p:style>
+        <p:txBody>
+          <a:bodyPr rtlCol="0" anchor="ctr"/>
+          <a:lstStyle/>
+          <a:p>
+            <a:pPr algn="ctr"/>
+          </a:p>
+        </p:txBody>
+      </p:sp>
+      <p:sp>
+        <p:nvSpPr>
+          <p:cNvPr id="22" name="TextBox 21"/>
+          <p:cNvSpPr txBox="1"/>
+          <p:nvPr/>
+        </p:nvSpPr>
+        <p:spPr>
+          <a:xfrm>
+            <a:off x="3931920" y="5440680"/>
+            <a:ext cx="7955279" cy="457200"/>
+          </a:xfrm>
+          <a:prstGeom prst="rect">
+            <a:avLst/>
+          </a:prstGeom>
+          <a:noFill/>
+        </p:spPr>
+        <p:txBody>
+          <a:bodyPr wrap="square">
+            <a:spAutoFit/>
+          </a:bodyPr>
+          <a:lstStyle/>
+          <a:p>
+            <a:pPr algn="l"/>
+            <a:r>
+              <a:rPr sz="1300" b="0" i="0">
+                <a:solidFill>
+                  <a:srgbClr val="0D1B2A"/>
+                </a:solidFill>
+              </a:rPr>
+              <a:t>Medical blue, game studio purple, startup green — no Tailwind dependency</a:t>
+            </a:r>
+          </a:p>
+        </p:txBody>
+      </p:sp>
+      <p:sp>
+        <p:nvSpPr>
+          <p:cNvPr id="21" name="TextBox 20"/>
+          <p:cNvSpPr txBox="1"/>
+          <p:nvPr/>
+        </p:nvSpPr>
+        <p:spPr>
+          <a:xfrm>
+            <a:off x="411480" y="5422392"/>
+            <a:ext cx="3291840" cy="457200"/>
+          </a:xfrm>
+          <a:prstGeom prst="rect">
+            <a:avLst/>
+          </a:prstGeom>
+          <a:noFill/>
+        </p:spPr>
+        <p:txBody>
+          <a:bodyPr wrap="square">
+            <a:spAutoFit/>
+          </a:bodyPr>
+          <a:lstStyle/>
+          <a:p>
+            <a:pPr algn="ctr"/>
+            <a:r>
+              <a:rPr sz="1200" b="1" i="0">
+                <a:solidFill>
+                  <a:srgbClr val="FFFFFF"/>
+                </a:solidFill>
+              </a:rPr>
+              <a:t>Example Themes</a:t>
+            </a:r>
+          </a:p>
+        </p:txBody>
+      </p:sp>
+      <p:sp>
+        <p:nvSpPr>
+          <p:cNvPr id="20" name="Rectangle 19"/>
+          <p:cNvSpPr/>
+          <p:nvPr/>
+        </p:nvSpPr>
+        <p:spPr>
+          <a:xfrm>
+            <a:off x="365760" y="5349240"/>
+            <a:ext cx="3383280" cy="594360"/>
+          </a:xfrm>
+          <a:prstGeom prst="rect">
+            <a:avLst/>
+          </a:prstGeom>
+          <a:solidFill>
+            <a:srgbClr val="00B4D8"/>
+          </a:solidFill>
+          <a:ln>
+            <a:noFill/>
+          </a:ln>
+        </p:spPr>
+        <p:style>
+          <a:lnRef idx="1">
+            <a:schemeClr val="accent1"/>
+          </a:lnRef>
+          <a:fillRef idx="3">
+            <a:schemeClr val="accent1"/>
+          </a:fillRef>
+          <a:effectRef idx="2">
+            <a:schemeClr val="accent1"/>
+          </a:effectRef>
+          <a:fontRef idx="minor">
+            <a:schemeClr val="lt1"/>
+          </a:fontRef>
+        </p:style>
+        <p:txBody>
+          <a:bodyPr rtlCol="0" anchor="ctr"/>
+          <a:lstStyle/>
+          <a:p>
+            <a:pPr algn="ctr"/>
+          </a:p>
+        </p:txBody>
+      </p:sp>
+      <p:sp>
+        <p:nvSpPr>
+          <p:cNvPr id="19" name="TextBox 18"/>
+          <p:cNvSpPr txBox="1"/>
+          <p:nvPr/>
+        </p:nvSpPr>
+        <p:spPr>
+          <a:xfrm>
+            <a:off x="3931920" y="4690872"/>
+            <a:ext cx="7955279" cy="457200"/>
+          </a:xfrm>
+          <a:prstGeom prst="rect">
+            <a:avLst/>
+          </a:prstGeom>
+          <a:noFill/>
+        </p:spPr>
+        <p:txBody>
+          <a:bodyPr wrap="square">
+            <a:spAutoFit/>
+          </a:bodyPr>
+          <a:lstStyle/>
+          <a:p>
+            <a:pPr algn="l"/>
+            <a:r>
+              <a:rPr sz="1300" b="0" i="0">
+                <a:solidFill>
+                  <a:srgbClr val="0D1B2A"/>
+                </a:solidFill>
+              </a:rPr>
+              <a:t>ThemeProvider writes CSS variables to document.documentElement — switches instantly</a:t>
+            </a:r>
+          </a:p>
+        </p:txBody>
+      </p:sp>
+      <p:sp>
+        <p:nvSpPr>
+          <p:cNvPr id="18" name="TextBox 17"/>
+          <p:cNvSpPr txBox="1"/>
+          <p:nvPr/>
+        </p:nvSpPr>
+        <p:spPr>
+          <a:xfrm>
+            <a:off x="411480" y="4672584"/>
+            <a:ext cx="3291840" cy="457200"/>
+          </a:xfrm>
+          <a:prstGeom prst="rect">
+            <a:avLst/>
+          </a:prstGeom>
+          <a:noFill/>
+        </p:spPr>
+        <p:txBody>
+          <a:bodyPr wrap="square">
+            <a:spAutoFit/>
+          </a:bodyPr>
+          <a:lstStyle/>
+          <a:p>
+            <a:pPr algn="ctr"/>
+            <a:r>
+              <a:rPr sz="1200" b="1" i="0">
+                <a:solidFill>
+                  <a:srgbClr val="FFFFFF"/>
+                </a:solidFill>
+              </a:rPr>
+              <a:t>CSS Variables</a:t>
+            </a:r>
+          </a:p>
+        </p:txBody>
+      </p:sp>
+      <p:sp>
+        <p:nvSpPr>
+          <p:cNvPr id="17" name="Rectangle 16"/>
+          <p:cNvSpPr/>
+          <p:nvPr/>
+        </p:nvSpPr>
+        <p:spPr>
+          <a:xfrm>
+            <a:off x="365760" y="4599432"/>
+            <a:ext cx="3383280" cy="594360"/>
+          </a:xfrm>
+          <a:prstGeom prst="rect">
+            <a:avLst/>
+          </a:prstGeom>
+          <a:solidFill>
+            <a:srgbClr val="00B4D8"/>
+          </a:solidFill>
+          <a:ln>
+            <a:noFill/>
+          </a:ln>
+        </p:spPr>
+        <p:style>
+          <a:lnRef idx="1">
+            <a:schemeClr val="accent1"/>
+          </a:lnRef>
+          <a:fillRef idx="3">
+            <a:schemeClr val="accent1"/>
+          </a:fillRef>
+          <a:effectRef idx="2">
+            <a:schemeClr val="accent1"/>
+          </a:effectRef>
+          <a:fontRef idx="minor">
+            <a:schemeClr val="lt1"/>
+          </a:fontRef>
+        </p:style>
+        <p:txBody>
+          <a:bodyPr rtlCol="0" anchor="ctr"/>
+          <a:lstStyle/>
+          <a:p>
+            <a:pPr algn="ctr"/>
+          </a:p>
+        </p:txBody>
+      </p:sp>
+      <p:sp>
+        <p:nvSpPr>
+          <p:cNvPr id="16" name="TextBox 15"/>
+          <p:cNvSpPr txBox="1"/>
+          <p:nvPr/>
+        </p:nvSpPr>
+        <p:spPr>
+          <a:xfrm>
+            <a:off x="3931920" y="3941064"/>
+            <a:ext cx="7955279" cy="457200"/>
+          </a:xfrm>
+          <a:prstGeom prst="rect">
+            <a:avLst/>
+          </a:prstGeom>
+          <a:noFill/>
+        </p:spPr>
+        <p:txBody>
+          <a:bodyPr wrap="square">
+            <a:spAutoFit/>
+          </a:bodyPr>
+          <a:lstStyle/>
+          <a:p>
+            <a:pPr algn="l"/>
+            <a:r>
+              <a:rPr sz="1300" b="0" i="0">
+                <a:solidFill>
+                  <a:srgbClr val="0D1B2A"/>
+                </a:solidFill>
+              </a:rPr>
+              <a:t>theme: block in project.yaml — sidebar_bg, accent, badge_bg CSS colour strings</a:t>
+            </a:r>
+          </a:p>
+        </p:txBody>
+      </p:sp>
+      <p:sp>
+        <p:nvSpPr>
+          <p:cNvPr id="15" name="TextBox 14"/>
+          <p:cNvSpPr txBox="1"/>
+          <p:nvPr/>
+        </p:nvSpPr>
+        <p:spPr>
+          <a:xfrm>
+            <a:off x="411480" y="3922776"/>
+            <a:ext cx="3291840" cy="457200"/>
+          </a:xfrm>
+          <a:prstGeom prst="rect">
+            <a:avLst/>
+          </a:prstGeom>
+          <a:noFill/>
+        </p:spPr>
+        <p:txBody>
+          <a:bodyPr wrap="square">
+            <a:spAutoFit/>
+          </a:bodyPr>
+          <a:lstStyle/>
+          <a:p>
+            <a:pPr algn="ctr"/>
+            <a:r>
+              <a:rPr sz="1200" b="1" i="0">
+                <a:solidFill>
+                  <a:srgbClr val="FFFFFF"/>
+                </a:solidFill>
+              </a:rPr>
+              <a:t>Solution Theming</a:t>
+            </a:r>
+          </a:p>
+        </p:txBody>
+      </p:sp>
+      <p:sp>
+        <p:nvSpPr>
+          <p:cNvPr id="14" name="Rectangle 13"/>
+          <p:cNvSpPr/>
+          <p:nvPr/>
+        </p:nvSpPr>
+        <p:spPr>
+          <a:xfrm>
+            <a:off x="365760" y="3849624"/>
+            <a:ext cx="3383280" cy="594360"/>
+          </a:xfrm>
+          <a:prstGeom prst="rect">
+            <a:avLst/>
+          </a:prstGeom>
+          <a:solidFill>
+            <a:srgbClr val="00B4D8"/>
+          </a:solidFill>
+          <a:ln>
+            <a:noFill/>
+          </a:ln>
+        </p:spPr>
+        <p:style>
+          <a:lnRef idx="1">
+            <a:schemeClr val="accent1"/>
+          </a:lnRef>
+          <a:fillRef idx="3">
+            <a:schemeClr val="accent1"/>
+          </a:fillRef>
+          <a:effectRef idx="2">
+            <a:schemeClr val="accent1"/>
+          </a:effectRef>
+          <a:fontRef idx="minor">
+            <a:schemeClr val="lt1"/>
+          </a:fontRef>
+        </p:style>
+        <p:txBody>
+          <a:bodyPr rtlCol="0" anchor="ctr"/>
+          <a:lstStyle/>
+          <a:p>
+            <a:pPr algn="ctr"/>
+          </a:p>
+        </p:txBody>
+      </p:sp>
+      <p:sp>
+        <p:nvSpPr>
+          <p:cNvPr id="13" name="TextBox 12"/>
+          <p:cNvSpPr txBox="1"/>
+          <p:nvPr/>
+        </p:nvSpPr>
+        <p:spPr>
+          <a:xfrm>
+            <a:off x="3931920" y="3191256"/>
+            <a:ext cx="7955279" cy="457200"/>
+          </a:xfrm>
+          <a:prstGeom prst="rect">
+            <a:avLst/>
+          </a:prstGeom>
+          <a:noFill/>
+        </p:spPr>
+        <p:txBody>
+          <a:bodyPr wrap="square">
+            <a:spAutoFit/>
+          </a:bodyPr>
+          <a:lstStyle/>
+          <a:p>
+            <a:pPr algn="l"/>
+            <a:r>
+              <a:rPr sz="1300" b="0" i="0">
+                <a:solidFill>
+                  <a:srgbClr val="0D1B2A"/>
+                </a:solidFill>
+              </a:rPr>
+              <a:t>Backed by POST /agents/hire — optionally add task types (written to tasks.yaml)</a:t>
+            </a:r>
+          </a:p>
+        </p:txBody>
+      </p:sp>
+      <p:sp>
+        <p:nvSpPr>
+          <p:cNvPr id="12" name="TextBox 11"/>
+          <p:cNvSpPr txBox="1"/>
+          <p:nvPr/>
+        </p:nvSpPr>
+        <p:spPr>
+          <a:xfrm>
+            <a:off x="411480" y="3172968"/>
+            <a:ext cx="3291840" cy="457200"/>
+          </a:xfrm>
+          <a:prstGeom prst="rect">
+            <a:avLst/>
+          </a:prstGeom>
+          <a:noFill/>
+        </p:spPr>
+        <p:txBody>
+          <a:bodyPr wrap="square">
+            <a:spAutoFit/>
+          </a:bodyPr>
+          <a:lstStyle/>
+          <a:p>
+            <a:pPr algn="ctr"/>
+            <a:r>
+              <a:rPr sz="1200" b="1" i="0">
+                <a:solidFill>
+                  <a:srgbClr val="FFFFFF"/>
+                </a:solidFill>
+              </a:rPr>
+              <a:t>API Backed</a:t>
+            </a:r>
+          </a:p>
+        </p:txBody>
+      </p:sp>
+      <p:sp>
+        <p:nvSpPr>
+          <p:cNvPr id="11" name="Rectangle 10"/>
+          <p:cNvSpPr/>
+          <p:nvPr/>
+        </p:nvSpPr>
+        <p:spPr>
+          <a:xfrm>
+            <a:off x="365760" y="3099816"/>
+            <a:ext cx="3383280" cy="594360"/>
+          </a:xfrm>
+          <a:prstGeom prst="rect">
+            <a:avLst/>
+          </a:prstGeom>
+          <a:solidFill>
+            <a:srgbClr val="00B4D8"/>
+          </a:solidFill>
+          <a:ln>
+            <a:noFill/>
+          </a:ln>
+        </p:spPr>
+        <p:style>
+          <a:lnRef idx="1">
+            <a:schemeClr val="accent1"/>
+          </a:lnRef>
+          <a:fillRef idx="3">
+            <a:schemeClr val="accent1"/>
+          </a:fillRef>
+          <a:effectRef idx="2">
+            <a:schemeClr val="accent1"/>
+          </a:effectRef>
+          <a:fontRef idx="minor">
+            <a:schemeClr val="lt1"/>
+          </a:fontRef>
+        </p:style>
+        <p:txBody>
+          <a:bodyPr rtlCol="0" anchor="ctr"/>
+          <a:lstStyle/>
+          <a:p>
+            <a:pPr algn="ctr"/>
+          </a:p>
+        </p:txBody>
+      </p:sp>
+      <p:sp>
+        <p:nvSpPr>
+          <p:cNvPr id="10" name="TextBox 9"/>
+          <p:cNvSpPr txBox="1"/>
+          <p:nvPr/>
+        </p:nvSpPr>
+        <p:spPr>
+          <a:xfrm>
+            <a:off x="3931920" y="2441448"/>
+            <a:ext cx="7955279" cy="457200"/>
+          </a:xfrm>
+          <a:prstGeom prst="rect">
+            <a:avLst/>
+          </a:prstGeom>
+          <a:noFill/>
+        </p:spPr>
+        <p:txBody>
+          <a:bodyPr wrap="square">
+            <a:spAutoFit/>
+          </a:bodyPr>
+          <a:lstStyle/>
+          <a:p>
+            <a:pPr algn="l"/>
+            <a:r>
+              <a:rPr sz="1300" b="0" i="0">
+                <a:solidFill>
+                  <a:srgbClr val="0D1B2A"/>
+                </a:solidFill>
+              </a:rPr>
+              <a:t>Creates HITL proposal — approve on Dashboard — role appears in Agents page immediately</a:t>
+            </a:r>
+          </a:p>
+        </p:txBody>
+      </p:sp>
+      <p:sp>
+        <p:nvSpPr>
+          <p:cNvPr id="9" name="TextBox 8"/>
+          <p:cNvSpPr txBox="1"/>
+          <p:nvPr/>
+        </p:nvSpPr>
+        <p:spPr>
+          <a:xfrm>
+            <a:off x="411480" y="2423160"/>
+            <a:ext cx="3291840" cy="457200"/>
+          </a:xfrm>
+          <a:prstGeom prst="rect">
+            <a:avLst/>
+          </a:prstGeom>
+          <a:noFill/>
+        </p:spPr>
+        <p:txBody>
+          <a:bodyPr wrap="square">
+            <a:spAutoFit/>
+          </a:bodyPr>
+          <a:lstStyle/>
+          <a:p>
+            <a:pPr algn="ctr"/>
+            <a:r>
+              <a:rPr sz="1200" b="1" i="0">
+                <a:solidFill>
+                  <a:srgbClr val="FFFFFF"/>
+                </a:solidFill>
+              </a:rPr>
+              <a:t>HITL Approval</a:t>
+            </a:r>
+          </a:p>
+        </p:txBody>
+      </p:sp>
+      <p:sp>
+        <p:nvSpPr>
+          <p:cNvPr id="8" name="Rectangle 7"/>
+          <p:cNvSpPr/>
+          <p:nvPr/>
+        </p:nvSpPr>
+        <p:spPr>
+          <a:xfrm>
+            <a:off x="365760" y="2350008"/>
+            <a:ext cx="3383280" cy="594360"/>
+          </a:xfrm>
+          <a:prstGeom prst="rect">
+            <a:avLst/>
+          </a:prstGeom>
+          <a:solidFill>
+            <a:srgbClr val="00B4D8"/>
+          </a:solidFill>
+          <a:ln>
+            <a:noFill/>
+          </a:ln>
+        </p:spPr>
+        <p:style>
+          <a:lnRef idx="1">
+            <a:schemeClr val="accent1"/>
+          </a:lnRef>
+          <a:fillRef idx="3">
+            <a:schemeClr val="accent1"/>
+          </a:fillRef>
+          <a:effectRef idx="2">
+            <a:schemeClr val="accent1"/>
+          </a:effectRef>
+          <a:fontRef idx="minor">
+            <a:schemeClr val="lt1"/>
+          </a:fontRef>
+        </p:style>
+        <p:txBody>
+          <a:bodyPr rtlCol="0" anchor="ctr"/>
+          <a:lstStyle/>
+          <a:p>
+            <a:pPr algn="ctr"/>
+          </a:p>
+        </p:txBody>
+      </p:sp>
+      <p:sp>
+        <p:nvSpPr>
+          <p:cNvPr id="7" name="TextBox 6"/>
+          <p:cNvSpPr txBox="1"/>
+          <p:nvPr/>
+        </p:nvSpPr>
+        <p:spPr>
+          <a:xfrm>
+            <a:off x="3931920" y="1691640"/>
+            <a:ext cx="7955279" cy="457200"/>
+          </a:xfrm>
+          <a:prstGeom prst="rect">
+            <a:avLst/>
+          </a:prstGeom>
+          <a:noFill/>
+        </p:spPr>
+        <p:txBody>
+          <a:bodyPr wrap="square">
+            <a:spAutoFit/>
+          </a:bodyPr>
+          <a:lstStyle/>
+          <a:p>
+            <a:pPr algn="l"/>
+            <a:r>
+              <a:rPr sz="1300" b="0" i="0">
+                <a:solidFill>
+                  <a:srgbClr val="0D1B2A"/>
+                </a:solidFill>
+              </a:rPr>
+              <a:t>From the web UI, click Hire Agent — choose icon, name, description, system prompt</a:t>
+            </a:r>
+          </a:p>
+        </p:txBody>
+      </p:sp>
+      <p:sp>
+        <p:nvSpPr>
+          <p:cNvPr id="6" name="TextBox 5"/>
+          <p:cNvSpPr txBox="1"/>
+          <p:nvPr/>
+        </p:nvSpPr>
+        <p:spPr>
+          <a:xfrm>
+            <a:off x="411480" y="1673352"/>
+            <a:ext cx="3291840" cy="457200"/>
+          </a:xfrm>
+          <a:prstGeom prst="rect">
+            <a:avLst/>
+          </a:prstGeom>
+          <a:noFill/>
+        </p:spPr>
+        <p:txBody>
+          <a:bodyPr wrap="square">
+            <a:spAutoFit/>
+          </a:bodyPr>
+          <a:lstStyle/>
+          <a:p>
+            <a:pPr algn="ctr"/>
+            <a:r>
+              <a:rPr sz="1200" b="1" i="0">
+                <a:solidFill>
+                  <a:srgbClr val="FFFFFF"/>
+                </a:solidFill>
+              </a:rPr>
+              <a:t>Hire Agent (Web UI)</a:t>
+            </a:r>
+          </a:p>
+        </p:txBody>
+      </p:sp>
+      <p:sp>
+        <p:nvSpPr>
+          <p:cNvPr id="5" name="Rectangle 4"/>
+          <p:cNvSpPr/>
+          <p:nvPr/>
+        </p:nvSpPr>
+        <p:spPr>
+          <a:xfrm>
+            <a:off x="365760" y="1600200"/>
+            <a:ext cx="3383280" cy="594360"/>
+          </a:xfrm>
+          <a:prstGeom prst="rect">
+            <a:avLst/>
+          </a:prstGeom>
+          <a:solidFill>
+            <a:srgbClr val="00B4D8"/>
+          </a:solidFill>
+          <a:ln>
+            <a:noFill/>
+          </a:ln>
+        </p:spPr>
+        <p:style>
+          <a:lnRef idx="1">
+            <a:schemeClr val="accent1"/>
+          </a:lnRef>
+          <a:fillRef idx="3">
+            <a:schemeClr val="accent1"/>
+          </a:fillRef>
+          <a:effectRef idx="2">
+            <a:schemeClr val="accent1"/>
+          </a:effectRef>
+          <a:fontRef idx="minor">
+            <a:schemeClr val="lt1"/>
+          </a:fontRef>
+        </p:style>
+        <p:txBody>
+          <a:bodyPr rtlCol="0" anchor="ctr"/>
+          <a:lstStyle/>
+          <a:p>
+            <a:pPr algn="ctr"/>
+          </a:p>
+        </p:txBody>
+      </p:sp>
+      <p:sp>
+        <p:nvSpPr>
+          <p:cNvPr id="4" name="TextBox 3"/>
+          <p:cNvSpPr txBox="1"/>
+          <p:nvPr/>
+        </p:nvSpPr>
+        <p:spPr>
+          <a:xfrm>
+            <a:off x="411480" y="804672"/>
+            <a:ext cx="11338560" cy="438912"/>
+          </a:xfrm>
+          <a:prstGeom prst="rect">
+            <a:avLst/>
+          </a:prstGeom>
+          <a:noFill/>
+        </p:spPr>
+        <p:txBody>
+          <a:bodyPr wrap="square">
+            <a:spAutoFit/>
+          </a:bodyPr>
+          <a:lstStyle/>
+          <a:p>
+            <a:pPr algn="l"/>
+            <a:r>
+              <a:rPr sz="1600" b="0" i="0">
+                <a:solidFill>
+                  <a:srgbClr val="00B4D8"/>
+                </a:solidFill>
+              </a:rPr>
+              <a:t>Extend agents and brand the UI without touching code or YAML files</a:t>
+            </a:r>
+          </a:p>
+        </p:txBody>
+      </p:sp>
+      <p:sp>
+        <p:nvSpPr>
+          <p:cNvPr id="3" name="TextBox 2"/>
+          <p:cNvSpPr txBox="1"/>
+          <p:nvPr/>
+        </p:nvSpPr>
+        <p:spPr>
+          <a:xfrm>
+            <a:off x="411480" y="109728"/>
+            <a:ext cx="11338560" cy="731520"/>
+          </a:xfrm>
+          <a:prstGeom prst="rect">
+            <a:avLst/>
+          </a:prstGeom>
+          <a:noFill/>
+        </p:spPr>
+        <p:txBody>
+          <a:bodyPr wrap="square">
+            <a:spAutoFit/>
+          </a:bodyPr>
+          <a:lstStyle/>
+          <a:p>
+            <a:pPr algn="l"/>
+            <a:r>
+              <a:rPr sz="3000" b="1" i="0">
+                <a:solidFill>
+                  <a:srgbClr val="FFFFFF"/>
+                </a:solidFill>
+              </a:rPr>
+              <a:t>Hire Agent &amp; Solution Theming — Runtime Customisation</a:t>
+            </a:r>
+          </a:p>
+        </p:txBody>
+      </p:sp>
+      <p:sp>
+        <p:nvSpPr>
+          <p:cNvPr id="2" name="Rectangle 1"/>
+          <p:cNvSpPr/>
+          <p:nvPr/>
+        </p:nvSpPr>
+        <p:spPr>
+          <a:xfrm>
+            <a:off x="0" y="0"/>
+            <a:ext cx="12188952" cy="1325880"/>
+          </a:xfrm>
+          <a:prstGeom prst="rect">
+            <a:avLst/>
+          </a:prstGeom>
+          <a:solidFill>
+            <a:srgbClr val="0D1B2A"/>
+          </a:solidFill>
+          <a:ln>
+            <a:noFill/>
+          </a:ln>
+        </p:spPr>
+        <p:style>
+          <a:lnRef idx="1">
+            <a:schemeClr val="accent1"/>
+          </a:lnRef>
+          <a:fillRef idx="3">
+            <a:schemeClr val="accent1"/>
+          </a:fillRef>
+          <a:effectRef idx="2">
+            <a:schemeClr val="accent1"/>
+          </a:effectRef>
+          <a:fontRef idx="minor">
+            <a:schemeClr val="lt1"/>
+          </a:fontRef>
+        </p:style>
+        <p:txBody>
+          <a:bodyPr rtlCol="0" anchor="ctr"/>
+          <a:lstStyle/>
+          <a:p>
+            <a:pPr algn="ctr"/>
           </a:p>
         </p:txBody>
       </p:sp>

--- a/docs/SageAI_Tech_Pitch.pptx
+++ b/docs/SageAI_Tech_Pitch.pptx
@@ -26,6 +26,8 @@
     <p:sldId id="274" r:id="rId25"/>
     <p:sldId id="275" r:id="rId26"/>
     <p:sldId id="276" r:id="rId27"/>
+    <p:sldId id="281" r:id="rId32"/>
+    <p:sldId id="282" r:id="rId33"/>
     <p:sldId id="279" r:id="rId30"/>
     <p:sldId id="280" r:id="rId31"/>
     <p:sldId id="277" r:id="rId28"/>
@@ -4746,7 +4748,7 @@
                   <a:srgbClr val="0D1B2A"/>
                 </a:solidFill>
               </a:rPr>
-              <a:t>New agent role: add YAML block to prompts.yaml + entry to tasks.yaml — no Python required — or use Hire Agent in the web UI, no YAML editing required</a:t>
+              <a:t>New agent role: add YAML block to prompts.yaml + entry to tasks.yaml — no Python required — or use Hire Agent in the web UI, no YAML editing required — or use Hire Agent in the web UI, no YAML editing required</a:t>
             </a:r>
           </a:p>
         </p:txBody>
@@ -8383,7 +8385,7 @@
                   <a:srgbClr val="FFFFFF"/>
                 </a:solidFill>
               </a:rPr>
-              <a:t>POST /onboarding/generate with a plain-language description + compliance standards | Web UI path: visit /onboarding — guided multi-turn conversation, LLM extracts domain info, Generate Solution button appears when ready</a:t>
+              <a:t>POST /onboarding/generate with a plain-language description + compliance standards | Web UI path: visit /onboarding — guided multi-turn conversation, LLM extracts domain info, Generate Solution button appears when ready | Web UI path: visit /onboarding — guided multi-turn conversation, LLM extracts domain info, Generate Solution button appears when ready</a:t>
             </a:r>
           </a:p>
         </p:txBody>
@@ -13435,6 +13437,1750 @@
 </file>
 
 <file path=ppt/slides/slide22.xml><?xml version="1.0" encoding="utf-8"?>
+<p:sld xmlns:a="http://schemas.openxmlformats.org/drawingml/2006/main" xmlns:p="http://schemas.openxmlformats.org/presentationml/2006/main" xmlns:r="http://schemas.openxmlformats.org/officeDocument/2006/relationships">
+  <p:cSld>
+    <p:spTree>
+      <p:nvGrpSpPr>
+        <p:cNvPr id="1" name=""/>
+        <p:cNvGrpSpPr/>
+        <p:nvPr/>
+      </p:nvGrpSpPr>
+      <p:grpSpPr/>
+      <p:sp>
+        <p:nvSpPr>
+          <p:cNvPr id="24" name="TextBox 23"/>
+          <p:cNvSpPr txBox="1"/>
+          <p:nvPr/>
+        </p:nvSpPr>
+        <p:spPr>
+          <a:xfrm>
+            <a:off x="274320" y="6510528"/>
+            <a:ext cx="8229600" cy="274320"/>
+          </a:xfrm>
+          <a:prstGeom prst="rect">
+            <a:avLst/>
+          </a:prstGeom>
+          <a:noFill/>
+        </p:spPr>
+        <p:txBody>
+          <a:bodyPr wrap="square">
+            <a:spAutoFit/>
+          </a:bodyPr>
+          <a:lstStyle/>
+          <a:p>
+            <a:pPr algn="l"/>
+            <a:r>
+              <a:rPr sz="900" b="0" i="0">
+                <a:solidFill>
+                  <a:srgbClr val="647487"/>
+                </a:solidFill>
+              </a:rPr>
+              <a:t>SAGE[ai] — Confidential | March 2026</a:t>
+            </a:r>
+          </a:p>
+        </p:txBody>
+      </p:sp>
+      <p:sp>
+        <p:nvSpPr>
+          <p:cNvPr id="23" name="Rectangle 22"/>
+          <p:cNvSpPr/>
+          <p:nvPr/>
+        </p:nvSpPr>
+        <p:spPr>
+          <a:xfrm>
+            <a:off x="0" y="6492240"/>
+            <a:ext cx="12188952" cy="365760"/>
+          </a:xfrm>
+          <a:prstGeom prst="rect">
+            <a:avLst/>
+          </a:prstGeom>
+          <a:solidFill>
+            <a:srgbClr val="0D1B2A"/>
+          </a:solidFill>
+          <a:ln>
+            <a:noFill/>
+          </a:ln>
+        </p:spPr>
+        <p:style>
+          <a:lnRef idx="1">
+            <a:schemeClr val="accent1"/>
+          </a:lnRef>
+          <a:fillRef idx="3">
+            <a:schemeClr val="accent1"/>
+          </a:fillRef>
+          <a:effectRef idx="2">
+            <a:schemeClr val="accent1"/>
+          </a:effectRef>
+          <a:fontRef idx="minor">
+            <a:schemeClr val="lt1"/>
+          </a:fontRef>
+        </p:style>
+        <p:txBody>
+          <a:bodyPr rtlCol="0" anchor="ctr"/>
+          <a:lstStyle/>
+          <a:p>
+            <a:pPr algn="ctr"/>
+          </a:p>
+        </p:txBody>
+      </p:sp>
+      <p:sp>
+        <p:nvSpPr>
+          <p:cNvPr id="22" name="TextBox 21"/>
+          <p:cNvSpPr txBox="1"/>
+          <p:nvPr/>
+        </p:nvSpPr>
+        <p:spPr>
+          <a:xfrm>
+            <a:off x="3931920" y="5440680"/>
+            <a:ext cx="7955279" cy="457200"/>
+          </a:xfrm>
+          <a:prstGeom prst="rect">
+            <a:avLst/>
+          </a:prstGeom>
+          <a:noFill/>
+        </p:spPr>
+        <p:txBody>
+          <a:bodyPr wrap="square">
+            <a:spAutoFit/>
+          </a:bodyPr>
+          <a:lstStyle/>
+          <a:p>
+            <a:pPr algn="l"/>
+            <a:r>
+              <a:rPr sz="1300" b="0" i="0">
+                <a:solidFill>
+                  <a:srgbClr val="0D1B2A"/>
+                </a:solidFill>
+              </a:rPr>
+              <a:t>pip install composio-langchain + COMPOSIO_API_KEY — no per-tool code</a:t>
+            </a:r>
+          </a:p>
+        </p:txBody>
+      </p:sp>
+      <p:sp>
+        <p:nvSpPr>
+          <p:cNvPr id="21" name="TextBox 20"/>
+          <p:cNvSpPr txBox="1"/>
+          <p:nvPr/>
+        </p:nvSpPr>
+        <p:spPr>
+          <a:xfrm>
+            <a:off x="411480" y="5422392"/>
+            <a:ext cx="3291840" cy="457200"/>
+          </a:xfrm>
+          <a:prstGeom prst="rect">
+            <a:avLst/>
+          </a:prstGeom>
+          <a:noFill/>
+        </p:spPr>
+        <p:txBody>
+          <a:bodyPr wrap="square">
+            <a:spAutoFit/>
+          </a:bodyPr>
+          <a:lstStyle/>
+          <a:p>
+            <a:pPr algn="ctr"/>
+            <a:r>
+              <a:rPr sz="1200" b="1" i="0">
+                <a:solidFill>
+                  <a:srgbClr val="FFFFFF"/>
+                </a:solidFill>
+              </a:rPr>
+              <a:t>Zero Code</a:t>
+            </a:r>
+          </a:p>
+        </p:txBody>
+      </p:sp>
+      <p:sp>
+        <p:nvSpPr>
+          <p:cNvPr id="20" name="Rectangle 19"/>
+          <p:cNvSpPr/>
+          <p:nvPr/>
+        </p:nvSpPr>
+        <p:spPr>
+          <a:xfrm>
+            <a:off x="365760" y="5349240"/>
+            <a:ext cx="3383280" cy="594360"/>
+          </a:xfrm>
+          <a:prstGeom prst="rect">
+            <a:avLst/>
+          </a:prstGeom>
+          <a:solidFill>
+            <a:srgbClr val="00B4D8"/>
+          </a:solidFill>
+          <a:ln>
+            <a:noFill/>
+          </a:ln>
+        </p:spPr>
+        <p:style>
+          <a:lnRef idx="1">
+            <a:schemeClr val="accent1"/>
+          </a:lnRef>
+          <a:fillRef idx="3">
+            <a:schemeClr val="accent1"/>
+          </a:fillRef>
+          <a:effectRef idx="2">
+            <a:schemeClr val="accent1"/>
+          </a:effectRef>
+          <a:fontRef idx="minor">
+            <a:schemeClr val="lt1"/>
+          </a:fontRef>
+        </p:style>
+        <p:txBody>
+          <a:bodyPr rtlCol="0" anchor="ctr"/>
+          <a:lstStyle/>
+          <a:p>
+            <a:pPr algn="ctr"/>
+          </a:p>
+        </p:txBody>
+      </p:sp>
+      <p:sp>
+        <p:nvSpPr>
+          <p:cNvPr id="19" name="TextBox 18"/>
+          <p:cNvSpPr txBox="1"/>
+          <p:nvPr/>
+        </p:nvSpPr>
+        <p:spPr>
+          <a:xfrm>
+            <a:off x="3931920" y="4690872"/>
+            <a:ext cx="7955279" cy="457200"/>
+          </a:xfrm>
+          <a:prstGeom prst="rect">
+            <a:avLst/>
+          </a:prstGeom>
+          <a:noFill/>
+        </p:spPr>
+        <p:txBody>
+          <a:bodyPr wrap="square">
+            <a:spAutoFit/>
+          </a:bodyPr>
+          <a:lstStyle/>
+          <a:p>
+            <a:pPr algn="l"/>
+            <a:r>
+              <a:rPr sz="1300" b="0" i="0">
+                <a:solidFill>
+                  <a:srgbClr val="0D1B2A"/>
+                </a:solidFill>
+              </a:rPr>
+              <a:t>POST /integrations/composio/connect creates a proposal — approve on Dashboard</a:t>
+            </a:r>
+          </a:p>
+        </p:txBody>
+      </p:sp>
+      <p:sp>
+        <p:nvSpPr>
+          <p:cNvPr id="18" name="TextBox 17"/>
+          <p:cNvSpPr txBox="1"/>
+          <p:nvPr/>
+        </p:nvSpPr>
+        <p:spPr>
+          <a:xfrm>
+            <a:off x="411480" y="4672584"/>
+            <a:ext cx="3291840" cy="457200"/>
+          </a:xfrm>
+          <a:prstGeom prst="rect">
+            <a:avLst/>
+          </a:prstGeom>
+          <a:noFill/>
+        </p:spPr>
+        <p:txBody>
+          <a:bodyPr wrap="square">
+            <a:spAutoFit/>
+          </a:bodyPr>
+          <a:lstStyle/>
+          <a:p>
+            <a:pPr algn="ctr"/>
+            <a:r>
+              <a:rPr sz="1200" b="1" i="0">
+                <a:solidFill>
+                  <a:srgbClr val="FFFFFF"/>
+                </a:solidFill>
+              </a:rPr>
+              <a:t>HITL Connect</a:t>
+            </a:r>
+          </a:p>
+        </p:txBody>
+      </p:sp>
+      <p:sp>
+        <p:nvSpPr>
+          <p:cNvPr id="17" name="Rectangle 16"/>
+          <p:cNvSpPr/>
+          <p:nvPr/>
+        </p:nvSpPr>
+        <p:spPr>
+          <a:xfrm>
+            <a:off x="365760" y="4599432"/>
+            <a:ext cx="3383280" cy="594360"/>
+          </a:xfrm>
+          <a:prstGeom prst="rect">
+            <a:avLst/>
+          </a:prstGeom>
+          <a:solidFill>
+            <a:srgbClr val="00B4D8"/>
+          </a:solidFill>
+          <a:ln>
+            <a:noFill/>
+          </a:ln>
+        </p:spPr>
+        <p:style>
+          <a:lnRef idx="1">
+            <a:schemeClr val="accent1"/>
+          </a:lnRef>
+          <a:fillRef idx="3">
+            <a:schemeClr val="accent1"/>
+          </a:fillRef>
+          <a:effectRef idx="2">
+            <a:schemeClr val="accent1"/>
+          </a:effectRef>
+          <a:fontRef idx="minor">
+            <a:schemeClr val="lt1"/>
+          </a:fontRef>
+        </p:style>
+        <p:txBody>
+          <a:bodyPr rtlCol="0" anchor="ctr"/>
+          <a:lstStyle/>
+          <a:p>
+            <a:pPr algn="ctr"/>
+          </a:p>
+        </p:txBody>
+      </p:sp>
+      <p:sp>
+        <p:nvSpPr>
+          <p:cNvPr id="16" name="TextBox 15"/>
+          <p:cNvSpPr txBox="1"/>
+          <p:nvPr/>
+        </p:nvSpPr>
+        <p:spPr>
+          <a:xfrm>
+            <a:off x="3931920" y="3941064"/>
+            <a:ext cx="7955279" cy="457200"/>
+          </a:xfrm>
+          <a:prstGeom prst="rect">
+            <a:avLst/>
+          </a:prstGeom>
+          <a:noFill/>
+        </p:spPr>
+        <p:txBody>
+          <a:bodyPr wrap="square">
+            <a:spAutoFit/>
+          </a:bodyPr>
+          <a:lstStyle/>
+          <a:p>
+            <a:pPr algn="l"/>
+            <a:r>
+              <a:rPr sz="1300" b="0" i="0">
+                <a:solidFill>
+                  <a:srgbClr val="0D1B2A"/>
+                </a:solidFill>
+              </a:rPr>
+              <a:t>New Integrations page: connect apps via OAuth, see active tools per solution</a:t>
+            </a:r>
+          </a:p>
+        </p:txBody>
+      </p:sp>
+      <p:sp>
+        <p:nvSpPr>
+          <p:cNvPr id="15" name="TextBox 14"/>
+          <p:cNvSpPr txBox="1"/>
+          <p:nvPr/>
+        </p:nvSpPr>
+        <p:spPr>
+          <a:xfrm>
+            <a:off x="411480" y="3922776"/>
+            <a:ext cx="3291840" cy="457200"/>
+          </a:xfrm>
+          <a:prstGeom prst="rect">
+            <a:avLst/>
+          </a:prstGeom>
+          <a:noFill/>
+        </p:spPr>
+        <p:txBody>
+          <a:bodyPr wrap="square">
+            <a:spAutoFit/>
+          </a:bodyPr>
+          <a:lstStyle/>
+          <a:p>
+            <a:pPr algn="ctr"/>
+            <a:r>
+              <a:rPr sz="1200" b="1" i="0">
+                <a:solidFill>
+                  <a:srgbClr val="FFFFFF"/>
+                </a:solidFill>
+              </a:rPr>
+              <a:t>Web UI</a:t>
+            </a:r>
+          </a:p>
+        </p:txBody>
+      </p:sp>
+      <p:sp>
+        <p:nvSpPr>
+          <p:cNvPr id="14" name="Rectangle 13"/>
+          <p:cNvSpPr/>
+          <p:nvPr/>
+        </p:nvSpPr>
+        <p:spPr>
+          <a:xfrm>
+            <a:off x="365760" y="3849624"/>
+            <a:ext cx="3383280" cy="594360"/>
+          </a:xfrm>
+          <a:prstGeom prst="rect">
+            <a:avLst/>
+          </a:prstGeom>
+          <a:solidFill>
+            <a:srgbClr val="00B4D8"/>
+          </a:solidFill>
+          <a:ln>
+            <a:noFill/>
+          </a:ln>
+        </p:spPr>
+        <p:style>
+          <a:lnRef idx="1">
+            <a:schemeClr val="accent1"/>
+          </a:lnRef>
+          <a:fillRef idx="3">
+            <a:schemeClr val="accent1"/>
+          </a:fillRef>
+          <a:effectRef idx="2">
+            <a:schemeClr val="accent1"/>
+          </a:effectRef>
+          <a:fontRef idx="minor">
+            <a:schemeClr val="lt1"/>
+          </a:fontRef>
+        </p:style>
+        <p:txBody>
+          <a:bodyPr rtlCol="0" anchor="ctr"/>
+          <a:lstStyle/>
+          <a:p>
+            <a:pPr algn="ctr"/>
+          </a:p>
+        </p:txBody>
+      </p:sp>
+      <p:sp>
+        <p:nvSpPr>
+          <p:cNvPr id="13" name="TextBox 12"/>
+          <p:cNvSpPr txBox="1"/>
+          <p:nvPr/>
+        </p:nvSpPr>
+        <p:spPr>
+          <a:xfrm>
+            <a:off x="3931920" y="3191256"/>
+            <a:ext cx="7955279" cy="457200"/>
+          </a:xfrm>
+          <a:prstGeom prst="rect">
+            <a:avLst/>
+          </a:prstGeom>
+          <a:noFill/>
+        </p:spPr>
+        <p:txBody>
+          <a:bodyPr wrap="square">
+            <a:spAutoFit/>
+          </a:bodyPr>
+          <a:lstStyle/>
+          <a:p>
+            <a:pPr algn="l"/>
+            <a:r>
+              <a:rPr sz="1300" b="0" i="0">
+                <a:solidFill>
+                  <a:srgbClr val="0D1B2A"/>
+                </a:solidFill>
+              </a:rPr>
+              <a:t>Uses existing langchain_tools.py — composio:github in project.yaml integrations</a:t>
+            </a:r>
+          </a:p>
+        </p:txBody>
+      </p:sp>
+      <p:sp>
+        <p:nvSpPr>
+          <p:cNvPr id="12" name="TextBox 11"/>
+          <p:cNvSpPr txBox="1"/>
+          <p:nvPr/>
+        </p:nvSpPr>
+        <p:spPr>
+          <a:xfrm>
+            <a:off x="411480" y="3172968"/>
+            <a:ext cx="3291840" cy="457200"/>
+          </a:xfrm>
+          <a:prstGeom prst="rect">
+            <a:avLst/>
+          </a:prstGeom>
+          <a:noFill/>
+        </p:spPr>
+        <p:txBody>
+          <a:bodyPr wrap="square">
+            <a:spAutoFit/>
+          </a:bodyPr>
+          <a:lstStyle/>
+          <a:p>
+            <a:pPr algn="ctr"/>
+            <a:r>
+              <a:rPr sz="1200" b="1" i="0">
+                <a:solidFill>
+                  <a:srgbClr val="FFFFFF"/>
+                </a:solidFill>
+              </a:rPr>
+              <a:t>LangChain Native</a:t>
+            </a:r>
+          </a:p>
+        </p:txBody>
+      </p:sp>
+      <p:sp>
+        <p:nvSpPr>
+          <p:cNvPr id="11" name="Rectangle 10"/>
+          <p:cNvSpPr/>
+          <p:nvPr/>
+        </p:nvSpPr>
+        <p:spPr>
+          <a:xfrm>
+            <a:off x="365760" y="3099816"/>
+            <a:ext cx="3383280" cy="594360"/>
+          </a:xfrm>
+          <a:prstGeom prst="rect">
+            <a:avLst/>
+          </a:prstGeom>
+          <a:solidFill>
+            <a:srgbClr val="00B4D8"/>
+          </a:solidFill>
+          <a:ln>
+            <a:noFill/>
+          </a:ln>
+        </p:spPr>
+        <p:style>
+          <a:lnRef idx="1">
+            <a:schemeClr val="accent1"/>
+          </a:lnRef>
+          <a:fillRef idx="3">
+            <a:schemeClr val="accent1"/>
+          </a:fillRef>
+          <a:effectRef idx="2">
+            <a:schemeClr val="accent1"/>
+          </a:effectRef>
+          <a:fontRef idx="minor">
+            <a:schemeClr val="lt1"/>
+          </a:fontRef>
+        </p:style>
+        <p:txBody>
+          <a:bodyPr rtlCol="0" anchor="ctr"/>
+          <a:lstStyle/>
+          <a:p>
+            <a:pPr algn="ctr"/>
+          </a:p>
+        </p:txBody>
+      </p:sp>
+      <p:sp>
+        <p:nvSpPr>
+          <p:cNvPr id="10" name="TextBox 9"/>
+          <p:cNvSpPr txBox="1"/>
+          <p:nvPr/>
+        </p:nvSpPr>
+        <p:spPr>
+          <a:xfrm>
+            <a:off x="3931920" y="2441448"/>
+            <a:ext cx="7955279" cy="457200"/>
+          </a:xfrm>
+          <a:prstGeom prst="rect">
+            <a:avLst/>
+          </a:prstGeom>
+          <a:noFill/>
+        </p:spPr>
+        <p:txBody>
+          <a:bodyPr wrap="square">
+            <a:spAutoFit/>
+          </a:bodyPr>
+          <a:lstStyle/>
+          <a:p>
+            <a:pPr algn="l"/>
+            <a:r>
+              <a:rPr sz="1300" b="0" i="0">
+                <a:solidFill>
+                  <a:srgbClr val="0D1B2A"/>
+                </a:solidFill>
+              </a:rPr>
+              <a:t>Composio manages auth flows — SAGE never stores third-party credentials</a:t>
+            </a:r>
+          </a:p>
+        </p:txBody>
+      </p:sp>
+      <p:sp>
+        <p:nvSpPr>
+          <p:cNvPr id="9" name="TextBox 8"/>
+          <p:cNvSpPr txBox="1"/>
+          <p:nvPr/>
+        </p:nvSpPr>
+        <p:spPr>
+          <a:xfrm>
+            <a:off x="411480" y="2423160"/>
+            <a:ext cx="3291840" cy="457200"/>
+          </a:xfrm>
+          <a:prstGeom prst="rect">
+            <a:avLst/>
+          </a:prstGeom>
+          <a:noFill/>
+        </p:spPr>
+        <p:txBody>
+          <a:bodyPr wrap="square">
+            <a:spAutoFit/>
+          </a:bodyPr>
+          <a:lstStyle/>
+          <a:p>
+            <a:pPr algn="ctr"/>
+            <a:r>
+              <a:rPr sz="1200" b="1" i="0">
+                <a:solidFill>
+                  <a:srgbClr val="FFFFFF"/>
+                </a:solidFill>
+              </a:rPr>
+              <a:t>OAuth Handled</a:t>
+            </a:r>
+          </a:p>
+        </p:txBody>
+      </p:sp>
+      <p:sp>
+        <p:nvSpPr>
+          <p:cNvPr id="8" name="Rectangle 7"/>
+          <p:cNvSpPr/>
+          <p:nvPr/>
+        </p:nvSpPr>
+        <p:spPr>
+          <a:xfrm>
+            <a:off x="365760" y="2350008"/>
+            <a:ext cx="3383280" cy="594360"/>
+          </a:xfrm>
+          <a:prstGeom prst="rect">
+            <a:avLst/>
+          </a:prstGeom>
+          <a:solidFill>
+            <a:srgbClr val="00B4D8"/>
+          </a:solidFill>
+          <a:ln>
+            <a:noFill/>
+          </a:ln>
+        </p:spPr>
+        <p:style>
+          <a:lnRef idx="1">
+            <a:schemeClr val="accent1"/>
+          </a:lnRef>
+          <a:fillRef idx="3">
+            <a:schemeClr val="accent1"/>
+          </a:fillRef>
+          <a:effectRef idx="2">
+            <a:schemeClr val="accent1"/>
+          </a:effectRef>
+          <a:fontRef idx="minor">
+            <a:schemeClr val="lt1"/>
+          </a:fontRef>
+        </p:style>
+        <p:txBody>
+          <a:bodyPr rtlCol="0" anchor="ctr"/>
+          <a:lstStyle/>
+          <a:p>
+            <a:pPr algn="ctr"/>
+          </a:p>
+        </p:txBody>
+      </p:sp>
+      <p:sp>
+        <p:nvSpPr>
+          <p:cNvPr id="7" name="TextBox 6"/>
+          <p:cNvSpPr txBox="1"/>
+          <p:nvPr/>
+        </p:nvSpPr>
+        <p:spPr>
+          <a:xfrm>
+            <a:off x="3931920" y="1691640"/>
+            <a:ext cx="7955279" cy="457200"/>
+          </a:xfrm>
+          <a:prstGeom prst="rect">
+            <a:avLst/>
+          </a:prstGeom>
+          <a:noFill/>
+        </p:spPr>
+        <p:txBody>
+          <a:bodyPr wrap="square">
+            <a:spAutoFit/>
+          </a:bodyPr>
+          <a:lstStyle/>
+          <a:p>
+            <a:pPr algn="l"/>
+            <a:r>
+              <a:rPr sz="1300" b="0" i="0">
+                <a:solidFill>
+                  <a:srgbClr val="0D1B2A"/>
+                </a:solidFill>
+              </a:rPr>
+              <a:t>GitHub, GitLab, Jira, Linear, Slack, Notion, Confluence, Salesforce, HubSpot, Zendesk, Stripe, Google Workspace, and 90+ more</a:t>
+            </a:r>
+          </a:p>
+        </p:txBody>
+      </p:sp>
+      <p:sp>
+        <p:nvSpPr>
+          <p:cNvPr id="6" name="TextBox 5"/>
+          <p:cNvSpPr txBox="1"/>
+          <p:nvPr/>
+        </p:nvSpPr>
+        <p:spPr>
+          <a:xfrm>
+            <a:off x="411480" y="1673352"/>
+            <a:ext cx="3291840" cy="457200"/>
+          </a:xfrm>
+          <a:prstGeom prst="rect">
+            <a:avLst/>
+          </a:prstGeom>
+          <a:noFill/>
+        </p:spPr>
+        <p:txBody>
+          <a:bodyPr wrap="square">
+            <a:spAutoFit/>
+          </a:bodyPr>
+          <a:lstStyle/>
+          <a:p>
+            <a:pPr algn="ctr"/>
+            <a:r>
+              <a:rPr sz="1200" b="1" i="0">
+                <a:solidFill>
+                  <a:srgbClr val="FFFFFF"/>
+                </a:solidFill>
+              </a:rPr>
+              <a:t>100+ Apps</a:t>
+            </a:r>
+          </a:p>
+        </p:txBody>
+      </p:sp>
+      <p:sp>
+        <p:nvSpPr>
+          <p:cNvPr id="5" name="Rectangle 4"/>
+          <p:cNvSpPr/>
+          <p:nvPr/>
+        </p:nvSpPr>
+        <p:spPr>
+          <a:xfrm>
+            <a:off x="365760" y="1600200"/>
+            <a:ext cx="3383280" cy="594360"/>
+          </a:xfrm>
+          <a:prstGeom prst="rect">
+            <a:avLst/>
+          </a:prstGeom>
+          <a:solidFill>
+            <a:srgbClr val="00B4D8"/>
+          </a:solidFill>
+          <a:ln>
+            <a:noFill/>
+          </a:ln>
+        </p:spPr>
+        <p:style>
+          <a:lnRef idx="1">
+            <a:schemeClr val="accent1"/>
+          </a:lnRef>
+          <a:fillRef idx="3">
+            <a:schemeClr val="accent1"/>
+          </a:fillRef>
+          <a:effectRef idx="2">
+            <a:schemeClr val="accent1"/>
+          </a:effectRef>
+          <a:fontRef idx="minor">
+            <a:schemeClr val="lt1"/>
+          </a:fontRef>
+        </p:style>
+        <p:txBody>
+          <a:bodyPr rtlCol="0" anchor="ctr"/>
+          <a:lstStyle/>
+          <a:p>
+            <a:pPr algn="ctr"/>
+          </a:p>
+        </p:txBody>
+      </p:sp>
+      <p:sp>
+        <p:nvSpPr>
+          <p:cNvPr id="4" name="TextBox 3"/>
+          <p:cNvSpPr txBox="1"/>
+          <p:nvPr/>
+        </p:nvSpPr>
+        <p:spPr>
+          <a:xfrm>
+            <a:off x="411480" y="804672"/>
+            <a:ext cx="11338560" cy="438912"/>
+          </a:xfrm>
+          <a:prstGeom prst="rect">
+            <a:avLst/>
+          </a:prstGeom>
+          <a:noFill/>
+        </p:spPr>
+        <p:txBody>
+          <a:bodyPr wrap="square">
+            <a:spAutoFit/>
+          </a:bodyPr>
+          <a:lstStyle/>
+          <a:p>
+            <a:pPr algn="l"/>
+            <a:r>
+              <a:rPr sz="1600" b="0" i="0">
+                <a:solidFill>
+                  <a:srgbClr val="00B4D8"/>
+                </a:solidFill>
+              </a:rPr>
+              <a:t>Connect any SaaS tool to SAGE agents — OAuth handled, no per-integration credential code</a:t>
+            </a:r>
+          </a:p>
+        </p:txBody>
+      </p:sp>
+      <p:sp>
+        <p:nvSpPr>
+          <p:cNvPr id="3" name="TextBox 2"/>
+          <p:cNvSpPr txBox="1"/>
+          <p:nvPr/>
+        </p:nvSpPr>
+        <p:spPr>
+          <a:xfrm>
+            <a:off x="411480" y="109728"/>
+            <a:ext cx="11338560" cy="731520"/>
+          </a:xfrm>
+          <a:prstGeom prst="rect">
+            <a:avLst/>
+          </a:prstGeom>
+          <a:noFill/>
+        </p:spPr>
+        <p:txBody>
+          <a:bodyPr wrap="square">
+            <a:spAutoFit/>
+          </a:bodyPr>
+          <a:lstStyle/>
+          <a:p>
+            <a:pPr algn="l"/>
+            <a:r>
+              <a:rPr sz="3000" b="1" i="0">
+                <a:solidFill>
+                  <a:srgbClr val="FFFFFF"/>
+                </a:solidFill>
+              </a:rPr>
+              <a:t>Composio Integration — 100+ Tools in One Package</a:t>
+            </a:r>
+          </a:p>
+        </p:txBody>
+      </p:sp>
+      <p:sp>
+        <p:nvSpPr>
+          <p:cNvPr id="2" name="Rectangle 1"/>
+          <p:cNvSpPr/>
+          <p:nvPr/>
+        </p:nvSpPr>
+        <p:spPr>
+          <a:xfrm>
+            <a:off x="0" y="0"/>
+            <a:ext cx="12188952" cy="1325880"/>
+          </a:xfrm>
+          <a:prstGeom prst="rect">
+            <a:avLst/>
+          </a:prstGeom>
+          <a:solidFill>
+            <a:srgbClr val="0D1B2A"/>
+          </a:solidFill>
+          <a:ln>
+            <a:noFill/>
+          </a:ln>
+        </p:spPr>
+        <p:style>
+          <a:lnRef idx="1">
+            <a:schemeClr val="accent1"/>
+          </a:lnRef>
+          <a:fillRef idx="3">
+            <a:schemeClr val="accent1"/>
+          </a:fillRef>
+          <a:effectRef idx="2">
+            <a:schemeClr val="accent1"/>
+          </a:effectRef>
+          <a:fontRef idx="minor">
+            <a:schemeClr val="lt1"/>
+          </a:fontRef>
+        </p:style>
+        <p:txBody>
+          <a:bodyPr rtlCol="0" anchor="ctr"/>
+          <a:lstStyle/>
+          <a:p>
+            <a:pPr algn="ctr"/>
+          </a:p>
+        </p:txBody>
+      </p:sp>
+    </p:spTree>
+  </p:cSld>
+  <p:clrMapOvr>
+    <a:masterClrMapping/>
+  </p:clrMapOvr>
+</p:sld>
+</file>
+
+<file path=ppt/slides/slide23.xml><?xml version="1.0" encoding="utf-8"?>
+<p:sld xmlns:a="http://schemas.openxmlformats.org/drawingml/2006/main" xmlns:p="http://schemas.openxmlformats.org/presentationml/2006/main" xmlns:r="http://schemas.openxmlformats.org/officeDocument/2006/relationships">
+  <p:cSld>
+    <p:spTree>
+      <p:nvGrpSpPr>
+        <p:cNvPr id="1" name=""/>
+        <p:cNvGrpSpPr/>
+        <p:nvPr/>
+      </p:nvGrpSpPr>
+      <p:grpSpPr/>
+      <p:sp>
+        <p:nvSpPr>
+          <p:cNvPr id="24" name="TextBox 23"/>
+          <p:cNvSpPr txBox="1"/>
+          <p:nvPr/>
+        </p:nvSpPr>
+        <p:spPr>
+          <a:xfrm>
+            <a:off x="274320" y="6510528"/>
+            <a:ext cx="8229600" cy="274320"/>
+          </a:xfrm>
+          <a:prstGeom prst="rect">
+            <a:avLst/>
+          </a:prstGeom>
+          <a:noFill/>
+        </p:spPr>
+        <p:txBody>
+          <a:bodyPr wrap="square">
+            <a:spAutoFit/>
+          </a:bodyPr>
+          <a:lstStyle/>
+          <a:p>
+            <a:pPr algn="l"/>
+            <a:r>
+              <a:rPr sz="900" b="0" i="0">
+                <a:solidFill>
+                  <a:srgbClr val="647487"/>
+                </a:solidFill>
+              </a:rPr>
+              <a:t>SAGE[ai] — Confidential | March 2026</a:t>
+            </a:r>
+          </a:p>
+        </p:txBody>
+      </p:sp>
+      <p:sp>
+        <p:nvSpPr>
+          <p:cNvPr id="23" name="Rectangle 22"/>
+          <p:cNvSpPr/>
+          <p:nvPr/>
+        </p:nvSpPr>
+        <p:spPr>
+          <a:xfrm>
+            <a:off x="0" y="6492240"/>
+            <a:ext cx="12188952" cy="365760"/>
+          </a:xfrm>
+          <a:prstGeom prst="rect">
+            <a:avLst/>
+          </a:prstGeom>
+          <a:solidFill>
+            <a:srgbClr val="0D1B2A"/>
+          </a:solidFill>
+          <a:ln>
+            <a:noFill/>
+          </a:ln>
+        </p:spPr>
+        <p:style>
+          <a:lnRef idx="1">
+            <a:schemeClr val="accent1"/>
+          </a:lnRef>
+          <a:fillRef idx="3">
+            <a:schemeClr val="accent1"/>
+          </a:fillRef>
+          <a:effectRef idx="2">
+            <a:schemeClr val="accent1"/>
+          </a:effectRef>
+          <a:fontRef idx="minor">
+            <a:schemeClr val="lt1"/>
+          </a:fontRef>
+        </p:style>
+        <p:txBody>
+          <a:bodyPr rtlCol="0" anchor="ctr"/>
+          <a:lstStyle/>
+          <a:p>
+            <a:pPr algn="ctr"/>
+          </a:p>
+        </p:txBody>
+      </p:sp>
+      <p:sp>
+        <p:nvSpPr>
+          <p:cNvPr id="22" name="TextBox 21"/>
+          <p:cNvSpPr txBox="1"/>
+          <p:nvPr/>
+        </p:nvSpPr>
+        <p:spPr>
+          <a:xfrm>
+            <a:off x="3931920" y="5440680"/>
+            <a:ext cx="7955279" cy="457200"/>
+          </a:xfrm>
+          <a:prstGeom prst="rect">
+            <a:avLst/>
+          </a:prstGeom>
+          <a:noFill/>
+        </p:spPr>
+        <p:txBody>
+          <a:bodyPr wrap="square">
+            <a:spAutoFit/>
+          </a:bodyPr>
+          <a:lstStyle/>
+          <a:p>
+            <a:pPr algn="l"/>
+            <a:r>
+              <a:rPr sz="1300" b="0" i="0">
+                <a:solidFill>
+                  <a:srgbClr val="0D1B2A"/>
+                </a:solidFill>
+              </a:rPr>
+              <a:t>Medical blue, game studio purple, startup green — no Tailwind dependency</a:t>
+            </a:r>
+          </a:p>
+        </p:txBody>
+      </p:sp>
+      <p:sp>
+        <p:nvSpPr>
+          <p:cNvPr id="21" name="TextBox 20"/>
+          <p:cNvSpPr txBox="1"/>
+          <p:nvPr/>
+        </p:nvSpPr>
+        <p:spPr>
+          <a:xfrm>
+            <a:off x="411480" y="5422392"/>
+            <a:ext cx="3291840" cy="457200"/>
+          </a:xfrm>
+          <a:prstGeom prst="rect">
+            <a:avLst/>
+          </a:prstGeom>
+          <a:noFill/>
+        </p:spPr>
+        <p:txBody>
+          <a:bodyPr wrap="square">
+            <a:spAutoFit/>
+          </a:bodyPr>
+          <a:lstStyle/>
+          <a:p>
+            <a:pPr algn="ctr"/>
+            <a:r>
+              <a:rPr sz="1200" b="1" i="0">
+                <a:solidFill>
+                  <a:srgbClr val="FFFFFF"/>
+                </a:solidFill>
+              </a:rPr>
+              <a:t>Example Themes</a:t>
+            </a:r>
+          </a:p>
+        </p:txBody>
+      </p:sp>
+      <p:sp>
+        <p:nvSpPr>
+          <p:cNvPr id="20" name="Rectangle 19"/>
+          <p:cNvSpPr/>
+          <p:nvPr/>
+        </p:nvSpPr>
+        <p:spPr>
+          <a:xfrm>
+            <a:off x="365760" y="5349240"/>
+            <a:ext cx="3383280" cy="594360"/>
+          </a:xfrm>
+          <a:prstGeom prst="rect">
+            <a:avLst/>
+          </a:prstGeom>
+          <a:solidFill>
+            <a:srgbClr val="00B4D8"/>
+          </a:solidFill>
+          <a:ln>
+            <a:noFill/>
+          </a:ln>
+        </p:spPr>
+        <p:style>
+          <a:lnRef idx="1">
+            <a:schemeClr val="accent1"/>
+          </a:lnRef>
+          <a:fillRef idx="3">
+            <a:schemeClr val="accent1"/>
+          </a:fillRef>
+          <a:effectRef idx="2">
+            <a:schemeClr val="accent1"/>
+          </a:effectRef>
+          <a:fontRef idx="minor">
+            <a:schemeClr val="lt1"/>
+          </a:fontRef>
+        </p:style>
+        <p:txBody>
+          <a:bodyPr rtlCol="0" anchor="ctr"/>
+          <a:lstStyle/>
+          <a:p>
+            <a:pPr algn="ctr"/>
+          </a:p>
+        </p:txBody>
+      </p:sp>
+      <p:sp>
+        <p:nvSpPr>
+          <p:cNvPr id="19" name="TextBox 18"/>
+          <p:cNvSpPr txBox="1"/>
+          <p:nvPr/>
+        </p:nvSpPr>
+        <p:spPr>
+          <a:xfrm>
+            <a:off x="3931920" y="4690872"/>
+            <a:ext cx="7955279" cy="457200"/>
+          </a:xfrm>
+          <a:prstGeom prst="rect">
+            <a:avLst/>
+          </a:prstGeom>
+          <a:noFill/>
+        </p:spPr>
+        <p:txBody>
+          <a:bodyPr wrap="square">
+            <a:spAutoFit/>
+          </a:bodyPr>
+          <a:lstStyle/>
+          <a:p>
+            <a:pPr algn="l"/>
+            <a:r>
+              <a:rPr sz="1300" b="0" i="0">
+                <a:solidFill>
+                  <a:srgbClr val="0D1B2A"/>
+                </a:solidFill>
+              </a:rPr>
+              <a:t>ThemeProvider writes CSS variables to document.documentElement — switches instantly</a:t>
+            </a:r>
+          </a:p>
+        </p:txBody>
+      </p:sp>
+      <p:sp>
+        <p:nvSpPr>
+          <p:cNvPr id="18" name="TextBox 17"/>
+          <p:cNvSpPr txBox="1"/>
+          <p:nvPr/>
+        </p:nvSpPr>
+        <p:spPr>
+          <a:xfrm>
+            <a:off x="411480" y="4672584"/>
+            <a:ext cx="3291840" cy="457200"/>
+          </a:xfrm>
+          <a:prstGeom prst="rect">
+            <a:avLst/>
+          </a:prstGeom>
+          <a:noFill/>
+        </p:spPr>
+        <p:txBody>
+          <a:bodyPr wrap="square">
+            <a:spAutoFit/>
+          </a:bodyPr>
+          <a:lstStyle/>
+          <a:p>
+            <a:pPr algn="ctr"/>
+            <a:r>
+              <a:rPr sz="1200" b="1" i="0">
+                <a:solidFill>
+                  <a:srgbClr val="FFFFFF"/>
+                </a:solidFill>
+              </a:rPr>
+              <a:t>CSS Variables</a:t>
+            </a:r>
+          </a:p>
+        </p:txBody>
+      </p:sp>
+      <p:sp>
+        <p:nvSpPr>
+          <p:cNvPr id="17" name="Rectangle 16"/>
+          <p:cNvSpPr/>
+          <p:nvPr/>
+        </p:nvSpPr>
+        <p:spPr>
+          <a:xfrm>
+            <a:off x="365760" y="4599432"/>
+            <a:ext cx="3383280" cy="594360"/>
+          </a:xfrm>
+          <a:prstGeom prst="rect">
+            <a:avLst/>
+          </a:prstGeom>
+          <a:solidFill>
+            <a:srgbClr val="00B4D8"/>
+          </a:solidFill>
+          <a:ln>
+            <a:noFill/>
+          </a:ln>
+        </p:spPr>
+        <p:style>
+          <a:lnRef idx="1">
+            <a:schemeClr val="accent1"/>
+          </a:lnRef>
+          <a:fillRef idx="3">
+            <a:schemeClr val="accent1"/>
+          </a:fillRef>
+          <a:effectRef idx="2">
+            <a:schemeClr val="accent1"/>
+          </a:effectRef>
+          <a:fontRef idx="minor">
+            <a:schemeClr val="lt1"/>
+          </a:fontRef>
+        </p:style>
+        <p:txBody>
+          <a:bodyPr rtlCol="0" anchor="ctr"/>
+          <a:lstStyle/>
+          <a:p>
+            <a:pPr algn="ctr"/>
+          </a:p>
+        </p:txBody>
+      </p:sp>
+      <p:sp>
+        <p:nvSpPr>
+          <p:cNvPr id="16" name="TextBox 15"/>
+          <p:cNvSpPr txBox="1"/>
+          <p:nvPr/>
+        </p:nvSpPr>
+        <p:spPr>
+          <a:xfrm>
+            <a:off x="3931920" y="3941064"/>
+            <a:ext cx="7955279" cy="457200"/>
+          </a:xfrm>
+          <a:prstGeom prst="rect">
+            <a:avLst/>
+          </a:prstGeom>
+          <a:noFill/>
+        </p:spPr>
+        <p:txBody>
+          <a:bodyPr wrap="square">
+            <a:spAutoFit/>
+          </a:bodyPr>
+          <a:lstStyle/>
+          <a:p>
+            <a:pPr algn="l"/>
+            <a:r>
+              <a:rPr sz="1300" b="0" i="0">
+                <a:solidFill>
+                  <a:srgbClr val="0D1B2A"/>
+                </a:solidFill>
+              </a:rPr>
+              <a:t>theme: block in project.yaml — sidebar_bg, accent, badge_bg CSS colour strings</a:t>
+            </a:r>
+          </a:p>
+        </p:txBody>
+      </p:sp>
+      <p:sp>
+        <p:nvSpPr>
+          <p:cNvPr id="15" name="TextBox 14"/>
+          <p:cNvSpPr txBox="1"/>
+          <p:nvPr/>
+        </p:nvSpPr>
+        <p:spPr>
+          <a:xfrm>
+            <a:off x="411480" y="3922776"/>
+            <a:ext cx="3291840" cy="457200"/>
+          </a:xfrm>
+          <a:prstGeom prst="rect">
+            <a:avLst/>
+          </a:prstGeom>
+          <a:noFill/>
+        </p:spPr>
+        <p:txBody>
+          <a:bodyPr wrap="square">
+            <a:spAutoFit/>
+          </a:bodyPr>
+          <a:lstStyle/>
+          <a:p>
+            <a:pPr algn="ctr"/>
+            <a:r>
+              <a:rPr sz="1200" b="1" i="0">
+                <a:solidFill>
+                  <a:srgbClr val="FFFFFF"/>
+                </a:solidFill>
+              </a:rPr>
+              <a:t>Solution Theming</a:t>
+            </a:r>
+          </a:p>
+        </p:txBody>
+      </p:sp>
+      <p:sp>
+        <p:nvSpPr>
+          <p:cNvPr id="14" name="Rectangle 13"/>
+          <p:cNvSpPr/>
+          <p:nvPr/>
+        </p:nvSpPr>
+        <p:spPr>
+          <a:xfrm>
+            <a:off x="365760" y="3849624"/>
+            <a:ext cx="3383280" cy="594360"/>
+          </a:xfrm>
+          <a:prstGeom prst="rect">
+            <a:avLst/>
+          </a:prstGeom>
+          <a:solidFill>
+            <a:srgbClr val="00B4D8"/>
+          </a:solidFill>
+          <a:ln>
+            <a:noFill/>
+          </a:ln>
+        </p:spPr>
+        <p:style>
+          <a:lnRef idx="1">
+            <a:schemeClr val="accent1"/>
+          </a:lnRef>
+          <a:fillRef idx="3">
+            <a:schemeClr val="accent1"/>
+          </a:fillRef>
+          <a:effectRef idx="2">
+            <a:schemeClr val="accent1"/>
+          </a:effectRef>
+          <a:fontRef idx="minor">
+            <a:schemeClr val="lt1"/>
+          </a:fontRef>
+        </p:style>
+        <p:txBody>
+          <a:bodyPr rtlCol="0" anchor="ctr"/>
+          <a:lstStyle/>
+          <a:p>
+            <a:pPr algn="ctr"/>
+          </a:p>
+        </p:txBody>
+      </p:sp>
+      <p:sp>
+        <p:nvSpPr>
+          <p:cNvPr id="13" name="TextBox 12"/>
+          <p:cNvSpPr txBox="1"/>
+          <p:nvPr/>
+        </p:nvSpPr>
+        <p:spPr>
+          <a:xfrm>
+            <a:off x="3931920" y="3191256"/>
+            <a:ext cx="7955279" cy="457200"/>
+          </a:xfrm>
+          <a:prstGeom prst="rect">
+            <a:avLst/>
+          </a:prstGeom>
+          <a:noFill/>
+        </p:spPr>
+        <p:txBody>
+          <a:bodyPr wrap="square">
+            <a:spAutoFit/>
+          </a:bodyPr>
+          <a:lstStyle/>
+          <a:p>
+            <a:pPr algn="l"/>
+            <a:r>
+              <a:rPr sz="1300" b="0" i="0">
+                <a:solidFill>
+                  <a:srgbClr val="0D1B2A"/>
+                </a:solidFill>
+              </a:rPr>
+              <a:t>Backed by POST /agents/hire — optionally add task types (written to tasks.yaml)</a:t>
+            </a:r>
+          </a:p>
+        </p:txBody>
+      </p:sp>
+      <p:sp>
+        <p:nvSpPr>
+          <p:cNvPr id="12" name="TextBox 11"/>
+          <p:cNvSpPr txBox="1"/>
+          <p:nvPr/>
+        </p:nvSpPr>
+        <p:spPr>
+          <a:xfrm>
+            <a:off x="411480" y="3172968"/>
+            <a:ext cx="3291840" cy="457200"/>
+          </a:xfrm>
+          <a:prstGeom prst="rect">
+            <a:avLst/>
+          </a:prstGeom>
+          <a:noFill/>
+        </p:spPr>
+        <p:txBody>
+          <a:bodyPr wrap="square">
+            <a:spAutoFit/>
+          </a:bodyPr>
+          <a:lstStyle/>
+          <a:p>
+            <a:pPr algn="ctr"/>
+            <a:r>
+              <a:rPr sz="1200" b="1" i="0">
+                <a:solidFill>
+                  <a:srgbClr val="FFFFFF"/>
+                </a:solidFill>
+              </a:rPr>
+              <a:t>API Backed</a:t>
+            </a:r>
+          </a:p>
+        </p:txBody>
+      </p:sp>
+      <p:sp>
+        <p:nvSpPr>
+          <p:cNvPr id="11" name="Rectangle 10"/>
+          <p:cNvSpPr/>
+          <p:nvPr/>
+        </p:nvSpPr>
+        <p:spPr>
+          <a:xfrm>
+            <a:off x="365760" y="3099816"/>
+            <a:ext cx="3383280" cy="594360"/>
+          </a:xfrm>
+          <a:prstGeom prst="rect">
+            <a:avLst/>
+          </a:prstGeom>
+          <a:solidFill>
+            <a:srgbClr val="00B4D8"/>
+          </a:solidFill>
+          <a:ln>
+            <a:noFill/>
+          </a:ln>
+        </p:spPr>
+        <p:style>
+          <a:lnRef idx="1">
+            <a:schemeClr val="accent1"/>
+          </a:lnRef>
+          <a:fillRef idx="3">
+            <a:schemeClr val="accent1"/>
+          </a:fillRef>
+          <a:effectRef idx="2">
+            <a:schemeClr val="accent1"/>
+          </a:effectRef>
+          <a:fontRef idx="minor">
+            <a:schemeClr val="lt1"/>
+          </a:fontRef>
+        </p:style>
+        <p:txBody>
+          <a:bodyPr rtlCol="0" anchor="ctr"/>
+          <a:lstStyle/>
+          <a:p>
+            <a:pPr algn="ctr"/>
+          </a:p>
+        </p:txBody>
+      </p:sp>
+      <p:sp>
+        <p:nvSpPr>
+          <p:cNvPr id="10" name="TextBox 9"/>
+          <p:cNvSpPr txBox="1"/>
+          <p:nvPr/>
+        </p:nvSpPr>
+        <p:spPr>
+          <a:xfrm>
+            <a:off x="3931920" y="2441448"/>
+            <a:ext cx="7955279" cy="457200"/>
+          </a:xfrm>
+          <a:prstGeom prst="rect">
+            <a:avLst/>
+          </a:prstGeom>
+          <a:noFill/>
+        </p:spPr>
+        <p:txBody>
+          <a:bodyPr wrap="square">
+            <a:spAutoFit/>
+          </a:bodyPr>
+          <a:lstStyle/>
+          <a:p>
+            <a:pPr algn="l"/>
+            <a:r>
+              <a:rPr sz="1300" b="0" i="0">
+                <a:solidFill>
+                  <a:srgbClr val="0D1B2A"/>
+                </a:solidFill>
+              </a:rPr>
+              <a:t>Creates HITL proposal — approve on Dashboard — role appears in Agents page immediately</a:t>
+            </a:r>
+          </a:p>
+        </p:txBody>
+      </p:sp>
+      <p:sp>
+        <p:nvSpPr>
+          <p:cNvPr id="9" name="TextBox 8"/>
+          <p:cNvSpPr txBox="1"/>
+          <p:nvPr/>
+        </p:nvSpPr>
+        <p:spPr>
+          <a:xfrm>
+            <a:off x="411480" y="2423160"/>
+            <a:ext cx="3291840" cy="457200"/>
+          </a:xfrm>
+          <a:prstGeom prst="rect">
+            <a:avLst/>
+          </a:prstGeom>
+          <a:noFill/>
+        </p:spPr>
+        <p:txBody>
+          <a:bodyPr wrap="square">
+            <a:spAutoFit/>
+          </a:bodyPr>
+          <a:lstStyle/>
+          <a:p>
+            <a:pPr algn="ctr"/>
+            <a:r>
+              <a:rPr sz="1200" b="1" i="0">
+                <a:solidFill>
+                  <a:srgbClr val="FFFFFF"/>
+                </a:solidFill>
+              </a:rPr>
+              <a:t>HITL Approval</a:t>
+            </a:r>
+          </a:p>
+        </p:txBody>
+      </p:sp>
+      <p:sp>
+        <p:nvSpPr>
+          <p:cNvPr id="8" name="Rectangle 7"/>
+          <p:cNvSpPr/>
+          <p:nvPr/>
+        </p:nvSpPr>
+        <p:spPr>
+          <a:xfrm>
+            <a:off x="365760" y="2350008"/>
+            <a:ext cx="3383280" cy="594360"/>
+          </a:xfrm>
+          <a:prstGeom prst="rect">
+            <a:avLst/>
+          </a:prstGeom>
+          <a:solidFill>
+            <a:srgbClr val="00B4D8"/>
+          </a:solidFill>
+          <a:ln>
+            <a:noFill/>
+          </a:ln>
+        </p:spPr>
+        <p:style>
+          <a:lnRef idx="1">
+            <a:schemeClr val="accent1"/>
+          </a:lnRef>
+          <a:fillRef idx="3">
+            <a:schemeClr val="accent1"/>
+          </a:fillRef>
+          <a:effectRef idx="2">
+            <a:schemeClr val="accent1"/>
+          </a:effectRef>
+          <a:fontRef idx="minor">
+            <a:schemeClr val="lt1"/>
+          </a:fontRef>
+        </p:style>
+        <p:txBody>
+          <a:bodyPr rtlCol="0" anchor="ctr"/>
+          <a:lstStyle/>
+          <a:p>
+            <a:pPr algn="ctr"/>
+          </a:p>
+        </p:txBody>
+      </p:sp>
+      <p:sp>
+        <p:nvSpPr>
+          <p:cNvPr id="7" name="TextBox 6"/>
+          <p:cNvSpPr txBox="1"/>
+          <p:nvPr/>
+        </p:nvSpPr>
+        <p:spPr>
+          <a:xfrm>
+            <a:off x="3931920" y="1691640"/>
+            <a:ext cx="7955279" cy="457200"/>
+          </a:xfrm>
+          <a:prstGeom prst="rect">
+            <a:avLst/>
+          </a:prstGeom>
+          <a:noFill/>
+        </p:spPr>
+        <p:txBody>
+          <a:bodyPr wrap="square">
+            <a:spAutoFit/>
+          </a:bodyPr>
+          <a:lstStyle/>
+          <a:p>
+            <a:pPr algn="l"/>
+            <a:r>
+              <a:rPr sz="1300" b="0" i="0">
+                <a:solidFill>
+                  <a:srgbClr val="0D1B2A"/>
+                </a:solidFill>
+              </a:rPr>
+              <a:t>From the web UI, click Hire Agent — choose icon, name, description, system prompt</a:t>
+            </a:r>
+          </a:p>
+        </p:txBody>
+      </p:sp>
+      <p:sp>
+        <p:nvSpPr>
+          <p:cNvPr id="6" name="TextBox 5"/>
+          <p:cNvSpPr txBox="1"/>
+          <p:nvPr/>
+        </p:nvSpPr>
+        <p:spPr>
+          <a:xfrm>
+            <a:off x="411480" y="1673352"/>
+            <a:ext cx="3291840" cy="457200"/>
+          </a:xfrm>
+          <a:prstGeom prst="rect">
+            <a:avLst/>
+          </a:prstGeom>
+          <a:noFill/>
+        </p:spPr>
+        <p:txBody>
+          <a:bodyPr wrap="square">
+            <a:spAutoFit/>
+          </a:bodyPr>
+          <a:lstStyle/>
+          <a:p>
+            <a:pPr algn="ctr"/>
+            <a:r>
+              <a:rPr sz="1200" b="1" i="0">
+                <a:solidFill>
+                  <a:srgbClr val="FFFFFF"/>
+                </a:solidFill>
+              </a:rPr>
+              <a:t>Hire Agent (Web UI)</a:t>
+            </a:r>
+          </a:p>
+        </p:txBody>
+      </p:sp>
+      <p:sp>
+        <p:nvSpPr>
+          <p:cNvPr id="5" name="Rectangle 4"/>
+          <p:cNvSpPr/>
+          <p:nvPr/>
+        </p:nvSpPr>
+        <p:spPr>
+          <a:xfrm>
+            <a:off x="365760" y="1600200"/>
+            <a:ext cx="3383280" cy="594360"/>
+          </a:xfrm>
+          <a:prstGeom prst="rect">
+            <a:avLst/>
+          </a:prstGeom>
+          <a:solidFill>
+            <a:srgbClr val="00B4D8"/>
+          </a:solidFill>
+          <a:ln>
+            <a:noFill/>
+          </a:ln>
+        </p:spPr>
+        <p:style>
+          <a:lnRef idx="1">
+            <a:schemeClr val="accent1"/>
+          </a:lnRef>
+          <a:fillRef idx="3">
+            <a:schemeClr val="accent1"/>
+          </a:fillRef>
+          <a:effectRef idx="2">
+            <a:schemeClr val="accent1"/>
+          </a:effectRef>
+          <a:fontRef idx="minor">
+            <a:schemeClr val="lt1"/>
+          </a:fontRef>
+        </p:style>
+        <p:txBody>
+          <a:bodyPr rtlCol="0" anchor="ctr"/>
+          <a:lstStyle/>
+          <a:p>
+            <a:pPr algn="ctr"/>
+          </a:p>
+        </p:txBody>
+      </p:sp>
+      <p:sp>
+        <p:nvSpPr>
+          <p:cNvPr id="4" name="TextBox 3"/>
+          <p:cNvSpPr txBox="1"/>
+          <p:nvPr/>
+        </p:nvSpPr>
+        <p:spPr>
+          <a:xfrm>
+            <a:off x="411480" y="804672"/>
+            <a:ext cx="11338560" cy="438912"/>
+          </a:xfrm>
+          <a:prstGeom prst="rect">
+            <a:avLst/>
+          </a:prstGeom>
+          <a:noFill/>
+        </p:spPr>
+        <p:txBody>
+          <a:bodyPr wrap="square">
+            <a:spAutoFit/>
+          </a:bodyPr>
+          <a:lstStyle/>
+          <a:p>
+            <a:pPr algn="l"/>
+            <a:r>
+              <a:rPr sz="1600" b="0" i="0">
+                <a:solidFill>
+                  <a:srgbClr val="00B4D8"/>
+                </a:solidFill>
+              </a:rPr>
+              <a:t>Extend agents and brand the UI without touching code or YAML files</a:t>
+            </a:r>
+          </a:p>
+        </p:txBody>
+      </p:sp>
+      <p:sp>
+        <p:nvSpPr>
+          <p:cNvPr id="3" name="TextBox 2"/>
+          <p:cNvSpPr txBox="1"/>
+          <p:nvPr/>
+        </p:nvSpPr>
+        <p:spPr>
+          <a:xfrm>
+            <a:off x="411480" y="109728"/>
+            <a:ext cx="11338560" cy="731520"/>
+          </a:xfrm>
+          <a:prstGeom prst="rect">
+            <a:avLst/>
+          </a:prstGeom>
+          <a:noFill/>
+        </p:spPr>
+        <p:txBody>
+          <a:bodyPr wrap="square">
+            <a:spAutoFit/>
+          </a:bodyPr>
+          <a:lstStyle/>
+          <a:p>
+            <a:pPr algn="l"/>
+            <a:r>
+              <a:rPr sz="3000" b="1" i="0">
+                <a:solidFill>
+                  <a:srgbClr val="FFFFFF"/>
+                </a:solidFill>
+              </a:rPr>
+              <a:t>Hire Agent &amp; Solution Theming — Runtime Customisation</a:t>
+            </a:r>
+          </a:p>
+        </p:txBody>
+      </p:sp>
+      <p:sp>
+        <p:nvSpPr>
+          <p:cNvPr id="2" name="Rectangle 1"/>
+          <p:cNvSpPr/>
+          <p:nvPr/>
+        </p:nvSpPr>
+        <p:spPr>
+          <a:xfrm>
+            <a:off x="0" y="0"/>
+            <a:ext cx="12188952" cy="1325880"/>
+          </a:xfrm>
+          <a:prstGeom prst="rect">
+            <a:avLst/>
+          </a:prstGeom>
+          <a:solidFill>
+            <a:srgbClr val="0D1B2A"/>
+          </a:solidFill>
+          <a:ln>
+            <a:noFill/>
+          </a:ln>
+        </p:spPr>
+        <p:style>
+          <a:lnRef idx="1">
+            <a:schemeClr val="accent1"/>
+          </a:lnRef>
+          <a:fillRef idx="3">
+            <a:schemeClr val="accent1"/>
+          </a:fillRef>
+          <a:effectRef idx="2">
+            <a:schemeClr val="accent1"/>
+          </a:effectRef>
+          <a:fontRef idx="minor">
+            <a:schemeClr val="lt1"/>
+          </a:fontRef>
+        </p:style>
+        <p:txBody>
+          <a:bodyPr rtlCol="0" anchor="ctr"/>
+          <a:lstStyle/>
+          <a:p>
+            <a:pPr algn="ctr"/>
+          </a:p>
+        </p:txBody>
+      </p:sp>
+    </p:spTree>
+  </p:cSld>
+  <p:clrMapOvr>
+    <a:masterClrMapping/>
+  </p:clrMapOvr>
+</p:sld>
+</file>
+
+<file path=ppt/slides/slide24.xml><?xml version="1.0" encoding="utf-8"?>
 <p:sld xmlns:a="http://schemas.openxmlformats.org/drawingml/2006/main" xmlns:p="http://schemas.openxmlformats.org/presentationml/2006/main" xmlns:r="http://schemas.openxmlformats.org/officeDocument/2006/relationships">
   <p:cSld>
     <p:bg>
@@ -14287,7 +16033,7 @@
 </p:sld>
 </file>
 
-<file path=ppt/slides/slide23.xml><?xml version="1.0" encoding="utf-8"?>
+<file path=ppt/slides/slide25.xml><?xml version="1.0" encoding="utf-8"?>
 <p:sld xmlns:a="http://schemas.openxmlformats.org/drawingml/2006/main" xmlns:p="http://schemas.openxmlformats.org/presentationml/2006/main" xmlns:r="http://schemas.openxmlformats.org/officeDocument/2006/relationships">
   <p:cSld>
     <p:spTree>
@@ -14673,7 +16419,7 @@
 </p:sld>
 </file>
 
-<file path=ppt/slides/slide24.xml><?xml version="1.0" encoding="utf-8"?>
+<file path=ppt/slides/slide26.xml><?xml version="1.0" encoding="utf-8"?>
 <p:sld xmlns:a="http://schemas.openxmlformats.org/drawingml/2006/main" xmlns:p="http://schemas.openxmlformats.org/presentationml/2006/main" xmlns:r="http://schemas.openxmlformats.org/officeDocument/2006/relationships">
   <p:cSld>
     <p:spTree>
@@ -15545,7 +17291,7 @@
 </p:sld>
 </file>
 
-<file path=ppt/slides/slide25.xml><?xml version="1.0" encoding="utf-8"?>
+<file path=ppt/slides/slide27.xml><?xml version="1.0" encoding="utf-8"?>
 <p:sld xmlns:a="http://schemas.openxmlformats.org/drawingml/2006/main" xmlns:p="http://schemas.openxmlformats.org/presentationml/2006/main" xmlns:r="http://schemas.openxmlformats.org/officeDocument/2006/relationships">
   <p:cSld>
     <p:spTree>

--- a/docs/SageAI_Tech_Pitch.pptx
+++ b/docs/SageAI_Tech_Pitch.pptx
@@ -30,6 +30,8 @@
     <p:sldId id="282" r:id="rId33"/>
     <p:sldId id="279" r:id="rId30"/>
     <p:sldId id="280" r:id="rId31"/>
+    <p:sldId id="283" r:id="rId34"/>
+    <p:sldId id="284" r:id="rId35"/>
     <p:sldId id="277" r:id="rId28"/>
     <p:sldId id="278" r:id="rId29"/>
   </p:sldIdLst>
@@ -15183,10 +15185,1754 @@
 <file path=ppt/slides/slide24.xml><?xml version="1.0" encoding="utf-8"?>
 <p:sld xmlns:a="http://schemas.openxmlformats.org/drawingml/2006/main" xmlns:p="http://schemas.openxmlformats.org/presentationml/2006/main" xmlns:r="http://schemas.openxmlformats.org/officeDocument/2006/relationships">
   <p:cSld>
+    <p:spTree>
+      <p:nvGrpSpPr>
+        <p:cNvPr id="1" name=""/>
+        <p:cNvGrpSpPr/>
+        <p:nvPr/>
+      </p:nvGrpSpPr>
+      <p:grpSpPr/>
+      <p:sp>
+        <p:nvSpPr>
+          <p:cNvPr id="24" name="TextBox 23"/>
+          <p:cNvSpPr txBox="1"/>
+          <p:nvPr/>
+        </p:nvSpPr>
+        <p:spPr>
+          <a:xfrm>
+            <a:off x="274320" y="6510528"/>
+            <a:ext cx="8229600" cy="274320"/>
+          </a:xfrm>
+          <a:prstGeom prst="rect">
+            <a:avLst/>
+          </a:prstGeom>
+          <a:noFill/>
+        </p:spPr>
+        <p:txBody>
+          <a:bodyPr wrap="square">
+            <a:spAutoFit/>
+          </a:bodyPr>
+          <a:lstStyle/>
+          <a:p>
+            <a:pPr algn="l"/>
+            <a:r>
+              <a:rPr sz="900" b="0" i="0">
+                <a:solidFill>
+                  <a:srgbClr val="647487"/>
+                </a:solidFill>
+              </a:rPr>
+              <a:t>SAGE[ai] — Confidential | March 2026</a:t>
+            </a:r>
+          </a:p>
+        </p:txBody>
+      </p:sp>
+      <p:sp>
+        <p:nvSpPr>
+          <p:cNvPr id="23" name="Rectangle 22"/>
+          <p:cNvSpPr/>
+          <p:nvPr/>
+        </p:nvSpPr>
+        <p:spPr>
+          <a:xfrm>
+            <a:off x="0" y="6492240"/>
+            <a:ext cx="12188952" cy="365760"/>
+          </a:xfrm>
+          <a:prstGeom prst="rect">
+            <a:avLst/>
+          </a:prstGeom>
+          <a:solidFill>
+            <a:srgbClr val="0D1B2A"/>
+          </a:solidFill>
+          <a:ln>
+            <a:noFill/>
+          </a:ln>
+        </p:spPr>
+        <p:style>
+          <a:lnRef idx="1">
+            <a:schemeClr val="accent1"/>
+          </a:lnRef>
+          <a:fillRef idx="3">
+            <a:schemeClr val="accent1"/>
+          </a:fillRef>
+          <a:effectRef idx="2">
+            <a:schemeClr val="accent1"/>
+          </a:effectRef>
+          <a:fontRef idx="minor">
+            <a:schemeClr val="lt1"/>
+          </a:fontRef>
+        </p:style>
+        <p:txBody>
+          <a:bodyPr rtlCol="0" anchor="ctr"/>
+          <a:lstStyle/>
+          <a:p>
+            <a:pPr algn="ctr"/>
+          </a:p>
+        </p:txBody>
+      </p:sp>
+      <p:sp>
+        <p:nvSpPr>
+          <p:cNvPr id="22" name="TextBox 21"/>
+          <p:cNvSpPr txBox="1"/>
+          <p:nvPr/>
+        </p:nvSpPr>
+        <p:spPr>
+          <a:xfrm>
+            <a:off x="3931920" y="5440680"/>
+            <a:ext cx="7955279" cy="457200"/>
+          </a:xfrm>
+          <a:prstGeom prst="rect">
+            <a:avLst/>
+          </a:prstGeom>
+          <a:noFill/>
+        </p:spPr>
+        <p:txBody>
+          <a:bodyPr wrap="square">
+            <a:spAutoFit/>
+          </a:bodyPr>
+          <a:lstStyle/>
+          <a:p>
+            <a:pPr algn="l"/>
+            <a:r>
+              <a:rPr sz="1300" b="0" i="0">
+                <a:solidFill>
+                  <a:srgbClr val="0D1B2A"/>
+                </a:solidFill>
+              </a:rPr>
+              <a:t>pip install composio-langchain + COMPOSIO_API_KEY — no per-tool code</a:t>
+            </a:r>
+          </a:p>
+        </p:txBody>
+      </p:sp>
+      <p:sp>
+        <p:nvSpPr>
+          <p:cNvPr id="21" name="TextBox 20"/>
+          <p:cNvSpPr txBox="1"/>
+          <p:nvPr/>
+        </p:nvSpPr>
+        <p:spPr>
+          <a:xfrm>
+            <a:off x="411480" y="5422392"/>
+            <a:ext cx="3291840" cy="457200"/>
+          </a:xfrm>
+          <a:prstGeom prst="rect">
+            <a:avLst/>
+          </a:prstGeom>
+          <a:noFill/>
+        </p:spPr>
+        <p:txBody>
+          <a:bodyPr wrap="square">
+            <a:spAutoFit/>
+          </a:bodyPr>
+          <a:lstStyle/>
+          <a:p>
+            <a:pPr algn="ctr"/>
+            <a:r>
+              <a:rPr sz="1200" b="1" i="0">
+                <a:solidFill>
+                  <a:srgbClr val="FFFFFF"/>
+                </a:solidFill>
+              </a:rPr>
+              <a:t>Zero Code</a:t>
+            </a:r>
+          </a:p>
+        </p:txBody>
+      </p:sp>
+      <p:sp>
+        <p:nvSpPr>
+          <p:cNvPr id="20" name="Rectangle 19"/>
+          <p:cNvSpPr/>
+          <p:nvPr/>
+        </p:nvSpPr>
+        <p:spPr>
+          <a:xfrm>
+            <a:off x="365760" y="5349240"/>
+            <a:ext cx="3383280" cy="594360"/>
+          </a:xfrm>
+          <a:prstGeom prst="rect">
+            <a:avLst/>
+          </a:prstGeom>
+          <a:solidFill>
+            <a:srgbClr val="00B4D8"/>
+          </a:solidFill>
+          <a:ln>
+            <a:noFill/>
+          </a:ln>
+        </p:spPr>
+        <p:style>
+          <a:lnRef idx="1">
+            <a:schemeClr val="accent1"/>
+          </a:lnRef>
+          <a:fillRef idx="3">
+            <a:schemeClr val="accent1"/>
+          </a:fillRef>
+          <a:effectRef idx="2">
+            <a:schemeClr val="accent1"/>
+          </a:effectRef>
+          <a:fontRef idx="minor">
+            <a:schemeClr val="lt1"/>
+          </a:fontRef>
+        </p:style>
+        <p:txBody>
+          <a:bodyPr rtlCol="0" anchor="ctr"/>
+          <a:lstStyle/>
+          <a:p>
+            <a:pPr algn="ctr"/>
+          </a:p>
+        </p:txBody>
+      </p:sp>
+      <p:sp>
+        <p:nvSpPr>
+          <p:cNvPr id="19" name="TextBox 18"/>
+          <p:cNvSpPr txBox="1"/>
+          <p:nvPr/>
+        </p:nvSpPr>
+        <p:spPr>
+          <a:xfrm>
+            <a:off x="3931920" y="4690872"/>
+            <a:ext cx="7955279" cy="457200"/>
+          </a:xfrm>
+          <a:prstGeom prst="rect">
+            <a:avLst/>
+          </a:prstGeom>
+          <a:noFill/>
+        </p:spPr>
+        <p:txBody>
+          <a:bodyPr wrap="square">
+            <a:spAutoFit/>
+          </a:bodyPr>
+          <a:lstStyle/>
+          <a:p>
+            <a:pPr algn="l"/>
+            <a:r>
+              <a:rPr sz="1300" b="0" i="0">
+                <a:solidFill>
+                  <a:srgbClr val="0D1B2A"/>
+                </a:solidFill>
+              </a:rPr>
+              <a:t>POST /integrations/composio/connect creates a proposal — approve on Dashboard</a:t>
+            </a:r>
+          </a:p>
+        </p:txBody>
+      </p:sp>
+      <p:sp>
+        <p:nvSpPr>
+          <p:cNvPr id="18" name="TextBox 17"/>
+          <p:cNvSpPr txBox="1"/>
+          <p:nvPr/>
+        </p:nvSpPr>
+        <p:spPr>
+          <a:xfrm>
+            <a:off x="411480" y="4672584"/>
+            <a:ext cx="3291840" cy="457200"/>
+          </a:xfrm>
+          <a:prstGeom prst="rect">
+            <a:avLst/>
+          </a:prstGeom>
+          <a:noFill/>
+        </p:spPr>
+        <p:txBody>
+          <a:bodyPr wrap="square">
+            <a:spAutoFit/>
+          </a:bodyPr>
+          <a:lstStyle/>
+          <a:p>
+            <a:pPr algn="ctr"/>
+            <a:r>
+              <a:rPr sz="1200" b="1" i="0">
+                <a:solidFill>
+                  <a:srgbClr val="FFFFFF"/>
+                </a:solidFill>
+              </a:rPr>
+              <a:t>HITL Connect</a:t>
+            </a:r>
+          </a:p>
+        </p:txBody>
+      </p:sp>
+      <p:sp>
+        <p:nvSpPr>
+          <p:cNvPr id="17" name="Rectangle 16"/>
+          <p:cNvSpPr/>
+          <p:nvPr/>
+        </p:nvSpPr>
+        <p:spPr>
+          <a:xfrm>
+            <a:off x="365760" y="4599432"/>
+            <a:ext cx="3383280" cy="594360"/>
+          </a:xfrm>
+          <a:prstGeom prst="rect">
+            <a:avLst/>
+          </a:prstGeom>
+          <a:solidFill>
+            <a:srgbClr val="00B4D8"/>
+          </a:solidFill>
+          <a:ln>
+            <a:noFill/>
+          </a:ln>
+        </p:spPr>
+        <p:style>
+          <a:lnRef idx="1">
+            <a:schemeClr val="accent1"/>
+          </a:lnRef>
+          <a:fillRef idx="3">
+            <a:schemeClr val="accent1"/>
+          </a:fillRef>
+          <a:effectRef idx="2">
+            <a:schemeClr val="accent1"/>
+          </a:effectRef>
+          <a:fontRef idx="minor">
+            <a:schemeClr val="lt1"/>
+          </a:fontRef>
+        </p:style>
+        <p:txBody>
+          <a:bodyPr rtlCol="0" anchor="ctr"/>
+          <a:lstStyle/>
+          <a:p>
+            <a:pPr algn="ctr"/>
+          </a:p>
+        </p:txBody>
+      </p:sp>
+      <p:sp>
+        <p:nvSpPr>
+          <p:cNvPr id="16" name="TextBox 15"/>
+          <p:cNvSpPr txBox="1"/>
+          <p:nvPr/>
+        </p:nvSpPr>
+        <p:spPr>
+          <a:xfrm>
+            <a:off x="3931920" y="3941064"/>
+            <a:ext cx="7955279" cy="457200"/>
+          </a:xfrm>
+          <a:prstGeom prst="rect">
+            <a:avLst/>
+          </a:prstGeom>
+          <a:noFill/>
+        </p:spPr>
+        <p:txBody>
+          <a:bodyPr wrap="square">
+            <a:spAutoFit/>
+          </a:bodyPr>
+          <a:lstStyle/>
+          <a:p>
+            <a:pPr algn="l"/>
+            <a:r>
+              <a:rPr sz="1300" b="0" i="0">
+                <a:solidFill>
+                  <a:srgbClr val="0D1B2A"/>
+                </a:solidFill>
+              </a:rPr>
+              <a:t>New Integrations page: connect apps via OAuth, see active tools per solution</a:t>
+            </a:r>
+          </a:p>
+        </p:txBody>
+      </p:sp>
+      <p:sp>
+        <p:nvSpPr>
+          <p:cNvPr id="15" name="TextBox 14"/>
+          <p:cNvSpPr txBox="1"/>
+          <p:nvPr/>
+        </p:nvSpPr>
+        <p:spPr>
+          <a:xfrm>
+            <a:off x="411480" y="3922776"/>
+            <a:ext cx="3291840" cy="457200"/>
+          </a:xfrm>
+          <a:prstGeom prst="rect">
+            <a:avLst/>
+          </a:prstGeom>
+          <a:noFill/>
+        </p:spPr>
+        <p:txBody>
+          <a:bodyPr wrap="square">
+            <a:spAutoFit/>
+          </a:bodyPr>
+          <a:lstStyle/>
+          <a:p>
+            <a:pPr algn="ctr"/>
+            <a:r>
+              <a:rPr sz="1200" b="1" i="0">
+                <a:solidFill>
+                  <a:srgbClr val="FFFFFF"/>
+                </a:solidFill>
+              </a:rPr>
+              <a:t>Web UI</a:t>
+            </a:r>
+          </a:p>
+        </p:txBody>
+      </p:sp>
+      <p:sp>
+        <p:nvSpPr>
+          <p:cNvPr id="14" name="Rectangle 13"/>
+          <p:cNvSpPr/>
+          <p:nvPr/>
+        </p:nvSpPr>
+        <p:spPr>
+          <a:xfrm>
+            <a:off x="365760" y="3849624"/>
+            <a:ext cx="3383280" cy="594360"/>
+          </a:xfrm>
+          <a:prstGeom prst="rect">
+            <a:avLst/>
+          </a:prstGeom>
+          <a:solidFill>
+            <a:srgbClr val="00B4D8"/>
+          </a:solidFill>
+          <a:ln>
+            <a:noFill/>
+          </a:ln>
+        </p:spPr>
+        <p:style>
+          <a:lnRef idx="1">
+            <a:schemeClr val="accent1"/>
+          </a:lnRef>
+          <a:fillRef idx="3">
+            <a:schemeClr val="accent1"/>
+          </a:fillRef>
+          <a:effectRef idx="2">
+            <a:schemeClr val="accent1"/>
+          </a:effectRef>
+          <a:fontRef idx="minor">
+            <a:schemeClr val="lt1"/>
+          </a:fontRef>
+        </p:style>
+        <p:txBody>
+          <a:bodyPr rtlCol="0" anchor="ctr"/>
+          <a:lstStyle/>
+          <a:p>
+            <a:pPr algn="ctr"/>
+          </a:p>
+        </p:txBody>
+      </p:sp>
+      <p:sp>
+        <p:nvSpPr>
+          <p:cNvPr id="13" name="TextBox 12"/>
+          <p:cNvSpPr txBox="1"/>
+          <p:nvPr/>
+        </p:nvSpPr>
+        <p:spPr>
+          <a:xfrm>
+            <a:off x="3931920" y="3191256"/>
+            <a:ext cx="7955279" cy="457200"/>
+          </a:xfrm>
+          <a:prstGeom prst="rect">
+            <a:avLst/>
+          </a:prstGeom>
+          <a:noFill/>
+        </p:spPr>
+        <p:txBody>
+          <a:bodyPr wrap="square">
+            <a:spAutoFit/>
+          </a:bodyPr>
+          <a:lstStyle/>
+          <a:p>
+            <a:pPr algn="l"/>
+            <a:r>
+              <a:rPr sz="1300" b="0" i="0">
+                <a:solidFill>
+                  <a:srgbClr val="0D1B2A"/>
+                </a:solidFill>
+              </a:rPr>
+              <a:t>Uses existing langchain_tools.py — composio:github in project.yaml integrations</a:t>
+            </a:r>
+          </a:p>
+        </p:txBody>
+      </p:sp>
+      <p:sp>
+        <p:nvSpPr>
+          <p:cNvPr id="12" name="TextBox 11"/>
+          <p:cNvSpPr txBox="1"/>
+          <p:nvPr/>
+        </p:nvSpPr>
+        <p:spPr>
+          <a:xfrm>
+            <a:off x="411480" y="3172968"/>
+            <a:ext cx="3291840" cy="457200"/>
+          </a:xfrm>
+          <a:prstGeom prst="rect">
+            <a:avLst/>
+          </a:prstGeom>
+          <a:noFill/>
+        </p:spPr>
+        <p:txBody>
+          <a:bodyPr wrap="square">
+            <a:spAutoFit/>
+          </a:bodyPr>
+          <a:lstStyle/>
+          <a:p>
+            <a:pPr algn="ctr"/>
+            <a:r>
+              <a:rPr sz="1200" b="1" i="0">
+                <a:solidFill>
+                  <a:srgbClr val="FFFFFF"/>
+                </a:solidFill>
+              </a:rPr>
+              <a:t>LangChain Native</a:t>
+            </a:r>
+          </a:p>
+        </p:txBody>
+      </p:sp>
+      <p:sp>
+        <p:nvSpPr>
+          <p:cNvPr id="11" name="Rectangle 10"/>
+          <p:cNvSpPr/>
+          <p:nvPr/>
+        </p:nvSpPr>
+        <p:spPr>
+          <a:xfrm>
+            <a:off x="365760" y="3099816"/>
+            <a:ext cx="3383280" cy="594360"/>
+          </a:xfrm>
+          <a:prstGeom prst="rect">
+            <a:avLst/>
+          </a:prstGeom>
+          <a:solidFill>
+            <a:srgbClr val="00B4D8"/>
+          </a:solidFill>
+          <a:ln>
+            <a:noFill/>
+          </a:ln>
+        </p:spPr>
+        <p:style>
+          <a:lnRef idx="1">
+            <a:schemeClr val="accent1"/>
+          </a:lnRef>
+          <a:fillRef idx="3">
+            <a:schemeClr val="accent1"/>
+          </a:fillRef>
+          <a:effectRef idx="2">
+            <a:schemeClr val="accent1"/>
+          </a:effectRef>
+          <a:fontRef idx="minor">
+            <a:schemeClr val="lt1"/>
+          </a:fontRef>
+        </p:style>
+        <p:txBody>
+          <a:bodyPr rtlCol="0" anchor="ctr"/>
+          <a:lstStyle/>
+          <a:p>
+            <a:pPr algn="ctr"/>
+          </a:p>
+        </p:txBody>
+      </p:sp>
+      <p:sp>
+        <p:nvSpPr>
+          <p:cNvPr id="10" name="TextBox 9"/>
+          <p:cNvSpPr txBox="1"/>
+          <p:nvPr/>
+        </p:nvSpPr>
+        <p:spPr>
+          <a:xfrm>
+            <a:off x="3931920" y="2441448"/>
+            <a:ext cx="7955279" cy="457200"/>
+          </a:xfrm>
+          <a:prstGeom prst="rect">
+            <a:avLst/>
+          </a:prstGeom>
+          <a:noFill/>
+        </p:spPr>
+        <p:txBody>
+          <a:bodyPr wrap="square">
+            <a:spAutoFit/>
+          </a:bodyPr>
+          <a:lstStyle/>
+          <a:p>
+            <a:pPr algn="l"/>
+            <a:r>
+              <a:rPr sz="1300" b="0" i="0">
+                <a:solidFill>
+                  <a:srgbClr val="0D1B2A"/>
+                </a:solidFill>
+              </a:rPr>
+              <a:t>Composio manages auth flows — SAGE never stores third-party credentials</a:t>
+            </a:r>
+          </a:p>
+        </p:txBody>
+      </p:sp>
+      <p:sp>
+        <p:nvSpPr>
+          <p:cNvPr id="9" name="TextBox 8"/>
+          <p:cNvSpPr txBox="1"/>
+          <p:nvPr/>
+        </p:nvSpPr>
+        <p:spPr>
+          <a:xfrm>
+            <a:off x="411480" y="2423160"/>
+            <a:ext cx="3291840" cy="457200"/>
+          </a:xfrm>
+          <a:prstGeom prst="rect">
+            <a:avLst/>
+          </a:prstGeom>
+          <a:noFill/>
+        </p:spPr>
+        <p:txBody>
+          <a:bodyPr wrap="square">
+            <a:spAutoFit/>
+          </a:bodyPr>
+          <a:lstStyle/>
+          <a:p>
+            <a:pPr algn="ctr"/>
+            <a:r>
+              <a:rPr sz="1200" b="1" i="0">
+                <a:solidFill>
+                  <a:srgbClr val="FFFFFF"/>
+                </a:solidFill>
+              </a:rPr>
+              <a:t>OAuth Handled</a:t>
+            </a:r>
+          </a:p>
+        </p:txBody>
+      </p:sp>
+      <p:sp>
+        <p:nvSpPr>
+          <p:cNvPr id="8" name="Rectangle 7"/>
+          <p:cNvSpPr/>
+          <p:nvPr/>
+        </p:nvSpPr>
+        <p:spPr>
+          <a:xfrm>
+            <a:off x="365760" y="2350008"/>
+            <a:ext cx="3383280" cy="594360"/>
+          </a:xfrm>
+          <a:prstGeom prst="rect">
+            <a:avLst/>
+          </a:prstGeom>
+          <a:solidFill>
+            <a:srgbClr val="00B4D8"/>
+          </a:solidFill>
+          <a:ln>
+            <a:noFill/>
+          </a:ln>
+        </p:spPr>
+        <p:style>
+          <a:lnRef idx="1">
+            <a:schemeClr val="accent1"/>
+          </a:lnRef>
+          <a:fillRef idx="3">
+            <a:schemeClr val="accent1"/>
+          </a:fillRef>
+          <a:effectRef idx="2">
+            <a:schemeClr val="accent1"/>
+          </a:effectRef>
+          <a:fontRef idx="minor">
+            <a:schemeClr val="lt1"/>
+          </a:fontRef>
+        </p:style>
+        <p:txBody>
+          <a:bodyPr rtlCol="0" anchor="ctr"/>
+          <a:lstStyle/>
+          <a:p>
+            <a:pPr algn="ctr"/>
+          </a:p>
+        </p:txBody>
+      </p:sp>
+      <p:sp>
+        <p:nvSpPr>
+          <p:cNvPr id="7" name="TextBox 6"/>
+          <p:cNvSpPr txBox="1"/>
+          <p:nvPr/>
+        </p:nvSpPr>
+        <p:spPr>
+          <a:xfrm>
+            <a:off x="3931920" y="1691640"/>
+            <a:ext cx="7955279" cy="457200"/>
+          </a:xfrm>
+          <a:prstGeom prst="rect">
+            <a:avLst/>
+          </a:prstGeom>
+          <a:noFill/>
+        </p:spPr>
+        <p:txBody>
+          <a:bodyPr wrap="square">
+            <a:spAutoFit/>
+          </a:bodyPr>
+          <a:lstStyle/>
+          <a:p>
+            <a:pPr algn="l"/>
+            <a:r>
+              <a:rPr sz="1300" b="0" i="0">
+                <a:solidFill>
+                  <a:srgbClr val="0D1B2A"/>
+                </a:solidFill>
+              </a:rPr>
+              <a:t>GitHub, GitLab, Jira, Linear, Slack, Notion, Confluence, Salesforce, HubSpot, Zendesk, Stripe, Google Workspace, and 90+ more</a:t>
+            </a:r>
+          </a:p>
+        </p:txBody>
+      </p:sp>
+      <p:sp>
+        <p:nvSpPr>
+          <p:cNvPr id="6" name="TextBox 5"/>
+          <p:cNvSpPr txBox="1"/>
+          <p:nvPr/>
+        </p:nvSpPr>
+        <p:spPr>
+          <a:xfrm>
+            <a:off x="411480" y="1673352"/>
+            <a:ext cx="3291840" cy="457200"/>
+          </a:xfrm>
+          <a:prstGeom prst="rect">
+            <a:avLst/>
+          </a:prstGeom>
+          <a:noFill/>
+        </p:spPr>
+        <p:txBody>
+          <a:bodyPr wrap="square">
+            <a:spAutoFit/>
+          </a:bodyPr>
+          <a:lstStyle/>
+          <a:p>
+            <a:pPr algn="ctr"/>
+            <a:r>
+              <a:rPr sz="1200" b="1" i="0">
+                <a:solidFill>
+                  <a:srgbClr val="FFFFFF"/>
+                </a:solidFill>
+              </a:rPr>
+              <a:t>100+ Apps</a:t>
+            </a:r>
+          </a:p>
+        </p:txBody>
+      </p:sp>
+      <p:sp>
+        <p:nvSpPr>
+          <p:cNvPr id="5" name="Rectangle 4"/>
+          <p:cNvSpPr/>
+          <p:nvPr/>
+        </p:nvSpPr>
+        <p:spPr>
+          <a:xfrm>
+            <a:off x="365760" y="1600200"/>
+            <a:ext cx="3383280" cy="594360"/>
+          </a:xfrm>
+          <a:prstGeom prst="rect">
+            <a:avLst/>
+          </a:prstGeom>
+          <a:solidFill>
+            <a:srgbClr val="00B4D8"/>
+          </a:solidFill>
+          <a:ln>
+            <a:noFill/>
+          </a:ln>
+        </p:spPr>
+        <p:style>
+          <a:lnRef idx="1">
+            <a:schemeClr val="accent1"/>
+          </a:lnRef>
+          <a:fillRef idx="3">
+            <a:schemeClr val="accent1"/>
+          </a:fillRef>
+          <a:effectRef idx="2">
+            <a:schemeClr val="accent1"/>
+          </a:effectRef>
+          <a:fontRef idx="minor">
+            <a:schemeClr val="lt1"/>
+          </a:fontRef>
+        </p:style>
+        <p:txBody>
+          <a:bodyPr rtlCol="0" anchor="ctr"/>
+          <a:lstStyle/>
+          <a:p>
+            <a:pPr algn="ctr"/>
+          </a:p>
+        </p:txBody>
+      </p:sp>
+      <p:sp>
+        <p:nvSpPr>
+          <p:cNvPr id="4" name="TextBox 3"/>
+          <p:cNvSpPr txBox="1"/>
+          <p:nvPr/>
+        </p:nvSpPr>
+        <p:spPr>
+          <a:xfrm>
+            <a:off x="411480" y="804672"/>
+            <a:ext cx="11338560" cy="438912"/>
+          </a:xfrm>
+          <a:prstGeom prst="rect">
+            <a:avLst/>
+          </a:prstGeom>
+          <a:noFill/>
+        </p:spPr>
+        <p:txBody>
+          <a:bodyPr wrap="square">
+            <a:spAutoFit/>
+          </a:bodyPr>
+          <a:lstStyle/>
+          <a:p>
+            <a:pPr algn="l"/>
+            <a:r>
+              <a:rPr sz="1600" b="0" i="0">
+                <a:solidFill>
+                  <a:srgbClr val="00B4D8"/>
+                </a:solidFill>
+              </a:rPr>
+              <a:t>Connect any SaaS tool to SAGE agents — OAuth handled, no per-integration credential code</a:t>
+            </a:r>
+          </a:p>
+        </p:txBody>
+      </p:sp>
+      <p:sp>
+        <p:nvSpPr>
+          <p:cNvPr id="3" name="TextBox 2"/>
+          <p:cNvSpPr txBox="1"/>
+          <p:nvPr/>
+        </p:nvSpPr>
+        <p:spPr>
+          <a:xfrm>
+            <a:off x="411480" y="109728"/>
+            <a:ext cx="11338560" cy="731520"/>
+          </a:xfrm>
+          <a:prstGeom prst="rect">
+            <a:avLst/>
+          </a:prstGeom>
+          <a:noFill/>
+        </p:spPr>
+        <p:txBody>
+          <a:bodyPr wrap="square">
+            <a:spAutoFit/>
+          </a:bodyPr>
+          <a:lstStyle/>
+          <a:p>
+            <a:pPr algn="l"/>
+            <a:r>
+              <a:rPr sz="3000" b="1" i="0">
+                <a:solidFill>
+                  <a:srgbClr val="FFFFFF"/>
+                </a:solidFill>
+              </a:rPr>
+              <a:t>Composio Integration — 100+ Tools in One Package</a:t>
+            </a:r>
+          </a:p>
+        </p:txBody>
+      </p:sp>
+      <p:sp>
+        <p:nvSpPr>
+          <p:cNvPr id="2" name="Rectangle 1"/>
+          <p:cNvSpPr/>
+          <p:nvPr/>
+        </p:nvSpPr>
+        <p:spPr>
+          <a:xfrm>
+            <a:off x="0" y="0"/>
+            <a:ext cx="12188952" cy="1325880"/>
+          </a:xfrm>
+          <a:prstGeom prst="rect">
+            <a:avLst/>
+          </a:prstGeom>
+          <a:solidFill>
+            <a:srgbClr val="0D1B2A"/>
+          </a:solidFill>
+          <a:ln>
+            <a:noFill/>
+          </a:ln>
+        </p:spPr>
+        <p:style>
+          <a:lnRef idx="1">
+            <a:schemeClr val="accent1"/>
+          </a:lnRef>
+          <a:fillRef idx="3">
+            <a:schemeClr val="accent1"/>
+          </a:fillRef>
+          <a:effectRef idx="2">
+            <a:schemeClr val="accent1"/>
+          </a:effectRef>
+          <a:fontRef idx="minor">
+            <a:schemeClr val="lt1"/>
+          </a:fontRef>
+        </p:style>
+        <p:txBody>
+          <a:bodyPr rtlCol="0" anchor="ctr"/>
+          <a:lstStyle/>
+          <a:p>
+            <a:pPr algn="ctr"/>
+          </a:p>
+        </p:txBody>
+      </p:sp>
+    </p:spTree>
+  </p:cSld>
+  <p:clrMapOvr>
+    <a:masterClrMapping/>
+  </p:clrMapOvr>
+</p:sld>
+</file>
+
+<file path=ppt/slides/slide25.xml><?xml version="1.0" encoding="utf-8"?>
+<p:sld xmlns:a="http://schemas.openxmlformats.org/drawingml/2006/main" xmlns:p="http://schemas.openxmlformats.org/presentationml/2006/main" xmlns:r="http://schemas.openxmlformats.org/officeDocument/2006/relationships">
+  <p:cSld>
+    <p:spTree>
+      <p:nvGrpSpPr>
+        <p:cNvPr id="1" name=""/>
+        <p:cNvGrpSpPr/>
+        <p:nvPr/>
+      </p:nvGrpSpPr>
+      <p:grpSpPr/>
+      <p:sp>
+        <p:nvSpPr>
+          <p:cNvPr id="24" name="TextBox 23"/>
+          <p:cNvSpPr txBox="1"/>
+          <p:nvPr/>
+        </p:nvSpPr>
+        <p:spPr>
+          <a:xfrm>
+            <a:off x="274320" y="6510528"/>
+            <a:ext cx="8229600" cy="274320"/>
+          </a:xfrm>
+          <a:prstGeom prst="rect">
+            <a:avLst/>
+          </a:prstGeom>
+          <a:noFill/>
+        </p:spPr>
+        <p:txBody>
+          <a:bodyPr wrap="square">
+            <a:spAutoFit/>
+          </a:bodyPr>
+          <a:lstStyle/>
+          <a:p>
+            <a:pPr algn="l"/>
+            <a:r>
+              <a:rPr sz="900" b="0" i="0">
+                <a:solidFill>
+                  <a:srgbClr val="647487"/>
+                </a:solidFill>
+              </a:rPr>
+              <a:t>SAGE[ai] — Confidential | March 2026</a:t>
+            </a:r>
+          </a:p>
+        </p:txBody>
+      </p:sp>
+      <p:sp>
+        <p:nvSpPr>
+          <p:cNvPr id="23" name="Rectangle 22"/>
+          <p:cNvSpPr/>
+          <p:nvPr/>
+        </p:nvSpPr>
+        <p:spPr>
+          <a:xfrm>
+            <a:off x="0" y="6492240"/>
+            <a:ext cx="12188952" cy="365760"/>
+          </a:xfrm>
+          <a:prstGeom prst="rect">
+            <a:avLst/>
+          </a:prstGeom>
+          <a:solidFill>
+            <a:srgbClr val="0D1B2A"/>
+          </a:solidFill>
+          <a:ln>
+            <a:noFill/>
+          </a:ln>
+        </p:spPr>
+        <p:style>
+          <a:lnRef idx="1">
+            <a:schemeClr val="accent1"/>
+          </a:lnRef>
+          <a:fillRef idx="3">
+            <a:schemeClr val="accent1"/>
+          </a:fillRef>
+          <a:effectRef idx="2">
+            <a:schemeClr val="accent1"/>
+          </a:effectRef>
+          <a:fontRef idx="minor">
+            <a:schemeClr val="lt1"/>
+          </a:fontRef>
+        </p:style>
+        <p:txBody>
+          <a:bodyPr rtlCol="0" anchor="ctr"/>
+          <a:lstStyle/>
+          <a:p>
+            <a:pPr algn="ctr"/>
+          </a:p>
+        </p:txBody>
+      </p:sp>
+      <p:sp>
+        <p:nvSpPr>
+          <p:cNvPr id="22" name="TextBox 21"/>
+          <p:cNvSpPr txBox="1"/>
+          <p:nvPr/>
+        </p:nvSpPr>
+        <p:spPr>
+          <a:xfrm>
+            <a:off x="3931920" y="5440680"/>
+            <a:ext cx="7955279" cy="457200"/>
+          </a:xfrm>
+          <a:prstGeom prst="rect">
+            <a:avLst/>
+          </a:prstGeom>
+          <a:noFill/>
+        </p:spPr>
+        <p:txBody>
+          <a:bodyPr wrap="square">
+            <a:spAutoFit/>
+          </a:bodyPr>
+          <a:lstStyle/>
+          <a:p>
+            <a:pPr algn="l"/>
+            <a:r>
+              <a:rPr sz="1300" b="0" i="0">
+                <a:solidFill>
+                  <a:srgbClr val="0D1B2A"/>
+                </a:solidFill>
+              </a:rPr>
+              <a:t>Medical blue, game studio purple, startup green — no Tailwind dependency</a:t>
+            </a:r>
+          </a:p>
+        </p:txBody>
+      </p:sp>
+      <p:sp>
+        <p:nvSpPr>
+          <p:cNvPr id="21" name="TextBox 20"/>
+          <p:cNvSpPr txBox="1"/>
+          <p:nvPr/>
+        </p:nvSpPr>
+        <p:spPr>
+          <a:xfrm>
+            <a:off x="411480" y="5422392"/>
+            <a:ext cx="3291840" cy="457200"/>
+          </a:xfrm>
+          <a:prstGeom prst="rect">
+            <a:avLst/>
+          </a:prstGeom>
+          <a:noFill/>
+        </p:spPr>
+        <p:txBody>
+          <a:bodyPr wrap="square">
+            <a:spAutoFit/>
+          </a:bodyPr>
+          <a:lstStyle/>
+          <a:p>
+            <a:pPr algn="ctr"/>
+            <a:r>
+              <a:rPr sz="1200" b="1" i="0">
+                <a:solidFill>
+                  <a:srgbClr val="FFFFFF"/>
+                </a:solidFill>
+              </a:rPr>
+              <a:t>Example Themes</a:t>
+            </a:r>
+          </a:p>
+        </p:txBody>
+      </p:sp>
+      <p:sp>
+        <p:nvSpPr>
+          <p:cNvPr id="20" name="Rectangle 19"/>
+          <p:cNvSpPr/>
+          <p:nvPr/>
+        </p:nvSpPr>
+        <p:spPr>
+          <a:xfrm>
+            <a:off x="365760" y="5349240"/>
+            <a:ext cx="3383280" cy="594360"/>
+          </a:xfrm>
+          <a:prstGeom prst="rect">
+            <a:avLst/>
+          </a:prstGeom>
+          <a:solidFill>
+            <a:srgbClr val="00B4D8"/>
+          </a:solidFill>
+          <a:ln>
+            <a:noFill/>
+          </a:ln>
+        </p:spPr>
+        <p:style>
+          <a:lnRef idx="1">
+            <a:schemeClr val="accent1"/>
+          </a:lnRef>
+          <a:fillRef idx="3">
+            <a:schemeClr val="accent1"/>
+          </a:fillRef>
+          <a:effectRef idx="2">
+            <a:schemeClr val="accent1"/>
+          </a:effectRef>
+          <a:fontRef idx="minor">
+            <a:schemeClr val="lt1"/>
+          </a:fontRef>
+        </p:style>
+        <p:txBody>
+          <a:bodyPr rtlCol="0" anchor="ctr"/>
+          <a:lstStyle/>
+          <a:p>
+            <a:pPr algn="ctr"/>
+          </a:p>
+        </p:txBody>
+      </p:sp>
+      <p:sp>
+        <p:nvSpPr>
+          <p:cNvPr id="19" name="TextBox 18"/>
+          <p:cNvSpPr txBox="1"/>
+          <p:nvPr/>
+        </p:nvSpPr>
+        <p:spPr>
+          <a:xfrm>
+            <a:off x="3931920" y="4690872"/>
+            <a:ext cx="7955279" cy="457200"/>
+          </a:xfrm>
+          <a:prstGeom prst="rect">
+            <a:avLst/>
+          </a:prstGeom>
+          <a:noFill/>
+        </p:spPr>
+        <p:txBody>
+          <a:bodyPr wrap="square">
+            <a:spAutoFit/>
+          </a:bodyPr>
+          <a:lstStyle/>
+          <a:p>
+            <a:pPr algn="l"/>
+            <a:r>
+              <a:rPr sz="1300" b="0" i="0">
+                <a:solidFill>
+                  <a:srgbClr val="0D1B2A"/>
+                </a:solidFill>
+              </a:rPr>
+              <a:t>ThemeProvider writes CSS variables to document.documentElement — switches instantly</a:t>
+            </a:r>
+          </a:p>
+        </p:txBody>
+      </p:sp>
+      <p:sp>
+        <p:nvSpPr>
+          <p:cNvPr id="18" name="TextBox 17"/>
+          <p:cNvSpPr txBox="1"/>
+          <p:nvPr/>
+        </p:nvSpPr>
+        <p:spPr>
+          <a:xfrm>
+            <a:off x="411480" y="4672584"/>
+            <a:ext cx="3291840" cy="457200"/>
+          </a:xfrm>
+          <a:prstGeom prst="rect">
+            <a:avLst/>
+          </a:prstGeom>
+          <a:noFill/>
+        </p:spPr>
+        <p:txBody>
+          <a:bodyPr wrap="square">
+            <a:spAutoFit/>
+          </a:bodyPr>
+          <a:lstStyle/>
+          <a:p>
+            <a:pPr algn="ctr"/>
+            <a:r>
+              <a:rPr sz="1200" b="1" i="0">
+                <a:solidFill>
+                  <a:srgbClr val="FFFFFF"/>
+                </a:solidFill>
+              </a:rPr>
+              <a:t>CSS Variables</a:t>
+            </a:r>
+          </a:p>
+        </p:txBody>
+      </p:sp>
+      <p:sp>
+        <p:nvSpPr>
+          <p:cNvPr id="17" name="Rectangle 16"/>
+          <p:cNvSpPr/>
+          <p:nvPr/>
+        </p:nvSpPr>
+        <p:spPr>
+          <a:xfrm>
+            <a:off x="365760" y="4599432"/>
+            <a:ext cx="3383280" cy="594360"/>
+          </a:xfrm>
+          <a:prstGeom prst="rect">
+            <a:avLst/>
+          </a:prstGeom>
+          <a:solidFill>
+            <a:srgbClr val="00B4D8"/>
+          </a:solidFill>
+          <a:ln>
+            <a:noFill/>
+          </a:ln>
+        </p:spPr>
+        <p:style>
+          <a:lnRef idx="1">
+            <a:schemeClr val="accent1"/>
+          </a:lnRef>
+          <a:fillRef idx="3">
+            <a:schemeClr val="accent1"/>
+          </a:fillRef>
+          <a:effectRef idx="2">
+            <a:schemeClr val="accent1"/>
+          </a:effectRef>
+          <a:fontRef idx="minor">
+            <a:schemeClr val="lt1"/>
+          </a:fontRef>
+        </p:style>
+        <p:txBody>
+          <a:bodyPr rtlCol="0" anchor="ctr"/>
+          <a:lstStyle/>
+          <a:p>
+            <a:pPr algn="ctr"/>
+          </a:p>
+        </p:txBody>
+      </p:sp>
+      <p:sp>
+        <p:nvSpPr>
+          <p:cNvPr id="16" name="TextBox 15"/>
+          <p:cNvSpPr txBox="1"/>
+          <p:nvPr/>
+        </p:nvSpPr>
+        <p:spPr>
+          <a:xfrm>
+            <a:off x="3931920" y="3941064"/>
+            <a:ext cx="7955279" cy="457200"/>
+          </a:xfrm>
+          <a:prstGeom prst="rect">
+            <a:avLst/>
+          </a:prstGeom>
+          <a:noFill/>
+        </p:spPr>
+        <p:txBody>
+          <a:bodyPr wrap="square">
+            <a:spAutoFit/>
+          </a:bodyPr>
+          <a:lstStyle/>
+          <a:p>
+            <a:pPr algn="l"/>
+            <a:r>
+              <a:rPr sz="1300" b="0" i="0">
+                <a:solidFill>
+                  <a:srgbClr val="0D1B2A"/>
+                </a:solidFill>
+              </a:rPr>
+              <a:t>theme: block in project.yaml — sidebar_bg, accent, badge_bg CSS colour strings</a:t>
+            </a:r>
+          </a:p>
+        </p:txBody>
+      </p:sp>
+      <p:sp>
+        <p:nvSpPr>
+          <p:cNvPr id="15" name="TextBox 14"/>
+          <p:cNvSpPr txBox="1"/>
+          <p:nvPr/>
+        </p:nvSpPr>
+        <p:spPr>
+          <a:xfrm>
+            <a:off x="411480" y="3922776"/>
+            <a:ext cx="3291840" cy="457200"/>
+          </a:xfrm>
+          <a:prstGeom prst="rect">
+            <a:avLst/>
+          </a:prstGeom>
+          <a:noFill/>
+        </p:spPr>
+        <p:txBody>
+          <a:bodyPr wrap="square">
+            <a:spAutoFit/>
+          </a:bodyPr>
+          <a:lstStyle/>
+          <a:p>
+            <a:pPr algn="ctr"/>
+            <a:r>
+              <a:rPr sz="1200" b="1" i="0">
+                <a:solidFill>
+                  <a:srgbClr val="FFFFFF"/>
+                </a:solidFill>
+              </a:rPr>
+              <a:t>Solution Theming</a:t>
+            </a:r>
+          </a:p>
+        </p:txBody>
+      </p:sp>
+      <p:sp>
+        <p:nvSpPr>
+          <p:cNvPr id="14" name="Rectangle 13"/>
+          <p:cNvSpPr/>
+          <p:nvPr/>
+        </p:nvSpPr>
+        <p:spPr>
+          <a:xfrm>
+            <a:off x="365760" y="3849624"/>
+            <a:ext cx="3383280" cy="594360"/>
+          </a:xfrm>
+          <a:prstGeom prst="rect">
+            <a:avLst/>
+          </a:prstGeom>
+          <a:solidFill>
+            <a:srgbClr val="00B4D8"/>
+          </a:solidFill>
+          <a:ln>
+            <a:noFill/>
+          </a:ln>
+        </p:spPr>
+        <p:style>
+          <a:lnRef idx="1">
+            <a:schemeClr val="accent1"/>
+          </a:lnRef>
+          <a:fillRef idx="3">
+            <a:schemeClr val="accent1"/>
+          </a:fillRef>
+          <a:effectRef idx="2">
+            <a:schemeClr val="accent1"/>
+          </a:effectRef>
+          <a:fontRef idx="minor">
+            <a:schemeClr val="lt1"/>
+          </a:fontRef>
+        </p:style>
+        <p:txBody>
+          <a:bodyPr rtlCol="0" anchor="ctr"/>
+          <a:lstStyle/>
+          <a:p>
+            <a:pPr algn="ctr"/>
+          </a:p>
+        </p:txBody>
+      </p:sp>
+      <p:sp>
+        <p:nvSpPr>
+          <p:cNvPr id="13" name="TextBox 12"/>
+          <p:cNvSpPr txBox="1"/>
+          <p:nvPr/>
+        </p:nvSpPr>
+        <p:spPr>
+          <a:xfrm>
+            <a:off x="3931920" y="3191256"/>
+            <a:ext cx="7955279" cy="457200"/>
+          </a:xfrm>
+          <a:prstGeom prst="rect">
+            <a:avLst/>
+          </a:prstGeom>
+          <a:noFill/>
+        </p:spPr>
+        <p:txBody>
+          <a:bodyPr wrap="square">
+            <a:spAutoFit/>
+          </a:bodyPr>
+          <a:lstStyle/>
+          <a:p>
+            <a:pPr algn="l"/>
+            <a:r>
+              <a:rPr sz="1300" b="0" i="0">
+                <a:solidFill>
+                  <a:srgbClr val="0D1B2A"/>
+                </a:solidFill>
+              </a:rPr>
+              <a:t>Backed by POST /agents/hire — optionally add task types (written to tasks.yaml)</a:t>
+            </a:r>
+          </a:p>
+        </p:txBody>
+      </p:sp>
+      <p:sp>
+        <p:nvSpPr>
+          <p:cNvPr id="12" name="TextBox 11"/>
+          <p:cNvSpPr txBox="1"/>
+          <p:nvPr/>
+        </p:nvSpPr>
+        <p:spPr>
+          <a:xfrm>
+            <a:off x="411480" y="3172968"/>
+            <a:ext cx="3291840" cy="457200"/>
+          </a:xfrm>
+          <a:prstGeom prst="rect">
+            <a:avLst/>
+          </a:prstGeom>
+          <a:noFill/>
+        </p:spPr>
+        <p:txBody>
+          <a:bodyPr wrap="square">
+            <a:spAutoFit/>
+          </a:bodyPr>
+          <a:lstStyle/>
+          <a:p>
+            <a:pPr algn="ctr"/>
+            <a:r>
+              <a:rPr sz="1200" b="1" i="0">
+                <a:solidFill>
+                  <a:srgbClr val="FFFFFF"/>
+                </a:solidFill>
+              </a:rPr>
+              <a:t>API Backed</a:t>
+            </a:r>
+          </a:p>
+        </p:txBody>
+      </p:sp>
+      <p:sp>
+        <p:nvSpPr>
+          <p:cNvPr id="11" name="Rectangle 10"/>
+          <p:cNvSpPr/>
+          <p:nvPr/>
+        </p:nvSpPr>
+        <p:spPr>
+          <a:xfrm>
+            <a:off x="365760" y="3099816"/>
+            <a:ext cx="3383280" cy="594360"/>
+          </a:xfrm>
+          <a:prstGeom prst="rect">
+            <a:avLst/>
+          </a:prstGeom>
+          <a:solidFill>
+            <a:srgbClr val="00B4D8"/>
+          </a:solidFill>
+          <a:ln>
+            <a:noFill/>
+          </a:ln>
+        </p:spPr>
+        <p:style>
+          <a:lnRef idx="1">
+            <a:schemeClr val="accent1"/>
+          </a:lnRef>
+          <a:fillRef idx="3">
+            <a:schemeClr val="accent1"/>
+          </a:fillRef>
+          <a:effectRef idx="2">
+            <a:schemeClr val="accent1"/>
+          </a:effectRef>
+          <a:fontRef idx="minor">
+            <a:schemeClr val="lt1"/>
+          </a:fontRef>
+        </p:style>
+        <p:txBody>
+          <a:bodyPr rtlCol="0" anchor="ctr"/>
+          <a:lstStyle/>
+          <a:p>
+            <a:pPr algn="ctr"/>
+          </a:p>
+        </p:txBody>
+      </p:sp>
+      <p:sp>
+        <p:nvSpPr>
+          <p:cNvPr id="10" name="TextBox 9"/>
+          <p:cNvSpPr txBox="1"/>
+          <p:nvPr/>
+        </p:nvSpPr>
+        <p:spPr>
+          <a:xfrm>
+            <a:off x="3931920" y="2441448"/>
+            <a:ext cx="7955279" cy="457200"/>
+          </a:xfrm>
+          <a:prstGeom prst="rect">
+            <a:avLst/>
+          </a:prstGeom>
+          <a:noFill/>
+        </p:spPr>
+        <p:txBody>
+          <a:bodyPr wrap="square">
+            <a:spAutoFit/>
+          </a:bodyPr>
+          <a:lstStyle/>
+          <a:p>
+            <a:pPr algn="l"/>
+            <a:r>
+              <a:rPr sz="1300" b="0" i="0">
+                <a:solidFill>
+                  <a:srgbClr val="0D1B2A"/>
+                </a:solidFill>
+              </a:rPr>
+              <a:t>Creates HITL proposal — approve on Dashboard — role appears in Agents page immediately</a:t>
+            </a:r>
+          </a:p>
+        </p:txBody>
+      </p:sp>
+      <p:sp>
+        <p:nvSpPr>
+          <p:cNvPr id="9" name="TextBox 8"/>
+          <p:cNvSpPr txBox="1"/>
+          <p:nvPr/>
+        </p:nvSpPr>
+        <p:spPr>
+          <a:xfrm>
+            <a:off x="411480" y="2423160"/>
+            <a:ext cx="3291840" cy="457200"/>
+          </a:xfrm>
+          <a:prstGeom prst="rect">
+            <a:avLst/>
+          </a:prstGeom>
+          <a:noFill/>
+        </p:spPr>
+        <p:txBody>
+          <a:bodyPr wrap="square">
+            <a:spAutoFit/>
+          </a:bodyPr>
+          <a:lstStyle/>
+          <a:p>
+            <a:pPr algn="ctr"/>
+            <a:r>
+              <a:rPr sz="1200" b="1" i="0">
+                <a:solidFill>
+                  <a:srgbClr val="FFFFFF"/>
+                </a:solidFill>
+              </a:rPr>
+              <a:t>HITL Approval</a:t>
+            </a:r>
+          </a:p>
+        </p:txBody>
+      </p:sp>
+      <p:sp>
+        <p:nvSpPr>
+          <p:cNvPr id="8" name="Rectangle 7"/>
+          <p:cNvSpPr/>
+          <p:nvPr/>
+        </p:nvSpPr>
+        <p:spPr>
+          <a:xfrm>
+            <a:off x="365760" y="2350008"/>
+            <a:ext cx="3383280" cy="594360"/>
+          </a:xfrm>
+          <a:prstGeom prst="rect">
+            <a:avLst/>
+          </a:prstGeom>
+          <a:solidFill>
+            <a:srgbClr val="00B4D8"/>
+          </a:solidFill>
+          <a:ln>
+            <a:noFill/>
+          </a:ln>
+        </p:spPr>
+        <p:style>
+          <a:lnRef idx="1">
+            <a:schemeClr val="accent1"/>
+          </a:lnRef>
+          <a:fillRef idx="3">
+            <a:schemeClr val="accent1"/>
+          </a:fillRef>
+          <a:effectRef idx="2">
+            <a:schemeClr val="accent1"/>
+          </a:effectRef>
+          <a:fontRef idx="minor">
+            <a:schemeClr val="lt1"/>
+          </a:fontRef>
+        </p:style>
+        <p:txBody>
+          <a:bodyPr rtlCol="0" anchor="ctr"/>
+          <a:lstStyle/>
+          <a:p>
+            <a:pPr algn="ctr"/>
+          </a:p>
+        </p:txBody>
+      </p:sp>
+      <p:sp>
+        <p:nvSpPr>
+          <p:cNvPr id="7" name="TextBox 6"/>
+          <p:cNvSpPr txBox="1"/>
+          <p:nvPr/>
+        </p:nvSpPr>
+        <p:spPr>
+          <a:xfrm>
+            <a:off x="3931920" y="1691640"/>
+            <a:ext cx="7955279" cy="457200"/>
+          </a:xfrm>
+          <a:prstGeom prst="rect">
+            <a:avLst/>
+          </a:prstGeom>
+          <a:noFill/>
+        </p:spPr>
+        <p:txBody>
+          <a:bodyPr wrap="square">
+            <a:spAutoFit/>
+          </a:bodyPr>
+          <a:lstStyle/>
+          <a:p>
+            <a:pPr algn="l"/>
+            <a:r>
+              <a:rPr sz="1300" b="0" i="0">
+                <a:solidFill>
+                  <a:srgbClr val="0D1B2A"/>
+                </a:solidFill>
+              </a:rPr>
+              <a:t>From the web UI, click Hire Agent — choose icon, name, description, system prompt</a:t>
+            </a:r>
+          </a:p>
+        </p:txBody>
+      </p:sp>
+      <p:sp>
+        <p:nvSpPr>
+          <p:cNvPr id="6" name="TextBox 5"/>
+          <p:cNvSpPr txBox="1"/>
+          <p:nvPr/>
+        </p:nvSpPr>
+        <p:spPr>
+          <a:xfrm>
+            <a:off x="411480" y="1673352"/>
+            <a:ext cx="3291840" cy="457200"/>
+          </a:xfrm>
+          <a:prstGeom prst="rect">
+            <a:avLst/>
+          </a:prstGeom>
+          <a:noFill/>
+        </p:spPr>
+        <p:txBody>
+          <a:bodyPr wrap="square">
+            <a:spAutoFit/>
+          </a:bodyPr>
+          <a:lstStyle/>
+          <a:p>
+            <a:pPr algn="ctr"/>
+            <a:r>
+              <a:rPr sz="1200" b="1" i="0">
+                <a:solidFill>
+                  <a:srgbClr val="FFFFFF"/>
+                </a:solidFill>
+              </a:rPr>
+              <a:t>Hire Agent (Web UI)</a:t>
+            </a:r>
+          </a:p>
+        </p:txBody>
+      </p:sp>
+      <p:sp>
+        <p:nvSpPr>
+          <p:cNvPr id="5" name="Rectangle 4"/>
+          <p:cNvSpPr/>
+          <p:nvPr/>
+        </p:nvSpPr>
+        <p:spPr>
+          <a:xfrm>
+            <a:off x="365760" y="1600200"/>
+            <a:ext cx="3383280" cy="594360"/>
+          </a:xfrm>
+          <a:prstGeom prst="rect">
+            <a:avLst/>
+          </a:prstGeom>
+          <a:solidFill>
+            <a:srgbClr val="00B4D8"/>
+          </a:solidFill>
+          <a:ln>
+            <a:noFill/>
+          </a:ln>
+        </p:spPr>
+        <p:style>
+          <a:lnRef idx="1">
+            <a:schemeClr val="accent1"/>
+          </a:lnRef>
+          <a:fillRef idx="3">
+            <a:schemeClr val="accent1"/>
+          </a:fillRef>
+          <a:effectRef idx="2">
+            <a:schemeClr val="accent1"/>
+          </a:effectRef>
+          <a:fontRef idx="minor">
+            <a:schemeClr val="lt1"/>
+          </a:fontRef>
+        </p:style>
+        <p:txBody>
+          <a:bodyPr rtlCol="0" anchor="ctr"/>
+          <a:lstStyle/>
+          <a:p>
+            <a:pPr algn="ctr"/>
+          </a:p>
+        </p:txBody>
+      </p:sp>
+      <p:sp>
+        <p:nvSpPr>
+          <p:cNvPr id="4" name="TextBox 3"/>
+          <p:cNvSpPr txBox="1"/>
+          <p:nvPr/>
+        </p:nvSpPr>
+        <p:spPr>
+          <a:xfrm>
+            <a:off x="411480" y="804672"/>
+            <a:ext cx="11338560" cy="438912"/>
+          </a:xfrm>
+          <a:prstGeom prst="rect">
+            <a:avLst/>
+          </a:prstGeom>
+          <a:noFill/>
+        </p:spPr>
+        <p:txBody>
+          <a:bodyPr wrap="square">
+            <a:spAutoFit/>
+          </a:bodyPr>
+          <a:lstStyle/>
+          <a:p>
+            <a:pPr algn="l"/>
+            <a:r>
+              <a:rPr sz="1600" b="0" i="0">
+                <a:solidFill>
+                  <a:srgbClr val="00B4D8"/>
+                </a:solidFill>
+              </a:rPr>
+              <a:t>Extend agents and brand the UI without touching code or YAML files</a:t>
+            </a:r>
+          </a:p>
+        </p:txBody>
+      </p:sp>
+      <p:sp>
+        <p:nvSpPr>
+          <p:cNvPr id="3" name="TextBox 2"/>
+          <p:cNvSpPr txBox="1"/>
+          <p:nvPr/>
+        </p:nvSpPr>
+        <p:spPr>
+          <a:xfrm>
+            <a:off x="411480" y="109728"/>
+            <a:ext cx="11338560" cy="731520"/>
+          </a:xfrm>
+          <a:prstGeom prst="rect">
+            <a:avLst/>
+          </a:prstGeom>
+          <a:noFill/>
+        </p:spPr>
+        <p:txBody>
+          <a:bodyPr wrap="square">
+            <a:spAutoFit/>
+          </a:bodyPr>
+          <a:lstStyle/>
+          <a:p>
+            <a:pPr algn="l"/>
+            <a:r>
+              <a:rPr sz="3000" b="1" i="0">
+                <a:solidFill>
+                  <a:srgbClr val="FFFFFF"/>
+                </a:solidFill>
+              </a:rPr>
+              <a:t>Hire Agent &amp; Solution Theming — Runtime Customisation</a:t>
+            </a:r>
+          </a:p>
+        </p:txBody>
+      </p:sp>
+      <p:sp>
+        <p:nvSpPr>
+          <p:cNvPr id="2" name="Rectangle 1"/>
+          <p:cNvSpPr/>
+          <p:nvPr/>
+        </p:nvSpPr>
+        <p:spPr>
+          <a:xfrm>
+            <a:off x="0" y="0"/>
+            <a:ext cx="12188952" cy="1325880"/>
+          </a:xfrm>
+          <a:prstGeom prst="rect">
+            <a:avLst/>
+          </a:prstGeom>
+          <a:solidFill>
+            <a:srgbClr val="0D1B2A"/>
+          </a:solidFill>
+          <a:ln>
+            <a:noFill/>
+          </a:ln>
+        </p:spPr>
+        <p:style>
+          <a:lnRef idx="1">
+            <a:schemeClr val="accent1"/>
+          </a:lnRef>
+          <a:fillRef idx="3">
+            <a:schemeClr val="accent1"/>
+          </a:fillRef>
+          <a:effectRef idx="2">
+            <a:schemeClr val="accent1"/>
+          </a:effectRef>
+          <a:fontRef idx="minor">
+            <a:schemeClr val="lt1"/>
+          </a:fontRef>
+        </p:style>
+        <p:txBody>
+          <a:bodyPr rtlCol="0" anchor="ctr"/>
+          <a:lstStyle/>
+          <a:p>
+            <a:pPr algn="ctr"/>
+          </a:p>
+        </p:txBody>
+      </p:sp>
+    </p:spTree>
+  </p:cSld>
+  <p:clrMapOvr>
+    <a:masterClrMapping/>
+  </p:clrMapOvr>
+</p:sld>
+</file>
+
+<file path=ppt/slides/slide26.xml><?xml version="1.0" encoding="utf-8"?>
+<p:sld xmlns:a="http://schemas.openxmlformats.org/drawingml/2006/main" xmlns:p="http://schemas.openxmlformats.org/presentationml/2006/main" xmlns:r="http://schemas.openxmlformats.org/officeDocument/2006/relationships">
+  <p:cSld>
     <p:bg>
       <p:bgPr>
         <a:solidFill>
-          <a:srgbClr val="F0F4F8"/>
+          <a:srgbClr val="FFFFFF"/>
         </a:solidFill>
         <a:effectLst/>
       </p:bgPr>
@@ -15213,7 +16959,7 @@
             <a:avLst/>
           </a:prstGeom>
           <a:solidFill>
-            <a:srgbClr val="0D1B2A"/>
+            <a:srgbClr val="ECFDF5"/>
           </a:solidFill>
           <a:ln>
             <a:noFill/>
@@ -15258,19 +17004,19 @@
           <a:noFill/>
         </p:spPr>
         <p:txBody>
-          <a:bodyPr wrap="square">
-            <a:spAutoFit/>
-          </a:bodyPr>
-          <a:lstStyle/>
-          <a:p>
-            <a:pPr algn="l"/>
-            <a:r>
-              <a:rPr sz="3000" b="1" i="0">
-                <a:solidFill>
-                  <a:srgbClr val="FFFFFF"/>
-                </a:solidFill>
-              </a:rPr>
-              <a:t>Platform Completeness — 12+ Integration Phases</a:t>
+          <a:bodyPr wrap="none">
+            <a:spAutoFit/>
+          </a:bodyPr>
+          <a:lstStyle/>
+          <a:p>
+            <a:r>
+              <a:rPr sz="3000" b="1">
+                <a:solidFill>
+                  <a:srgbClr val="065F46"/>
+                </a:solidFill>
+                <a:latin typeface="Calibri"/>
+              </a:rPr>
+              <a:t>Build Orchestrator — 0→1→N Pipeline</a:t>
             </a:r>
           </a:p>
         </p:txBody>
@@ -15292,6 +17038,1883 @@
           <a:noFill/>
         </p:spPr>
         <p:txBody>
+          <a:bodyPr wrap="none">
+            <a:spAutoFit/>
+          </a:bodyPr>
+          <a:lstStyle/>
+          <a:p>
+            <a:r>
+              <a:rPr sz="1600" b="0">
+                <a:solidFill>
+                  <a:srgbClr val="4B5563"/>
+                </a:solidFill>
+                <a:latin typeface="Calibri"/>
+              </a:rPr>
+              <a:t>From plain-English description to working product</a:t>
+            </a:r>
+          </a:p>
+        </p:txBody>
+      </p:sp>
+      <p:sp>
+        <p:nvSpPr>
+          <p:cNvPr id="5" name="Rectangle 4"/>
+          <p:cNvSpPr/>
+          <p:nvPr/>
+        </p:nvSpPr>
+        <p:spPr>
+          <a:xfrm>
+            <a:off x="457200" y="1508760"/>
+            <a:ext cx="2176272" cy="2743200"/>
+          </a:xfrm>
+          <a:prstGeom prst="rect">
+            <a:avLst/>
+          </a:prstGeom>
+          <a:solidFill>
+            <a:srgbClr val="ECFDF5"/>
+          </a:solidFill>
+          <a:ln>
+            <a:noFill/>
+          </a:ln>
+        </p:spPr>
+        <p:style>
+          <a:lnRef idx="1">
+            <a:schemeClr val="accent1"/>
+          </a:lnRef>
+          <a:fillRef idx="3">
+            <a:schemeClr val="accent1"/>
+          </a:fillRef>
+          <a:effectRef idx="2">
+            <a:schemeClr val="accent1"/>
+          </a:effectRef>
+          <a:fontRef idx="minor">
+            <a:schemeClr val="lt1"/>
+          </a:fontRef>
+        </p:style>
+        <p:txBody>
+          <a:bodyPr rtlCol="0" anchor="ctr"/>
+          <a:lstStyle/>
+          <a:p>
+            <a:pPr algn="ctr"/>
+          </a:p>
+        </p:txBody>
+      </p:sp>
+      <p:sp>
+        <p:nvSpPr>
+          <p:cNvPr id="6" name="TextBox 5"/>
+          <p:cNvSpPr txBox="1"/>
+          <p:nvPr/>
+        </p:nvSpPr>
+        <p:spPr>
+          <a:xfrm>
+            <a:off x="548640" y="1600200"/>
+            <a:ext cx="1993392" cy="274320"/>
+          </a:xfrm>
+          <a:prstGeom prst="rect">
+            <a:avLst/>
+          </a:prstGeom>
+          <a:noFill/>
+        </p:spPr>
+        <p:txBody>
+          <a:bodyPr wrap="none">
+            <a:spAutoFit/>
+          </a:bodyPr>
+          <a:lstStyle/>
+          <a:p>
+            <a:r>
+              <a:rPr sz="1500" b="1">
+                <a:solidFill>
+                  <a:srgbClr val="059669"/>
+                </a:solidFill>
+                <a:latin typeface="Calibri"/>
+              </a:rPr>
+              <a:t>1  DECOMPOSE</a:t>
+            </a:r>
+          </a:p>
+        </p:txBody>
+      </p:sp>
+      <p:sp>
+        <p:nvSpPr>
+          <p:cNvPr id="7" name="TextBox 6"/>
+          <p:cNvSpPr txBox="1"/>
+          <p:nvPr/>
+        </p:nvSpPr>
+        <p:spPr>
+          <a:xfrm>
+            <a:off x="548640" y="1828800"/>
+            <a:ext cx="1993392" cy="2377440"/>
+          </a:xfrm>
+          <a:prstGeom prst="rect">
+            <a:avLst/>
+          </a:prstGeom>
+          <a:noFill/>
+        </p:spPr>
+        <p:txBody>
+          <a:bodyPr wrap="square">
+            <a:spAutoFit/>
+          </a:bodyPr>
+          <a:lstStyle/>
+          <a:p>
+            <a:r>
+              <a:rPr sz="1300" b="0">
+                <a:solidFill>
+                  <a:srgbClr val="374151"/>
+                </a:solidFill>
+                <a:latin typeface="Calibri"/>
+              </a:rPr>
+              <a:t>PlannerAgent breaks idea into parallel tasks (9 types: BACKEND, FRONTEND, TESTS, etc.)</a:t>
+            </a:r>
+          </a:p>
+        </p:txBody>
+      </p:sp>
+      <p:sp>
+        <p:nvSpPr>
+          <p:cNvPr id="8" name="Rectangle 7"/>
+          <p:cNvSpPr/>
+          <p:nvPr/>
+        </p:nvSpPr>
+        <p:spPr>
+          <a:xfrm>
+            <a:off x="2724912" y="1508760"/>
+            <a:ext cx="2176272" cy="2743200"/>
+          </a:xfrm>
+          <a:prstGeom prst="rect">
+            <a:avLst/>
+          </a:prstGeom>
+          <a:solidFill>
+            <a:srgbClr val="ECFDF5"/>
+          </a:solidFill>
+          <a:ln>
+            <a:noFill/>
+          </a:ln>
+        </p:spPr>
+        <p:style>
+          <a:lnRef idx="1">
+            <a:schemeClr val="accent1"/>
+          </a:lnRef>
+          <a:fillRef idx="3">
+            <a:schemeClr val="accent1"/>
+          </a:fillRef>
+          <a:effectRef idx="2">
+            <a:schemeClr val="accent1"/>
+          </a:effectRef>
+          <a:fontRef idx="minor">
+            <a:schemeClr val="lt1"/>
+          </a:fontRef>
+        </p:style>
+        <p:txBody>
+          <a:bodyPr rtlCol="0" anchor="ctr"/>
+          <a:lstStyle/>
+          <a:p>
+            <a:pPr algn="ctr"/>
+          </a:p>
+        </p:txBody>
+      </p:sp>
+      <p:sp>
+        <p:nvSpPr>
+          <p:cNvPr id="9" name="TextBox 8"/>
+          <p:cNvSpPr txBox="1"/>
+          <p:nvPr/>
+        </p:nvSpPr>
+        <p:spPr>
+          <a:xfrm>
+            <a:off x="2816352" y="1600200"/>
+            <a:ext cx="1993392" cy="274320"/>
+          </a:xfrm>
+          <a:prstGeom prst="rect">
+            <a:avLst/>
+          </a:prstGeom>
+          <a:noFill/>
+        </p:spPr>
+        <p:txBody>
+          <a:bodyPr wrap="none">
+            <a:spAutoFit/>
+          </a:bodyPr>
+          <a:lstStyle/>
+          <a:p>
+            <a:r>
+              <a:rPr sz="1500" b="1">
+                <a:solidFill>
+                  <a:srgbClr val="059669"/>
+                </a:solidFill>
+                <a:latin typeface="Calibri"/>
+              </a:rPr>
+              <a:t>2  CRITIC REVIEW</a:t>
+            </a:r>
+          </a:p>
+        </p:txBody>
+      </p:sp>
+      <p:sp>
+        <p:nvSpPr>
+          <p:cNvPr id="10" name="TextBox 9"/>
+          <p:cNvSpPr txBox="1"/>
+          <p:nvPr/>
+        </p:nvSpPr>
+        <p:spPr>
+          <a:xfrm>
+            <a:off x="2816352" y="1828800"/>
+            <a:ext cx="1993392" cy="2377440"/>
+          </a:xfrm>
+          <a:prstGeom prst="rect">
+            <a:avLst/>
+          </a:prstGeom>
+          <a:noFill/>
+        </p:spPr>
+        <p:txBody>
+          <a:bodyPr wrap="square">
+            <a:spAutoFit/>
+          </a:bodyPr>
+          <a:lstStyle/>
+          <a:p>
+            <a:r>
+              <a:rPr sz="1300" b="0">
+                <a:solidFill>
+                  <a:srgbClr val="374151"/>
+                </a:solidFill>
+                <a:latin typeface="Calibri"/>
+              </a:rPr>
+              <a:t>Actor-critic loop: Builder↔Critic iterates until score ≥ threshold (default 70/100)</a:t>
+            </a:r>
+          </a:p>
+        </p:txBody>
+      </p:sp>
+      <p:sp>
+        <p:nvSpPr>
+          <p:cNvPr id="11" name="Rectangle 10"/>
+          <p:cNvSpPr/>
+          <p:nvPr/>
+        </p:nvSpPr>
+        <p:spPr>
+          <a:xfrm>
+            <a:off x="4992624" y="1508760"/>
+            <a:ext cx="2176272" cy="2743200"/>
+          </a:xfrm>
+          <a:prstGeom prst="rect">
+            <a:avLst/>
+          </a:prstGeom>
+          <a:solidFill>
+            <a:srgbClr val="ECFDF5"/>
+          </a:solidFill>
+          <a:ln>
+            <a:noFill/>
+          </a:ln>
+        </p:spPr>
+        <p:style>
+          <a:lnRef idx="1">
+            <a:schemeClr val="accent1"/>
+          </a:lnRef>
+          <a:fillRef idx="3">
+            <a:schemeClr val="accent1"/>
+          </a:fillRef>
+          <a:effectRef idx="2">
+            <a:schemeClr val="accent1"/>
+          </a:effectRef>
+          <a:fontRef idx="minor">
+            <a:schemeClr val="lt1"/>
+          </a:fontRef>
+        </p:style>
+        <p:txBody>
+          <a:bodyPr rtlCol="0" anchor="ctr"/>
+          <a:lstStyle/>
+          <a:p>
+            <a:pPr algn="ctr"/>
+          </a:p>
+        </p:txBody>
+      </p:sp>
+      <p:sp>
+        <p:nvSpPr>
+          <p:cNvPr id="12" name="TextBox 11"/>
+          <p:cNvSpPr txBox="1"/>
+          <p:nvPr/>
+        </p:nvSpPr>
+        <p:spPr>
+          <a:xfrm>
+            <a:off x="5084064" y="1600200"/>
+            <a:ext cx="1993392" cy="274320"/>
+          </a:xfrm>
+          <a:prstGeom prst="rect">
+            <a:avLst/>
+          </a:prstGeom>
+          <a:noFill/>
+        </p:spPr>
+        <p:txBody>
+          <a:bodyPr wrap="none">
+            <a:spAutoFit/>
+          </a:bodyPr>
+          <a:lstStyle/>
+          <a:p>
+            <a:r>
+              <a:rPr sz="1500" b="1">
+                <a:solidFill>
+                  <a:srgbClr val="059669"/>
+                </a:solidFill>
+                <a:latin typeface="Calibri"/>
+              </a:rPr>
+              <a:t>3  EXECUTE</a:t>
+            </a:r>
+          </a:p>
+        </p:txBody>
+      </p:sp>
+      <p:sp>
+        <p:nvSpPr>
+          <p:cNvPr id="13" name="TextBox 12"/>
+          <p:cNvSpPr txBox="1"/>
+          <p:nvPr/>
+        </p:nvSpPr>
+        <p:spPr>
+          <a:xfrm>
+            <a:off x="5084064" y="1828800"/>
+            <a:ext cx="1993392" cy="2377440"/>
+          </a:xfrm>
+          <a:prstGeom prst="rect">
+            <a:avLst/>
+          </a:prstGeom>
+          <a:noFill/>
+        </p:spPr>
+        <p:txBody>
+          <a:bodyPr wrap="square">
+            <a:spAutoFit/>
+          </a:bodyPr>
+          <a:lstStyle/>
+          <a:p>
+            <a:r>
+              <a:rPr sz="1300" b="0">
+                <a:solidFill>
+                  <a:srgbClr val="374151"/>
+                </a:solidFill>
+                <a:latin typeface="Calibri"/>
+              </a:rPr>
+              <a:t>Wave-based parallel execution via ReAct pattern (Thought→Action→Observation→Status)</a:t>
+            </a:r>
+          </a:p>
+        </p:txBody>
+      </p:sp>
+      <p:sp>
+        <p:nvSpPr>
+          <p:cNvPr id="14" name="Rectangle 13"/>
+          <p:cNvSpPr/>
+          <p:nvPr/>
+        </p:nvSpPr>
+        <p:spPr>
+          <a:xfrm>
+            <a:off x="7260336" y="1508760"/>
+            <a:ext cx="2176272" cy="2743200"/>
+          </a:xfrm>
+          <a:prstGeom prst="rect">
+            <a:avLst/>
+          </a:prstGeom>
+          <a:solidFill>
+            <a:srgbClr val="ECFDF5"/>
+          </a:solidFill>
+          <a:ln>
+            <a:noFill/>
+          </a:ln>
+        </p:spPr>
+        <p:style>
+          <a:lnRef idx="1">
+            <a:schemeClr val="accent1"/>
+          </a:lnRef>
+          <a:fillRef idx="3">
+            <a:schemeClr val="accent1"/>
+          </a:fillRef>
+          <a:effectRef idx="2">
+            <a:schemeClr val="accent1"/>
+          </a:effectRef>
+          <a:fontRef idx="minor">
+            <a:schemeClr val="lt1"/>
+          </a:fontRef>
+        </p:style>
+        <p:txBody>
+          <a:bodyPr rtlCol="0" anchor="ctr"/>
+          <a:lstStyle/>
+          <a:p>
+            <a:pPr algn="ctr"/>
+          </a:p>
+        </p:txBody>
+      </p:sp>
+      <p:sp>
+        <p:nvSpPr>
+          <p:cNvPr id="15" name="TextBox 14"/>
+          <p:cNvSpPr txBox="1"/>
+          <p:nvPr/>
+        </p:nvSpPr>
+        <p:spPr>
+          <a:xfrm>
+            <a:off x="7351776" y="1600200"/>
+            <a:ext cx="1993392" cy="274320"/>
+          </a:xfrm>
+          <a:prstGeom prst="rect">
+            <a:avLst/>
+          </a:prstGeom>
+          <a:noFill/>
+        </p:spPr>
+        <p:txBody>
+          <a:bodyPr wrap="none">
+            <a:spAutoFit/>
+          </a:bodyPr>
+          <a:lstStyle/>
+          <a:p>
+            <a:r>
+              <a:rPr sz="1500" b="1">
+                <a:solidFill>
+                  <a:srgbClr val="059669"/>
+                </a:solidFill>
+                <a:latin typeface="Calibri"/>
+              </a:rPr>
+              <a:t>4  INTEGRATE</a:t>
+            </a:r>
+          </a:p>
+        </p:txBody>
+      </p:sp>
+      <p:sp>
+        <p:nvSpPr>
+          <p:cNvPr id="16" name="TextBox 15"/>
+          <p:cNvSpPr txBox="1"/>
+          <p:nvPr/>
+        </p:nvSpPr>
+        <p:spPr>
+          <a:xfrm>
+            <a:off x="7351776" y="1828800"/>
+            <a:ext cx="1993392" cy="2377440"/>
+          </a:xfrm>
+          <a:prstGeom prst="rect">
+            <a:avLst/>
+          </a:prstGeom>
+          <a:noFill/>
+        </p:spPr>
+        <p:txBody>
+          <a:bodyPr wrap="square">
+            <a:spAutoFit/>
+          </a:bodyPr>
+          <a:lstStyle/>
+          <a:p>
+            <a:r>
+              <a:rPr sz="1300" b="0">
+                <a:solidFill>
+                  <a:srgbClr val="374151"/>
+                </a:solidFill>
+                <a:latin typeface="Calibri"/>
+              </a:rPr>
+              <a:t>Merge results, run tests, generate diff — critic reviews integration</a:t>
+            </a:r>
+          </a:p>
+        </p:txBody>
+      </p:sp>
+      <p:sp>
+        <p:nvSpPr>
+          <p:cNvPr id="17" name="Rectangle 16"/>
+          <p:cNvSpPr/>
+          <p:nvPr/>
+        </p:nvSpPr>
+        <p:spPr>
+          <a:xfrm>
+            <a:off x="9528048" y="1508760"/>
+            <a:ext cx="2176272" cy="2743200"/>
+          </a:xfrm>
+          <a:prstGeom prst="rect">
+            <a:avLst/>
+          </a:prstGeom>
+          <a:solidFill>
+            <a:srgbClr val="ECFDF5"/>
+          </a:solidFill>
+          <a:ln>
+            <a:noFill/>
+          </a:ln>
+        </p:spPr>
+        <p:style>
+          <a:lnRef idx="1">
+            <a:schemeClr val="accent1"/>
+          </a:lnRef>
+          <a:fillRef idx="3">
+            <a:schemeClr val="accent1"/>
+          </a:fillRef>
+          <a:effectRef idx="2">
+            <a:schemeClr val="accent1"/>
+          </a:effectRef>
+          <a:fontRef idx="minor">
+            <a:schemeClr val="lt1"/>
+          </a:fontRef>
+        </p:style>
+        <p:txBody>
+          <a:bodyPr rtlCol="0" anchor="ctr"/>
+          <a:lstStyle/>
+          <a:p>
+            <a:pPr algn="ctr"/>
+          </a:p>
+        </p:txBody>
+      </p:sp>
+      <p:sp>
+        <p:nvSpPr>
+          <p:cNvPr id="18" name="TextBox 17"/>
+          <p:cNvSpPr txBox="1"/>
+          <p:nvPr/>
+        </p:nvSpPr>
+        <p:spPr>
+          <a:xfrm>
+            <a:off x="9619488" y="1600200"/>
+            <a:ext cx="1993392" cy="274320"/>
+          </a:xfrm>
+          <a:prstGeom prst="rect">
+            <a:avLst/>
+          </a:prstGeom>
+          <a:noFill/>
+        </p:spPr>
+        <p:txBody>
+          <a:bodyPr wrap="none">
+            <a:spAutoFit/>
+          </a:bodyPr>
+          <a:lstStyle/>
+          <a:p>
+            <a:r>
+              <a:rPr sz="1500" b="1">
+                <a:solidFill>
+                  <a:srgbClr val="059669"/>
+                </a:solidFill>
+                <a:latin typeface="Calibri"/>
+              </a:rPr>
+              <a:t>5  APPROVE</a:t>
+            </a:r>
+          </a:p>
+        </p:txBody>
+      </p:sp>
+      <p:sp>
+        <p:nvSpPr>
+          <p:cNvPr id="19" name="TextBox 18"/>
+          <p:cNvSpPr txBox="1"/>
+          <p:nvPr/>
+        </p:nvSpPr>
+        <p:spPr>
+          <a:xfrm>
+            <a:off x="9619488" y="1828800"/>
+            <a:ext cx="1993392" cy="2377440"/>
+          </a:xfrm>
+          <a:prstGeom prst="rect">
+            <a:avLst/>
+          </a:prstGeom>
+          <a:noFill/>
+        </p:spPr>
+        <p:txBody>
+          <a:bodyPr wrap="square">
+            <a:spAutoFit/>
+          </a:bodyPr>
+          <a:lstStyle/>
+          <a:p>
+            <a:r>
+              <a:rPr sz="1300" b="0">
+                <a:solidFill>
+                  <a:srgbClr val="374151"/>
+                </a:solidFill>
+                <a:latin typeface="Calibri"/>
+              </a:rPr>
+              <a:t>Human sees artifact + critic report + revision history → approve or reject</a:t>
+            </a:r>
+          </a:p>
+        </p:txBody>
+      </p:sp>
+      <p:sp>
+        <p:nvSpPr>
+          <p:cNvPr id="20" name="TextBox 19"/>
+          <p:cNvSpPr txBox="1"/>
+          <p:nvPr/>
+        </p:nvSpPr>
+        <p:spPr>
+          <a:xfrm>
+            <a:off x="457200" y="4480560"/>
+            <a:ext cx="11247120" cy="274320"/>
+          </a:xfrm>
+          <a:prstGeom prst="rect">
+            <a:avLst/>
+          </a:prstGeom>
+          <a:noFill/>
+        </p:spPr>
+        <p:txBody>
+          <a:bodyPr wrap="square">
+            <a:spAutoFit/>
+          </a:bodyPr>
+          <a:lstStyle/>
+          <a:p>
+            <a:r>
+              <a:rPr sz="1100" b="0">
+                <a:solidFill>
+                  <a:srgbClr val="6B7280"/>
+                </a:solidFill>
+                <a:latin typeface="Calibri"/>
+              </a:rPr>
+              <a:t>3-tier degradation: External Open SWE → LangGraph workflow → ReAct LLM fallback</a:t>
+            </a:r>
+          </a:p>
+        </p:txBody>
+      </p:sp>
+      <p:sp>
+        <p:nvSpPr>
+          <p:cNvPr id="21" name="Rectangle 20"/>
+          <p:cNvSpPr/>
+          <p:nvPr/>
+        </p:nvSpPr>
+        <p:spPr>
+          <a:xfrm>
+            <a:off x="0" y="6492240"/>
+            <a:ext cx="12188952" cy="365760"/>
+          </a:xfrm>
+          <a:prstGeom prst="rect">
+            <a:avLst/>
+          </a:prstGeom>
+          <a:solidFill>
+            <a:srgbClr val="ECFDF5"/>
+          </a:solidFill>
+          <a:ln>
+            <a:noFill/>
+          </a:ln>
+        </p:spPr>
+        <p:style>
+          <a:lnRef idx="1">
+            <a:schemeClr val="accent1"/>
+          </a:lnRef>
+          <a:fillRef idx="3">
+            <a:schemeClr val="accent1"/>
+          </a:fillRef>
+          <a:effectRef idx="2">
+            <a:schemeClr val="accent1"/>
+          </a:effectRef>
+          <a:fontRef idx="minor">
+            <a:schemeClr val="lt1"/>
+          </a:fontRef>
+        </p:style>
+        <p:txBody>
+          <a:bodyPr rtlCol="0" anchor="ctr"/>
+          <a:lstStyle/>
+          <a:p>
+            <a:pPr algn="ctr"/>
+          </a:p>
+        </p:txBody>
+      </p:sp>
+      <p:sp>
+        <p:nvSpPr>
+          <p:cNvPr id="22" name="TextBox 21"/>
+          <p:cNvSpPr txBox="1"/>
+          <p:nvPr/>
+        </p:nvSpPr>
+        <p:spPr>
+          <a:xfrm>
+            <a:off x="274320" y="6510528"/>
+            <a:ext cx="8229600" cy="274320"/>
+          </a:xfrm>
+          <a:prstGeom prst="rect">
+            <a:avLst/>
+          </a:prstGeom>
+          <a:noFill/>
+        </p:spPr>
+        <p:txBody>
+          <a:bodyPr wrap="none">
+            <a:spAutoFit/>
+          </a:bodyPr>
+          <a:lstStyle/>
+          <a:p>
+            <a:r>
+              <a:rPr sz="900" b="0">
+                <a:solidFill>
+                  <a:srgbClr val="6B7280"/>
+                </a:solidFill>
+                <a:latin typeface="Calibri"/>
+              </a:rPr>
+              <a:t>SAGE[ai] — Confidential | March 2026</a:t>
+            </a:r>
+          </a:p>
+        </p:txBody>
+      </p:sp>
+    </p:spTree>
+  </p:cSld>
+  <p:clrMapOvr>
+    <a:masterClrMapping/>
+  </p:clrMapOvr>
+</p:sld>
+</file>
+
+<file path=ppt/slides/slide27.xml><?xml version="1.0" encoding="utf-8"?>
+<p:sld xmlns:a="http://schemas.openxmlformats.org/drawingml/2006/main" xmlns:p="http://schemas.openxmlformats.org/presentationml/2006/main" xmlns:r="http://schemas.openxmlformats.org/officeDocument/2006/relationships">
+  <p:cSld>
+    <p:bg>
+      <p:bgPr>
+        <a:solidFill>
+          <a:srgbClr val="FFFFFF"/>
+        </a:solidFill>
+        <a:effectLst/>
+      </p:bgPr>
+    </p:bg>
+    <p:spTree>
+      <p:nvGrpSpPr>
+        <p:cNvPr id="1" name=""/>
+        <p:cNvGrpSpPr/>
+        <p:nvPr/>
+      </p:nvGrpSpPr>
+      <p:grpSpPr/>
+      <p:sp>
+        <p:nvSpPr>
+          <p:cNvPr id="2" name="Rectangle 1"/>
+          <p:cNvSpPr/>
+          <p:nvPr/>
+        </p:nvSpPr>
+        <p:spPr>
+          <a:xfrm>
+            <a:off x="0" y="0"/>
+            <a:ext cx="12188952" cy="1325880"/>
+          </a:xfrm>
+          <a:prstGeom prst="rect">
+            <a:avLst/>
+          </a:prstGeom>
+          <a:solidFill>
+            <a:srgbClr val="ECFDF5"/>
+          </a:solidFill>
+          <a:ln>
+            <a:noFill/>
+          </a:ln>
+        </p:spPr>
+        <p:style>
+          <a:lnRef idx="1">
+            <a:schemeClr val="accent1"/>
+          </a:lnRef>
+          <a:fillRef idx="3">
+            <a:schemeClr val="accent1"/>
+          </a:fillRef>
+          <a:effectRef idx="2">
+            <a:schemeClr val="accent1"/>
+          </a:effectRef>
+          <a:fontRef idx="minor">
+            <a:schemeClr val="lt1"/>
+          </a:fontRef>
+        </p:style>
+        <p:txBody>
+          <a:bodyPr rtlCol="0" anchor="ctr"/>
+          <a:lstStyle/>
+          <a:p>
+            <a:pPr algn="ctr"/>
+          </a:p>
+        </p:txBody>
+      </p:sp>
+      <p:sp>
+        <p:nvSpPr>
+          <p:cNvPr id="3" name="TextBox 2"/>
+          <p:cNvSpPr txBox="1"/>
+          <p:nvPr/>
+        </p:nvSpPr>
+        <p:spPr>
+          <a:xfrm>
+            <a:off x="411480" y="109728"/>
+            <a:ext cx="11338560" cy="731520"/>
+          </a:xfrm>
+          <a:prstGeom prst="rect">
+            <a:avLst/>
+          </a:prstGeom>
+          <a:noFill/>
+        </p:spPr>
+        <p:txBody>
+          <a:bodyPr wrap="none">
+            <a:spAutoFit/>
+          </a:bodyPr>
+          <a:lstStyle/>
+          <a:p>
+            <a:r>
+              <a:rPr sz="3000" b="1">
+                <a:solidFill>
+                  <a:srgbClr val="065F46"/>
+                </a:solidFill>
+                <a:latin typeface="Calibri"/>
+              </a:rPr>
+              <a:t>Agentic Patterns for Built Products</a:t>
+            </a:r>
+          </a:p>
+        </p:txBody>
+      </p:sp>
+      <p:sp>
+        <p:nvSpPr>
+          <p:cNvPr id="4" name="TextBox 3"/>
+          <p:cNvSpPr txBox="1"/>
+          <p:nvPr/>
+        </p:nvSpPr>
+        <p:spPr>
+          <a:xfrm>
+            <a:off x="411480" y="804672"/>
+            <a:ext cx="11338560" cy="438912"/>
+          </a:xfrm>
+          <a:prstGeom prst="rect">
+            <a:avLst/>
+          </a:prstGeom>
+          <a:noFill/>
+        </p:spPr>
+        <p:txBody>
+          <a:bodyPr wrap="none">
+            <a:spAutoFit/>
+          </a:bodyPr>
+          <a:lstStyle/>
+          <a:p>
+            <a:r>
+              <a:rPr sz="1600" b="0">
+                <a:solidFill>
+                  <a:srgbClr val="4B5563"/>
+                </a:solidFill>
+                <a:latin typeface="Calibri"/>
+              </a:rPr>
+              <a:t>Products built by SAGE can themselves use any agentic architecture</a:t>
+            </a:r>
+          </a:p>
+        </p:txBody>
+      </p:sp>
+      <p:sp>
+        <p:nvSpPr>
+          <p:cNvPr id="5" name="Rectangle 4"/>
+          <p:cNvSpPr/>
+          <p:nvPr/>
+        </p:nvSpPr>
+        <p:spPr>
+          <a:xfrm>
+            <a:off x="457200" y="1508760"/>
+            <a:ext cx="5532120" cy="457200"/>
+          </a:xfrm>
+          <a:prstGeom prst="rect">
+            <a:avLst/>
+          </a:prstGeom>
+          <a:solidFill>
+            <a:srgbClr val="ECFDF5"/>
+          </a:solidFill>
+          <a:ln>
+            <a:noFill/>
+          </a:ln>
+        </p:spPr>
+        <p:style>
+          <a:lnRef idx="1">
+            <a:schemeClr val="accent1"/>
+          </a:lnRef>
+          <a:fillRef idx="3">
+            <a:schemeClr val="accent1"/>
+          </a:fillRef>
+          <a:effectRef idx="2">
+            <a:schemeClr val="accent1"/>
+          </a:effectRef>
+          <a:fontRef idx="minor">
+            <a:schemeClr val="lt1"/>
+          </a:fontRef>
+        </p:style>
+        <p:txBody>
+          <a:bodyPr rtlCol="0" anchor="ctr"/>
+          <a:lstStyle/>
+          <a:p>
+            <a:pPr algn="ctr"/>
+          </a:p>
+        </p:txBody>
+      </p:sp>
+      <p:sp>
+        <p:nvSpPr>
+          <p:cNvPr id="6" name="TextBox 5"/>
+          <p:cNvSpPr txBox="1"/>
+          <p:nvPr/>
+        </p:nvSpPr>
+        <p:spPr>
+          <a:xfrm>
+            <a:off x="594360" y="1618488"/>
+            <a:ext cx="5257800" cy="320040"/>
+          </a:xfrm>
+          <a:prstGeom prst="rect">
+            <a:avLst/>
+          </a:prstGeom>
+          <a:noFill/>
+        </p:spPr>
+        <p:txBody>
+          <a:bodyPr wrap="none">
+            <a:spAutoFit/>
+          </a:bodyPr>
+          <a:lstStyle/>
+          <a:p>
+            <a:r>
+              <a:rPr sz="1300" b="1">
+                <a:solidFill>
+                  <a:srgbClr val="059669"/>
+                </a:solidFill>
+                <a:latin typeface="Calibri"/>
+              </a:rPr>
+              <a:t>1.  </a:t>
+            </a:r>
+            <a:r>
+              <a:rPr sz="1300" b="0">
+                <a:solidFill>
+                  <a:srgbClr val="374151"/>
+                </a:solidFill>
+                <a:latin typeface="Calibri"/>
+              </a:rPr>
+              <a:t>Single-Agent</a:t>
+            </a:r>
+          </a:p>
+        </p:txBody>
+      </p:sp>
+      <p:sp>
+        <p:nvSpPr>
+          <p:cNvPr id="7" name="Rectangle 6"/>
+          <p:cNvSpPr/>
+          <p:nvPr/>
+        </p:nvSpPr>
+        <p:spPr>
+          <a:xfrm>
+            <a:off x="457200" y="2057400"/>
+            <a:ext cx="5532120" cy="457200"/>
+          </a:xfrm>
+          <a:prstGeom prst="rect">
+            <a:avLst/>
+          </a:prstGeom>
+          <a:solidFill>
+            <a:srgbClr val="ECFDF5"/>
+          </a:solidFill>
+          <a:ln>
+            <a:noFill/>
+          </a:ln>
+        </p:spPr>
+        <p:style>
+          <a:lnRef idx="1">
+            <a:schemeClr val="accent1"/>
+          </a:lnRef>
+          <a:fillRef idx="3">
+            <a:schemeClr val="accent1"/>
+          </a:fillRef>
+          <a:effectRef idx="2">
+            <a:schemeClr val="accent1"/>
+          </a:effectRef>
+          <a:fontRef idx="minor">
+            <a:schemeClr val="lt1"/>
+          </a:fontRef>
+        </p:style>
+        <p:txBody>
+          <a:bodyPr rtlCol="0" anchor="ctr"/>
+          <a:lstStyle/>
+          <a:p>
+            <a:pPr algn="ctr"/>
+          </a:p>
+        </p:txBody>
+      </p:sp>
+      <p:sp>
+        <p:nvSpPr>
+          <p:cNvPr id="8" name="TextBox 7"/>
+          <p:cNvSpPr txBox="1"/>
+          <p:nvPr/>
+        </p:nvSpPr>
+        <p:spPr>
+          <a:xfrm>
+            <a:off x="594360" y="2167128"/>
+            <a:ext cx="5257800" cy="320040"/>
+          </a:xfrm>
+          <a:prstGeom prst="rect">
+            <a:avLst/>
+          </a:prstGeom>
+          <a:noFill/>
+        </p:spPr>
+        <p:txBody>
+          <a:bodyPr wrap="none">
+            <a:spAutoFit/>
+          </a:bodyPr>
+          <a:lstStyle/>
+          <a:p>
+            <a:r>
+              <a:rPr sz="1300" b="1">
+                <a:solidFill>
+                  <a:srgbClr val="059669"/>
+                </a:solidFill>
+                <a:latin typeface="Calibri"/>
+              </a:rPr>
+              <a:t>2.  </a:t>
+            </a:r>
+            <a:r>
+              <a:rPr sz="1300" b="0">
+                <a:solidFill>
+                  <a:srgbClr val="374151"/>
+                </a:solidFill>
+                <a:latin typeface="Calibri"/>
+              </a:rPr>
+              <a:t>Multi-Agent Sequential</a:t>
+            </a:r>
+          </a:p>
+        </p:txBody>
+      </p:sp>
+      <p:sp>
+        <p:nvSpPr>
+          <p:cNvPr id="9" name="Rectangle 8"/>
+          <p:cNvSpPr/>
+          <p:nvPr/>
+        </p:nvSpPr>
+        <p:spPr>
+          <a:xfrm>
+            <a:off x="457200" y="2606040"/>
+            <a:ext cx="5532120" cy="457200"/>
+          </a:xfrm>
+          <a:prstGeom prst="rect">
+            <a:avLst/>
+          </a:prstGeom>
+          <a:solidFill>
+            <a:srgbClr val="ECFDF5"/>
+          </a:solidFill>
+          <a:ln>
+            <a:noFill/>
+          </a:ln>
+        </p:spPr>
+        <p:style>
+          <a:lnRef idx="1">
+            <a:schemeClr val="accent1"/>
+          </a:lnRef>
+          <a:fillRef idx="3">
+            <a:schemeClr val="accent1"/>
+          </a:fillRef>
+          <a:effectRef idx="2">
+            <a:schemeClr val="accent1"/>
+          </a:effectRef>
+          <a:fontRef idx="minor">
+            <a:schemeClr val="lt1"/>
+          </a:fontRef>
+        </p:style>
+        <p:txBody>
+          <a:bodyPr rtlCol="0" anchor="ctr"/>
+          <a:lstStyle/>
+          <a:p>
+            <a:pPr algn="ctr"/>
+          </a:p>
+        </p:txBody>
+      </p:sp>
+      <p:sp>
+        <p:nvSpPr>
+          <p:cNvPr id="10" name="TextBox 9"/>
+          <p:cNvSpPr txBox="1"/>
+          <p:nvPr/>
+        </p:nvSpPr>
+        <p:spPr>
+          <a:xfrm>
+            <a:off x="594360" y="2715768"/>
+            <a:ext cx="5257800" cy="320040"/>
+          </a:xfrm>
+          <a:prstGeom prst="rect">
+            <a:avLst/>
+          </a:prstGeom>
+          <a:noFill/>
+        </p:spPr>
+        <p:txBody>
+          <a:bodyPr wrap="none">
+            <a:spAutoFit/>
+          </a:bodyPr>
+          <a:lstStyle/>
+          <a:p>
+            <a:r>
+              <a:rPr sz="1300" b="1">
+                <a:solidFill>
+                  <a:srgbClr val="059669"/>
+                </a:solidFill>
+                <a:latin typeface="Calibri"/>
+              </a:rPr>
+              <a:t>3.  </a:t>
+            </a:r>
+            <a:r>
+              <a:rPr sz="1300" b="0">
+                <a:solidFill>
+                  <a:srgbClr val="374151"/>
+                </a:solidFill>
+                <a:latin typeface="Calibri"/>
+              </a:rPr>
+              <a:t>Multi-Agent Parallel</a:t>
+            </a:r>
+          </a:p>
+        </p:txBody>
+      </p:sp>
+      <p:sp>
+        <p:nvSpPr>
+          <p:cNvPr id="11" name="Rectangle 10"/>
+          <p:cNvSpPr/>
+          <p:nvPr/>
+        </p:nvSpPr>
+        <p:spPr>
+          <a:xfrm>
+            <a:off x="457200" y="3154680"/>
+            <a:ext cx="5532120" cy="457200"/>
+          </a:xfrm>
+          <a:prstGeom prst="rect">
+            <a:avLst/>
+          </a:prstGeom>
+          <a:solidFill>
+            <a:srgbClr val="ECFDF5"/>
+          </a:solidFill>
+          <a:ln>
+            <a:noFill/>
+          </a:ln>
+        </p:spPr>
+        <p:style>
+          <a:lnRef idx="1">
+            <a:schemeClr val="accent1"/>
+          </a:lnRef>
+          <a:fillRef idx="3">
+            <a:schemeClr val="accent1"/>
+          </a:fillRef>
+          <a:effectRef idx="2">
+            <a:schemeClr val="accent1"/>
+          </a:effectRef>
+          <a:fontRef idx="minor">
+            <a:schemeClr val="lt1"/>
+          </a:fontRef>
+        </p:style>
+        <p:txBody>
+          <a:bodyPr rtlCol="0" anchor="ctr"/>
+          <a:lstStyle/>
+          <a:p>
+            <a:pPr algn="ctr"/>
+          </a:p>
+        </p:txBody>
+      </p:sp>
+      <p:sp>
+        <p:nvSpPr>
+          <p:cNvPr id="12" name="TextBox 11"/>
+          <p:cNvSpPr txBox="1"/>
+          <p:nvPr/>
+        </p:nvSpPr>
+        <p:spPr>
+          <a:xfrm>
+            <a:off x="594360" y="3264408"/>
+            <a:ext cx="5257800" cy="320040"/>
+          </a:xfrm>
+          <a:prstGeom prst="rect">
+            <a:avLst/>
+          </a:prstGeom>
+          <a:noFill/>
+        </p:spPr>
+        <p:txBody>
+          <a:bodyPr wrap="none">
+            <a:spAutoFit/>
+          </a:bodyPr>
+          <a:lstStyle/>
+          <a:p>
+            <a:r>
+              <a:rPr sz="1300" b="1">
+                <a:solidFill>
+                  <a:srgbClr val="059669"/>
+                </a:solidFill>
+                <a:latin typeface="Calibri"/>
+              </a:rPr>
+              <a:t>4.  </a:t>
+            </a:r>
+            <a:r>
+              <a:rPr sz="1300" b="0">
+                <a:solidFill>
+                  <a:srgbClr val="374151"/>
+                </a:solidFill>
+                <a:latin typeface="Calibri"/>
+              </a:rPr>
+              <a:t>Review &amp; Critique</a:t>
+            </a:r>
+          </a:p>
+        </p:txBody>
+      </p:sp>
+      <p:sp>
+        <p:nvSpPr>
+          <p:cNvPr id="13" name="Rectangle 12"/>
+          <p:cNvSpPr/>
+          <p:nvPr/>
+        </p:nvSpPr>
+        <p:spPr>
+          <a:xfrm>
+            <a:off x="457200" y="3703320"/>
+            <a:ext cx="5532120" cy="457200"/>
+          </a:xfrm>
+          <a:prstGeom prst="rect">
+            <a:avLst/>
+          </a:prstGeom>
+          <a:solidFill>
+            <a:srgbClr val="ECFDF5"/>
+          </a:solidFill>
+          <a:ln>
+            <a:noFill/>
+          </a:ln>
+        </p:spPr>
+        <p:style>
+          <a:lnRef idx="1">
+            <a:schemeClr val="accent1"/>
+          </a:lnRef>
+          <a:fillRef idx="3">
+            <a:schemeClr val="accent1"/>
+          </a:fillRef>
+          <a:effectRef idx="2">
+            <a:schemeClr val="accent1"/>
+          </a:effectRef>
+          <a:fontRef idx="minor">
+            <a:schemeClr val="lt1"/>
+          </a:fontRef>
+        </p:style>
+        <p:txBody>
+          <a:bodyPr rtlCol="0" anchor="ctr"/>
+          <a:lstStyle/>
+          <a:p>
+            <a:pPr algn="ctr"/>
+          </a:p>
+        </p:txBody>
+      </p:sp>
+      <p:sp>
+        <p:nvSpPr>
+          <p:cNvPr id="14" name="TextBox 13"/>
+          <p:cNvSpPr txBox="1"/>
+          <p:nvPr/>
+        </p:nvSpPr>
+        <p:spPr>
+          <a:xfrm>
+            <a:off x="594360" y="3813048"/>
+            <a:ext cx="5257800" cy="320040"/>
+          </a:xfrm>
+          <a:prstGeom prst="rect">
+            <a:avLst/>
+          </a:prstGeom>
+          <a:noFill/>
+        </p:spPr>
+        <p:txBody>
+          <a:bodyPr wrap="none">
+            <a:spAutoFit/>
+          </a:bodyPr>
+          <a:lstStyle/>
+          <a:p>
+            <a:r>
+              <a:rPr sz="1300" b="1">
+                <a:solidFill>
+                  <a:srgbClr val="059669"/>
+                </a:solidFill>
+                <a:latin typeface="Calibri"/>
+              </a:rPr>
+              <a:t>5.  </a:t>
+            </a:r>
+            <a:r>
+              <a:rPr sz="1300" b="0">
+                <a:solidFill>
+                  <a:srgbClr val="374151"/>
+                </a:solidFill>
+                <a:latin typeface="Calibri"/>
+              </a:rPr>
+              <a:t>Multi-Agent Coordinator</a:t>
+            </a:r>
+          </a:p>
+        </p:txBody>
+      </p:sp>
+      <p:sp>
+        <p:nvSpPr>
+          <p:cNvPr id="15" name="Rectangle 14"/>
+          <p:cNvSpPr/>
+          <p:nvPr/>
+        </p:nvSpPr>
+        <p:spPr>
+          <a:xfrm>
+            <a:off x="6172200" y="1508760"/>
+            <a:ext cx="5532120" cy="457200"/>
+          </a:xfrm>
+          <a:prstGeom prst="rect">
+            <a:avLst/>
+          </a:prstGeom>
+          <a:solidFill>
+            <a:srgbClr val="ECFDF5"/>
+          </a:solidFill>
+          <a:ln>
+            <a:noFill/>
+          </a:ln>
+        </p:spPr>
+        <p:style>
+          <a:lnRef idx="1">
+            <a:schemeClr val="accent1"/>
+          </a:lnRef>
+          <a:fillRef idx="3">
+            <a:schemeClr val="accent1"/>
+          </a:fillRef>
+          <a:effectRef idx="2">
+            <a:schemeClr val="accent1"/>
+          </a:effectRef>
+          <a:fontRef idx="minor">
+            <a:schemeClr val="lt1"/>
+          </a:fontRef>
+        </p:style>
+        <p:txBody>
+          <a:bodyPr rtlCol="0" anchor="ctr"/>
+          <a:lstStyle/>
+          <a:p>
+            <a:pPr algn="ctr"/>
+          </a:p>
+        </p:txBody>
+      </p:sp>
+      <p:sp>
+        <p:nvSpPr>
+          <p:cNvPr id="16" name="TextBox 15"/>
+          <p:cNvSpPr txBox="1"/>
+          <p:nvPr/>
+        </p:nvSpPr>
+        <p:spPr>
+          <a:xfrm>
+            <a:off x="6309360" y="1618488"/>
+            <a:ext cx="5257800" cy="320040"/>
+          </a:xfrm>
+          <a:prstGeom prst="rect">
+            <a:avLst/>
+          </a:prstGeom>
+          <a:noFill/>
+        </p:spPr>
+        <p:txBody>
+          <a:bodyPr wrap="none">
+            <a:spAutoFit/>
+          </a:bodyPr>
+          <a:lstStyle/>
+          <a:p>
+            <a:r>
+              <a:rPr sz="1300" b="1">
+                <a:solidFill>
+                  <a:srgbClr val="059669"/>
+                </a:solidFill>
+                <a:latin typeface="Calibri"/>
+              </a:rPr>
+              <a:t>6.  </a:t>
+            </a:r>
+            <a:r>
+              <a:rPr sz="1300" b="0">
+                <a:solidFill>
+                  <a:srgbClr val="374151"/>
+                </a:solidFill>
+                <a:latin typeface="Calibri"/>
+              </a:rPr>
+              <a:t>Hierarchical Decomposition</a:t>
+            </a:r>
+          </a:p>
+        </p:txBody>
+      </p:sp>
+      <p:sp>
+        <p:nvSpPr>
+          <p:cNvPr id="17" name="Rectangle 16"/>
+          <p:cNvSpPr/>
+          <p:nvPr/>
+        </p:nvSpPr>
+        <p:spPr>
+          <a:xfrm>
+            <a:off x="6172200" y="2057400"/>
+            <a:ext cx="5532120" cy="457200"/>
+          </a:xfrm>
+          <a:prstGeom prst="rect">
+            <a:avLst/>
+          </a:prstGeom>
+          <a:solidFill>
+            <a:srgbClr val="ECFDF5"/>
+          </a:solidFill>
+          <a:ln>
+            <a:noFill/>
+          </a:ln>
+        </p:spPr>
+        <p:style>
+          <a:lnRef idx="1">
+            <a:schemeClr val="accent1"/>
+          </a:lnRef>
+          <a:fillRef idx="3">
+            <a:schemeClr val="accent1"/>
+          </a:fillRef>
+          <a:effectRef idx="2">
+            <a:schemeClr val="accent1"/>
+          </a:effectRef>
+          <a:fontRef idx="minor">
+            <a:schemeClr val="lt1"/>
+          </a:fontRef>
+        </p:style>
+        <p:txBody>
+          <a:bodyPr rtlCol="0" anchor="ctr"/>
+          <a:lstStyle/>
+          <a:p>
+            <a:pPr algn="ctr"/>
+          </a:p>
+        </p:txBody>
+      </p:sp>
+      <p:sp>
+        <p:nvSpPr>
+          <p:cNvPr id="18" name="TextBox 17"/>
+          <p:cNvSpPr txBox="1"/>
+          <p:nvPr/>
+        </p:nvSpPr>
+        <p:spPr>
+          <a:xfrm>
+            <a:off x="6309360" y="2167128"/>
+            <a:ext cx="5257800" cy="320040"/>
+          </a:xfrm>
+          <a:prstGeom prst="rect">
+            <a:avLst/>
+          </a:prstGeom>
+          <a:noFill/>
+        </p:spPr>
+        <p:txBody>
+          <a:bodyPr wrap="none">
+            <a:spAutoFit/>
+          </a:bodyPr>
+          <a:lstStyle/>
+          <a:p>
+            <a:r>
+              <a:rPr sz="1300" b="1">
+                <a:solidFill>
+                  <a:srgbClr val="059669"/>
+                </a:solidFill>
+                <a:latin typeface="Calibri"/>
+              </a:rPr>
+              <a:t>7.  </a:t>
+            </a:r>
+            <a:r>
+              <a:rPr sz="1300" b="0">
+                <a:solidFill>
+                  <a:srgbClr val="374151"/>
+                </a:solidFill>
+                <a:latin typeface="Calibri"/>
+              </a:rPr>
+              <a:t>Multi-Agent Swarm</a:t>
+            </a:r>
+          </a:p>
+        </p:txBody>
+      </p:sp>
+      <p:sp>
+        <p:nvSpPr>
+          <p:cNvPr id="19" name="Rectangle 18"/>
+          <p:cNvSpPr/>
+          <p:nvPr/>
+        </p:nvSpPr>
+        <p:spPr>
+          <a:xfrm>
+            <a:off x="6172200" y="2606040"/>
+            <a:ext cx="5532120" cy="457200"/>
+          </a:xfrm>
+          <a:prstGeom prst="rect">
+            <a:avLst/>
+          </a:prstGeom>
+          <a:solidFill>
+            <a:srgbClr val="ECFDF5"/>
+          </a:solidFill>
+          <a:ln>
+            <a:noFill/>
+          </a:ln>
+        </p:spPr>
+        <p:style>
+          <a:lnRef idx="1">
+            <a:schemeClr val="accent1"/>
+          </a:lnRef>
+          <a:fillRef idx="3">
+            <a:schemeClr val="accent1"/>
+          </a:fillRef>
+          <a:effectRef idx="2">
+            <a:schemeClr val="accent1"/>
+          </a:effectRef>
+          <a:fontRef idx="minor">
+            <a:schemeClr val="lt1"/>
+          </a:fontRef>
+        </p:style>
+        <p:txBody>
+          <a:bodyPr rtlCol="0" anchor="ctr"/>
+          <a:lstStyle/>
+          <a:p>
+            <a:pPr algn="ctr"/>
+          </a:p>
+        </p:txBody>
+      </p:sp>
+      <p:sp>
+        <p:nvSpPr>
+          <p:cNvPr id="20" name="TextBox 19"/>
+          <p:cNvSpPr txBox="1"/>
+          <p:nvPr/>
+        </p:nvSpPr>
+        <p:spPr>
+          <a:xfrm>
+            <a:off x="6309360" y="2715768"/>
+            <a:ext cx="5257800" cy="320040"/>
+          </a:xfrm>
+          <a:prstGeom prst="rect">
+            <a:avLst/>
+          </a:prstGeom>
+          <a:noFill/>
+        </p:spPr>
+        <p:txBody>
+          <a:bodyPr wrap="none">
+            <a:spAutoFit/>
+          </a:bodyPr>
+          <a:lstStyle/>
+          <a:p>
+            <a:r>
+              <a:rPr sz="1300" b="1">
+                <a:solidFill>
+                  <a:srgbClr val="059669"/>
+                </a:solidFill>
+                <a:latin typeface="Calibri"/>
+              </a:rPr>
+              <a:t>8.  </a:t>
+            </a:r>
+            <a:r>
+              <a:rPr sz="1300" b="0">
+                <a:solidFill>
+                  <a:srgbClr val="374151"/>
+                </a:solidFill>
+                <a:latin typeface="Calibri"/>
+              </a:rPr>
+              <a:t>ReAct (Reason+Act)</a:t>
+            </a:r>
+          </a:p>
+        </p:txBody>
+      </p:sp>
+      <p:sp>
+        <p:nvSpPr>
+          <p:cNvPr id="21" name="Rectangle 20"/>
+          <p:cNvSpPr/>
+          <p:nvPr/>
+        </p:nvSpPr>
+        <p:spPr>
+          <a:xfrm>
+            <a:off x="6172200" y="3154680"/>
+            <a:ext cx="5532120" cy="457200"/>
+          </a:xfrm>
+          <a:prstGeom prst="rect">
+            <a:avLst/>
+          </a:prstGeom>
+          <a:solidFill>
+            <a:srgbClr val="ECFDF5"/>
+          </a:solidFill>
+          <a:ln>
+            <a:noFill/>
+          </a:ln>
+        </p:spPr>
+        <p:style>
+          <a:lnRef idx="1">
+            <a:schemeClr val="accent1"/>
+          </a:lnRef>
+          <a:fillRef idx="3">
+            <a:schemeClr val="accent1"/>
+          </a:fillRef>
+          <a:effectRef idx="2">
+            <a:schemeClr val="accent1"/>
+          </a:effectRef>
+          <a:fontRef idx="minor">
+            <a:schemeClr val="lt1"/>
+          </a:fontRef>
+        </p:style>
+        <p:txBody>
+          <a:bodyPr rtlCol="0" anchor="ctr"/>
+          <a:lstStyle/>
+          <a:p>
+            <a:pPr algn="ctr"/>
+          </a:p>
+        </p:txBody>
+      </p:sp>
+      <p:sp>
+        <p:nvSpPr>
+          <p:cNvPr id="22" name="TextBox 21"/>
+          <p:cNvSpPr txBox="1"/>
+          <p:nvPr/>
+        </p:nvSpPr>
+        <p:spPr>
+          <a:xfrm>
+            <a:off x="6309360" y="3264408"/>
+            <a:ext cx="5257800" cy="320040"/>
+          </a:xfrm>
+          <a:prstGeom prst="rect">
+            <a:avLst/>
+          </a:prstGeom>
+          <a:noFill/>
+        </p:spPr>
+        <p:txBody>
+          <a:bodyPr wrap="none">
+            <a:spAutoFit/>
+          </a:bodyPr>
+          <a:lstStyle/>
+          <a:p>
+            <a:r>
+              <a:rPr sz="1300" b="1">
+                <a:solidFill>
+                  <a:srgbClr val="059669"/>
+                </a:solidFill>
+                <a:latin typeface="Calibri"/>
+              </a:rPr>
+              <a:t>9.  </a:t>
+            </a:r>
+            <a:r>
+              <a:rPr sz="1300" b="0">
+                <a:solidFill>
+                  <a:srgbClr val="374151"/>
+                </a:solidFill>
+                <a:latin typeface="Calibri"/>
+              </a:rPr>
+              <a:t>Human-in-the-Loop</a:t>
+            </a:r>
+          </a:p>
+        </p:txBody>
+      </p:sp>
+      <p:sp>
+        <p:nvSpPr>
+          <p:cNvPr id="23" name="Rectangle 22"/>
+          <p:cNvSpPr/>
+          <p:nvPr/>
+        </p:nvSpPr>
+        <p:spPr>
+          <a:xfrm>
+            <a:off x="6172200" y="3703320"/>
+            <a:ext cx="5532120" cy="457200"/>
+          </a:xfrm>
+          <a:prstGeom prst="rect">
+            <a:avLst/>
+          </a:prstGeom>
+          <a:solidFill>
+            <a:srgbClr val="ECFDF5"/>
+          </a:solidFill>
+          <a:ln>
+            <a:noFill/>
+          </a:ln>
+        </p:spPr>
+        <p:style>
+          <a:lnRef idx="1">
+            <a:schemeClr val="accent1"/>
+          </a:lnRef>
+          <a:fillRef idx="3">
+            <a:schemeClr val="accent1"/>
+          </a:fillRef>
+          <a:effectRef idx="2">
+            <a:schemeClr val="accent1"/>
+          </a:effectRef>
+          <a:fontRef idx="minor">
+            <a:schemeClr val="lt1"/>
+          </a:fontRef>
+        </p:style>
+        <p:txBody>
+          <a:bodyPr rtlCol="0" anchor="ctr"/>
+          <a:lstStyle/>
+          <a:p>
+            <a:pPr algn="ctr"/>
+          </a:p>
+        </p:txBody>
+      </p:sp>
+      <p:sp>
+        <p:nvSpPr>
+          <p:cNvPr id="24" name="TextBox 23"/>
+          <p:cNvSpPr txBox="1"/>
+          <p:nvPr/>
+        </p:nvSpPr>
+        <p:spPr>
+          <a:xfrm>
+            <a:off x="6309360" y="3813048"/>
+            <a:ext cx="5257800" cy="320040"/>
+          </a:xfrm>
+          <a:prstGeom prst="rect">
+            <a:avLst/>
+          </a:prstGeom>
+          <a:noFill/>
+        </p:spPr>
+        <p:txBody>
+          <a:bodyPr wrap="none">
+            <a:spAutoFit/>
+          </a:bodyPr>
+          <a:lstStyle/>
+          <a:p>
+            <a:r>
+              <a:rPr sz="1300" b="1">
+                <a:solidFill>
+                  <a:srgbClr val="059669"/>
+                </a:solidFill>
+                <a:latin typeface="Calibri"/>
+              </a:rPr>
+              <a:t>10.  </a:t>
+            </a:r>
+            <a:r>
+              <a:rPr sz="1300" b="0">
+                <a:solidFill>
+                  <a:srgbClr val="374151"/>
+                </a:solidFill>
+                <a:latin typeface="Calibri"/>
+              </a:rPr>
+              <a:t>Iterative Refinement</a:t>
+            </a:r>
+          </a:p>
+        </p:txBody>
+      </p:sp>
+      <p:sp>
+        <p:nvSpPr>
+          <p:cNvPr id="25" name="TextBox 24"/>
+          <p:cNvSpPr txBox="1"/>
+          <p:nvPr/>
+        </p:nvSpPr>
+        <p:spPr>
+          <a:xfrm>
+            <a:off x="457200" y="4937760"/>
+            <a:ext cx="11247120" cy="274320"/>
+          </a:xfrm>
+          <a:prstGeom prst="rect">
+            <a:avLst/>
+          </a:prstGeom>
+          <a:noFill/>
+        </p:spPr>
+        <p:txBody>
+          <a:bodyPr wrap="square">
+            <a:spAutoFit/>
+          </a:bodyPr>
+          <a:lstStyle/>
+          <a:p>
+            <a:r>
+              <a:rPr sz="1100" b="0">
+                <a:solidFill>
+                  <a:srgbClr val="6B7280"/>
+                </a:solidFill>
+                <a:latin typeface="Calibri"/>
+              </a:rPr>
+              <a:t>3 HITL levels: minimal (2 gates) · standard (3 gates) · strict (every stage)</a:t>
+            </a:r>
+          </a:p>
+        </p:txBody>
+      </p:sp>
+      <p:sp>
+        <p:nvSpPr>
+          <p:cNvPr id="26" name="Rectangle 25"/>
+          <p:cNvSpPr/>
+          <p:nvPr/>
+        </p:nvSpPr>
+        <p:spPr>
+          <a:xfrm>
+            <a:off x="0" y="6492240"/>
+            <a:ext cx="12188952" cy="365760"/>
+          </a:xfrm>
+          <a:prstGeom prst="rect">
+            <a:avLst/>
+          </a:prstGeom>
+          <a:solidFill>
+            <a:srgbClr val="ECFDF5"/>
+          </a:solidFill>
+          <a:ln>
+            <a:noFill/>
+          </a:ln>
+        </p:spPr>
+        <p:style>
+          <a:lnRef idx="1">
+            <a:schemeClr val="accent1"/>
+          </a:lnRef>
+          <a:fillRef idx="3">
+            <a:schemeClr val="accent1"/>
+          </a:fillRef>
+          <a:effectRef idx="2">
+            <a:schemeClr val="accent1"/>
+          </a:effectRef>
+          <a:fontRef idx="minor">
+            <a:schemeClr val="lt1"/>
+          </a:fontRef>
+        </p:style>
+        <p:txBody>
+          <a:bodyPr rtlCol="0" anchor="ctr"/>
+          <a:lstStyle/>
+          <a:p>
+            <a:pPr algn="ctr"/>
+          </a:p>
+        </p:txBody>
+      </p:sp>
+      <p:sp>
+        <p:nvSpPr>
+          <p:cNvPr id="27" name="TextBox 26"/>
+          <p:cNvSpPr txBox="1"/>
+          <p:nvPr/>
+        </p:nvSpPr>
+        <p:spPr>
+          <a:xfrm>
+            <a:off x="274320" y="6510528"/>
+            <a:ext cx="8229600" cy="274320"/>
+          </a:xfrm>
+          <a:prstGeom prst="rect">
+            <a:avLst/>
+          </a:prstGeom>
+          <a:noFill/>
+        </p:spPr>
+        <p:txBody>
+          <a:bodyPr wrap="none">
+            <a:spAutoFit/>
+          </a:bodyPr>
+          <a:lstStyle/>
+          <a:p>
+            <a:r>
+              <a:rPr sz="900" b="0">
+                <a:solidFill>
+                  <a:srgbClr val="6B7280"/>
+                </a:solidFill>
+                <a:latin typeface="Calibri"/>
+              </a:rPr>
+              <a:t>SAGE[ai] — Confidential | March 2026</a:t>
+            </a:r>
+          </a:p>
+        </p:txBody>
+      </p:sp>
+    </p:spTree>
+  </p:cSld>
+  <p:clrMapOvr>
+    <a:masterClrMapping/>
+  </p:clrMapOvr>
+</p:sld>
+</file>
+
+<file path=ppt/slides/slide28.xml><?xml version="1.0" encoding="utf-8"?>
+<p:sld xmlns:a="http://schemas.openxmlformats.org/drawingml/2006/main" xmlns:p="http://schemas.openxmlformats.org/presentationml/2006/main" xmlns:r="http://schemas.openxmlformats.org/officeDocument/2006/relationships">
+  <p:cSld>
+    <p:bg>
+      <p:bgPr>
+        <a:solidFill>
+          <a:srgbClr val="FFFFFF"/>
+        </a:solidFill>
+        <a:effectLst/>
+      </p:bgPr>
+    </p:bg>
+    <p:spTree>
+      <p:nvGrpSpPr>
+        <p:cNvPr id="1" name=""/>
+        <p:cNvGrpSpPr/>
+        <p:nvPr/>
+      </p:nvGrpSpPr>
+      <p:grpSpPr/>
+      <p:sp>
+        <p:nvSpPr>
+          <p:cNvPr id="2" name="Rectangle 1"/>
+          <p:cNvSpPr/>
+          <p:nvPr/>
+        </p:nvSpPr>
+        <p:spPr>
+          <a:xfrm>
+            <a:off x="0" y="0"/>
+            <a:ext cx="12188952" cy="1325880"/>
+          </a:xfrm>
+          <a:prstGeom prst="rect">
+            <a:avLst/>
+          </a:prstGeom>
+          <a:solidFill>
+            <a:srgbClr val="ECFDF5"/>
+          </a:solidFill>
+          <a:ln>
+            <a:noFill/>
+          </a:ln>
+        </p:spPr>
+        <p:style>
+          <a:lnRef idx="1">
+            <a:schemeClr val="accent1"/>
+          </a:lnRef>
+          <a:fillRef idx="3">
+            <a:schemeClr val="accent1"/>
+          </a:fillRef>
+          <a:effectRef idx="2">
+            <a:schemeClr val="accent1"/>
+          </a:effectRef>
+          <a:fontRef idx="minor">
+            <a:schemeClr val="lt1"/>
+          </a:fontRef>
+        </p:style>
+        <p:txBody>
+          <a:bodyPr rtlCol="0" anchor="ctr"/>
+          <a:lstStyle/>
+          <a:p>
+            <a:pPr algn="ctr"/>
+          </a:p>
+        </p:txBody>
+      </p:sp>
+      <p:sp>
+        <p:nvSpPr>
+          <p:cNvPr id="3" name="TextBox 2"/>
+          <p:cNvSpPr txBox="1"/>
+          <p:nvPr/>
+        </p:nvSpPr>
+        <p:spPr>
+          <a:xfrm>
+            <a:off x="411480" y="109728"/>
+            <a:ext cx="11338560" cy="731520"/>
+          </a:xfrm>
+          <a:prstGeom prst="rect">
+            <a:avLst/>
+          </a:prstGeom>
+          <a:noFill/>
+        </p:spPr>
+        <p:txBody>
           <a:bodyPr wrap="square">
             <a:spAutoFit/>
           </a:bodyPr>
@@ -15299,9 +18922,43 @@
           <a:p>
             <a:pPr algn="l"/>
             <a:r>
+              <a:rPr sz="3000" b="1" i="0">
+                <a:solidFill>
+                  <a:srgbClr val="065F46"/>
+                </a:solidFill>
+              </a:rPr>
+              <a:t>Platform Completeness — 12+ Integration Phases</a:t>
+            </a:r>
+          </a:p>
+        </p:txBody>
+      </p:sp>
+      <p:sp>
+        <p:nvSpPr>
+          <p:cNvPr id="4" name="TextBox 3"/>
+          <p:cNvSpPr txBox="1"/>
+          <p:nvPr/>
+        </p:nvSpPr>
+        <p:spPr>
+          <a:xfrm>
+            <a:off x="411480" y="804672"/>
+            <a:ext cx="11338560" cy="438912"/>
+          </a:xfrm>
+          <a:prstGeom prst="rect">
+            <a:avLst/>
+          </a:prstGeom>
+          <a:noFill/>
+        </p:spPr>
+        <p:txBody>
+          <a:bodyPr wrap="square">
+            <a:spAutoFit/>
+          </a:bodyPr>
+          <a:lstStyle/>
+          <a:p>
+            <a:pPr algn="l"/>
+            <a:r>
               <a:rPr sz="1600" b="0" i="0">
                 <a:solidFill>
-                  <a:srgbClr val="00B4D8"/>
+                  <a:srgbClr val="4B5563"/>
                 </a:solidFill>
               </a:rPr>
               <a:t>From core agent loop to enterprise-grade orchestration — all live</a:t>
@@ -15342,7 +18999,7 @@
                       <a:r>
                         <a:rPr b="1" sz="1300">
                           <a:solidFill>
-                            <a:srgbClr val="FFFFFF"/>
+                            <a:srgbClr val="065F46"/>
                           </a:solidFill>
                         </a:rPr>
                         <a:t>Phase</a:t>
@@ -15351,7 +19008,7 @@
                   </a:txBody>
                   <a:tcPr>
                     <a:solidFill>
-                      <a:srgbClr val="0078D4"/>
+                      <a:srgbClr val="10B981"/>
                     </a:solidFill>
                   </a:tcPr>
                 </a:tc>
@@ -15364,7 +19021,7 @@
                       <a:r>
                         <a:rPr b="1" sz="1300">
                           <a:solidFill>
-                            <a:srgbClr val="FFFFFF"/>
+                            <a:srgbClr val="065F46"/>
                           </a:solidFill>
                         </a:rPr>
                         <a:t>Feature</a:t>
@@ -15373,7 +19030,7 @@
                   </a:txBody>
                   <a:tcPr>
                     <a:solidFill>
-                      <a:srgbClr val="0078D4"/>
+                      <a:srgbClr val="10B981"/>
                     </a:solidFill>
                   </a:tcPr>
                 </a:tc>
@@ -15386,7 +19043,7 @@
                       <a:r>
                         <a:rPr b="1" sz="1300">
                           <a:solidFill>
-                            <a:srgbClr val="FFFFFF"/>
+                            <a:srgbClr val="065F46"/>
                           </a:solidFill>
                         </a:rPr>
                         <a:t>Status</a:t>
@@ -15395,7 +19052,7 @@
                   </a:txBody>
                   <a:tcPr>
                     <a:solidFill>
-                      <a:srgbClr val="0078D4"/>
+                      <a:srgbClr val="10B981"/>
                     </a:solidFill>
                   </a:tcPr>
                 </a:tc>
@@ -15410,7 +19067,7 @@
                       <a:r>
                         <a:rPr sz="1200">
                           <a:solidFill>
-                            <a:srgbClr val="0D1B2A"/>
+                            <a:srgbClr val="374151"/>
                           </a:solidFill>
                         </a:rPr>
                         <a:t>0-4</a:t>
@@ -15419,7 +19076,7 @@
                   </a:txBody>
                   <a:tcPr>
                     <a:solidFill>
-                      <a:srgbClr val="F0F4F8"/>
+                      <a:srgbClr val="ECFDF5"/>
                     </a:solidFill>
                   </a:tcPr>
                 </a:tc>
@@ -15432,7 +19089,7 @@
                       <a:r>
                         <a:rPr sz="1200">
                           <a:solidFill>
-                            <a:srgbClr val="0D1B2A"/>
+                            <a:srgbClr val="374151"/>
                           </a:solidFill>
                         </a:rPr>
                         <a:t>Core agents, API, Web UI, Approval gate, Audit log</a:t>
@@ -15441,7 +19098,7 @@
                   </a:txBody>
                   <a:tcPr>
                     <a:solidFill>
-                      <a:srgbClr val="F0F4F8"/>
+                      <a:srgbClr val="ECFDF5"/>
                     </a:solidFill>
                   </a:tcPr>
                 </a:tc>
@@ -15454,7 +19111,7 @@
                       <a:r>
                         <a:rPr sz="1200">
                           <a:solidFill>
-                            <a:srgbClr val="0D1B2A"/>
+                            <a:srgbClr val="374151"/>
                           </a:solidFill>
                         </a:rPr>
                         <a:t>Complete</a:t>
@@ -15463,7 +19120,7 @@
                   </a:txBody>
                   <a:tcPr>
                     <a:solidFill>
-                      <a:srgbClr val="F0F4F8"/>
+                      <a:srgbClr val="ECFDF5"/>
                     </a:solidFill>
                   </a:tcPr>
                 </a:tc>
@@ -15478,7 +19135,7 @@
                       <a:r>
                         <a:rPr sz="1200">
                           <a:solidFill>
-                            <a:srgbClr val="0D1B2A"/>
+                            <a:srgbClr val="374151"/>
                           </a:solidFill>
                         </a:rPr>
                         <a:t>5</a:t>
@@ -15500,7 +19157,7 @@
                       <a:r>
                         <a:rPr sz="1200">
                           <a:solidFill>
-                            <a:srgbClr val="0D1B2A"/>
+                            <a:srgbClr val="374151"/>
                           </a:solidFill>
                         </a:rPr>
                         <a:t>SSE streaming — real-time token output in dashboard</a:t>
@@ -15522,7 +19179,7 @@
                       <a:r>
                         <a:rPr sz="1200">
                           <a:solidFill>
-                            <a:srgbClr val="0D1B2A"/>
+                            <a:srgbClr val="374151"/>
                           </a:solidFill>
                         </a:rPr>
                         <a:t>Complete</a:t>
@@ -15546,7 +19203,7 @@
                       <a:r>
                         <a:rPr sz="1200">
                           <a:solidFill>
-                            <a:srgbClr val="0D1B2A"/>
+                            <a:srgbClr val="374151"/>
                           </a:solidFill>
                         </a:rPr>
                         <a:t>6</a:t>
@@ -15555,7 +19212,7 @@
                   </a:txBody>
                   <a:tcPr>
                     <a:solidFill>
-                      <a:srgbClr val="F0F4F8"/>
+                      <a:srgbClr val="ECFDF5"/>
                     </a:solidFill>
                   </a:tcPr>
                 </a:tc>
@@ -15568,7 +19225,7 @@
                       <a:r>
                         <a:rPr sz="1200">
                           <a:solidFill>
-                            <a:srgbClr val="0D1B2A"/>
+                            <a:srgbClr val="374151"/>
                           </a:solidFill>
                         </a:rPr>
                         <a:t>Onboarding wizard — plain-language to YAML solution in 60 s</a:t>
@@ -15577,7 +19234,7 @@
                   </a:txBody>
                   <a:tcPr>
                     <a:solidFill>
-                      <a:srgbClr val="F0F4F8"/>
+                      <a:srgbClr val="ECFDF5"/>
                     </a:solidFill>
                   </a:tcPr>
                 </a:tc>
@@ -15590,7 +19247,7 @@
                       <a:r>
                         <a:rPr sz="1200">
                           <a:solidFill>
-                            <a:srgbClr val="0D1B2A"/>
+                            <a:srgbClr val="374151"/>
                           </a:solidFill>
                         </a:rPr>
                         <a:t>Complete</a:t>
@@ -15599,7 +19256,7 @@
                   </a:txBody>
                   <a:tcPr>
                     <a:solidFill>
-                      <a:srgbClr val="F0F4F8"/>
+                      <a:srgbClr val="ECFDF5"/>
                     </a:solidFill>
                   </a:tcPr>
                 </a:tc>
@@ -15614,7 +19271,7 @@
                       <a:r>
                         <a:rPr sz="1200">
                           <a:solidFill>
-                            <a:srgbClr val="0D1B2A"/>
+                            <a:srgbClr val="374151"/>
                           </a:solidFill>
                         </a:rPr>
                         <a:t>7</a:t>
@@ -15636,7 +19293,7 @@
                       <a:r>
                         <a:rPr sz="1200">
                           <a:solidFill>
-                            <a:srgbClr val="0D1B2A"/>
+                            <a:srgbClr val="374151"/>
                           </a:solidFill>
                         </a:rPr>
                         <a:t>Knowledge base CRUD — list, add, delete, bulk, search</a:t>
@@ -15658,7 +19315,7 @@
                       <a:r>
                         <a:rPr sz="1200">
                           <a:solidFill>
-                            <a:srgbClr val="0D1B2A"/>
+                            <a:srgbClr val="374151"/>
                           </a:solidFill>
                         </a:rPr>
                         <a:t>Complete</a:t>
@@ -15682,7 +19339,7 @@
                       <a:r>
                         <a:rPr sz="1200">
                           <a:solidFill>
-                            <a:srgbClr val="0D1B2A"/>
+                            <a:srgbClr val="374151"/>
                           </a:solidFill>
                         </a:rPr>
                         <a:t>8</a:t>
@@ -15691,7 +19348,7 @@
                   </a:txBody>
                   <a:tcPr>
                     <a:solidFill>
-                      <a:srgbClr val="F0F4F8"/>
+                      <a:srgbClr val="ECFDF5"/>
                     </a:solidFill>
                   </a:tcPr>
                 </a:tc>
@@ -15704,7 +19361,7 @@
                       <a:r>
                         <a:rPr sz="1200">
                           <a:solidFill>
-                            <a:srgbClr val="0D1B2A"/>
+                            <a:srgbClr val="374151"/>
                           </a:solidFill>
                         </a:rPr>
                         <a:t>Slack two-way approval — Block Kit buttons, HMAC verified</a:t>
@@ -15713,7 +19370,7 @@
                   </a:txBody>
                   <a:tcPr>
                     <a:solidFill>
-                      <a:srgbClr val="F0F4F8"/>
+                      <a:srgbClr val="ECFDF5"/>
                     </a:solidFill>
                   </a:tcPr>
                 </a:tc>
@@ -15726,7 +19383,7 @@
                       <a:r>
                         <a:rPr sz="1200">
                           <a:solidFill>
-                            <a:srgbClr val="0D1B2A"/>
+                            <a:srgbClr val="374151"/>
                           </a:solidFill>
                         </a:rPr>
                         <a:t>Complete</a:t>
@@ -15735,7 +19392,7 @@
                   </a:txBody>
                   <a:tcPr>
                     <a:solidFill>
-                      <a:srgbClr val="F0F4F8"/>
+                      <a:srgbClr val="ECFDF5"/>
                     </a:solidFill>
                   </a:tcPr>
                 </a:tc>
@@ -15750,7 +19407,7 @@
                       <a:r>
                         <a:rPr sz="1200">
                           <a:solidFill>
-                            <a:srgbClr val="0D1B2A"/>
+                            <a:srgbClr val="374151"/>
                           </a:solidFill>
                         </a:rPr>
                         <a:t>9</a:t>
@@ -15772,7 +19429,7 @@
                       <a:r>
                         <a:rPr sz="1200">
                           <a:solidFill>
-                            <a:srgbClr val="0D1B2A"/>
+                            <a:srgbClr val="374151"/>
                           </a:solidFill>
                         </a:rPr>
                         <a:t>Eval &amp; benchmarking — YAML test cases, 0-100 scoring, history</a:t>
@@ -15794,7 +19451,7 @@
                       <a:r>
                         <a:rPr sz="1200">
                           <a:solidFill>
-                            <a:srgbClr val="0D1B2A"/>
+                            <a:srgbClr val="374151"/>
                           </a:solidFill>
                         </a:rPr>
                         <a:t>Complete</a:t>
@@ -15818,7 +19475,7 @@
                       <a:r>
                         <a:rPr sz="1200">
                           <a:solidFill>
-                            <a:srgbClr val="0D1B2A"/>
+                            <a:srgbClr val="374151"/>
                           </a:solidFill>
                         </a:rPr>
                         <a:t>10</a:t>
@@ -15827,7 +19484,7 @@
                   </a:txBody>
                   <a:tcPr>
                     <a:solidFill>
-                      <a:srgbClr val="F0F4F8"/>
+                      <a:srgbClr val="ECFDF5"/>
                     </a:solidFill>
                   </a:tcPr>
                 </a:tc>
@@ -15840,7 +19497,7 @@
                       <a:r>
                         <a:rPr sz="1200">
                           <a:solidFill>
-                            <a:srgbClr val="0D1B2A"/>
+                            <a:srgbClr val="374151"/>
                           </a:solidFill>
                         </a:rPr>
                         <a:t>Multi-tenant isolation — X-SAGE-Tenant header namespacing</a:t>
@@ -15849,7 +19506,7 @@
                   </a:txBody>
                   <a:tcPr>
                     <a:solidFill>
-                      <a:srgbClr val="F0F4F8"/>
+                      <a:srgbClr val="ECFDF5"/>
                     </a:solidFill>
                   </a:tcPr>
                 </a:tc>
@@ -15862,7 +19519,7 @@
                       <a:r>
                         <a:rPr sz="1200">
                           <a:solidFill>
-                            <a:srgbClr val="0D1B2A"/>
+                            <a:srgbClr val="374151"/>
                           </a:solidFill>
                         </a:rPr>
                         <a:t>Complete</a:t>
@@ -15871,7 +19528,7 @@
                   </a:txBody>
                   <a:tcPr>
                     <a:solidFill>
-                      <a:srgbClr val="F0F4F8"/>
+                      <a:srgbClr val="ECFDF5"/>
                     </a:solidFill>
                   </a:tcPr>
                 </a:tc>
@@ -15886,7 +19543,7 @@
                       <a:r>
                         <a:rPr sz="1200">
                           <a:solidFill>
-                            <a:srgbClr val="0D1B2A"/>
+                            <a:srgbClr val="374151"/>
                           </a:solidFill>
                         </a:rPr>
                         <a:t>11</a:t>
@@ -15908,7 +19565,7 @@
                       <a:r>
                         <a:rPr sz="1200">
                           <a:solidFill>
-                            <a:srgbClr val="0D1B2A"/>
+                            <a:srgbClr val="374151"/>
                           </a:solidFill>
                         </a:rPr>
                         <a:t>Temporal durable workflows + LangGraph fallback</a:t>
@@ -15930,7 +19587,7 @@
                       <a:r>
                         <a:rPr sz="1200">
                           <a:solidFill>
-                            <a:srgbClr val="0D1B2A"/>
+                            <a:srgbClr val="374151"/>
                           </a:solidFill>
                         </a:rPr>
                         <a:t>Complete</a:t>
@@ -15963,7 +19620,7 @@
             <a:avLst/>
           </a:prstGeom>
           <a:solidFill>
-            <a:srgbClr val="0D1B2A"/>
+            <a:srgbClr val="ECFDF5"/>
           </a:solidFill>
           <a:ln>
             <a:noFill/>
@@ -16017,7 +19674,7 @@
             <a:r>
               <a:rPr sz="900" b="0" i="0">
                 <a:solidFill>
-                  <a:srgbClr val="647487"/>
+                  <a:srgbClr val="6B7280"/>
                 </a:solidFill>
               </a:rPr>
               <a:t>SAGE[ai] — Confidential | March 2026</a:t>
@@ -16033,7 +19690,7 @@
 </p:sld>
 </file>
 
-<file path=ppt/slides/slide25.xml><?xml version="1.0" encoding="utf-8"?>
+<file path=ppt/slides/slide29.xml><?xml version="1.0" encoding="utf-8"?>
 <p:sld xmlns:a="http://schemas.openxmlformats.org/drawingml/2006/main" xmlns:p="http://schemas.openxmlformats.org/presentationml/2006/main" xmlns:r="http://schemas.openxmlformats.org/officeDocument/2006/relationships">
   <p:cSld>
     <p:spTree>
@@ -16408,1750 +20065,6 @@
               </a:rPr>
               <a:t>All performance figures and cost estimates are assumption-based — validate before decisions.</a:t>
             </a:r>
-          </a:p>
-        </p:txBody>
-      </p:sp>
-    </p:spTree>
-  </p:cSld>
-  <p:clrMapOvr>
-    <a:masterClrMapping/>
-  </p:clrMapOvr>
-</p:sld>
-</file>
-
-<file path=ppt/slides/slide26.xml><?xml version="1.0" encoding="utf-8"?>
-<p:sld xmlns:a="http://schemas.openxmlformats.org/drawingml/2006/main" xmlns:p="http://schemas.openxmlformats.org/presentationml/2006/main" xmlns:r="http://schemas.openxmlformats.org/officeDocument/2006/relationships">
-  <p:cSld>
-    <p:spTree>
-      <p:nvGrpSpPr>
-        <p:cNvPr id="1" name=""/>
-        <p:cNvGrpSpPr/>
-        <p:nvPr/>
-      </p:nvGrpSpPr>
-      <p:grpSpPr/>
-      <p:sp>
-        <p:nvSpPr>
-          <p:cNvPr id="24" name="TextBox 23"/>
-          <p:cNvSpPr txBox="1"/>
-          <p:nvPr/>
-        </p:nvSpPr>
-        <p:spPr>
-          <a:xfrm>
-            <a:off x="274320" y="6510528"/>
-            <a:ext cx="8229600" cy="274320"/>
-          </a:xfrm>
-          <a:prstGeom prst="rect">
-            <a:avLst/>
-          </a:prstGeom>
-          <a:noFill/>
-        </p:spPr>
-        <p:txBody>
-          <a:bodyPr wrap="square">
-            <a:spAutoFit/>
-          </a:bodyPr>
-          <a:lstStyle/>
-          <a:p>
-            <a:pPr algn="l"/>
-            <a:r>
-              <a:rPr sz="900" b="0" i="0">
-                <a:solidFill>
-                  <a:srgbClr val="647487"/>
-                </a:solidFill>
-              </a:rPr>
-              <a:t>SAGE[ai] — Confidential | March 2026</a:t>
-            </a:r>
-          </a:p>
-        </p:txBody>
-      </p:sp>
-      <p:sp>
-        <p:nvSpPr>
-          <p:cNvPr id="23" name="Rectangle 22"/>
-          <p:cNvSpPr/>
-          <p:nvPr/>
-        </p:nvSpPr>
-        <p:spPr>
-          <a:xfrm>
-            <a:off x="0" y="6492240"/>
-            <a:ext cx="12188952" cy="365760"/>
-          </a:xfrm>
-          <a:prstGeom prst="rect">
-            <a:avLst/>
-          </a:prstGeom>
-          <a:solidFill>
-            <a:srgbClr val="0D1B2A"/>
-          </a:solidFill>
-          <a:ln>
-            <a:noFill/>
-          </a:ln>
-        </p:spPr>
-        <p:style>
-          <a:lnRef idx="1">
-            <a:schemeClr val="accent1"/>
-          </a:lnRef>
-          <a:fillRef idx="3">
-            <a:schemeClr val="accent1"/>
-          </a:fillRef>
-          <a:effectRef idx="2">
-            <a:schemeClr val="accent1"/>
-          </a:effectRef>
-          <a:fontRef idx="minor">
-            <a:schemeClr val="lt1"/>
-          </a:fontRef>
-        </p:style>
-        <p:txBody>
-          <a:bodyPr rtlCol="0" anchor="ctr"/>
-          <a:lstStyle/>
-          <a:p>
-            <a:pPr algn="ctr"/>
-          </a:p>
-        </p:txBody>
-      </p:sp>
-      <p:sp>
-        <p:nvSpPr>
-          <p:cNvPr id="22" name="TextBox 21"/>
-          <p:cNvSpPr txBox="1"/>
-          <p:nvPr/>
-        </p:nvSpPr>
-        <p:spPr>
-          <a:xfrm>
-            <a:off x="3931920" y="5440680"/>
-            <a:ext cx="7955279" cy="457200"/>
-          </a:xfrm>
-          <a:prstGeom prst="rect">
-            <a:avLst/>
-          </a:prstGeom>
-          <a:noFill/>
-        </p:spPr>
-        <p:txBody>
-          <a:bodyPr wrap="square">
-            <a:spAutoFit/>
-          </a:bodyPr>
-          <a:lstStyle/>
-          <a:p>
-            <a:pPr algn="l"/>
-            <a:r>
-              <a:rPr sz="1300" b="0" i="0">
-                <a:solidFill>
-                  <a:srgbClr val="0D1B2A"/>
-                </a:solidFill>
-              </a:rPr>
-              <a:t>pip install composio-langchain + COMPOSIO_API_KEY — no per-tool code</a:t>
-            </a:r>
-          </a:p>
-        </p:txBody>
-      </p:sp>
-      <p:sp>
-        <p:nvSpPr>
-          <p:cNvPr id="21" name="TextBox 20"/>
-          <p:cNvSpPr txBox="1"/>
-          <p:nvPr/>
-        </p:nvSpPr>
-        <p:spPr>
-          <a:xfrm>
-            <a:off x="411480" y="5422392"/>
-            <a:ext cx="3291840" cy="457200"/>
-          </a:xfrm>
-          <a:prstGeom prst="rect">
-            <a:avLst/>
-          </a:prstGeom>
-          <a:noFill/>
-        </p:spPr>
-        <p:txBody>
-          <a:bodyPr wrap="square">
-            <a:spAutoFit/>
-          </a:bodyPr>
-          <a:lstStyle/>
-          <a:p>
-            <a:pPr algn="ctr"/>
-            <a:r>
-              <a:rPr sz="1200" b="1" i="0">
-                <a:solidFill>
-                  <a:srgbClr val="FFFFFF"/>
-                </a:solidFill>
-              </a:rPr>
-              <a:t>Zero Code</a:t>
-            </a:r>
-          </a:p>
-        </p:txBody>
-      </p:sp>
-      <p:sp>
-        <p:nvSpPr>
-          <p:cNvPr id="20" name="Rectangle 19"/>
-          <p:cNvSpPr/>
-          <p:nvPr/>
-        </p:nvSpPr>
-        <p:spPr>
-          <a:xfrm>
-            <a:off x="365760" y="5349240"/>
-            <a:ext cx="3383280" cy="594360"/>
-          </a:xfrm>
-          <a:prstGeom prst="rect">
-            <a:avLst/>
-          </a:prstGeom>
-          <a:solidFill>
-            <a:srgbClr val="00B4D8"/>
-          </a:solidFill>
-          <a:ln>
-            <a:noFill/>
-          </a:ln>
-        </p:spPr>
-        <p:style>
-          <a:lnRef idx="1">
-            <a:schemeClr val="accent1"/>
-          </a:lnRef>
-          <a:fillRef idx="3">
-            <a:schemeClr val="accent1"/>
-          </a:fillRef>
-          <a:effectRef idx="2">
-            <a:schemeClr val="accent1"/>
-          </a:effectRef>
-          <a:fontRef idx="minor">
-            <a:schemeClr val="lt1"/>
-          </a:fontRef>
-        </p:style>
-        <p:txBody>
-          <a:bodyPr rtlCol="0" anchor="ctr"/>
-          <a:lstStyle/>
-          <a:p>
-            <a:pPr algn="ctr"/>
-          </a:p>
-        </p:txBody>
-      </p:sp>
-      <p:sp>
-        <p:nvSpPr>
-          <p:cNvPr id="19" name="TextBox 18"/>
-          <p:cNvSpPr txBox="1"/>
-          <p:nvPr/>
-        </p:nvSpPr>
-        <p:spPr>
-          <a:xfrm>
-            <a:off x="3931920" y="4690872"/>
-            <a:ext cx="7955279" cy="457200"/>
-          </a:xfrm>
-          <a:prstGeom prst="rect">
-            <a:avLst/>
-          </a:prstGeom>
-          <a:noFill/>
-        </p:spPr>
-        <p:txBody>
-          <a:bodyPr wrap="square">
-            <a:spAutoFit/>
-          </a:bodyPr>
-          <a:lstStyle/>
-          <a:p>
-            <a:pPr algn="l"/>
-            <a:r>
-              <a:rPr sz="1300" b="0" i="0">
-                <a:solidFill>
-                  <a:srgbClr val="0D1B2A"/>
-                </a:solidFill>
-              </a:rPr>
-              <a:t>POST /integrations/composio/connect creates a proposal — approve on Dashboard</a:t>
-            </a:r>
-          </a:p>
-        </p:txBody>
-      </p:sp>
-      <p:sp>
-        <p:nvSpPr>
-          <p:cNvPr id="18" name="TextBox 17"/>
-          <p:cNvSpPr txBox="1"/>
-          <p:nvPr/>
-        </p:nvSpPr>
-        <p:spPr>
-          <a:xfrm>
-            <a:off x="411480" y="4672584"/>
-            <a:ext cx="3291840" cy="457200"/>
-          </a:xfrm>
-          <a:prstGeom prst="rect">
-            <a:avLst/>
-          </a:prstGeom>
-          <a:noFill/>
-        </p:spPr>
-        <p:txBody>
-          <a:bodyPr wrap="square">
-            <a:spAutoFit/>
-          </a:bodyPr>
-          <a:lstStyle/>
-          <a:p>
-            <a:pPr algn="ctr"/>
-            <a:r>
-              <a:rPr sz="1200" b="1" i="0">
-                <a:solidFill>
-                  <a:srgbClr val="FFFFFF"/>
-                </a:solidFill>
-              </a:rPr>
-              <a:t>HITL Connect</a:t>
-            </a:r>
-          </a:p>
-        </p:txBody>
-      </p:sp>
-      <p:sp>
-        <p:nvSpPr>
-          <p:cNvPr id="17" name="Rectangle 16"/>
-          <p:cNvSpPr/>
-          <p:nvPr/>
-        </p:nvSpPr>
-        <p:spPr>
-          <a:xfrm>
-            <a:off x="365760" y="4599432"/>
-            <a:ext cx="3383280" cy="594360"/>
-          </a:xfrm>
-          <a:prstGeom prst="rect">
-            <a:avLst/>
-          </a:prstGeom>
-          <a:solidFill>
-            <a:srgbClr val="00B4D8"/>
-          </a:solidFill>
-          <a:ln>
-            <a:noFill/>
-          </a:ln>
-        </p:spPr>
-        <p:style>
-          <a:lnRef idx="1">
-            <a:schemeClr val="accent1"/>
-          </a:lnRef>
-          <a:fillRef idx="3">
-            <a:schemeClr val="accent1"/>
-          </a:fillRef>
-          <a:effectRef idx="2">
-            <a:schemeClr val="accent1"/>
-          </a:effectRef>
-          <a:fontRef idx="minor">
-            <a:schemeClr val="lt1"/>
-          </a:fontRef>
-        </p:style>
-        <p:txBody>
-          <a:bodyPr rtlCol="0" anchor="ctr"/>
-          <a:lstStyle/>
-          <a:p>
-            <a:pPr algn="ctr"/>
-          </a:p>
-        </p:txBody>
-      </p:sp>
-      <p:sp>
-        <p:nvSpPr>
-          <p:cNvPr id="16" name="TextBox 15"/>
-          <p:cNvSpPr txBox="1"/>
-          <p:nvPr/>
-        </p:nvSpPr>
-        <p:spPr>
-          <a:xfrm>
-            <a:off x="3931920" y="3941064"/>
-            <a:ext cx="7955279" cy="457200"/>
-          </a:xfrm>
-          <a:prstGeom prst="rect">
-            <a:avLst/>
-          </a:prstGeom>
-          <a:noFill/>
-        </p:spPr>
-        <p:txBody>
-          <a:bodyPr wrap="square">
-            <a:spAutoFit/>
-          </a:bodyPr>
-          <a:lstStyle/>
-          <a:p>
-            <a:pPr algn="l"/>
-            <a:r>
-              <a:rPr sz="1300" b="0" i="0">
-                <a:solidFill>
-                  <a:srgbClr val="0D1B2A"/>
-                </a:solidFill>
-              </a:rPr>
-              <a:t>New Integrations page: connect apps via OAuth, see active tools per solution</a:t>
-            </a:r>
-          </a:p>
-        </p:txBody>
-      </p:sp>
-      <p:sp>
-        <p:nvSpPr>
-          <p:cNvPr id="15" name="TextBox 14"/>
-          <p:cNvSpPr txBox="1"/>
-          <p:nvPr/>
-        </p:nvSpPr>
-        <p:spPr>
-          <a:xfrm>
-            <a:off x="411480" y="3922776"/>
-            <a:ext cx="3291840" cy="457200"/>
-          </a:xfrm>
-          <a:prstGeom prst="rect">
-            <a:avLst/>
-          </a:prstGeom>
-          <a:noFill/>
-        </p:spPr>
-        <p:txBody>
-          <a:bodyPr wrap="square">
-            <a:spAutoFit/>
-          </a:bodyPr>
-          <a:lstStyle/>
-          <a:p>
-            <a:pPr algn="ctr"/>
-            <a:r>
-              <a:rPr sz="1200" b="1" i="0">
-                <a:solidFill>
-                  <a:srgbClr val="FFFFFF"/>
-                </a:solidFill>
-              </a:rPr>
-              <a:t>Web UI</a:t>
-            </a:r>
-          </a:p>
-        </p:txBody>
-      </p:sp>
-      <p:sp>
-        <p:nvSpPr>
-          <p:cNvPr id="14" name="Rectangle 13"/>
-          <p:cNvSpPr/>
-          <p:nvPr/>
-        </p:nvSpPr>
-        <p:spPr>
-          <a:xfrm>
-            <a:off x="365760" y="3849624"/>
-            <a:ext cx="3383280" cy="594360"/>
-          </a:xfrm>
-          <a:prstGeom prst="rect">
-            <a:avLst/>
-          </a:prstGeom>
-          <a:solidFill>
-            <a:srgbClr val="00B4D8"/>
-          </a:solidFill>
-          <a:ln>
-            <a:noFill/>
-          </a:ln>
-        </p:spPr>
-        <p:style>
-          <a:lnRef idx="1">
-            <a:schemeClr val="accent1"/>
-          </a:lnRef>
-          <a:fillRef idx="3">
-            <a:schemeClr val="accent1"/>
-          </a:fillRef>
-          <a:effectRef idx="2">
-            <a:schemeClr val="accent1"/>
-          </a:effectRef>
-          <a:fontRef idx="minor">
-            <a:schemeClr val="lt1"/>
-          </a:fontRef>
-        </p:style>
-        <p:txBody>
-          <a:bodyPr rtlCol="0" anchor="ctr"/>
-          <a:lstStyle/>
-          <a:p>
-            <a:pPr algn="ctr"/>
-          </a:p>
-        </p:txBody>
-      </p:sp>
-      <p:sp>
-        <p:nvSpPr>
-          <p:cNvPr id="13" name="TextBox 12"/>
-          <p:cNvSpPr txBox="1"/>
-          <p:nvPr/>
-        </p:nvSpPr>
-        <p:spPr>
-          <a:xfrm>
-            <a:off x="3931920" y="3191256"/>
-            <a:ext cx="7955279" cy="457200"/>
-          </a:xfrm>
-          <a:prstGeom prst="rect">
-            <a:avLst/>
-          </a:prstGeom>
-          <a:noFill/>
-        </p:spPr>
-        <p:txBody>
-          <a:bodyPr wrap="square">
-            <a:spAutoFit/>
-          </a:bodyPr>
-          <a:lstStyle/>
-          <a:p>
-            <a:pPr algn="l"/>
-            <a:r>
-              <a:rPr sz="1300" b="0" i="0">
-                <a:solidFill>
-                  <a:srgbClr val="0D1B2A"/>
-                </a:solidFill>
-              </a:rPr>
-              <a:t>Uses existing langchain_tools.py — composio:github in project.yaml integrations</a:t>
-            </a:r>
-          </a:p>
-        </p:txBody>
-      </p:sp>
-      <p:sp>
-        <p:nvSpPr>
-          <p:cNvPr id="12" name="TextBox 11"/>
-          <p:cNvSpPr txBox="1"/>
-          <p:nvPr/>
-        </p:nvSpPr>
-        <p:spPr>
-          <a:xfrm>
-            <a:off x="411480" y="3172968"/>
-            <a:ext cx="3291840" cy="457200"/>
-          </a:xfrm>
-          <a:prstGeom prst="rect">
-            <a:avLst/>
-          </a:prstGeom>
-          <a:noFill/>
-        </p:spPr>
-        <p:txBody>
-          <a:bodyPr wrap="square">
-            <a:spAutoFit/>
-          </a:bodyPr>
-          <a:lstStyle/>
-          <a:p>
-            <a:pPr algn="ctr"/>
-            <a:r>
-              <a:rPr sz="1200" b="1" i="0">
-                <a:solidFill>
-                  <a:srgbClr val="FFFFFF"/>
-                </a:solidFill>
-              </a:rPr>
-              <a:t>LangChain Native</a:t>
-            </a:r>
-          </a:p>
-        </p:txBody>
-      </p:sp>
-      <p:sp>
-        <p:nvSpPr>
-          <p:cNvPr id="11" name="Rectangle 10"/>
-          <p:cNvSpPr/>
-          <p:nvPr/>
-        </p:nvSpPr>
-        <p:spPr>
-          <a:xfrm>
-            <a:off x="365760" y="3099816"/>
-            <a:ext cx="3383280" cy="594360"/>
-          </a:xfrm>
-          <a:prstGeom prst="rect">
-            <a:avLst/>
-          </a:prstGeom>
-          <a:solidFill>
-            <a:srgbClr val="00B4D8"/>
-          </a:solidFill>
-          <a:ln>
-            <a:noFill/>
-          </a:ln>
-        </p:spPr>
-        <p:style>
-          <a:lnRef idx="1">
-            <a:schemeClr val="accent1"/>
-          </a:lnRef>
-          <a:fillRef idx="3">
-            <a:schemeClr val="accent1"/>
-          </a:fillRef>
-          <a:effectRef idx="2">
-            <a:schemeClr val="accent1"/>
-          </a:effectRef>
-          <a:fontRef idx="minor">
-            <a:schemeClr val="lt1"/>
-          </a:fontRef>
-        </p:style>
-        <p:txBody>
-          <a:bodyPr rtlCol="0" anchor="ctr"/>
-          <a:lstStyle/>
-          <a:p>
-            <a:pPr algn="ctr"/>
-          </a:p>
-        </p:txBody>
-      </p:sp>
-      <p:sp>
-        <p:nvSpPr>
-          <p:cNvPr id="10" name="TextBox 9"/>
-          <p:cNvSpPr txBox="1"/>
-          <p:nvPr/>
-        </p:nvSpPr>
-        <p:spPr>
-          <a:xfrm>
-            <a:off x="3931920" y="2441448"/>
-            <a:ext cx="7955279" cy="457200"/>
-          </a:xfrm>
-          <a:prstGeom prst="rect">
-            <a:avLst/>
-          </a:prstGeom>
-          <a:noFill/>
-        </p:spPr>
-        <p:txBody>
-          <a:bodyPr wrap="square">
-            <a:spAutoFit/>
-          </a:bodyPr>
-          <a:lstStyle/>
-          <a:p>
-            <a:pPr algn="l"/>
-            <a:r>
-              <a:rPr sz="1300" b="0" i="0">
-                <a:solidFill>
-                  <a:srgbClr val="0D1B2A"/>
-                </a:solidFill>
-              </a:rPr>
-              <a:t>Composio manages auth flows — SAGE never stores third-party credentials</a:t>
-            </a:r>
-          </a:p>
-        </p:txBody>
-      </p:sp>
-      <p:sp>
-        <p:nvSpPr>
-          <p:cNvPr id="9" name="TextBox 8"/>
-          <p:cNvSpPr txBox="1"/>
-          <p:nvPr/>
-        </p:nvSpPr>
-        <p:spPr>
-          <a:xfrm>
-            <a:off x="411480" y="2423160"/>
-            <a:ext cx="3291840" cy="457200"/>
-          </a:xfrm>
-          <a:prstGeom prst="rect">
-            <a:avLst/>
-          </a:prstGeom>
-          <a:noFill/>
-        </p:spPr>
-        <p:txBody>
-          <a:bodyPr wrap="square">
-            <a:spAutoFit/>
-          </a:bodyPr>
-          <a:lstStyle/>
-          <a:p>
-            <a:pPr algn="ctr"/>
-            <a:r>
-              <a:rPr sz="1200" b="1" i="0">
-                <a:solidFill>
-                  <a:srgbClr val="FFFFFF"/>
-                </a:solidFill>
-              </a:rPr>
-              <a:t>OAuth Handled</a:t>
-            </a:r>
-          </a:p>
-        </p:txBody>
-      </p:sp>
-      <p:sp>
-        <p:nvSpPr>
-          <p:cNvPr id="8" name="Rectangle 7"/>
-          <p:cNvSpPr/>
-          <p:nvPr/>
-        </p:nvSpPr>
-        <p:spPr>
-          <a:xfrm>
-            <a:off x="365760" y="2350008"/>
-            <a:ext cx="3383280" cy="594360"/>
-          </a:xfrm>
-          <a:prstGeom prst="rect">
-            <a:avLst/>
-          </a:prstGeom>
-          <a:solidFill>
-            <a:srgbClr val="00B4D8"/>
-          </a:solidFill>
-          <a:ln>
-            <a:noFill/>
-          </a:ln>
-        </p:spPr>
-        <p:style>
-          <a:lnRef idx="1">
-            <a:schemeClr val="accent1"/>
-          </a:lnRef>
-          <a:fillRef idx="3">
-            <a:schemeClr val="accent1"/>
-          </a:fillRef>
-          <a:effectRef idx="2">
-            <a:schemeClr val="accent1"/>
-          </a:effectRef>
-          <a:fontRef idx="minor">
-            <a:schemeClr val="lt1"/>
-          </a:fontRef>
-        </p:style>
-        <p:txBody>
-          <a:bodyPr rtlCol="0" anchor="ctr"/>
-          <a:lstStyle/>
-          <a:p>
-            <a:pPr algn="ctr"/>
-          </a:p>
-        </p:txBody>
-      </p:sp>
-      <p:sp>
-        <p:nvSpPr>
-          <p:cNvPr id="7" name="TextBox 6"/>
-          <p:cNvSpPr txBox="1"/>
-          <p:nvPr/>
-        </p:nvSpPr>
-        <p:spPr>
-          <a:xfrm>
-            <a:off x="3931920" y="1691640"/>
-            <a:ext cx="7955279" cy="457200"/>
-          </a:xfrm>
-          <a:prstGeom prst="rect">
-            <a:avLst/>
-          </a:prstGeom>
-          <a:noFill/>
-        </p:spPr>
-        <p:txBody>
-          <a:bodyPr wrap="square">
-            <a:spAutoFit/>
-          </a:bodyPr>
-          <a:lstStyle/>
-          <a:p>
-            <a:pPr algn="l"/>
-            <a:r>
-              <a:rPr sz="1300" b="0" i="0">
-                <a:solidFill>
-                  <a:srgbClr val="0D1B2A"/>
-                </a:solidFill>
-              </a:rPr>
-              <a:t>GitHub, GitLab, Jira, Linear, Slack, Notion, Confluence, Salesforce, HubSpot, Zendesk, Stripe, Google Workspace, and 90+ more</a:t>
-            </a:r>
-          </a:p>
-        </p:txBody>
-      </p:sp>
-      <p:sp>
-        <p:nvSpPr>
-          <p:cNvPr id="6" name="TextBox 5"/>
-          <p:cNvSpPr txBox="1"/>
-          <p:nvPr/>
-        </p:nvSpPr>
-        <p:spPr>
-          <a:xfrm>
-            <a:off x="411480" y="1673352"/>
-            <a:ext cx="3291840" cy="457200"/>
-          </a:xfrm>
-          <a:prstGeom prst="rect">
-            <a:avLst/>
-          </a:prstGeom>
-          <a:noFill/>
-        </p:spPr>
-        <p:txBody>
-          <a:bodyPr wrap="square">
-            <a:spAutoFit/>
-          </a:bodyPr>
-          <a:lstStyle/>
-          <a:p>
-            <a:pPr algn="ctr"/>
-            <a:r>
-              <a:rPr sz="1200" b="1" i="0">
-                <a:solidFill>
-                  <a:srgbClr val="FFFFFF"/>
-                </a:solidFill>
-              </a:rPr>
-              <a:t>100+ Apps</a:t>
-            </a:r>
-          </a:p>
-        </p:txBody>
-      </p:sp>
-      <p:sp>
-        <p:nvSpPr>
-          <p:cNvPr id="5" name="Rectangle 4"/>
-          <p:cNvSpPr/>
-          <p:nvPr/>
-        </p:nvSpPr>
-        <p:spPr>
-          <a:xfrm>
-            <a:off x="365760" y="1600200"/>
-            <a:ext cx="3383280" cy="594360"/>
-          </a:xfrm>
-          <a:prstGeom prst="rect">
-            <a:avLst/>
-          </a:prstGeom>
-          <a:solidFill>
-            <a:srgbClr val="00B4D8"/>
-          </a:solidFill>
-          <a:ln>
-            <a:noFill/>
-          </a:ln>
-        </p:spPr>
-        <p:style>
-          <a:lnRef idx="1">
-            <a:schemeClr val="accent1"/>
-          </a:lnRef>
-          <a:fillRef idx="3">
-            <a:schemeClr val="accent1"/>
-          </a:fillRef>
-          <a:effectRef idx="2">
-            <a:schemeClr val="accent1"/>
-          </a:effectRef>
-          <a:fontRef idx="minor">
-            <a:schemeClr val="lt1"/>
-          </a:fontRef>
-        </p:style>
-        <p:txBody>
-          <a:bodyPr rtlCol="0" anchor="ctr"/>
-          <a:lstStyle/>
-          <a:p>
-            <a:pPr algn="ctr"/>
-          </a:p>
-        </p:txBody>
-      </p:sp>
-      <p:sp>
-        <p:nvSpPr>
-          <p:cNvPr id="4" name="TextBox 3"/>
-          <p:cNvSpPr txBox="1"/>
-          <p:nvPr/>
-        </p:nvSpPr>
-        <p:spPr>
-          <a:xfrm>
-            <a:off x="411480" y="804672"/>
-            <a:ext cx="11338560" cy="438912"/>
-          </a:xfrm>
-          <a:prstGeom prst="rect">
-            <a:avLst/>
-          </a:prstGeom>
-          <a:noFill/>
-        </p:spPr>
-        <p:txBody>
-          <a:bodyPr wrap="square">
-            <a:spAutoFit/>
-          </a:bodyPr>
-          <a:lstStyle/>
-          <a:p>
-            <a:pPr algn="l"/>
-            <a:r>
-              <a:rPr sz="1600" b="0" i="0">
-                <a:solidFill>
-                  <a:srgbClr val="00B4D8"/>
-                </a:solidFill>
-              </a:rPr>
-              <a:t>Connect any SaaS tool to SAGE agents — OAuth handled, no per-integration credential code</a:t>
-            </a:r>
-          </a:p>
-        </p:txBody>
-      </p:sp>
-      <p:sp>
-        <p:nvSpPr>
-          <p:cNvPr id="3" name="TextBox 2"/>
-          <p:cNvSpPr txBox="1"/>
-          <p:nvPr/>
-        </p:nvSpPr>
-        <p:spPr>
-          <a:xfrm>
-            <a:off x="411480" y="109728"/>
-            <a:ext cx="11338560" cy="731520"/>
-          </a:xfrm>
-          <a:prstGeom prst="rect">
-            <a:avLst/>
-          </a:prstGeom>
-          <a:noFill/>
-        </p:spPr>
-        <p:txBody>
-          <a:bodyPr wrap="square">
-            <a:spAutoFit/>
-          </a:bodyPr>
-          <a:lstStyle/>
-          <a:p>
-            <a:pPr algn="l"/>
-            <a:r>
-              <a:rPr sz="3000" b="1" i="0">
-                <a:solidFill>
-                  <a:srgbClr val="FFFFFF"/>
-                </a:solidFill>
-              </a:rPr>
-              <a:t>Composio Integration — 100+ Tools in One Package</a:t>
-            </a:r>
-          </a:p>
-        </p:txBody>
-      </p:sp>
-      <p:sp>
-        <p:nvSpPr>
-          <p:cNvPr id="2" name="Rectangle 1"/>
-          <p:cNvSpPr/>
-          <p:nvPr/>
-        </p:nvSpPr>
-        <p:spPr>
-          <a:xfrm>
-            <a:off x="0" y="0"/>
-            <a:ext cx="12188952" cy="1325880"/>
-          </a:xfrm>
-          <a:prstGeom prst="rect">
-            <a:avLst/>
-          </a:prstGeom>
-          <a:solidFill>
-            <a:srgbClr val="0D1B2A"/>
-          </a:solidFill>
-          <a:ln>
-            <a:noFill/>
-          </a:ln>
-        </p:spPr>
-        <p:style>
-          <a:lnRef idx="1">
-            <a:schemeClr val="accent1"/>
-          </a:lnRef>
-          <a:fillRef idx="3">
-            <a:schemeClr val="accent1"/>
-          </a:fillRef>
-          <a:effectRef idx="2">
-            <a:schemeClr val="accent1"/>
-          </a:effectRef>
-          <a:fontRef idx="minor">
-            <a:schemeClr val="lt1"/>
-          </a:fontRef>
-        </p:style>
-        <p:txBody>
-          <a:bodyPr rtlCol="0" anchor="ctr"/>
-          <a:lstStyle/>
-          <a:p>
-            <a:pPr algn="ctr"/>
-          </a:p>
-        </p:txBody>
-      </p:sp>
-    </p:spTree>
-  </p:cSld>
-  <p:clrMapOvr>
-    <a:masterClrMapping/>
-  </p:clrMapOvr>
-</p:sld>
-</file>
-
-<file path=ppt/slides/slide27.xml><?xml version="1.0" encoding="utf-8"?>
-<p:sld xmlns:a="http://schemas.openxmlformats.org/drawingml/2006/main" xmlns:p="http://schemas.openxmlformats.org/presentationml/2006/main" xmlns:r="http://schemas.openxmlformats.org/officeDocument/2006/relationships">
-  <p:cSld>
-    <p:spTree>
-      <p:nvGrpSpPr>
-        <p:cNvPr id="1" name=""/>
-        <p:cNvGrpSpPr/>
-        <p:nvPr/>
-      </p:nvGrpSpPr>
-      <p:grpSpPr/>
-      <p:sp>
-        <p:nvSpPr>
-          <p:cNvPr id="24" name="TextBox 23"/>
-          <p:cNvSpPr txBox="1"/>
-          <p:nvPr/>
-        </p:nvSpPr>
-        <p:spPr>
-          <a:xfrm>
-            <a:off x="274320" y="6510528"/>
-            <a:ext cx="8229600" cy="274320"/>
-          </a:xfrm>
-          <a:prstGeom prst="rect">
-            <a:avLst/>
-          </a:prstGeom>
-          <a:noFill/>
-        </p:spPr>
-        <p:txBody>
-          <a:bodyPr wrap="square">
-            <a:spAutoFit/>
-          </a:bodyPr>
-          <a:lstStyle/>
-          <a:p>
-            <a:pPr algn="l"/>
-            <a:r>
-              <a:rPr sz="900" b="0" i="0">
-                <a:solidFill>
-                  <a:srgbClr val="647487"/>
-                </a:solidFill>
-              </a:rPr>
-              <a:t>SAGE[ai] — Confidential | March 2026</a:t>
-            </a:r>
-          </a:p>
-        </p:txBody>
-      </p:sp>
-      <p:sp>
-        <p:nvSpPr>
-          <p:cNvPr id="23" name="Rectangle 22"/>
-          <p:cNvSpPr/>
-          <p:nvPr/>
-        </p:nvSpPr>
-        <p:spPr>
-          <a:xfrm>
-            <a:off x="0" y="6492240"/>
-            <a:ext cx="12188952" cy="365760"/>
-          </a:xfrm>
-          <a:prstGeom prst="rect">
-            <a:avLst/>
-          </a:prstGeom>
-          <a:solidFill>
-            <a:srgbClr val="0D1B2A"/>
-          </a:solidFill>
-          <a:ln>
-            <a:noFill/>
-          </a:ln>
-        </p:spPr>
-        <p:style>
-          <a:lnRef idx="1">
-            <a:schemeClr val="accent1"/>
-          </a:lnRef>
-          <a:fillRef idx="3">
-            <a:schemeClr val="accent1"/>
-          </a:fillRef>
-          <a:effectRef idx="2">
-            <a:schemeClr val="accent1"/>
-          </a:effectRef>
-          <a:fontRef idx="minor">
-            <a:schemeClr val="lt1"/>
-          </a:fontRef>
-        </p:style>
-        <p:txBody>
-          <a:bodyPr rtlCol="0" anchor="ctr"/>
-          <a:lstStyle/>
-          <a:p>
-            <a:pPr algn="ctr"/>
-          </a:p>
-        </p:txBody>
-      </p:sp>
-      <p:sp>
-        <p:nvSpPr>
-          <p:cNvPr id="22" name="TextBox 21"/>
-          <p:cNvSpPr txBox="1"/>
-          <p:nvPr/>
-        </p:nvSpPr>
-        <p:spPr>
-          <a:xfrm>
-            <a:off x="3931920" y="5440680"/>
-            <a:ext cx="7955279" cy="457200"/>
-          </a:xfrm>
-          <a:prstGeom prst="rect">
-            <a:avLst/>
-          </a:prstGeom>
-          <a:noFill/>
-        </p:spPr>
-        <p:txBody>
-          <a:bodyPr wrap="square">
-            <a:spAutoFit/>
-          </a:bodyPr>
-          <a:lstStyle/>
-          <a:p>
-            <a:pPr algn="l"/>
-            <a:r>
-              <a:rPr sz="1300" b="0" i="0">
-                <a:solidFill>
-                  <a:srgbClr val="0D1B2A"/>
-                </a:solidFill>
-              </a:rPr>
-              <a:t>Medical blue, game studio purple, startup green — no Tailwind dependency</a:t>
-            </a:r>
-          </a:p>
-        </p:txBody>
-      </p:sp>
-      <p:sp>
-        <p:nvSpPr>
-          <p:cNvPr id="21" name="TextBox 20"/>
-          <p:cNvSpPr txBox="1"/>
-          <p:nvPr/>
-        </p:nvSpPr>
-        <p:spPr>
-          <a:xfrm>
-            <a:off x="411480" y="5422392"/>
-            <a:ext cx="3291840" cy="457200"/>
-          </a:xfrm>
-          <a:prstGeom prst="rect">
-            <a:avLst/>
-          </a:prstGeom>
-          <a:noFill/>
-        </p:spPr>
-        <p:txBody>
-          <a:bodyPr wrap="square">
-            <a:spAutoFit/>
-          </a:bodyPr>
-          <a:lstStyle/>
-          <a:p>
-            <a:pPr algn="ctr"/>
-            <a:r>
-              <a:rPr sz="1200" b="1" i="0">
-                <a:solidFill>
-                  <a:srgbClr val="FFFFFF"/>
-                </a:solidFill>
-              </a:rPr>
-              <a:t>Example Themes</a:t>
-            </a:r>
-          </a:p>
-        </p:txBody>
-      </p:sp>
-      <p:sp>
-        <p:nvSpPr>
-          <p:cNvPr id="20" name="Rectangle 19"/>
-          <p:cNvSpPr/>
-          <p:nvPr/>
-        </p:nvSpPr>
-        <p:spPr>
-          <a:xfrm>
-            <a:off x="365760" y="5349240"/>
-            <a:ext cx="3383280" cy="594360"/>
-          </a:xfrm>
-          <a:prstGeom prst="rect">
-            <a:avLst/>
-          </a:prstGeom>
-          <a:solidFill>
-            <a:srgbClr val="00B4D8"/>
-          </a:solidFill>
-          <a:ln>
-            <a:noFill/>
-          </a:ln>
-        </p:spPr>
-        <p:style>
-          <a:lnRef idx="1">
-            <a:schemeClr val="accent1"/>
-          </a:lnRef>
-          <a:fillRef idx="3">
-            <a:schemeClr val="accent1"/>
-          </a:fillRef>
-          <a:effectRef idx="2">
-            <a:schemeClr val="accent1"/>
-          </a:effectRef>
-          <a:fontRef idx="minor">
-            <a:schemeClr val="lt1"/>
-          </a:fontRef>
-        </p:style>
-        <p:txBody>
-          <a:bodyPr rtlCol="0" anchor="ctr"/>
-          <a:lstStyle/>
-          <a:p>
-            <a:pPr algn="ctr"/>
-          </a:p>
-        </p:txBody>
-      </p:sp>
-      <p:sp>
-        <p:nvSpPr>
-          <p:cNvPr id="19" name="TextBox 18"/>
-          <p:cNvSpPr txBox="1"/>
-          <p:nvPr/>
-        </p:nvSpPr>
-        <p:spPr>
-          <a:xfrm>
-            <a:off x="3931920" y="4690872"/>
-            <a:ext cx="7955279" cy="457200"/>
-          </a:xfrm>
-          <a:prstGeom prst="rect">
-            <a:avLst/>
-          </a:prstGeom>
-          <a:noFill/>
-        </p:spPr>
-        <p:txBody>
-          <a:bodyPr wrap="square">
-            <a:spAutoFit/>
-          </a:bodyPr>
-          <a:lstStyle/>
-          <a:p>
-            <a:pPr algn="l"/>
-            <a:r>
-              <a:rPr sz="1300" b="0" i="0">
-                <a:solidFill>
-                  <a:srgbClr val="0D1B2A"/>
-                </a:solidFill>
-              </a:rPr>
-              <a:t>ThemeProvider writes CSS variables to document.documentElement — switches instantly</a:t>
-            </a:r>
-          </a:p>
-        </p:txBody>
-      </p:sp>
-      <p:sp>
-        <p:nvSpPr>
-          <p:cNvPr id="18" name="TextBox 17"/>
-          <p:cNvSpPr txBox="1"/>
-          <p:nvPr/>
-        </p:nvSpPr>
-        <p:spPr>
-          <a:xfrm>
-            <a:off x="411480" y="4672584"/>
-            <a:ext cx="3291840" cy="457200"/>
-          </a:xfrm>
-          <a:prstGeom prst="rect">
-            <a:avLst/>
-          </a:prstGeom>
-          <a:noFill/>
-        </p:spPr>
-        <p:txBody>
-          <a:bodyPr wrap="square">
-            <a:spAutoFit/>
-          </a:bodyPr>
-          <a:lstStyle/>
-          <a:p>
-            <a:pPr algn="ctr"/>
-            <a:r>
-              <a:rPr sz="1200" b="1" i="0">
-                <a:solidFill>
-                  <a:srgbClr val="FFFFFF"/>
-                </a:solidFill>
-              </a:rPr>
-              <a:t>CSS Variables</a:t>
-            </a:r>
-          </a:p>
-        </p:txBody>
-      </p:sp>
-      <p:sp>
-        <p:nvSpPr>
-          <p:cNvPr id="17" name="Rectangle 16"/>
-          <p:cNvSpPr/>
-          <p:nvPr/>
-        </p:nvSpPr>
-        <p:spPr>
-          <a:xfrm>
-            <a:off x="365760" y="4599432"/>
-            <a:ext cx="3383280" cy="594360"/>
-          </a:xfrm>
-          <a:prstGeom prst="rect">
-            <a:avLst/>
-          </a:prstGeom>
-          <a:solidFill>
-            <a:srgbClr val="00B4D8"/>
-          </a:solidFill>
-          <a:ln>
-            <a:noFill/>
-          </a:ln>
-        </p:spPr>
-        <p:style>
-          <a:lnRef idx="1">
-            <a:schemeClr val="accent1"/>
-          </a:lnRef>
-          <a:fillRef idx="3">
-            <a:schemeClr val="accent1"/>
-          </a:fillRef>
-          <a:effectRef idx="2">
-            <a:schemeClr val="accent1"/>
-          </a:effectRef>
-          <a:fontRef idx="minor">
-            <a:schemeClr val="lt1"/>
-          </a:fontRef>
-        </p:style>
-        <p:txBody>
-          <a:bodyPr rtlCol="0" anchor="ctr"/>
-          <a:lstStyle/>
-          <a:p>
-            <a:pPr algn="ctr"/>
-          </a:p>
-        </p:txBody>
-      </p:sp>
-      <p:sp>
-        <p:nvSpPr>
-          <p:cNvPr id="16" name="TextBox 15"/>
-          <p:cNvSpPr txBox="1"/>
-          <p:nvPr/>
-        </p:nvSpPr>
-        <p:spPr>
-          <a:xfrm>
-            <a:off x="3931920" y="3941064"/>
-            <a:ext cx="7955279" cy="457200"/>
-          </a:xfrm>
-          <a:prstGeom prst="rect">
-            <a:avLst/>
-          </a:prstGeom>
-          <a:noFill/>
-        </p:spPr>
-        <p:txBody>
-          <a:bodyPr wrap="square">
-            <a:spAutoFit/>
-          </a:bodyPr>
-          <a:lstStyle/>
-          <a:p>
-            <a:pPr algn="l"/>
-            <a:r>
-              <a:rPr sz="1300" b="0" i="0">
-                <a:solidFill>
-                  <a:srgbClr val="0D1B2A"/>
-                </a:solidFill>
-              </a:rPr>
-              <a:t>theme: block in project.yaml — sidebar_bg, accent, badge_bg CSS colour strings</a:t>
-            </a:r>
-          </a:p>
-        </p:txBody>
-      </p:sp>
-      <p:sp>
-        <p:nvSpPr>
-          <p:cNvPr id="15" name="TextBox 14"/>
-          <p:cNvSpPr txBox="1"/>
-          <p:nvPr/>
-        </p:nvSpPr>
-        <p:spPr>
-          <a:xfrm>
-            <a:off x="411480" y="3922776"/>
-            <a:ext cx="3291840" cy="457200"/>
-          </a:xfrm>
-          <a:prstGeom prst="rect">
-            <a:avLst/>
-          </a:prstGeom>
-          <a:noFill/>
-        </p:spPr>
-        <p:txBody>
-          <a:bodyPr wrap="square">
-            <a:spAutoFit/>
-          </a:bodyPr>
-          <a:lstStyle/>
-          <a:p>
-            <a:pPr algn="ctr"/>
-            <a:r>
-              <a:rPr sz="1200" b="1" i="0">
-                <a:solidFill>
-                  <a:srgbClr val="FFFFFF"/>
-                </a:solidFill>
-              </a:rPr>
-              <a:t>Solution Theming</a:t>
-            </a:r>
-          </a:p>
-        </p:txBody>
-      </p:sp>
-      <p:sp>
-        <p:nvSpPr>
-          <p:cNvPr id="14" name="Rectangle 13"/>
-          <p:cNvSpPr/>
-          <p:nvPr/>
-        </p:nvSpPr>
-        <p:spPr>
-          <a:xfrm>
-            <a:off x="365760" y="3849624"/>
-            <a:ext cx="3383280" cy="594360"/>
-          </a:xfrm>
-          <a:prstGeom prst="rect">
-            <a:avLst/>
-          </a:prstGeom>
-          <a:solidFill>
-            <a:srgbClr val="00B4D8"/>
-          </a:solidFill>
-          <a:ln>
-            <a:noFill/>
-          </a:ln>
-        </p:spPr>
-        <p:style>
-          <a:lnRef idx="1">
-            <a:schemeClr val="accent1"/>
-          </a:lnRef>
-          <a:fillRef idx="3">
-            <a:schemeClr val="accent1"/>
-          </a:fillRef>
-          <a:effectRef idx="2">
-            <a:schemeClr val="accent1"/>
-          </a:effectRef>
-          <a:fontRef idx="minor">
-            <a:schemeClr val="lt1"/>
-          </a:fontRef>
-        </p:style>
-        <p:txBody>
-          <a:bodyPr rtlCol="0" anchor="ctr"/>
-          <a:lstStyle/>
-          <a:p>
-            <a:pPr algn="ctr"/>
-          </a:p>
-        </p:txBody>
-      </p:sp>
-      <p:sp>
-        <p:nvSpPr>
-          <p:cNvPr id="13" name="TextBox 12"/>
-          <p:cNvSpPr txBox="1"/>
-          <p:nvPr/>
-        </p:nvSpPr>
-        <p:spPr>
-          <a:xfrm>
-            <a:off x="3931920" y="3191256"/>
-            <a:ext cx="7955279" cy="457200"/>
-          </a:xfrm>
-          <a:prstGeom prst="rect">
-            <a:avLst/>
-          </a:prstGeom>
-          <a:noFill/>
-        </p:spPr>
-        <p:txBody>
-          <a:bodyPr wrap="square">
-            <a:spAutoFit/>
-          </a:bodyPr>
-          <a:lstStyle/>
-          <a:p>
-            <a:pPr algn="l"/>
-            <a:r>
-              <a:rPr sz="1300" b="0" i="0">
-                <a:solidFill>
-                  <a:srgbClr val="0D1B2A"/>
-                </a:solidFill>
-              </a:rPr>
-              <a:t>Backed by POST /agents/hire — optionally add task types (written to tasks.yaml)</a:t>
-            </a:r>
-          </a:p>
-        </p:txBody>
-      </p:sp>
-      <p:sp>
-        <p:nvSpPr>
-          <p:cNvPr id="12" name="TextBox 11"/>
-          <p:cNvSpPr txBox="1"/>
-          <p:nvPr/>
-        </p:nvSpPr>
-        <p:spPr>
-          <a:xfrm>
-            <a:off x="411480" y="3172968"/>
-            <a:ext cx="3291840" cy="457200"/>
-          </a:xfrm>
-          <a:prstGeom prst="rect">
-            <a:avLst/>
-          </a:prstGeom>
-          <a:noFill/>
-        </p:spPr>
-        <p:txBody>
-          <a:bodyPr wrap="square">
-            <a:spAutoFit/>
-          </a:bodyPr>
-          <a:lstStyle/>
-          <a:p>
-            <a:pPr algn="ctr"/>
-            <a:r>
-              <a:rPr sz="1200" b="1" i="0">
-                <a:solidFill>
-                  <a:srgbClr val="FFFFFF"/>
-                </a:solidFill>
-              </a:rPr>
-              <a:t>API Backed</a:t>
-            </a:r>
-          </a:p>
-        </p:txBody>
-      </p:sp>
-      <p:sp>
-        <p:nvSpPr>
-          <p:cNvPr id="11" name="Rectangle 10"/>
-          <p:cNvSpPr/>
-          <p:nvPr/>
-        </p:nvSpPr>
-        <p:spPr>
-          <a:xfrm>
-            <a:off x="365760" y="3099816"/>
-            <a:ext cx="3383280" cy="594360"/>
-          </a:xfrm>
-          <a:prstGeom prst="rect">
-            <a:avLst/>
-          </a:prstGeom>
-          <a:solidFill>
-            <a:srgbClr val="00B4D8"/>
-          </a:solidFill>
-          <a:ln>
-            <a:noFill/>
-          </a:ln>
-        </p:spPr>
-        <p:style>
-          <a:lnRef idx="1">
-            <a:schemeClr val="accent1"/>
-          </a:lnRef>
-          <a:fillRef idx="3">
-            <a:schemeClr val="accent1"/>
-          </a:fillRef>
-          <a:effectRef idx="2">
-            <a:schemeClr val="accent1"/>
-          </a:effectRef>
-          <a:fontRef idx="minor">
-            <a:schemeClr val="lt1"/>
-          </a:fontRef>
-        </p:style>
-        <p:txBody>
-          <a:bodyPr rtlCol="0" anchor="ctr"/>
-          <a:lstStyle/>
-          <a:p>
-            <a:pPr algn="ctr"/>
-          </a:p>
-        </p:txBody>
-      </p:sp>
-      <p:sp>
-        <p:nvSpPr>
-          <p:cNvPr id="10" name="TextBox 9"/>
-          <p:cNvSpPr txBox="1"/>
-          <p:nvPr/>
-        </p:nvSpPr>
-        <p:spPr>
-          <a:xfrm>
-            <a:off x="3931920" y="2441448"/>
-            <a:ext cx="7955279" cy="457200"/>
-          </a:xfrm>
-          <a:prstGeom prst="rect">
-            <a:avLst/>
-          </a:prstGeom>
-          <a:noFill/>
-        </p:spPr>
-        <p:txBody>
-          <a:bodyPr wrap="square">
-            <a:spAutoFit/>
-          </a:bodyPr>
-          <a:lstStyle/>
-          <a:p>
-            <a:pPr algn="l"/>
-            <a:r>
-              <a:rPr sz="1300" b="0" i="0">
-                <a:solidFill>
-                  <a:srgbClr val="0D1B2A"/>
-                </a:solidFill>
-              </a:rPr>
-              <a:t>Creates HITL proposal — approve on Dashboard — role appears in Agents page immediately</a:t>
-            </a:r>
-          </a:p>
-        </p:txBody>
-      </p:sp>
-      <p:sp>
-        <p:nvSpPr>
-          <p:cNvPr id="9" name="TextBox 8"/>
-          <p:cNvSpPr txBox="1"/>
-          <p:nvPr/>
-        </p:nvSpPr>
-        <p:spPr>
-          <a:xfrm>
-            <a:off x="411480" y="2423160"/>
-            <a:ext cx="3291840" cy="457200"/>
-          </a:xfrm>
-          <a:prstGeom prst="rect">
-            <a:avLst/>
-          </a:prstGeom>
-          <a:noFill/>
-        </p:spPr>
-        <p:txBody>
-          <a:bodyPr wrap="square">
-            <a:spAutoFit/>
-          </a:bodyPr>
-          <a:lstStyle/>
-          <a:p>
-            <a:pPr algn="ctr"/>
-            <a:r>
-              <a:rPr sz="1200" b="1" i="0">
-                <a:solidFill>
-                  <a:srgbClr val="FFFFFF"/>
-                </a:solidFill>
-              </a:rPr>
-              <a:t>HITL Approval</a:t>
-            </a:r>
-          </a:p>
-        </p:txBody>
-      </p:sp>
-      <p:sp>
-        <p:nvSpPr>
-          <p:cNvPr id="8" name="Rectangle 7"/>
-          <p:cNvSpPr/>
-          <p:nvPr/>
-        </p:nvSpPr>
-        <p:spPr>
-          <a:xfrm>
-            <a:off x="365760" y="2350008"/>
-            <a:ext cx="3383280" cy="594360"/>
-          </a:xfrm>
-          <a:prstGeom prst="rect">
-            <a:avLst/>
-          </a:prstGeom>
-          <a:solidFill>
-            <a:srgbClr val="00B4D8"/>
-          </a:solidFill>
-          <a:ln>
-            <a:noFill/>
-          </a:ln>
-        </p:spPr>
-        <p:style>
-          <a:lnRef idx="1">
-            <a:schemeClr val="accent1"/>
-          </a:lnRef>
-          <a:fillRef idx="3">
-            <a:schemeClr val="accent1"/>
-          </a:fillRef>
-          <a:effectRef idx="2">
-            <a:schemeClr val="accent1"/>
-          </a:effectRef>
-          <a:fontRef idx="minor">
-            <a:schemeClr val="lt1"/>
-          </a:fontRef>
-        </p:style>
-        <p:txBody>
-          <a:bodyPr rtlCol="0" anchor="ctr"/>
-          <a:lstStyle/>
-          <a:p>
-            <a:pPr algn="ctr"/>
-          </a:p>
-        </p:txBody>
-      </p:sp>
-      <p:sp>
-        <p:nvSpPr>
-          <p:cNvPr id="7" name="TextBox 6"/>
-          <p:cNvSpPr txBox="1"/>
-          <p:nvPr/>
-        </p:nvSpPr>
-        <p:spPr>
-          <a:xfrm>
-            <a:off x="3931920" y="1691640"/>
-            <a:ext cx="7955279" cy="457200"/>
-          </a:xfrm>
-          <a:prstGeom prst="rect">
-            <a:avLst/>
-          </a:prstGeom>
-          <a:noFill/>
-        </p:spPr>
-        <p:txBody>
-          <a:bodyPr wrap="square">
-            <a:spAutoFit/>
-          </a:bodyPr>
-          <a:lstStyle/>
-          <a:p>
-            <a:pPr algn="l"/>
-            <a:r>
-              <a:rPr sz="1300" b="0" i="0">
-                <a:solidFill>
-                  <a:srgbClr val="0D1B2A"/>
-                </a:solidFill>
-              </a:rPr>
-              <a:t>From the web UI, click Hire Agent — choose icon, name, description, system prompt</a:t>
-            </a:r>
-          </a:p>
-        </p:txBody>
-      </p:sp>
-      <p:sp>
-        <p:nvSpPr>
-          <p:cNvPr id="6" name="TextBox 5"/>
-          <p:cNvSpPr txBox="1"/>
-          <p:nvPr/>
-        </p:nvSpPr>
-        <p:spPr>
-          <a:xfrm>
-            <a:off x="411480" y="1673352"/>
-            <a:ext cx="3291840" cy="457200"/>
-          </a:xfrm>
-          <a:prstGeom prst="rect">
-            <a:avLst/>
-          </a:prstGeom>
-          <a:noFill/>
-        </p:spPr>
-        <p:txBody>
-          <a:bodyPr wrap="square">
-            <a:spAutoFit/>
-          </a:bodyPr>
-          <a:lstStyle/>
-          <a:p>
-            <a:pPr algn="ctr"/>
-            <a:r>
-              <a:rPr sz="1200" b="1" i="0">
-                <a:solidFill>
-                  <a:srgbClr val="FFFFFF"/>
-                </a:solidFill>
-              </a:rPr>
-              <a:t>Hire Agent (Web UI)</a:t>
-            </a:r>
-          </a:p>
-        </p:txBody>
-      </p:sp>
-      <p:sp>
-        <p:nvSpPr>
-          <p:cNvPr id="5" name="Rectangle 4"/>
-          <p:cNvSpPr/>
-          <p:nvPr/>
-        </p:nvSpPr>
-        <p:spPr>
-          <a:xfrm>
-            <a:off x="365760" y="1600200"/>
-            <a:ext cx="3383280" cy="594360"/>
-          </a:xfrm>
-          <a:prstGeom prst="rect">
-            <a:avLst/>
-          </a:prstGeom>
-          <a:solidFill>
-            <a:srgbClr val="00B4D8"/>
-          </a:solidFill>
-          <a:ln>
-            <a:noFill/>
-          </a:ln>
-        </p:spPr>
-        <p:style>
-          <a:lnRef idx="1">
-            <a:schemeClr val="accent1"/>
-          </a:lnRef>
-          <a:fillRef idx="3">
-            <a:schemeClr val="accent1"/>
-          </a:fillRef>
-          <a:effectRef idx="2">
-            <a:schemeClr val="accent1"/>
-          </a:effectRef>
-          <a:fontRef idx="minor">
-            <a:schemeClr val="lt1"/>
-          </a:fontRef>
-        </p:style>
-        <p:txBody>
-          <a:bodyPr rtlCol="0" anchor="ctr"/>
-          <a:lstStyle/>
-          <a:p>
-            <a:pPr algn="ctr"/>
-          </a:p>
-        </p:txBody>
-      </p:sp>
-      <p:sp>
-        <p:nvSpPr>
-          <p:cNvPr id="4" name="TextBox 3"/>
-          <p:cNvSpPr txBox="1"/>
-          <p:nvPr/>
-        </p:nvSpPr>
-        <p:spPr>
-          <a:xfrm>
-            <a:off x="411480" y="804672"/>
-            <a:ext cx="11338560" cy="438912"/>
-          </a:xfrm>
-          <a:prstGeom prst="rect">
-            <a:avLst/>
-          </a:prstGeom>
-          <a:noFill/>
-        </p:spPr>
-        <p:txBody>
-          <a:bodyPr wrap="square">
-            <a:spAutoFit/>
-          </a:bodyPr>
-          <a:lstStyle/>
-          <a:p>
-            <a:pPr algn="l"/>
-            <a:r>
-              <a:rPr sz="1600" b="0" i="0">
-                <a:solidFill>
-                  <a:srgbClr val="00B4D8"/>
-                </a:solidFill>
-              </a:rPr>
-              <a:t>Extend agents and brand the UI without touching code or YAML files</a:t>
-            </a:r>
-          </a:p>
-        </p:txBody>
-      </p:sp>
-      <p:sp>
-        <p:nvSpPr>
-          <p:cNvPr id="3" name="TextBox 2"/>
-          <p:cNvSpPr txBox="1"/>
-          <p:nvPr/>
-        </p:nvSpPr>
-        <p:spPr>
-          <a:xfrm>
-            <a:off x="411480" y="109728"/>
-            <a:ext cx="11338560" cy="731520"/>
-          </a:xfrm>
-          <a:prstGeom prst="rect">
-            <a:avLst/>
-          </a:prstGeom>
-          <a:noFill/>
-        </p:spPr>
-        <p:txBody>
-          <a:bodyPr wrap="square">
-            <a:spAutoFit/>
-          </a:bodyPr>
-          <a:lstStyle/>
-          <a:p>
-            <a:pPr algn="l"/>
-            <a:r>
-              <a:rPr sz="3000" b="1" i="0">
-                <a:solidFill>
-                  <a:srgbClr val="FFFFFF"/>
-                </a:solidFill>
-              </a:rPr>
-              <a:t>Hire Agent &amp; Solution Theming — Runtime Customisation</a:t>
-            </a:r>
-          </a:p>
-        </p:txBody>
-      </p:sp>
-      <p:sp>
-        <p:nvSpPr>
-          <p:cNvPr id="2" name="Rectangle 1"/>
-          <p:cNvSpPr/>
-          <p:nvPr/>
-        </p:nvSpPr>
-        <p:spPr>
-          <a:xfrm>
-            <a:off x="0" y="0"/>
-            <a:ext cx="12188952" cy="1325880"/>
-          </a:xfrm>
-          <a:prstGeom prst="rect">
-            <a:avLst/>
-          </a:prstGeom>
-          <a:solidFill>
-            <a:srgbClr val="0D1B2A"/>
-          </a:solidFill>
-          <a:ln>
-            <a:noFill/>
-          </a:ln>
-        </p:spPr>
-        <p:style>
-          <a:lnRef idx="1">
-            <a:schemeClr val="accent1"/>
-          </a:lnRef>
-          <a:fillRef idx="3">
-            <a:schemeClr val="accent1"/>
-          </a:fillRef>
-          <a:effectRef idx="2">
-            <a:schemeClr val="accent1"/>
-          </a:effectRef>
-          <a:fontRef idx="minor">
-            <a:schemeClr val="lt1"/>
-          </a:fontRef>
-        </p:style>
-        <p:txBody>
-          <a:bodyPr rtlCol="0" anchor="ctr"/>
-          <a:lstStyle/>
-          <a:p>
-            <a:pPr algn="ctr"/>
           </a:p>
         </p:txBody>
       </p:sp>

--- a/docs/SageAI_Tech_Pitch.pptx
+++ b/docs/SageAI_Tech_Pitch.pptx
@@ -26,12 +26,8 @@
     <p:sldId id="274" r:id="rId25"/>
     <p:sldId id="275" r:id="rId26"/>
     <p:sldId id="276" r:id="rId27"/>
-    <p:sldId id="281" r:id="rId32"/>
-    <p:sldId id="282" r:id="rId33"/>
     <p:sldId id="279" r:id="rId30"/>
     <p:sldId id="280" r:id="rId31"/>
-    <p:sldId id="283" r:id="rId34"/>
-    <p:sldId id="284" r:id="rId35"/>
     <p:sldId id="277" r:id="rId28"/>
     <p:sldId id="278" r:id="rId29"/>
   </p:sldIdLst>
@@ -3342,7 +3338,7 @@
                   <a:srgbClr val="647487"/>
                 </a:solidFill>
               </a:rPr>
-              <a:t>A modular autonomous AI agent framework
+              <a:t>A modular open-source AI agent framework
 built on lean development methodology at machine speed</a:t>
             </a:r>
           </a:p>
@@ -3377,7 +3373,7 @@
                   <a:srgbClr val="647487"/>
                 </a:solidFill>
               </a:rPr>
-              <a:t>Technical Platform Overview — March 2026</a:t>
+              <a:t>Open Source (Apache 2.0) — Technical Platform Overview — March 2026</a:t>
             </a:r>
           </a:p>
         </p:txBody>
@@ -4094,7 +4090,7 @@
                   <a:srgbClr val="647487"/>
                 </a:solidFill>
               </a:rPr>
-              <a:t>SAGE[ai] — Confidential | March 2026</a:t>
+              <a:t>SAGE[ai] — Open Source (Apache 2.0) | github.com/Sumanharapanahalli/sage | March 2026</a:t>
             </a:r>
           </a:p>
         </p:txBody>
@@ -4750,7 +4746,7 @@
                   <a:srgbClr val="0D1B2A"/>
                 </a:solidFill>
               </a:rPr>
-              <a:t>New agent role: add YAML block to prompts.yaml + entry to tasks.yaml — no Python required — or use Hire Agent in the web UI, no YAML editing required — or use Hire Agent in the web UI, no YAML editing required</a:t>
+              <a:t>New agent role: add YAML block to prompts.yaml + entry to tasks.yaml — no Python required</a:t>
             </a:r>
           </a:p>
         </p:txBody>
@@ -4784,7 +4780,7 @@
                   <a:srgbClr val="0D1B2A"/>
                 </a:solidFill>
               </a:rPr>
-              <a:t>Hot-reload YAML via /edit-solution-yaml skill — backend reloads without restart | Solution theming: add theme: block to project.yaml — sidebar, buttons, badges update instantly</a:t>
+              <a:t>Hot-reload YAML via /edit-solution-yaml skill — backend reloads without restart</a:t>
             </a:r>
           </a:p>
         </p:txBody>
@@ -4861,7 +4857,7 @@
                   <a:srgbClr val="647487"/>
                 </a:solidFill>
               </a:rPr>
-              <a:t>SAGE[ai] — Confidential | March 2026</a:t>
+              <a:t>SAGE[ai] — Open Source (Apache 2.0) | github.com/Sumanharapanahalli/sage | March 2026</a:t>
             </a:r>
           </a:p>
         </p:txBody>
@@ -5680,7 +5676,7 @@
                   <a:srgbClr val="647487"/>
                 </a:solidFill>
               </a:rPr>
-              <a:t>SAGE[ai] — Confidential | March 2026</a:t>
+              <a:t>SAGE[ai] — Open Source (Apache 2.0) | github.com/Sumanharapanahalli/sage | March 2026</a:t>
             </a:r>
           </a:p>
         </p:txBody>
@@ -6567,7 +6563,7 @@
                   <a:srgbClr val="647487"/>
                 </a:solidFill>
               </a:rPr>
-              <a:t>SAGE[ai] — Confidential | March 2026</a:t>
+              <a:t>SAGE[ai] — Open Source (Apache 2.0) | github.com/Sumanharapanahalli/sage | March 2026</a:t>
             </a:r>
           </a:p>
         </p:txBody>
@@ -7259,7 +7255,7 @@
                   <a:srgbClr val="647487"/>
                 </a:solidFill>
               </a:rPr>
-              <a:t>SAGE[ai] — Confidential | March 2026</a:t>
+              <a:t>SAGE[ai] — Open Source (Apache 2.0) | github.com/Sumanharapanahalli/sage | March 2026</a:t>
             </a:r>
           </a:p>
         </p:txBody>
@@ -8139,7 +8135,7 @@
                   <a:srgbClr val="647487"/>
                 </a:solidFill>
               </a:rPr>
-              <a:t>SAGE[ai] — Confidential | March 2026</a:t>
+              <a:t>SAGE[ai] — Open Source (Apache 2.0) | github.com/Sumanharapanahalli/sage | March 2026</a:t>
             </a:r>
           </a:p>
         </p:txBody>
@@ -8387,7 +8383,7 @@
                   <a:srgbClr val="FFFFFF"/>
                 </a:solidFill>
               </a:rPr>
-              <a:t>POST /onboarding/generate with a plain-language description + compliance standards | Web UI path: visit /onboarding — guided multi-turn conversation, LLM extracts domain info, Generate Solution button appears when ready | Web UI path: visit /onboarding — guided multi-turn conversation, LLM extracts domain info, Generate Solution button appears when ready</a:t>
+              <a:t>POST /onboarding/generate with a plain-language description + compliance standards</a:t>
             </a:r>
           </a:p>
         </p:txBody>
@@ -8933,7 +8929,7 @@
                   <a:srgbClr val="647487"/>
                 </a:solidFill>
               </a:rPr>
-              <a:t>SAGE[ai] — Confidential | March 2026</a:t>
+              <a:t>SAGE[ai] — Open Source (Apache 2.0) | github.com/Sumanharapanahalli/sage | March 2026</a:t>
             </a:r>
           </a:p>
         </p:txBody>
@@ -9582,7 +9578,7 @@
                   <a:srgbClr val="647487"/>
                 </a:solidFill>
               </a:rPr>
-              <a:t>SAGE[ai] — Confidential | March 2026</a:t>
+              <a:t>SAGE[ai] — Open Source (Apache 2.0) | github.com/Sumanharapanahalli/sage | March 2026</a:t>
             </a:r>
           </a:p>
         </p:txBody>
@@ -10462,7 +10458,7 @@
                   <a:srgbClr val="647487"/>
                 </a:solidFill>
               </a:rPr>
-              <a:t>SAGE[ai] — Confidential | March 2026</a:t>
+              <a:t>SAGE[ai] — Open Source (Apache 2.0) | github.com/Sumanharapanahalli/sage | March 2026</a:t>
             </a:r>
           </a:p>
         </p:txBody>
@@ -11170,7 +11166,7 @@
                   <a:srgbClr val="647487"/>
                 </a:solidFill>
               </a:rPr>
-              <a:t>SAGE[ai] — Confidential | March 2026</a:t>
+              <a:t>SAGE[ai] — Open Source (Apache 2.0) | github.com/Sumanharapanahalli/sage | March 2026</a:t>
             </a:r>
           </a:p>
         </p:txBody>
@@ -11828,7 +11824,7 @@
                   <a:srgbClr val="647487"/>
                 </a:solidFill>
               </a:rPr>
-              <a:t>SAGE[ai] — Confidential | March 2026</a:t>
+              <a:t>SAGE[ai] — Open Source (Apache 2.0) | github.com/Sumanharapanahalli/sage | March 2026</a:t>
             </a:r>
           </a:p>
         </p:txBody>
@@ -12708,7 +12704,7 @@
                   <a:srgbClr val="647487"/>
                 </a:solidFill>
               </a:rPr>
-              <a:t>SAGE[ai] — Confidential | March 2026</a:t>
+              <a:t>SAGE[ai] — Open Source (Apache 2.0) | github.com/Sumanharapanahalli/sage | March 2026</a:t>
             </a:r>
           </a:p>
         </p:txBody>
@@ -13425,7 +13421,7 @@
                   <a:srgbClr val="647487"/>
                 </a:solidFill>
               </a:rPr>
-              <a:t>SAGE[ai] — Confidential | March 2026</a:t>
+              <a:t>SAGE[ai] — Open Source (Apache 2.0) | github.com/Sumanharapanahalli/sage | March 2026</a:t>
             </a:r>
           </a:p>
         </p:txBody>
@@ -13439,3494 +13435,6 @@
 </file>
 
 <file path=ppt/slides/slide22.xml><?xml version="1.0" encoding="utf-8"?>
-<p:sld xmlns:a="http://schemas.openxmlformats.org/drawingml/2006/main" xmlns:p="http://schemas.openxmlformats.org/presentationml/2006/main" xmlns:r="http://schemas.openxmlformats.org/officeDocument/2006/relationships">
-  <p:cSld>
-    <p:spTree>
-      <p:nvGrpSpPr>
-        <p:cNvPr id="1" name=""/>
-        <p:cNvGrpSpPr/>
-        <p:nvPr/>
-      </p:nvGrpSpPr>
-      <p:grpSpPr/>
-      <p:sp>
-        <p:nvSpPr>
-          <p:cNvPr id="24" name="TextBox 23"/>
-          <p:cNvSpPr txBox="1"/>
-          <p:nvPr/>
-        </p:nvSpPr>
-        <p:spPr>
-          <a:xfrm>
-            <a:off x="274320" y="6510528"/>
-            <a:ext cx="8229600" cy="274320"/>
-          </a:xfrm>
-          <a:prstGeom prst="rect">
-            <a:avLst/>
-          </a:prstGeom>
-          <a:noFill/>
-        </p:spPr>
-        <p:txBody>
-          <a:bodyPr wrap="square">
-            <a:spAutoFit/>
-          </a:bodyPr>
-          <a:lstStyle/>
-          <a:p>
-            <a:pPr algn="l"/>
-            <a:r>
-              <a:rPr sz="900" b="0" i="0">
-                <a:solidFill>
-                  <a:srgbClr val="647487"/>
-                </a:solidFill>
-              </a:rPr>
-              <a:t>SAGE[ai] — Confidential | March 2026</a:t>
-            </a:r>
-          </a:p>
-        </p:txBody>
-      </p:sp>
-      <p:sp>
-        <p:nvSpPr>
-          <p:cNvPr id="23" name="Rectangle 22"/>
-          <p:cNvSpPr/>
-          <p:nvPr/>
-        </p:nvSpPr>
-        <p:spPr>
-          <a:xfrm>
-            <a:off x="0" y="6492240"/>
-            <a:ext cx="12188952" cy="365760"/>
-          </a:xfrm>
-          <a:prstGeom prst="rect">
-            <a:avLst/>
-          </a:prstGeom>
-          <a:solidFill>
-            <a:srgbClr val="0D1B2A"/>
-          </a:solidFill>
-          <a:ln>
-            <a:noFill/>
-          </a:ln>
-        </p:spPr>
-        <p:style>
-          <a:lnRef idx="1">
-            <a:schemeClr val="accent1"/>
-          </a:lnRef>
-          <a:fillRef idx="3">
-            <a:schemeClr val="accent1"/>
-          </a:fillRef>
-          <a:effectRef idx="2">
-            <a:schemeClr val="accent1"/>
-          </a:effectRef>
-          <a:fontRef idx="minor">
-            <a:schemeClr val="lt1"/>
-          </a:fontRef>
-        </p:style>
-        <p:txBody>
-          <a:bodyPr rtlCol="0" anchor="ctr"/>
-          <a:lstStyle/>
-          <a:p>
-            <a:pPr algn="ctr"/>
-          </a:p>
-        </p:txBody>
-      </p:sp>
-      <p:sp>
-        <p:nvSpPr>
-          <p:cNvPr id="22" name="TextBox 21"/>
-          <p:cNvSpPr txBox="1"/>
-          <p:nvPr/>
-        </p:nvSpPr>
-        <p:spPr>
-          <a:xfrm>
-            <a:off x="3931920" y="5440680"/>
-            <a:ext cx="7955279" cy="457200"/>
-          </a:xfrm>
-          <a:prstGeom prst="rect">
-            <a:avLst/>
-          </a:prstGeom>
-          <a:noFill/>
-        </p:spPr>
-        <p:txBody>
-          <a:bodyPr wrap="square">
-            <a:spAutoFit/>
-          </a:bodyPr>
-          <a:lstStyle/>
-          <a:p>
-            <a:pPr algn="l"/>
-            <a:r>
-              <a:rPr sz="1300" b="0" i="0">
-                <a:solidFill>
-                  <a:srgbClr val="0D1B2A"/>
-                </a:solidFill>
-              </a:rPr>
-              <a:t>pip install composio-langchain + COMPOSIO_API_KEY — no per-tool code</a:t>
-            </a:r>
-          </a:p>
-        </p:txBody>
-      </p:sp>
-      <p:sp>
-        <p:nvSpPr>
-          <p:cNvPr id="21" name="TextBox 20"/>
-          <p:cNvSpPr txBox="1"/>
-          <p:nvPr/>
-        </p:nvSpPr>
-        <p:spPr>
-          <a:xfrm>
-            <a:off x="411480" y="5422392"/>
-            <a:ext cx="3291840" cy="457200"/>
-          </a:xfrm>
-          <a:prstGeom prst="rect">
-            <a:avLst/>
-          </a:prstGeom>
-          <a:noFill/>
-        </p:spPr>
-        <p:txBody>
-          <a:bodyPr wrap="square">
-            <a:spAutoFit/>
-          </a:bodyPr>
-          <a:lstStyle/>
-          <a:p>
-            <a:pPr algn="ctr"/>
-            <a:r>
-              <a:rPr sz="1200" b="1" i="0">
-                <a:solidFill>
-                  <a:srgbClr val="FFFFFF"/>
-                </a:solidFill>
-              </a:rPr>
-              <a:t>Zero Code</a:t>
-            </a:r>
-          </a:p>
-        </p:txBody>
-      </p:sp>
-      <p:sp>
-        <p:nvSpPr>
-          <p:cNvPr id="20" name="Rectangle 19"/>
-          <p:cNvSpPr/>
-          <p:nvPr/>
-        </p:nvSpPr>
-        <p:spPr>
-          <a:xfrm>
-            <a:off x="365760" y="5349240"/>
-            <a:ext cx="3383280" cy="594360"/>
-          </a:xfrm>
-          <a:prstGeom prst="rect">
-            <a:avLst/>
-          </a:prstGeom>
-          <a:solidFill>
-            <a:srgbClr val="00B4D8"/>
-          </a:solidFill>
-          <a:ln>
-            <a:noFill/>
-          </a:ln>
-        </p:spPr>
-        <p:style>
-          <a:lnRef idx="1">
-            <a:schemeClr val="accent1"/>
-          </a:lnRef>
-          <a:fillRef idx="3">
-            <a:schemeClr val="accent1"/>
-          </a:fillRef>
-          <a:effectRef idx="2">
-            <a:schemeClr val="accent1"/>
-          </a:effectRef>
-          <a:fontRef idx="minor">
-            <a:schemeClr val="lt1"/>
-          </a:fontRef>
-        </p:style>
-        <p:txBody>
-          <a:bodyPr rtlCol="0" anchor="ctr"/>
-          <a:lstStyle/>
-          <a:p>
-            <a:pPr algn="ctr"/>
-          </a:p>
-        </p:txBody>
-      </p:sp>
-      <p:sp>
-        <p:nvSpPr>
-          <p:cNvPr id="19" name="TextBox 18"/>
-          <p:cNvSpPr txBox="1"/>
-          <p:nvPr/>
-        </p:nvSpPr>
-        <p:spPr>
-          <a:xfrm>
-            <a:off x="3931920" y="4690872"/>
-            <a:ext cx="7955279" cy="457200"/>
-          </a:xfrm>
-          <a:prstGeom prst="rect">
-            <a:avLst/>
-          </a:prstGeom>
-          <a:noFill/>
-        </p:spPr>
-        <p:txBody>
-          <a:bodyPr wrap="square">
-            <a:spAutoFit/>
-          </a:bodyPr>
-          <a:lstStyle/>
-          <a:p>
-            <a:pPr algn="l"/>
-            <a:r>
-              <a:rPr sz="1300" b="0" i="0">
-                <a:solidFill>
-                  <a:srgbClr val="0D1B2A"/>
-                </a:solidFill>
-              </a:rPr>
-              <a:t>POST /integrations/composio/connect creates a proposal — approve on Dashboard</a:t>
-            </a:r>
-          </a:p>
-        </p:txBody>
-      </p:sp>
-      <p:sp>
-        <p:nvSpPr>
-          <p:cNvPr id="18" name="TextBox 17"/>
-          <p:cNvSpPr txBox="1"/>
-          <p:nvPr/>
-        </p:nvSpPr>
-        <p:spPr>
-          <a:xfrm>
-            <a:off x="411480" y="4672584"/>
-            <a:ext cx="3291840" cy="457200"/>
-          </a:xfrm>
-          <a:prstGeom prst="rect">
-            <a:avLst/>
-          </a:prstGeom>
-          <a:noFill/>
-        </p:spPr>
-        <p:txBody>
-          <a:bodyPr wrap="square">
-            <a:spAutoFit/>
-          </a:bodyPr>
-          <a:lstStyle/>
-          <a:p>
-            <a:pPr algn="ctr"/>
-            <a:r>
-              <a:rPr sz="1200" b="1" i="0">
-                <a:solidFill>
-                  <a:srgbClr val="FFFFFF"/>
-                </a:solidFill>
-              </a:rPr>
-              <a:t>HITL Connect</a:t>
-            </a:r>
-          </a:p>
-        </p:txBody>
-      </p:sp>
-      <p:sp>
-        <p:nvSpPr>
-          <p:cNvPr id="17" name="Rectangle 16"/>
-          <p:cNvSpPr/>
-          <p:nvPr/>
-        </p:nvSpPr>
-        <p:spPr>
-          <a:xfrm>
-            <a:off x="365760" y="4599432"/>
-            <a:ext cx="3383280" cy="594360"/>
-          </a:xfrm>
-          <a:prstGeom prst="rect">
-            <a:avLst/>
-          </a:prstGeom>
-          <a:solidFill>
-            <a:srgbClr val="00B4D8"/>
-          </a:solidFill>
-          <a:ln>
-            <a:noFill/>
-          </a:ln>
-        </p:spPr>
-        <p:style>
-          <a:lnRef idx="1">
-            <a:schemeClr val="accent1"/>
-          </a:lnRef>
-          <a:fillRef idx="3">
-            <a:schemeClr val="accent1"/>
-          </a:fillRef>
-          <a:effectRef idx="2">
-            <a:schemeClr val="accent1"/>
-          </a:effectRef>
-          <a:fontRef idx="minor">
-            <a:schemeClr val="lt1"/>
-          </a:fontRef>
-        </p:style>
-        <p:txBody>
-          <a:bodyPr rtlCol="0" anchor="ctr"/>
-          <a:lstStyle/>
-          <a:p>
-            <a:pPr algn="ctr"/>
-          </a:p>
-        </p:txBody>
-      </p:sp>
-      <p:sp>
-        <p:nvSpPr>
-          <p:cNvPr id="16" name="TextBox 15"/>
-          <p:cNvSpPr txBox="1"/>
-          <p:nvPr/>
-        </p:nvSpPr>
-        <p:spPr>
-          <a:xfrm>
-            <a:off x="3931920" y="3941064"/>
-            <a:ext cx="7955279" cy="457200"/>
-          </a:xfrm>
-          <a:prstGeom prst="rect">
-            <a:avLst/>
-          </a:prstGeom>
-          <a:noFill/>
-        </p:spPr>
-        <p:txBody>
-          <a:bodyPr wrap="square">
-            <a:spAutoFit/>
-          </a:bodyPr>
-          <a:lstStyle/>
-          <a:p>
-            <a:pPr algn="l"/>
-            <a:r>
-              <a:rPr sz="1300" b="0" i="0">
-                <a:solidFill>
-                  <a:srgbClr val="0D1B2A"/>
-                </a:solidFill>
-              </a:rPr>
-              <a:t>New Integrations page: connect apps via OAuth, see active tools per solution</a:t>
-            </a:r>
-          </a:p>
-        </p:txBody>
-      </p:sp>
-      <p:sp>
-        <p:nvSpPr>
-          <p:cNvPr id="15" name="TextBox 14"/>
-          <p:cNvSpPr txBox="1"/>
-          <p:nvPr/>
-        </p:nvSpPr>
-        <p:spPr>
-          <a:xfrm>
-            <a:off x="411480" y="3922776"/>
-            <a:ext cx="3291840" cy="457200"/>
-          </a:xfrm>
-          <a:prstGeom prst="rect">
-            <a:avLst/>
-          </a:prstGeom>
-          <a:noFill/>
-        </p:spPr>
-        <p:txBody>
-          <a:bodyPr wrap="square">
-            <a:spAutoFit/>
-          </a:bodyPr>
-          <a:lstStyle/>
-          <a:p>
-            <a:pPr algn="ctr"/>
-            <a:r>
-              <a:rPr sz="1200" b="1" i="0">
-                <a:solidFill>
-                  <a:srgbClr val="FFFFFF"/>
-                </a:solidFill>
-              </a:rPr>
-              <a:t>Web UI</a:t>
-            </a:r>
-          </a:p>
-        </p:txBody>
-      </p:sp>
-      <p:sp>
-        <p:nvSpPr>
-          <p:cNvPr id="14" name="Rectangle 13"/>
-          <p:cNvSpPr/>
-          <p:nvPr/>
-        </p:nvSpPr>
-        <p:spPr>
-          <a:xfrm>
-            <a:off x="365760" y="3849624"/>
-            <a:ext cx="3383280" cy="594360"/>
-          </a:xfrm>
-          <a:prstGeom prst="rect">
-            <a:avLst/>
-          </a:prstGeom>
-          <a:solidFill>
-            <a:srgbClr val="00B4D8"/>
-          </a:solidFill>
-          <a:ln>
-            <a:noFill/>
-          </a:ln>
-        </p:spPr>
-        <p:style>
-          <a:lnRef idx="1">
-            <a:schemeClr val="accent1"/>
-          </a:lnRef>
-          <a:fillRef idx="3">
-            <a:schemeClr val="accent1"/>
-          </a:fillRef>
-          <a:effectRef idx="2">
-            <a:schemeClr val="accent1"/>
-          </a:effectRef>
-          <a:fontRef idx="minor">
-            <a:schemeClr val="lt1"/>
-          </a:fontRef>
-        </p:style>
-        <p:txBody>
-          <a:bodyPr rtlCol="0" anchor="ctr"/>
-          <a:lstStyle/>
-          <a:p>
-            <a:pPr algn="ctr"/>
-          </a:p>
-        </p:txBody>
-      </p:sp>
-      <p:sp>
-        <p:nvSpPr>
-          <p:cNvPr id="13" name="TextBox 12"/>
-          <p:cNvSpPr txBox="1"/>
-          <p:nvPr/>
-        </p:nvSpPr>
-        <p:spPr>
-          <a:xfrm>
-            <a:off x="3931920" y="3191256"/>
-            <a:ext cx="7955279" cy="457200"/>
-          </a:xfrm>
-          <a:prstGeom prst="rect">
-            <a:avLst/>
-          </a:prstGeom>
-          <a:noFill/>
-        </p:spPr>
-        <p:txBody>
-          <a:bodyPr wrap="square">
-            <a:spAutoFit/>
-          </a:bodyPr>
-          <a:lstStyle/>
-          <a:p>
-            <a:pPr algn="l"/>
-            <a:r>
-              <a:rPr sz="1300" b="0" i="0">
-                <a:solidFill>
-                  <a:srgbClr val="0D1B2A"/>
-                </a:solidFill>
-              </a:rPr>
-              <a:t>Uses existing langchain_tools.py — composio:github in project.yaml integrations</a:t>
-            </a:r>
-          </a:p>
-        </p:txBody>
-      </p:sp>
-      <p:sp>
-        <p:nvSpPr>
-          <p:cNvPr id="12" name="TextBox 11"/>
-          <p:cNvSpPr txBox="1"/>
-          <p:nvPr/>
-        </p:nvSpPr>
-        <p:spPr>
-          <a:xfrm>
-            <a:off x="411480" y="3172968"/>
-            <a:ext cx="3291840" cy="457200"/>
-          </a:xfrm>
-          <a:prstGeom prst="rect">
-            <a:avLst/>
-          </a:prstGeom>
-          <a:noFill/>
-        </p:spPr>
-        <p:txBody>
-          <a:bodyPr wrap="square">
-            <a:spAutoFit/>
-          </a:bodyPr>
-          <a:lstStyle/>
-          <a:p>
-            <a:pPr algn="ctr"/>
-            <a:r>
-              <a:rPr sz="1200" b="1" i="0">
-                <a:solidFill>
-                  <a:srgbClr val="FFFFFF"/>
-                </a:solidFill>
-              </a:rPr>
-              <a:t>LangChain Native</a:t>
-            </a:r>
-          </a:p>
-        </p:txBody>
-      </p:sp>
-      <p:sp>
-        <p:nvSpPr>
-          <p:cNvPr id="11" name="Rectangle 10"/>
-          <p:cNvSpPr/>
-          <p:nvPr/>
-        </p:nvSpPr>
-        <p:spPr>
-          <a:xfrm>
-            <a:off x="365760" y="3099816"/>
-            <a:ext cx="3383280" cy="594360"/>
-          </a:xfrm>
-          <a:prstGeom prst="rect">
-            <a:avLst/>
-          </a:prstGeom>
-          <a:solidFill>
-            <a:srgbClr val="00B4D8"/>
-          </a:solidFill>
-          <a:ln>
-            <a:noFill/>
-          </a:ln>
-        </p:spPr>
-        <p:style>
-          <a:lnRef idx="1">
-            <a:schemeClr val="accent1"/>
-          </a:lnRef>
-          <a:fillRef idx="3">
-            <a:schemeClr val="accent1"/>
-          </a:fillRef>
-          <a:effectRef idx="2">
-            <a:schemeClr val="accent1"/>
-          </a:effectRef>
-          <a:fontRef idx="minor">
-            <a:schemeClr val="lt1"/>
-          </a:fontRef>
-        </p:style>
-        <p:txBody>
-          <a:bodyPr rtlCol="0" anchor="ctr"/>
-          <a:lstStyle/>
-          <a:p>
-            <a:pPr algn="ctr"/>
-          </a:p>
-        </p:txBody>
-      </p:sp>
-      <p:sp>
-        <p:nvSpPr>
-          <p:cNvPr id="10" name="TextBox 9"/>
-          <p:cNvSpPr txBox="1"/>
-          <p:nvPr/>
-        </p:nvSpPr>
-        <p:spPr>
-          <a:xfrm>
-            <a:off x="3931920" y="2441448"/>
-            <a:ext cx="7955279" cy="457200"/>
-          </a:xfrm>
-          <a:prstGeom prst="rect">
-            <a:avLst/>
-          </a:prstGeom>
-          <a:noFill/>
-        </p:spPr>
-        <p:txBody>
-          <a:bodyPr wrap="square">
-            <a:spAutoFit/>
-          </a:bodyPr>
-          <a:lstStyle/>
-          <a:p>
-            <a:pPr algn="l"/>
-            <a:r>
-              <a:rPr sz="1300" b="0" i="0">
-                <a:solidFill>
-                  <a:srgbClr val="0D1B2A"/>
-                </a:solidFill>
-              </a:rPr>
-              <a:t>Composio manages auth flows — SAGE never stores third-party credentials</a:t>
-            </a:r>
-          </a:p>
-        </p:txBody>
-      </p:sp>
-      <p:sp>
-        <p:nvSpPr>
-          <p:cNvPr id="9" name="TextBox 8"/>
-          <p:cNvSpPr txBox="1"/>
-          <p:nvPr/>
-        </p:nvSpPr>
-        <p:spPr>
-          <a:xfrm>
-            <a:off x="411480" y="2423160"/>
-            <a:ext cx="3291840" cy="457200"/>
-          </a:xfrm>
-          <a:prstGeom prst="rect">
-            <a:avLst/>
-          </a:prstGeom>
-          <a:noFill/>
-        </p:spPr>
-        <p:txBody>
-          <a:bodyPr wrap="square">
-            <a:spAutoFit/>
-          </a:bodyPr>
-          <a:lstStyle/>
-          <a:p>
-            <a:pPr algn="ctr"/>
-            <a:r>
-              <a:rPr sz="1200" b="1" i="0">
-                <a:solidFill>
-                  <a:srgbClr val="FFFFFF"/>
-                </a:solidFill>
-              </a:rPr>
-              <a:t>OAuth Handled</a:t>
-            </a:r>
-          </a:p>
-        </p:txBody>
-      </p:sp>
-      <p:sp>
-        <p:nvSpPr>
-          <p:cNvPr id="8" name="Rectangle 7"/>
-          <p:cNvSpPr/>
-          <p:nvPr/>
-        </p:nvSpPr>
-        <p:spPr>
-          <a:xfrm>
-            <a:off x="365760" y="2350008"/>
-            <a:ext cx="3383280" cy="594360"/>
-          </a:xfrm>
-          <a:prstGeom prst="rect">
-            <a:avLst/>
-          </a:prstGeom>
-          <a:solidFill>
-            <a:srgbClr val="00B4D8"/>
-          </a:solidFill>
-          <a:ln>
-            <a:noFill/>
-          </a:ln>
-        </p:spPr>
-        <p:style>
-          <a:lnRef idx="1">
-            <a:schemeClr val="accent1"/>
-          </a:lnRef>
-          <a:fillRef idx="3">
-            <a:schemeClr val="accent1"/>
-          </a:fillRef>
-          <a:effectRef idx="2">
-            <a:schemeClr val="accent1"/>
-          </a:effectRef>
-          <a:fontRef idx="minor">
-            <a:schemeClr val="lt1"/>
-          </a:fontRef>
-        </p:style>
-        <p:txBody>
-          <a:bodyPr rtlCol="0" anchor="ctr"/>
-          <a:lstStyle/>
-          <a:p>
-            <a:pPr algn="ctr"/>
-          </a:p>
-        </p:txBody>
-      </p:sp>
-      <p:sp>
-        <p:nvSpPr>
-          <p:cNvPr id="7" name="TextBox 6"/>
-          <p:cNvSpPr txBox="1"/>
-          <p:nvPr/>
-        </p:nvSpPr>
-        <p:spPr>
-          <a:xfrm>
-            <a:off x="3931920" y="1691640"/>
-            <a:ext cx="7955279" cy="457200"/>
-          </a:xfrm>
-          <a:prstGeom prst="rect">
-            <a:avLst/>
-          </a:prstGeom>
-          <a:noFill/>
-        </p:spPr>
-        <p:txBody>
-          <a:bodyPr wrap="square">
-            <a:spAutoFit/>
-          </a:bodyPr>
-          <a:lstStyle/>
-          <a:p>
-            <a:pPr algn="l"/>
-            <a:r>
-              <a:rPr sz="1300" b="0" i="0">
-                <a:solidFill>
-                  <a:srgbClr val="0D1B2A"/>
-                </a:solidFill>
-              </a:rPr>
-              <a:t>GitHub, GitLab, Jira, Linear, Slack, Notion, Confluence, Salesforce, HubSpot, Zendesk, Stripe, Google Workspace, and 90+ more</a:t>
-            </a:r>
-          </a:p>
-        </p:txBody>
-      </p:sp>
-      <p:sp>
-        <p:nvSpPr>
-          <p:cNvPr id="6" name="TextBox 5"/>
-          <p:cNvSpPr txBox="1"/>
-          <p:nvPr/>
-        </p:nvSpPr>
-        <p:spPr>
-          <a:xfrm>
-            <a:off x="411480" y="1673352"/>
-            <a:ext cx="3291840" cy="457200"/>
-          </a:xfrm>
-          <a:prstGeom prst="rect">
-            <a:avLst/>
-          </a:prstGeom>
-          <a:noFill/>
-        </p:spPr>
-        <p:txBody>
-          <a:bodyPr wrap="square">
-            <a:spAutoFit/>
-          </a:bodyPr>
-          <a:lstStyle/>
-          <a:p>
-            <a:pPr algn="ctr"/>
-            <a:r>
-              <a:rPr sz="1200" b="1" i="0">
-                <a:solidFill>
-                  <a:srgbClr val="FFFFFF"/>
-                </a:solidFill>
-              </a:rPr>
-              <a:t>100+ Apps</a:t>
-            </a:r>
-          </a:p>
-        </p:txBody>
-      </p:sp>
-      <p:sp>
-        <p:nvSpPr>
-          <p:cNvPr id="5" name="Rectangle 4"/>
-          <p:cNvSpPr/>
-          <p:nvPr/>
-        </p:nvSpPr>
-        <p:spPr>
-          <a:xfrm>
-            <a:off x="365760" y="1600200"/>
-            <a:ext cx="3383280" cy="594360"/>
-          </a:xfrm>
-          <a:prstGeom prst="rect">
-            <a:avLst/>
-          </a:prstGeom>
-          <a:solidFill>
-            <a:srgbClr val="00B4D8"/>
-          </a:solidFill>
-          <a:ln>
-            <a:noFill/>
-          </a:ln>
-        </p:spPr>
-        <p:style>
-          <a:lnRef idx="1">
-            <a:schemeClr val="accent1"/>
-          </a:lnRef>
-          <a:fillRef idx="3">
-            <a:schemeClr val="accent1"/>
-          </a:fillRef>
-          <a:effectRef idx="2">
-            <a:schemeClr val="accent1"/>
-          </a:effectRef>
-          <a:fontRef idx="minor">
-            <a:schemeClr val="lt1"/>
-          </a:fontRef>
-        </p:style>
-        <p:txBody>
-          <a:bodyPr rtlCol="0" anchor="ctr"/>
-          <a:lstStyle/>
-          <a:p>
-            <a:pPr algn="ctr"/>
-          </a:p>
-        </p:txBody>
-      </p:sp>
-      <p:sp>
-        <p:nvSpPr>
-          <p:cNvPr id="4" name="TextBox 3"/>
-          <p:cNvSpPr txBox="1"/>
-          <p:nvPr/>
-        </p:nvSpPr>
-        <p:spPr>
-          <a:xfrm>
-            <a:off x="411480" y="804672"/>
-            <a:ext cx="11338560" cy="438912"/>
-          </a:xfrm>
-          <a:prstGeom prst="rect">
-            <a:avLst/>
-          </a:prstGeom>
-          <a:noFill/>
-        </p:spPr>
-        <p:txBody>
-          <a:bodyPr wrap="square">
-            <a:spAutoFit/>
-          </a:bodyPr>
-          <a:lstStyle/>
-          <a:p>
-            <a:pPr algn="l"/>
-            <a:r>
-              <a:rPr sz="1600" b="0" i="0">
-                <a:solidFill>
-                  <a:srgbClr val="00B4D8"/>
-                </a:solidFill>
-              </a:rPr>
-              <a:t>Connect any SaaS tool to SAGE agents — OAuth handled, no per-integration credential code</a:t>
-            </a:r>
-          </a:p>
-        </p:txBody>
-      </p:sp>
-      <p:sp>
-        <p:nvSpPr>
-          <p:cNvPr id="3" name="TextBox 2"/>
-          <p:cNvSpPr txBox="1"/>
-          <p:nvPr/>
-        </p:nvSpPr>
-        <p:spPr>
-          <a:xfrm>
-            <a:off x="411480" y="109728"/>
-            <a:ext cx="11338560" cy="731520"/>
-          </a:xfrm>
-          <a:prstGeom prst="rect">
-            <a:avLst/>
-          </a:prstGeom>
-          <a:noFill/>
-        </p:spPr>
-        <p:txBody>
-          <a:bodyPr wrap="square">
-            <a:spAutoFit/>
-          </a:bodyPr>
-          <a:lstStyle/>
-          <a:p>
-            <a:pPr algn="l"/>
-            <a:r>
-              <a:rPr sz="3000" b="1" i="0">
-                <a:solidFill>
-                  <a:srgbClr val="FFFFFF"/>
-                </a:solidFill>
-              </a:rPr>
-              <a:t>Composio Integration — 100+ Tools in One Package</a:t>
-            </a:r>
-          </a:p>
-        </p:txBody>
-      </p:sp>
-      <p:sp>
-        <p:nvSpPr>
-          <p:cNvPr id="2" name="Rectangle 1"/>
-          <p:cNvSpPr/>
-          <p:nvPr/>
-        </p:nvSpPr>
-        <p:spPr>
-          <a:xfrm>
-            <a:off x="0" y="0"/>
-            <a:ext cx="12188952" cy="1325880"/>
-          </a:xfrm>
-          <a:prstGeom prst="rect">
-            <a:avLst/>
-          </a:prstGeom>
-          <a:solidFill>
-            <a:srgbClr val="0D1B2A"/>
-          </a:solidFill>
-          <a:ln>
-            <a:noFill/>
-          </a:ln>
-        </p:spPr>
-        <p:style>
-          <a:lnRef idx="1">
-            <a:schemeClr val="accent1"/>
-          </a:lnRef>
-          <a:fillRef idx="3">
-            <a:schemeClr val="accent1"/>
-          </a:fillRef>
-          <a:effectRef idx="2">
-            <a:schemeClr val="accent1"/>
-          </a:effectRef>
-          <a:fontRef idx="minor">
-            <a:schemeClr val="lt1"/>
-          </a:fontRef>
-        </p:style>
-        <p:txBody>
-          <a:bodyPr rtlCol="0" anchor="ctr"/>
-          <a:lstStyle/>
-          <a:p>
-            <a:pPr algn="ctr"/>
-          </a:p>
-        </p:txBody>
-      </p:sp>
-    </p:spTree>
-  </p:cSld>
-  <p:clrMapOvr>
-    <a:masterClrMapping/>
-  </p:clrMapOvr>
-</p:sld>
-</file>
-
-<file path=ppt/slides/slide23.xml><?xml version="1.0" encoding="utf-8"?>
-<p:sld xmlns:a="http://schemas.openxmlformats.org/drawingml/2006/main" xmlns:p="http://schemas.openxmlformats.org/presentationml/2006/main" xmlns:r="http://schemas.openxmlformats.org/officeDocument/2006/relationships">
-  <p:cSld>
-    <p:spTree>
-      <p:nvGrpSpPr>
-        <p:cNvPr id="1" name=""/>
-        <p:cNvGrpSpPr/>
-        <p:nvPr/>
-      </p:nvGrpSpPr>
-      <p:grpSpPr/>
-      <p:sp>
-        <p:nvSpPr>
-          <p:cNvPr id="24" name="TextBox 23"/>
-          <p:cNvSpPr txBox="1"/>
-          <p:nvPr/>
-        </p:nvSpPr>
-        <p:spPr>
-          <a:xfrm>
-            <a:off x="274320" y="6510528"/>
-            <a:ext cx="8229600" cy="274320"/>
-          </a:xfrm>
-          <a:prstGeom prst="rect">
-            <a:avLst/>
-          </a:prstGeom>
-          <a:noFill/>
-        </p:spPr>
-        <p:txBody>
-          <a:bodyPr wrap="square">
-            <a:spAutoFit/>
-          </a:bodyPr>
-          <a:lstStyle/>
-          <a:p>
-            <a:pPr algn="l"/>
-            <a:r>
-              <a:rPr sz="900" b="0" i="0">
-                <a:solidFill>
-                  <a:srgbClr val="647487"/>
-                </a:solidFill>
-              </a:rPr>
-              <a:t>SAGE[ai] — Confidential | March 2026</a:t>
-            </a:r>
-          </a:p>
-        </p:txBody>
-      </p:sp>
-      <p:sp>
-        <p:nvSpPr>
-          <p:cNvPr id="23" name="Rectangle 22"/>
-          <p:cNvSpPr/>
-          <p:nvPr/>
-        </p:nvSpPr>
-        <p:spPr>
-          <a:xfrm>
-            <a:off x="0" y="6492240"/>
-            <a:ext cx="12188952" cy="365760"/>
-          </a:xfrm>
-          <a:prstGeom prst="rect">
-            <a:avLst/>
-          </a:prstGeom>
-          <a:solidFill>
-            <a:srgbClr val="0D1B2A"/>
-          </a:solidFill>
-          <a:ln>
-            <a:noFill/>
-          </a:ln>
-        </p:spPr>
-        <p:style>
-          <a:lnRef idx="1">
-            <a:schemeClr val="accent1"/>
-          </a:lnRef>
-          <a:fillRef idx="3">
-            <a:schemeClr val="accent1"/>
-          </a:fillRef>
-          <a:effectRef idx="2">
-            <a:schemeClr val="accent1"/>
-          </a:effectRef>
-          <a:fontRef idx="minor">
-            <a:schemeClr val="lt1"/>
-          </a:fontRef>
-        </p:style>
-        <p:txBody>
-          <a:bodyPr rtlCol="0" anchor="ctr"/>
-          <a:lstStyle/>
-          <a:p>
-            <a:pPr algn="ctr"/>
-          </a:p>
-        </p:txBody>
-      </p:sp>
-      <p:sp>
-        <p:nvSpPr>
-          <p:cNvPr id="22" name="TextBox 21"/>
-          <p:cNvSpPr txBox="1"/>
-          <p:nvPr/>
-        </p:nvSpPr>
-        <p:spPr>
-          <a:xfrm>
-            <a:off x="3931920" y="5440680"/>
-            <a:ext cx="7955279" cy="457200"/>
-          </a:xfrm>
-          <a:prstGeom prst="rect">
-            <a:avLst/>
-          </a:prstGeom>
-          <a:noFill/>
-        </p:spPr>
-        <p:txBody>
-          <a:bodyPr wrap="square">
-            <a:spAutoFit/>
-          </a:bodyPr>
-          <a:lstStyle/>
-          <a:p>
-            <a:pPr algn="l"/>
-            <a:r>
-              <a:rPr sz="1300" b="0" i="0">
-                <a:solidFill>
-                  <a:srgbClr val="0D1B2A"/>
-                </a:solidFill>
-              </a:rPr>
-              <a:t>Medical blue, game studio purple, startup green — no Tailwind dependency</a:t>
-            </a:r>
-          </a:p>
-        </p:txBody>
-      </p:sp>
-      <p:sp>
-        <p:nvSpPr>
-          <p:cNvPr id="21" name="TextBox 20"/>
-          <p:cNvSpPr txBox="1"/>
-          <p:nvPr/>
-        </p:nvSpPr>
-        <p:spPr>
-          <a:xfrm>
-            <a:off x="411480" y="5422392"/>
-            <a:ext cx="3291840" cy="457200"/>
-          </a:xfrm>
-          <a:prstGeom prst="rect">
-            <a:avLst/>
-          </a:prstGeom>
-          <a:noFill/>
-        </p:spPr>
-        <p:txBody>
-          <a:bodyPr wrap="square">
-            <a:spAutoFit/>
-          </a:bodyPr>
-          <a:lstStyle/>
-          <a:p>
-            <a:pPr algn="ctr"/>
-            <a:r>
-              <a:rPr sz="1200" b="1" i="0">
-                <a:solidFill>
-                  <a:srgbClr val="FFFFFF"/>
-                </a:solidFill>
-              </a:rPr>
-              <a:t>Example Themes</a:t>
-            </a:r>
-          </a:p>
-        </p:txBody>
-      </p:sp>
-      <p:sp>
-        <p:nvSpPr>
-          <p:cNvPr id="20" name="Rectangle 19"/>
-          <p:cNvSpPr/>
-          <p:nvPr/>
-        </p:nvSpPr>
-        <p:spPr>
-          <a:xfrm>
-            <a:off x="365760" y="5349240"/>
-            <a:ext cx="3383280" cy="594360"/>
-          </a:xfrm>
-          <a:prstGeom prst="rect">
-            <a:avLst/>
-          </a:prstGeom>
-          <a:solidFill>
-            <a:srgbClr val="00B4D8"/>
-          </a:solidFill>
-          <a:ln>
-            <a:noFill/>
-          </a:ln>
-        </p:spPr>
-        <p:style>
-          <a:lnRef idx="1">
-            <a:schemeClr val="accent1"/>
-          </a:lnRef>
-          <a:fillRef idx="3">
-            <a:schemeClr val="accent1"/>
-          </a:fillRef>
-          <a:effectRef idx="2">
-            <a:schemeClr val="accent1"/>
-          </a:effectRef>
-          <a:fontRef idx="minor">
-            <a:schemeClr val="lt1"/>
-          </a:fontRef>
-        </p:style>
-        <p:txBody>
-          <a:bodyPr rtlCol="0" anchor="ctr"/>
-          <a:lstStyle/>
-          <a:p>
-            <a:pPr algn="ctr"/>
-          </a:p>
-        </p:txBody>
-      </p:sp>
-      <p:sp>
-        <p:nvSpPr>
-          <p:cNvPr id="19" name="TextBox 18"/>
-          <p:cNvSpPr txBox="1"/>
-          <p:nvPr/>
-        </p:nvSpPr>
-        <p:spPr>
-          <a:xfrm>
-            <a:off x="3931920" y="4690872"/>
-            <a:ext cx="7955279" cy="457200"/>
-          </a:xfrm>
-          <a:prstGeom prst="rect">
-            <a:avLst/>
-          </a:prstGeom>
-          <a:noFill/>
-        </p:spPr>
-        <p:txBody>
-          <a:bodyPr wrap="square">
-            <a:spAutoFit/>
-          </a:bodyPr>
-          <a:lstStyle/>
-          <a:p>
-            <a:pPr algn="l"/>
-            <a:r>
-              <a:rPr sz="1300" b="0" i="0">
-                <a:solidFill>
-                  <a:srgbClr val="0D1B2A"/>
-                </a:solidFill>
-              </a:rPr>
-              <a:t>ThemeProvider writes CSS variables to document.documentElement — switches instantly</a:t>
-            </a:r>
-          </a:p>
-        </p:txBody>
-      </p:sp>
-      <p:sp>
-        <p:nvSpPr>
-          <p:cNvPr id="18" name="TextBox 17"/>
-          <p:cNvSpPr txBox="1"/>
-          <p:nvPr/>
-        </p:nvSpPr>
-        <p:spPr>
-          <a:xfrm>
-            <a:off x="411480" y="4672584"/>
-            <a:ext cx="3291840" cy="457200"/>
-          </a:xfrm>
-          <a:prstGeom prst="rect">
-            <a:avLst/>
-          </a:prstGeom>
-          <a:noFill/>
-        </p:spPr>
-        <p:txBody>
-          <a:bodyPr wrap="square">
-            <a:spAutoFit/>
-          </a:bodyPr>
-          <a:lstStyle/>
-          <a:p>
-            <a:pPr algn="ctr"/>
-            <a:r>
-              <a:rPr sz="1200" b="1" i="0">
-                <a:solidFill>
-                  <a:srgbClr val="FFFFFF"/>
-                </a:solidFill>
-              </a:rPr>
-              <a:t>CSS Variables</a:t>
-            </a:r>
-          </a:p>
-        </p:txBody>
-      </p:sp>
-      <p:sp>
-        <p:nvSpPr>
-          <p:cNvPr id="17" name="Rectangle 16"/>
-          <p:cNvSpPr/>
-          <p:nvPr/>
-        </p:nvSpPr>
-        <p:spPr>
-          <a:xfrm>
-            <a:off x="365760" y="4599432"/>
-            <a:ext cx="3383280" cy="594360"/>
-          </a:xfrm>
-          <a:prstGeom prst="rect">
-            <a:avLst/>
-          </a:prstGeom>
-          <a:solidFill>
-            <a:srgbClr val="00B4D8"/>
-          </a:solidFill>
-          <a:ln>
-            <a:noFill/>
-          </a:ln>
-        </p:spPr>
-        <p:style>
-          <a:lnRef idx="1">
-            <a:schemeClr val="accent1"/>
-          </a:lnRef>
-          <a:fillRef idx="3">
-            <a:schemeClr val="accent1"/>
-          </a:fillRef>
-          <a:effectRef idx="2">
-            <a:schemeClr val="accent1"/>
-          </a:effectRef>
-          <a:fontRef idx="minor">
-            <a:schemeClr val="lt1"/>
-          </a:fontRef>
-        </p:style>
-        <p:txBody>
-          <a:bodyPr rtlCol="0" anchor="ctr"/>
-          <a:lstStyle/>
-          <a:p>
-            <a:pPr algn="ctr"/>
-          </a:p>
-        </p:txBody>
-      </p:sp>
-      <p:sp>
-        <p:nvSpPr>
-          <p:cNvPr id="16" name="TextBox 15"/>
-          <p:cNvSpPr txBox="1"/>
-          <p:nvPr/>
-        </p:nvSpPr>
-        <p:spPr>
-          <a:xfrm>
-            <a:off x="3931920" y="3941064"/>
-            <a:ext cx="7955279" cy="457200"/>
-          </a:xfrm>
-          <a:prstGeom prst="rect">
-            <a:avLst/>
-          </a:prstGeom>
-          <a:noFill/>
-        </p:spPr>
-        <p:txBody>
-          <a:bodyPr wrap="square">
-            <a:spAutoFit/>
-          </a:bodyPr>
-          <a:lstStyle/>
-          <a:p>
-            <a:pPr algn="l"/>
-            <a:r>
-              <a:rPr sz="1300" b="0" i="0">
-                <a:solidFill>
-                  <a:srgbClr val="0D1B2A"/>
-                </a:solidFill>
-              </a:rPr>
-              <a:t>theme: block in project.yaml — sidebar_bg, accent, badge_bg CSS colour strings</a:t>
-            </a:r>
-          </a:p>
-        </p:txBody>
-      </p:sp>
-      <p:sp>
-        <p:nvSpPr>
-          <p:cNvPr id="15" name="TextBox 14"/>
-          <p:cNvSpPr txBox="1"/>
-          <p:nvPr/>
-        </p:nvSpPr>
-        <p:spPr>
-          <a:xfrm>
-            <a:off x="411480" y="3922776"/>
-            <a:ext cx="3291840" cy="457200"/>
-          </a:xfrm>
-          <a:prstGeom prst="rect">
-            <a:avLst/>
-          </a:prstGeom>
-          <a:noFill/>
-        </p:spPr>
-        <p:txBody>
-          <a:bodyPr wrap="square">
-            <a:spAutoFit/>
-          </a:bodyPr>
-          <a:lstStyle/>
-          <a:p>
-            <a:pPr algn="ctr"/>
-            <a:r>
-              <a:rPr sz="1200" b="1" i="0">
-                <a:solidFill>
-                  <a:srgbClr val="FFFFFF"/>
-                </a:solidFill>
-              </a:rPr>
-              <a:t>Solution Theming</a:t>
-            </a:r>
-          </a:p>
-        </p:txBody>
-      </p:sp>
-      <p:sp>
-        <p:nvSpPr>
-          <p:cNvPr id="14" name="Rectangle 13"/>
-          <p:cNvSpPr/>
-          <p:nvPr/>
-        </p:nvSpPr>
-        <p:spPr>
-          <a:xfrm>
-            <a:off x="365760" y="3849624"/>
-            <a:ext cx="3383280" cy="594360"/>
-          </a:xfrm>
-          <a:prstGeom prst="rect">
-            <a:avLst/>
-          </a:prstGeom>
-          <a:solidFill>
-            <a:srgbClr val="00B4D8"/>
-          </a:solidFill>
-          <a:ln>
-            <a:noFill/>
-          </a:ln>
-        </p:spPr>
-        <p:style>
-          <a:lnRef idx="1">
-            <a:schemeClr val="accent1"/>
-          </a:lnRef>
-          <a:fillRef idx="3">
-            <a:schemeClr val="accent1"/>
-          </a:fillRef>
-          <a:effectRef idx="2">
-            <a:schemeClr val="accent1"/>
-          </a:effectRef>
-          <a:fontRef idx="minor">
-            <a:schemeClr val="lt1"/>
-          </a:fontRef>
-        </p:style>
-        <p:txBody>
-          <a:bodyPr rtlCol="0" anchor="ctr"/>
-          <a:lstStyle/>
-          <a:p>
-            <a:pPr algn="ctr"/>
-          </a:p>
-        </p:txBody>
-      </p:sp>
-      <p:sp>
-        <p:nvSpPr>
-          <p:cNvPr id="13" name="TextBox 12"/>
-          <p:cNvSpPr txBox="1"/>
-          <p:nvPr/>
-        </p:nvSpPr>
-        <p:spPr>
-          <a:xfrm>
-            <a:off x="3931920" y="3191256"/>
-            <a:ext cx="7955279" cy="457200"/>
-          </a:xfrm>
-          <a:prstGeom prst="rect">
-            <a:avLst/>
-          </a:prstGeom>
-          <a:noFill/>
-        </p:spPr>
-        <p:txBody>
-          <a:bodyPr wrap="square">
-            <a:spAutoFit/>
-          </a:bodyPr>
-          <a:lstStyle/>
-          <a:p>
-            <a:pPr algn="l"/>
-            <a:r>
-              <a:rPr sz="1300" b="0" i="0">
-                <a:solidFill>
-                  <a:srgbClr val="0D1B2A"/>
-                </a:solidFill>
-              </a:rPr>
-              <a:t>Backed by POST /agents/hire — optionally add task types (written to tasks.yaml)</a:t>
-            </a:r>
-          </a:p>
-        </p:txBody>
-      </p:sp>
-      <p:sp>
-        <p:nvSpPr>
-          <p:cNvPr id="12" name="TextBox 11"/>
-          <p:cNvSpPr txBox="1"/>
-          <p:nvPr/>
-        </p:nvSpPr>
-        <p:spPr>
-          <a:xfrm>
-            <a:off x="411480" y="3172968"/>
-            <a:ext cx="3291840" cy="457200"/>
-          </a:xfrm>
-          <a:prstGeom prst="rect">
-            <a:avLst/>
-          </a:prstGeom>
-          <a:noFill/>
-        </p:spPr>
-        <p:txBody>
-          <a:bodyPr wrap="square">
-            <a:spAutoFit/>
-          </a:bodyPr>
-          <a:lstStyle/>
-          <a:p>
-            <a:pPr algn="ctr"/>
-            <a:r>
-              <a:rPr sz="1200" b="1" i="0">
-                <a:solidFill>
-                  <a:srgbClr val="FFFFFF"/>
-                </a:solidFill>
-              </a:rPr>
-              <a:t>API Backed</a:t>
-            </a:r>
-          </a:p>
-        </p:txBody>
-      </p:sp>
-      <p:sp>
-        <p:nvSpPr>
-          <p:cNvPr id="11" name="Rectangle 10"/>
-          <p:cNvSpPr/>
-          <p:nvPr/>
-        </p:nvSpPr>
-        <p:spPr>
-          <a:xfrm>
-            <a:off x="365760" y="3099816"/>
-            <a:ext cx="3383280" cy="594360"/>
-          </a:xfrm>
-          <a:prstGeom prst="rect">
-            <a:avLst/>
-          </a:prstGeom>
-          <a:solidFill>
-            <a:srgbClr val="00B4D8"/>
-          </a:solidFill>
-          <a:ln>
-            <a:noFill/>
-          </a:ln>
-        </p:spPr>
-        <p:style>
-          <a:lnRef idx="1">
-            <a:schemeClr val="accent1"/>
-          </a:lnRef>
-          <a:fillRef idx="3">
-            <a:schemeClr val="accent1"/>
-          </a:fillRef>
-          <a:effectRef idx="2">
-            <a:schemeClr val="accent1"/>
-          </a:effectRef>
-          <a:fontRef idx="minor">
-            <a:schemeClr val="lt1"/>
-          </a:fontRef>
-        </p:style>
-        <p:txBody>
-          <a:bodyPr rtlCol="0" anchor="ctr"/>
-          <a:lstStyle/>
-          <a:p>
-            <a:pPr algn="ctr"/>
-          </a:p>
-        </p:txBody>
-      </p:sp>
-      <p:sp>
-        <p:nvSpPr>
-          <p:cNvPr id="10" name="TextBox 9"/>
-          <p:cNvSpPr txBox="1"/>
-          <p:nvPr/>
-        </p:nvSpPr>
-        <p:spPr>
-          <a:xfrm>
-            <a:off x="3931920" y="2441448"/>
-            <a:ext cx="7955279" cy="457200"/>
-          </a:xfrm>
-          <a:prstGeom prst="rect">
-            <a:avLst/>
-          </a:prstGeom>
-          <a:noFill/>
-        </p:spPr>
-        <p:txBody>
-          <a:bodyPr wrap="square">
-            <a:spAutoFit/>
-          </a:bodyPr>
-          <a:lstStyle/>
-          <a:p>
-            <a:pPr algn="l"/>
-            <a:r>
-              <a:rPr sz="1300" b="0" i="0">
-                <a:solidFill>
-                  <a:srgbClr val="0D1B2A"/>
-                </a:solidFill>
-              </a:rPr>
-              <a:t>Creates HITL proposal — approve on Dashboard — role appears in Agents page immediately</a:t>
-            </a:r>
-          </a:p>
-        </p:txBody>
-      </p:sp>
-      <p:sp>
-        <p:nvSpPr>
-          <p:cNvPr id="9" name="TextBox 8"/>
-          <p:cNvSpPr txBox="1"/>
-          <p:nvPr/>
-        </p:nvSpPr>
-        <p:spPr>
-          <a:xfrm>
-            <a:off x="411480" y="2423160"/>
-            <a:ext cx="3291840" cy="457200"/>
-          </a:xfrm>
-          <a:prstGeom prst="rect">
-            <a:avLst/>
-          </a:prstGeom>
-          <a:noFill/>
-        </p:spPr>
-        <p:txBody>
-          <a:bodyPr wrap="square">
-            <a:spAutoFit/>
-          </a:bodyPr>
-          <a:lstStyle/>
-          <a:p>
-            <a:pPr algn="ctr"/>
-            <a:r>
-              <a:rPr sz="1200" b="1" i="0">
-                <a:solidFill>
-                  <a:srgbClr val="FFFFFF"/>
-                </a:solidFill>
-              </a:rPr>
-              <a:t>HITL Approval</a:t>
-            </a:r>
-          </a:p>
-        </p:txBody>
-      </p:sp>
-      <p:sp>
-        <p:nvSpPr>
-          <p:cNvPr id="8" name="Rectangle 7"/>
-          <p:cNvSpPr/>
-          <p:nvPr/>
-        </p:nvSpPr>
-        <p:spPr>
-          <a:xfrm>
-            <a:off x="365760" y="2350008"/>
-            <a:ext cx="3383280" cy="594360"/>
-          </a:xfrm>
-          <a:prstGeom prst="rect">
-            <a:avLst/>
-          </a:prstGeom>
-          <a:solidFill>
-            <a:srgbClr val="00B4D8"/>
-          </a:solidFill>
-          <a:ln>
-            <a:noFill/>
-          </a:ln>
-        </p:spPr>
-        <p:style>
-          <a:lnRef idx="1">
-            <a:schemeClr val="accent1"/>
-          </a:lnRef>
-          <a:fillRef idx="3">
-            <a:schemeClr val="accent1"/>
-          </a:fillRef>
-          <a:effectRef idx="2">
-            <a:schemeClr val="accent1"/>
-          </a:effectRef>
-          <a:fontRef idx="minor">
-            <a:schemeClr val="lt1"/>
-          </a:fontRef>
-        </p:style>
-        <p:txBody>
-          <a:bodyPr rtlCol="0" anchor="ctr"/>
-          <a:lstStyle/>
-          <a:p>
-            <a:pPr algn="ctr"/>
-          </a:p>
-        </p:txBody>
-      </p:sp>
-      <p:sp>
-        <p:nvSpPr>
-          <p:cNvPr id="7" name="TextBox 6"/>
-          <p:cNvSpPr txBox="1"/>
-          <p:nvPr/>
-        </p:nvSpPr>
-        <p:spPr>
-          <a:xfrm>
-            <a:off x="3931920" y="1691640"/>
-            <a:ext cx="7955279" cy="457200"/>
-          </a:xfrm>
-          <a:prstGeom prst="rect">
-            <a:avLst/>
-          </a:prstGeom>
-          <a:noFill/>
-        </p:spPr>
-        <p:txBody>
-          <a:bodyPr wrap="square">
-            <a:spAutoFit/>
-          </a:bodyPr>
-          <a:lstStyle/>
-          <a:p>
-            <a:pPr algn="l"/>
-            <a:r>
-              <a:rPr sz="1300" b="0" i="0">
-                <a:solidFill>
-                  <a:srgbClr val="0D1B2A"/>
-                </a:solidFill>
-              </a:rPr>
-              <a:t>From the web UI, click Hire Agent — choose icon, name, description, system prompt</a:t>
-            </a:r>
-          </a:p>
-        </p:txBody>
-      </p:sp>
-      <p:sp>
-        <p:nvSpPr>
-          <p:cNvPr id="6" name="TextBox 5"/>
-          <p:cNvSpPr txBox="1"/>
-          <p:nvPr/>
-        </p:nvSpPr>
-        <p:spPr>
-          <a:xfrm>
-            <a:off x="411480" y="1673352"/>
-            <a:ext cx="3291840" cy="457200"/>
-          </a:xfrm>
-          <a:prstGeom prst="rect">
-            <a:avLst/>
-          </a:prstGeom>
-          <a:noFill/>
-        </p:spPr>
-        <p:txBody>
-          <a:bodyPr wrap="square">
-            <a:spAutoFit/>
-          </a:bodyPr>
-          <a:lstStyle/>
-          <a:p>
-            <a:pPr algn="ctr"/>
-            <a:r>
-              <a:rPr sz="1200" b="1" i="0">
-                <a:solidFill>
-                  <a:srgbClr val="FFFFFF"/>
-                </a:solidFill>
-              </a:rPr>
-              <a:t>Hire Agent (Web UI)</a:t>
-            </a:r>
-          </a:p>
-        </p:txBody>
-      </p:sp>
-      <p:sp>
-        <p:nvSpPr>
-          <p:cNvPr id="5" name="Rectangle 4"/>
-          <p:cNvSpPr/>
-          <p:nvPr/>
-        </p:nvSpPr>
-        <p:spPr>
-          <a:xfrm>
-            <a:off x="365760" y="1600200"/>
-            <a:ext cx="3383280" cy="594360"/>
-          </a:xfrm>
-          <a:prstGeom prst="rect">
-            <a:avLst/>
-          </a:prstGeom>
-          <a:solidFill>
-            <a:srgbClr val="00B4D8"/>
-          </a:solidFill>
-          <a:ln>
-            <a:noFill/>
-          </a:ln>
-        </p:spPr>
-        <p:style>
-          <a:lnRef idx="1">
-            <a:schemeClr val="accent1"/>
-          </a:lnRef>
-          <a:fillRef idx="3">
-            <a:schemeClr val="accent1"/>
-          </a:fillRef>
-          <a:effectRef idx="2">
-            <a:schemeClr val="accent1"/>
-          </a:effectRef>
-          <a:fontRef idx="minor">
-            <a:schemeClr val="lt1"/>
-          </a:fontRef>
-        </p:style>
-        <p:txBody>
-          <a:bodyPr rtlCol="0" anchor="ctr"/>
-          <a:lstStyle/>
-          <a:p>
-            <a:pPr algn="ctr"/>
-          </a:p>
-        </p:txBody>
-      </p:sp>
-      <p:sp>
-        <p:nvSpPr>
-          <p:cNvPr id="4" name="TextBox 3"/>
-          <p:cNvSpPr txBox="1"/>
-          <p:nvPr/>
-        </p:nvSpPr>
-        <p:spPr>
-          <a:xfrm>
-            <a:off x="411480" y="804672"/>
-            <a:ext cx="11338560" cy="438912"/>
-          </a:xfrm>
-          <a:prstGeom prst="rect">
-            <a:avLst/>
-          </a:prstGeom>
-          <a:noFill/>
-        </p:spPr>
-        <p:txBody>
-          <a:bodyPr wrap="square">
-            <a:spAutoFit/>
-          </a:bodyPr>
-          <a:lstStyle/>
-          <a:p>
-            <a:pPr algn="l"/>
-            <a:r>
-              <a:rPr sz="1600" b="0" i="0">
-                <a:solidFill>
-                  <a:srgbClr val="00B4D8"/>
-                </a:solidFill>
-              </a:rPr>
-              <a:t>Extend agents and brand the UI without touching code or YAML files</a:t>
-            </a:r>
-          </a:p>
-        </p:txBody>
-      </p:sp>
-      <p:sp>
-        <p:nvSpPr>
-          <p:cNvPr id="3" name="TextBox 2"/>
-          <p:cNvSpPr txBox="1"/>
-          <p:nvPr/>
-        </p:nvSpPr>
-        <p:spPr>
-          <a:xfrm>
-            <a:off x="411480" y="109728"/>
-            <a:ext cx="11338560" cy="731520"/>
-          </a:xfrm>
-          <a:prstGeom prst="rect">
-            <a:avLst/>
-          </a:prstGeom>
-          <a:noFill/>
-        </p:spPr>
-        <p:txBody>
-          <a:bodyPr wrap="square">
-            <a:spAutoFit/>
-          </a:bodyPr>
-          <a:lstStyle/>
-          <a:p>
-            <a:pPr algn="l"/>
-            <a:r>
-              <a:rPr sz="3000" b="1" i="0">
-                <a:solidFill>
-                  <a:srgbClr val="FFFFFF"/>
-                </a:solidFill>
-              </a:rPr>
-              <a:t>Hire Agent &amp; Solution Theming — Runtime Customisation</a:t>
-            </a:r>
-          </a:p>
-        </p:txBody>
-      </p:sp>
-      <p:sp>
-        <p:nvSpPr>
-          <p:cNvPr id="2" name="Rectangle 1"/>
-          <p:cNvSpPr/>
-          <p:nvPr/>
-        </p:nvSpPr>
-        <p:spPr>
-          <a:xfrm>
-            <a:off x="0" y="0"/>
-            <a:ext cx="12188952" cy="1325880"/>
-          </a:xfrm>
-          <a:prstGeom prst="rect">
-            <a:avLst/>
-          </a:prstGeom>
-          <a:solidFill>
-            <a:srgbClr val="0D1B2A"/>
-          </a:solidFill>
-          <a:ln>
-            <a:noFill/>
-          </a:ln>
-        </p:spPr>
-        <p:style>
-          <a:lnRef idx="1">
-            <a:schemeClr val="accent1"/>
-          </a:lnRef>
-          <a:fillRef idx="3">
-            <a:schemeClr val="accent1"/>
-          </a:fillRef>
-          <a:effectRef idx="2">
-            <a:schemeClr val="accent1"/>
-          </a:effectRef>
-          <a:fontRef idx="minor">
-            <a:schemeClr val="lt1"/>
-          </a:fontRef>
-        </p:style>
-        <p:txBody>
-          <a:bodyPr rtlCol="0" anchor="ctr"/>
-          <a:lstStyle/>
-          <a:p>
-            <a:pPr algn="ctr"/>
-          </a:p>
-        </p:txBody>
-      </p:sp>
-    </p:spTree>
-  </p:cSld>
-  <p:clrMapOvr>
-    <a:masterClrMapping/>
-  </p:clrMapOvr>
-</p:sld>
-</file>
-
-<file path=ppt/slides/slide24.xml><?xml version="1.0" encoding="utf-8"?>
-<p:sld xmlns:a="http://schemas.openxmlformats.org/drawingml/2006/main" xmlns:p="http://schemas.openxmlformats.org/presentationml/2006/main" xmlns:r="http://schemas.openxmlformats.org/officeDocument/2006/relationships">
-  <p:cSld>
-    <p:spTree>
-      <p:nvGrpSpPr>
-        <p:cNvPr id="1" name=""/>
-        <p:cNvGrpSpPr/>
-        <p:nvPr/>
-      </p:nvGrpSpPr>
-      <p:grpSpPr/>
-      <p:sp>
-        <p:nvSpPr>
-          <p:cNvPr id="24" name="TextBox 23"/>
-          <p:cNvSpPr txBox="1"/>
-          <p:nvPr/>
-        </p:nvSpPr>
-        <p:spPr>
-          <a:xfrm>
-            <a:off x="274320" y="6510528"/>
-            <a:ext cx="8229600" cy="274320"/>
-          </a:xfrm>
-          <a:prstGeom prst="rect">
-            <a:avLst/>
-          </a:prstGeom>
-          <a:noFill/>
-        </p:spPr>
-        <p:txBody>
-          <a:bodyPr wrap="square">
-            <a:spAutoFit/>
-          </a:bodyPr>
-          <a:lstStyle/>
-          <a:p>
-            <a:pPr algn="l"/>
-            <a:r>
-              <a:rPr sz="900" b="0" i="0">
-                <a:solidFill>
-                  <a:srgbClr val="647487"/>
-                </a:solidFill>
-              </a:rPr>
-              <a:t>SAGE[ai] — Confidential | March 2026</a:t>
-            </a:r>
-          </a:p>
-        </p:txBody>
-      </p:sp>
-      <p:sp>
-        <p:nvSpPr>
-          <p:cNvPr id="23" name="Rectangle 22"/>
-          <p:cNvSpPr/>
-          <p:nvPr/>
-        </p:nvSpPr>
-        <p:spPr>
-          <a:xfrm>
-            <a:off x="0" y="6492240"/>
-            <a:ext cx="12188952" cy="365760"/>
-          </a:xfrm>
-          <a:prstGeom prst="rect">
-            <a:avLst/>
-          </a:prstGeom>
-          <a:solidFill>
-            <a:srgbClr val="0D1B2A"/>
-          </a:solidFill>
-          <a:ln>
-            <a:noFill/>
-          </a:ln>
-        </p:spPr>
-        <p:style>
-          <a:lnRef idx="1">
-            <a:schemeClr val="accent1"/>
-          </a:lnRef>
-          <a:fillRef idx="3">
-            <a:schemeClr val="accent1"/>
-          </a:fillRef>
-          <a:effectRef idx="2">
-            <a:schemeClr val="accent1"/>
-          </a:effectRef>
-          <a:fontRef idx="minor">
-            <a:schemeClr val="lt1"/>
-          </a:fontRef>
-        </p:style>
-        <p:txBody>
-          <a:bodyPr rtlCol="0" anchor="ctr"/>
-          <a:lstStyle/>
-          <a:p>
-            <a:pPr algn="ctr"/>
-          </a:p>
-        </p:txBody>
-      </p:sp>
-      <p:sp>
-        <p:nvSpPr>
-          <p:cNvPr id="22" name="TextBox 21"/>
-          <p:cNvSpPr txBox="1"/>
-          <p:nvPr/>
-        </p:nvSpPr>
-        <p:spPr>
-          <a:xfrm>
-            <a:off x="3931920" y="5440680"/>
-            <a:ext cx="7955279" cy="457200"/>
-          </a:xfrm>
-          <a:prstGeom prst="rect">
-            <a:avLst/>
-          </a:prstGeom>
-          <a:noFill/>
-        </p:spPr>
-        <p:txBody>
-          <a:bodyPr wrap="square">
-            <a:spAutoFit/>
-          </a:bodyPr>
-          <a:lstStyle/>
-          <a:p>
-            <a:pPr algn="l"/>
-            <a:r>
-              <a:rPr sz="1300" b="0" i="0">
-                <a:solidFill>
-                  <a:srgbClr val="0D1B2A"/>
-                </a:solidFill>
-              </a:rPr>
-              <a:t>pip install composio-langchain + COMPOSIO_API_KEY — no per-tool code</a:t>
-            </a:r>
-          </a:p>
-        </p:txBody>
-      </p:sp>
-      <p:sp>
-        <p:nvSpPr>
-          <p:cNvPr id="21" name="TextBox 20"/>
-          <p:cNvSpPr txBox="1"/>
-          <p:nvPr/>
-        </p:nvSpPr>
-        <p:spPr>
-          <a:xfrm>
-            <a:off x="411480" y="5422392"/>
-            <a:ext cx="3291840" cy="457200"/>
-          </a:xfrm>
-          <a:prstGeom prst="rect">
-            <a:avLst/>
-          </a:prstGeom>
-          <a:noFill/>
-        </p:spPr>
-        <p:txBody>
-          <a:bodyPr wrap="square">
-            <a:spAutoFit/>
-          </a:bodyPr>
-          <a:lstStyle/>
-          <a:p>
-            <a:pPr algn="ctr"/>
-            <a:r>
-              <a:rPr sz="1200" b="1" i="0">
-                <a:solidFill>
-                  <a:srgbClr val="FFFFFF"/>
-                </a:solidFill>
-              </a:rPr>
-              <a:t>Zero Code</a:t>
-            </a:r>
-          </a:p>
-        </p:txBody>
-      </p:sp>
-      <p:sp>
-        <p:nvSpPr>
-          <p:cNvPr id="20" name="Rectangle 19"/>
-          <p:cNvSpPr/>
-          <p:nvPr/>
-        </p:nvSpPr>
-        <p:spPr>
-          <a:xfrm>
-            <a:off x="365760" y="5349240"/>
-            <a:ext cx="3383280" cy="594360"/>
-          </a:xfrm>
-          <a:prstGeom prst="rect">
-            <a:avLst/>
-          </a:prstGeom>
-          <a:solidFill>
-            <a:srgbClr val="00B4D8"/>
-          </a:solidFill>
-          <a:ln>
-            <a:noFill/>
-          </a:ln>
-        </p:spPr>
-        <p:style>
-          <a:lnRef idx="1">
-            <a:schemeClr val="accent1"/>
-          </a:lnRef>
-          <a:fillRef idx="3">
-            <a:schemeClr val="accent1"/>
-          </a:fillRef>
-          <a:effectRef idx="2">
-            <a:schemeClr val="accent1"/>
-          </a:effectRef>
-          <a:fontRef idx="minor">
-            <a:schemeClr val="lt1"/>
-          </a:fontRef>
-        </p:style>
-        <p:txBody>
-          <a:bodyPr rtlCol="0" anchor="ctr"/>
-          <a:lstStyle/>
-          <a:p>
-            <a:pPr algn="ctr"/>
-          </a:p>
-        </p:txBody>
-      </p:sp>
-      <p:sp>
-        <p:nvSpPr>
-          <p:cNvPr id="19" name="TextBox 18"/>
-          <p:cNvSpPr txBox="1"/>
-          <p:nvPr/>
-        </p:nvSpPr>
-        <p:spPr>
-          <a:xfrm>
-            <a:off x="3931920" y="4690872"/>
-            <a:ext cx="7955279" cy="457200"/>
-          </a:xfrm>
-          <a:prstGeom prst="rect">
-            <a:avLst/>
-          </a:prstGeom>
-          <a:noFill/>
-        </p:spPr>
-        <p:txBody>
-          <a:bodyPr wrap="square">
-            <a:spAutoFit/>
-          </a:bodyPr>
-          <a:lstStyle/>
-          <a:p>
-            <a:pPr algn="l"/>
-            <a:r>
-              <a:rPr sz="1300" b="0" i="0">
-                <a:solidFill>
-                  <a:srgbClr val="0D1B2A"/>
-                </a:solidFill>
-              </a:rPr>
-              <a:t>POST /integrations/composio/connect creates a proposal — approve on Dashboard</a:t>
-            </a:r>
-          </a:p>
-        </p:txBody>
-      </p:sp>
-      <p:sp>
-        <p:nvSpPr>
-          <p:cNvPr id="18" name="TextBox 17"/>
-          <p:cNvSpPr txBox="1"/>
-          <p:nvPr/>
-        </p:nvSpPr>
-        <p:spPr>
-          <a:xfrm>
-            <a:off x="411480" y="4672584"/>
-            <a:ext cx="3291840" cy="457200"/>
-          </a:xfrm>
-          <a:prstGeom prst="rect">
-            <a:avLst/>
-          </a:prstGeom>
-          <a:noFill/>
-        </p:spPr>
-        <p:txBody>
-          <a:bodyPr wrap="square">
-            <a:spAutoFit/>
-          </a:bodyPr>
-          <a:lstStyle/>
-          <a:p>
-            <a:pPr algn="ctr"/>
-            <a:r>
-              <a:rPr sz="1200" b="1" i="0">
-                <a:solidFill>
-                  <a:srgbClr val="FFFFFF"/>
-                </a:solidFill>
-              </a:rPr>
-              <a:t>HITL Connect</a:t>
-            </a:r>
-          </a:p>
-        </p:txBody>
-      </p:sp>
-      <p:sp>
-        <p:nvSpPr>
-          <p:cNvPr id="17" name="Rectangle 16"/>
-          <p:cNvSpPr/>
-          <p:nvPr/>
-        </p:nvSpPr>
-        <p:spPr>
-          <a:xfrm>
-            <a:off x="365760" y="4599432"/>
-            <a:ext cx="3383280" cy="594360"/>
-          </a:xfrm>
-          <a:prstGeom prst="rect">
-            <a:avLst/>
-          </a:prstGeom>
-          <a:solidFill>
-            <a:srgbClr val="00B4D8"/>
-          </a:solidFill>
-          <a:ln>
-            <a:noFill/>
-          </a:ln>
-        </p:spPr>
-        <p:style>
-          <a:lnRef idx="1">
-            <a:schemeClr val="accent1"/>
-          </a:lnRef>
-          <a:fillRef idx="3">
-            <a:schemeClr val="accent1"/>
-          </a:fillRef>
-          <a:effectRef idx="2">
-            <a:schemeClr val="accent1"/>
-          </a:effectRef>
-          <a:fontRef idx="minor">
-            <a:schemeClr val="lt1"/>
-          </a:fontRef>
-        </p:style>
-        <p:txBody>
-          <a:bodyPr rtlCol="0" anchor="ctr"/>
-          <a:lstStyle/>
-          <a:p>
-            <a:pPr algn="ctr"/>
-          </a:p>
-        </p:txBody>
-      </p:sp>
-      <p:sp>
-        <p:nvSpPr>
-          <p:cNvPr id="16" name="TextBox 15"/>
-          <p:cNvSpPr txBox="1"/>
-          <p:nvPr/>
-        </p:nvSpPr>
-        <p:spPr>
-          <a:xfrm>
-            <a:off x="3931920" y="3941064"/>
-            <a:ext cx="7955279" cy="457200"/>
-          </a:xfrm>
-          <a:prstGeom prst="rect">
-            <a:avLst/>
-          </a:prstGeom>
-          <a:noFill/>
-        </p:spPr>
-        <p:txBody>
-          <a:bodyPr wrap="square">
-            <a:spAutoFit/>
-          </a:bodyPr>
-          <a:lstStyle/>
-          <a:p>
-            <a:pPr algn="l"/>
-            <a:r>
-              <a:rPr sz="1300" b="0" i="0">
-                <a:solidFill>
-                  <a:srgbClr val="0D1B2A"/>
-                </a:solidFill>
-              </a:rPr>
-              <a:t>New Integrations page: connect apps via OAuth, see active tools per solution</a:t>
-            </a:r>
-          </a:p>
-        </p:txBody>
-      </p:sp>
-      <p:sp>
-        <p:nvSpPr>
-          <p:cNvPr id="15" name="TextBox 14"/>
-          <p:cNvSpPr txBox="1"/>
-          <p:nvPr/>
-        </p:nvSpPr>
-        <p:spPr>
-          <a:xfrm>
-            <a:off x="411480" y="3922776"/>
-            <a:ext cx="3291840" cy="457200"/>
-          </a:xfrm>
-          <a:prstGeom prst="rect">
-            <a:avLst/>
-          </a:prstGeom>
-          <a:noFill/>
-        </p:spPr>
-        <p:txBody>
-          <a:bodyPr wrap="square">
-            <a:spAutoFit/>
-          </a:bodyPr>
-          <a:lstStyle/>
-          <a:p>
-            <a:pPr algn="ctr"/>
-            <a:r>
-              <a:rPr sz="1200" b="1" i="0">
-                <a:solidFill>
-                  <a:srgbClr val="FFFFFF"/>
-                </a:solidFill>
-              </a:rPr>
-              <a:t>Web UI</a:t>
-            </a:r>
-          </a:p>
-        </p:txBody>
-      </p:sp>
-      <p:sp>
-        <p:nvSpPr>
-          <p:cNvPr id="14" name="Rectangle 13"/>
-          <p:cNvSpPr/>
-          <p:nvPr/>
-        </p:nvSpPr>
-        <p:spPr>
-          <a:xfrm>
-            <a:off x="365760" y="3849624"/>
-            <a:ext cx="3383280" cy="594360"/>
-          </a:xfrm>
-          <a:prstGeom prst="rect">
-            <a:avLst/>
-          </a:prstGeom>
-          <a:solidFill>
-            <a:srgbClr val="00B4D8"/>
-          </a:solidFill>
-          <a:ln>
-            <a:noFill/>
-          </a:ln>
-        </p:spPr>
-        <p:style>
-          <a:lnRef idx="1">
-            <a:schemeClr val="accent1"/>
-          </a:lnRef>
-          <a:fillRef idx="3">
-            <a:schemeClr val="accent1"/>
-          </a:fillRef>
-          <a:effectRef idx="2">
-            <a:schemeClr val="accent1"/>
-          </a:effectRef>
-          <a:fontRef idx="minor">
-            <a:schemeClr val="lt1"/>
-          </a:fontRef>
-        </p:style>
-        <p:txBody>
-          <a:bodyPr rtlCol="0" anchor="ctr"/>
-          <a:lstStyle/>
-          <a:p>
-            <a:pPr algn="ctr"/>
-          </a:p>
-        </p:txBody>
-      </p:sp>
-      <p:sp>
-        <p:nvSpPr>
-          <p:cNvPr id="13" name="TextBox 12"/>
-          <p:cNvSpPr txBox="1"/>
-          <p:nvPr/>
-        </p:nvSpPr>
-        <p:spPr>
-          <a:xfrm>
-            <a:off x="3931920" y="3191256"/>
-            <a:ext cx="7955279" cy="457200"/>
-          </a:xfrm>
-          <a:prstGeom prst="rect">
-            <a:avLst/>
-          </a:prstGeom>
-          <a:noFill/>
-        </p:spPr>
-        <p:txBody>
-          <a:bodyPr wrap="square">
-            <a:spAutoFit/>
-          </a:bodyPr>
-          <a:lstStyle/>
-          <a:p>
-            <a:pPr algn="l"/>
-            <a:r>
-              <a:rPr sz="1300" b="0" i="0">
-                <a:solidFill>
-                  <a:srgbClr val="0D1B2A"/>
-                </a:solidFill>
-              </a:rPr>
-              <a:t>Uses existing langchain_tools.py — composio:github in project.yaml integrations</a:t>
-            </a:r>
-          </a:p>
-        </p:txBody>
-      </p:sp>
-      <p:sp>
-        <p:nvSpPr>
-          <p:cNvPr id="12" name="TextBox 11"/>
-          <p:cNvSpPr txBox="1"/>
-          <p:nvPr/>
-        </p:nvSpPr>
-        <p:spPr>
-          <a:xfrm>
-            <a:off x="411480" y="3172968"/>
-            <a:ext cx="3291840" cy="457200"/>
-          </a:xfrm>
-          <a:prstGeom prst="rect">
-            <a:avLst/>
-          </a:prstGeom>
-          <a:noFill/>
-        </p:spPr>
-        <p:txBody>
-          <a:bodyPr wrap="square">
-            <a:spAutoFit/>
-          </a:bodyPr>
-          <a:lstStyle/>
-          <a:p>
-            <a:pPr algn="ctr"/>
-            <a:r>
-              <a:rPr sz="1200" b="1" i="0">
-                <a:solidFill>
-                  <a:srgbClr val="FFFFFF"/>
-                </a:solidFill>
-              </a:rPr>
-              <a:t>LangChain Native</a:t>
-            </a:r>
-          </a:p>
-        </p:txBody>
-      </p:sp>
-      <p:sp>
-        <p:nvSpPr>
-          <p:cNvPr id="11" name="Rectangle 10"/>
-          <p:cNvSpPr/>
-          <p:nvPr/>
-        </p:nvSpPr>
-        <p:spPr>
-          <a:xfrm>
-            <a:off x="365760" y="3099816"/>
-            <a:ext cx="3383280" cy="594360"/>
-          </a:xfrm>
-          <a:prstGeom prst="rect">
-            <a:avLst/>
-          </a:prstGeom>
-          <a:solidFill>
-            <a:srgbClr val="00B4D8"/>
-          </a:solidFill>
-          <a:ln>
-            <a:noFill/>
-          </a:ln>
-        </p:spPr>
-        <p:style>
-          <a:lnRef idx="1">
-            <a:schemeClr val="accent1"/>
-          </a:lnRef>
-          <a:fillRef idx="3">
-            <a:schemeClr val="accent1"/>
-          </a:fillRef>
-          <a:effectRef idx="2">
-            <a:schemeClr val="accent1"/>
-          </a:effectRef>
-          <a:fontRef idx="minor">
-            <a:schemeClr val="lt1"/>
-          </a:fontRef>
-        </p:style>
-        <p:txBody>
-          <a:bodyPr rtlCol="0" anchor="ctr"/>
-          <a:lstStyle/>
-          <a:p>
-            <a:pPr algn="ctr"/>
-          </a:p>
-        </p:txBody>
-      </p:sp>
-      <p:sp>
-        <p:nvSpPr>
-          <p:cNvPr id="10" name="TextBox 9"/>
-          <p:cNvSpPr txBox="1"/>
-          <p:nvPr/>
-        </p:nvSpPr>
-        <p:spPr>
-          <a:xfrm>
-            <a:off x="3931920" y="2441448"/>
-            <a:ext cx="7955279" cy="457200"/>
-          </a:xfrm>
-          <a:prstGeom prst="rect">
-            <a:avLst/>
-          </a:prstGeom>
-          <a:noFill/>
-        </p:spPr>
-        <p:txBody>
-          <a:bodyPr wrap="square">
-            <a:spAutoFit/>
-          </a:bodyPr>
-          <a:lstStyle/>
-          <a:p>
-            <a:pPr algn="l"/>
-            <a:r>
-              <a:rPr sz="1300" b="0" i="0">
-                <a:solidFill>
-                  <a:srgbClr val="0D1B2A"/>
-                </a:solidFill>
-              </a:rPr>
-              <a:t>Composio manages auth flows — SAGE never stores third-party credentials</a:t>
-            </a:r>
-          </a:p>
-        </p:txBody>
-      </p:sp>
-      <p:sp>
-        <p:nvSpPr>
-          <p:cNvPr id="9" name="TextBox 8"/>
-          <p:cNvSpPr txBox="1"/>
-          <p:nvPr/>
-        </p:nvSpPr>
-        <p:spPr>
-          <a:xfrm>
-            <a:off x="411480" y="2423160"/>
-            <a:ext cx="3291840" cy="457200"/>
-          </a:xfrm>
-          <a:prstGeom prst="rect">
-            <a:avLst/>
-          </a:prstGeom>
-          <a:noFill/>
-        </p:spPr>
-        <p:txBody>
-          <a:bodyPr wrap="square">
-            <a:spAutoFit/>
-          </a:bodyPr>
-          <a:lstStyle/>
-          <a:p>
-            <a:pPr algn="ctr"/>
-            <a:r>
-              <a:rPr sz="1200" b="1" i="0">
-                <a:solidFill>
-                  <a:srgbClr val="FFFFFF"/>
-                </a:solidFill>
-              </a:rPr>
-              <a:t>OAuth Handled</a:t>
-            </a:r>
-          </a:p>
-        </p:txBody>
-      </p:sp>
-      <p:sp>
-        <p:nvSpPr>
-          <p:cNvPr id="8" name="Rectangle 7"/>
-          <p:cNvSpPr/>
-          <p:nvPr/>
-        </p:nvSpPr>
-        <p:spPr>
-          <a:xfrm>
-            <a:off x="365760" y="2350008"/>
-            <a:ext cx="3383280" cy="594360"/>
-          </a:xfrm>
-          <a:prstGeom prst="rect">
-            <a:avLst/>
-          </a:prstGeom>
-          <a:solidFill>
-            <a:srgbClr val="00B4D8"/>
-          </a:solidFill>
-          <a:ln>
-            <a:noFill/>
-          </a:ln>
-        </p:spPr>
-        <p:style>
-          <a:lnRef idx="1">
-            <a:schemeClr val="accent1"/>
-          </a:lnRef>
-          <a:fillRef idx="3">
-            <a:schemeClr val="accent1"/>
-          </a:fillRef>
-          <a:effectRef idx="2">
-            <a:schemeClr val="accent1"/>
-          </a:effectRef>
-          <a:fontRef idx="minor">
-            <a:schemeClr val="lt1"/>
-          </a:fontRef>
-        </p:style>
-        <p:txBody>
-          <a:bodyPr rtlCol="0" anchor="ctr"/>
-          <a:lstStyle/>
-          <a:p>
-            <a:pPr algn="ctr"/>
-          </a:p>
-        </p:txBody>
-      </p:sp>
-      <p:sp>
-        <p:nvSpPr>
-          <p:cNvPr id="7" name="TextBox 6"/>
-          <p:cNvSpPr txBox="1"/>
-          <p:nvPr/>
-        </p:nvSpPr>
-        <p:spPr>
-          <a:xfrm>
-            <a:off x="3931920" y="1691640"/>
-            <a:ext cx="7955279" cy="457200"/>
-          </a:xfrm>
-          <a:prstGeom prst="rect">
-            <a:avLst/>
-          </a:prstGeom>
-          <a:noFill/>
-        </p:spPr>
-        <p:txBody>
-          <a:bodyPr wrap="square">
-            <a:spAutoFit/>
-          </a:bodyPr>
-          <a:lstStyle/>
-          <a:p>
-            <a:pPr algn="l"/>
-            <a:r>
-              <a:rPr sz="1300" b="0" i="0">
-                <a:solidFill>
-                  <a:srgbClr val="0D1B2A"/>
-                </a:solidFill>
-              </a:rPr>
-              <a:t>GitHub, GitLab, Jira, Linear, Slack, Notion, Confluence, Salesforce, HubSpot, Zendesk, Stripe, Google Workspace, and 90+ more</a:t>
-            </a:r>
-          </a:p>
-        </p:txBody>
-      </p:sp>
-      <p:sp>
-        <p:nvSpPr>
-          <p:cNvPr id="6" name="TextBox 5"/>
-          <p:cNvSpPr txBox="1"/>
-          <p:nvPr/>
-        </p:nvSpPr>
-        <p:spPr>
-          <a:xfrm>
-            <a:off x="411480" y="1673352"/>
-            <a:ext cx="3291840" cy="457200"/>
-          </a:xfrm>
-          <a:prstGeom prst="rect">
-            <a:avLst/>
-          </a:prstGeom>
-          <a:noFill/>
-        </p:spPr>
-        <p:txBody>
-          <a:bodyPr wrap="square">
-            <a:spAutoFit/>
-          </a:bodyPr>
-          <a:lstStyle/>
-          <a:p>
-            <a:pPr algn="ctr"/>
-            <a:r>
-              <a:rPr sz="1200" b="1" i="0">
-                <a:solidFill>
-                  <a:srgbClr val="FFFFFF"/>
-                </a:solidFill>
-              </a:rPr>
-              <a:t>100+ Apps</a:t>
-            </a:r>
-          </a:p>
-        </p:txBody>
-      </p:sp>
-      <p:sp>
-        <p:nvSpPr>
-          <p:cNvPr id="5" name="Rectangle 4"/>
-          <p:cNvSpPr/>
-          <p:nvPr/>
-        </p:nvSpPr>
-        <p:spPr>
-          <a:xfrm>
-            <a:off x="365760" y="1600200"/>
-            <a:ext cx="3383280" cy="594360"/>
-          </a:xfrm>
-          <a:prstGeom prst="rect">
-            <a:avLst/>
-          </a:prstGeom>
-          <a:solidFill>
-            <a:srgbClr val="00B4D8"/>
-          </a:solidFill>
-          <a:ln>
-            <a:noFill/>
-          </a:ln>
-        </p:spPr>
-        <p:style>
-          <a:lnRef idx="1">
-            <a:schemeClr val="accent1"/>
-          </a:lnRef>
-          <a:fillRef idx="3">
-            <a:schemeClr val="accent1"/>
-          </a:fillRef>
-          <a:effectRef idx="2">
-            <a:schemeClr val="accent1"/>
-          </a:effectRef>
-          <a:fontRef idx="minor">
-            <a:schemeClr val="lt1"/>
-          </a:fontRef>
-        </p:style>
-        <p:txBody>
-          <a:bodyPr rtlCol="0" anchor="ctr"/>
-          <a:lstStyle/>
-          <a:p>
-            <a:pPr algn="ctr"/>
-          </a:p>
-        </p:txBody>
-      </p:sp>
-      <p:sp>
-        <p:nvSpPr>
-          <p:cNvPr id="4" name="TextBox 3"/>
-          <p:cNvSpPr txBox="1"/>
-          <p:nvPr/>
-        </p:nvSpPr>
-        <p:spPr>
-          <a:xfrm>
-            <a:off x="411480" y="804672"/>
-            <a:ext cx="11338560" cy="438912"/>
-          </a:xfrm>
-          <a:prstGeom prst="rect">
-            <a:avLst/>
-          </a:prstGeom>
-          <a:noFill/>
-        </p:spPr>
-        <p:txBody>
-          <a:bodyPr wrap="square">
-            <a:spAutoFit/>
-          </a:bodyPr>
-          <a:lstStyle/>
-          <a:p>
-            <a:pPr algn="l"/>
-            <a:r>
-              <a:rPr sz="1600" b="0" i="0">
-                <a:solidFill>
-                  <a:srgbClr val="00B4D8"/>
-                </a:solidFill>
-              </a:rPr>
-              <a:t>Connect any SaaS tool to SAGE agents — OAuth handled, no per-integration credential code</a:t>
-            </a:r>
-          </a:p>
-        </p:txBody>
-      </p:sp>
-      <p:sp>
-        <p:nvSpPr>
-          <p:cNvPr id="3" name="TextBox 2"/>
-          <p:cNvSpPr txBox="1"/>
-          <p:nvPr/>
-        </p:nvSpPr>
-        <p:spPr>
-          <a:xfrm>
-            <a:off x="411480" y="109728"/>
-            <a:ext cx="11338560" cy="731520"/>
-          </a:xfrm>
-          <a:prstGeom prst="rect">
-            <a:avLst/>
-          </a:prstGeom>
-          <a:noFill/>
-        </p:spPr>
-        <p:txBody>
-          <a:bodyPr wrap="square">
-            <a:spAutoFit/>
-          </a:bodyPr>
-          <a:lstStyle/>
-          <a:p>
-            <a:pPr algn="l"/>
-            <a:r>
-              <a:rPr sz="3000" b="1" i="0">
-                <a:solidFill>
-                  <a:srgbClr val="FFFFFF"/>
-                </a:solidFill>
-              </a:rPr>
-              <a:t>Composio Integration — 100+ Tools in One Package</a:t>
-            </a:r>
-          </a:p>
-        </p:txBody>
-      </p:sp>
-      <p:sp>
-        <p:nvSpPr>
-          <p:cNvPr id="2" name="Rectangle 1"/>
-          <p:cNvSpPr/>
-          <p:nvPr/>
-        </p:nvSpPr>
-        <p:spPr>
-          <a:xfrm>
-            <a:off x="0" y="0"/>
-            <a:ext cx="12188952" cy="1325880"/>
-          </a:xfrm>
-          <a:prstGeom prst="rect">
-            <a:avLst/>
-          </a:prstGeom>
-          <a:solidFill>
-            <a:srgbClr val="0D1B2A"/>
-          </a:solidFill>
-          <a:ln>
-            <a:noFill/>
-          </a:ln>
-        </p:spPr>
-        <p:style>
-          <a:lnRef idx="1">
-            <a:schemeClr val="accent1"/>
-          </a:lnRef>
-          <a:fillRef idx="3">
-            <a:schemeClr val="accent1"/>
-          </a:fillRef>
-          <a:effectRef idx="2">
-            <a:schemeClr val="accent1"/>
-          </a:effectRef>
-          <a:fontRef idx="minor">
-            <a:schemeClr val="lt1"/>
-          </a:fontRef>
-        </p:style>
-        <p:txBody>
-          <a:bodyPr rtlCol="0" anchor="ctr"/>
-          <a:lstStyle/>
-          <a:p>
-            <a:pPr algn="ctr"/>
-          </a:p>
-        </p:txBody>
-      </p:sp>
-    </p:spTree>
-  </p:cSld>
-  <p:clrMapOvr>
-    <a:masterClrMapping/>
-  </p:clrMapOvr>
-</p:sld>
-</file>
-
-<file path=ppt/slides/slide25.xml><?xml version="1.0" encoding="utf-8"?>
-<p:sld xmlns:a="http://schemas.openxmlformats.org/drawingml/2006/main" xmlns:p="http://schemas.openxmlformats.org/presentationml/2006/main" xmlns:r="http://schemas.openxmlformats.org/officeDocument/2006/relationships">
-  <p:cSld>
-    <p:spTree>
-      <p:nvGrpSpPr>
-        <p:cNvPr id="1" name=""/>
-        <p:cNvGrpSpPr/>
-        <p:nvPr/>
-      </p:nvGrpSpPr>
-      <p:grpSpPr/>
-      <p:sp>
-        <p:nvSpPr>
-          <p:cNvPr id="24" name="TextBox 23"/>
-          <p:cNvSpPr txBox="1"/>
-          <p:nvPr/>
-        </p:nvSpPr>
-        <p:spPr>
-          <a:xfrm>
-            <a:off x="274320" y="6510528"/>
-            <a:ext cx="8229600" cy="274320"/>
-          </a:xfrm>
-          <a:prstGeom prst="rect">
-            <a:avLst/>
-          </a:prstGeom>
-          <a:noFill/>
-        </p:spPr>
-        <p:txBody>
-          <a:bodyPr wrap="square">
-            <a:spAutoFit/>
-          </a:bodyPr>
-          <a:lstStyle/>
-          <a:p>
-            <a:pPr algn="l"/>
-            <a:r>
-              <a:rPr sz="900" b="0" i="0">
-                <a:solidFill>
-                  <a:srgbClr val="647487"/>
-                </a:solidFill>
-              </a:rPr>
-              <a:t>SAGE[ai] — Confidential | March 2026</a:t>
-            </a:r>
-          </a:p>
-        </p:txBody>
-      </p:sp>
-      <p:sp>
-        <p:nvSpPr>
-          <p:cNvPr id="23" name="Rectangle 22"/>
-          <p:cNvSpPr/>
-          <p:nvPr/>
-        </p:nvSpPr>
-        <p:spPr>
-          <a:xfrm>
-            <a:off x="0" y="6492240"/>
-            <a:ext cx="12188952" cy="365760"/>
-          </a:xfrm>
-          <a:prstGeom prst="rect">
-            <a:avLst/>
-          </a:prstGeom>
-          <a:solidFill>
-            <a:srgbClr val="0D1B2A"/>
-          </a:solidFill>
-          <a:ln>
-            <a:noFill/>
-          </a:ln>
-        </p:spPr>
-        <p:style>
-          <a:lnRef idx="1">
-            <a:schemeClr val="accent1"/>
-          </a:lnRef>
-          <a:fillRef idx="3">
-            <a:schemeClr val="accent1"/>
-          </a:fillRef>
-          <a:effectRef idx="2">
-            <a:schemeClr val="accent1"/>
-          </a:effectRef>
-          <a:fontRef idx="minor">
-            <a:schemeClr val="lt1"/>
-          </a:fontRef>
-        </p:style>
-        <p:txBody>
-          <a:bodyPr rtlCol="0" anchor="ctr"/>
-          <a:lstStyle/>
-          <a:p>
-            <a:pPr algn="ctr"/>
-          </a:p>
-        </p:txBody>
-      </p:sp>
-      <p:sp>
-        <p:nvSpPr>
-          <p:cNvPr id="22" name="TextBox 21"/>
-          <p:cNvSpPr txBox="1"/>
-          <p:nvPr/>
-        </p:nvSpPr>
-        <p:spPr>
-          <a:xfrm>
-            <a:off x="3931920" y="5440680"/>
-            <a:ext cx="7955279" cy="457200"/>
-          </a:xfrm>
-          <a:prstGeom prst="rect">
-            <a:avLst/>
-          </a:prstGeom>
-          <a:noFill/>
-        </p:spPr>
-        <p:txBody>
-          <a:bodyPr wrap="square">
-            <a:spAutoFit/>
-          </a:bodyPr>
-          <a:lstStyle/>
-          <a:p>
-            <a:pPr algn="l"/>
-            <a:r>
-              <a:rPr sz="1300" b="0" i="0">
-                <a:solidFill>
-                  <a:srgbClr val="0D1B2A"/>
-                </a:solidFill>
-              </a:rPr>
-              <a:t>Medical blue, game studio purple, startup green — no Tailwind dependency</a:t>
-            </a:r>
-          </a:p>
-        </p:txBody>
-      </p:sp>
-      <p:sp>
-        <p:nvSpPr>
-          <p:cNvPr id="21" name="TextBox 20"/>
-          <p:cNvSpPr txBox="1"/>
-          <p:nvPr/>
-        </p:nvSpPr>
-        <p:spPr>
-          <a:xfrm>
-            <a:off x="411480" y="5422392"/>
-            <a:ext cx="3291840" cy="457200"/>
-          </a:xfrm>
-          <a:prstGeom prst="rect">
-            <a:avLst/>
-          </a:prstGeom>
-          <a:noFill/>
-        </p:spPr>
-        <p:txBody>
-          <a:bodyPr wrap="square">
-            <a:spAutoFit/>
-          </a:bodyPr>
-          <a:lstStyle/>
-          <a:p>
-            <a:pPr algn="ctr"/>
-            <a:r>
-              <a:rPr sz="1200" b="1" i="0">
-                <a:solidFill>
-                  <a:srgbClr val="FFFFFF"/>
-                </a:solidFill>
-              </a:rPr>
-              <a:t>Example Themes</a:t>
-            </a:r>
-          </a:p>
-        </p:txBody>
-      </p:sp>
-      <p:sp>
-        <p:nvSpPr>
-          <p:cNvPr id="20" name="Rectangle 19"/>
-          <p:cNvSpPr/>
-          <p:nvPr/>
-        </p:nvSpPr>
-        <p:spPr>
-          <a:xfrm>
-            <a:off x="365760" y="5349240"/>
-            <a:ext cx="3383280" cy="594360"/>
-          </a:xfrm>
-          <a:prstGeom prst="rect">
-            <a:avLst/>
-          </a:prstGeom>
-          <a:solidFill>
-            <a:srgbClr val="00B4D8"/>
-          </a:solidFill>
-          <a:ln>
-            <a:noFill/>
-          </a:ln>
-        </p:spPr>
-        <p:style>
-          <a:lnRef idx="1">
-            <a:schemeClr val="accent1"/>
-          </a:lnRef>
-          <a:fillRef idx="3">
-            <a:schemeClr val="accent1"/>
-          </a:fillRef>
-          <a:effectRef idx="2">
-            <a:schemeClr val="accent1"/>
-          </a:effectRef>
-          <a:fontRef idx="minor">
-            <a:schemeClr val="lt1"/>
-          </a:fontRef>
-        </p:style>
-        <p:txBody>
-          <a:bodyPr rtlCol="0" anchor="ctr"/>
-          <a:lstStyle/>
-          <a:p>
-            <a:pPr algn="ctr"/>
-          </a:p>
-        </p:txBody>
-      </p:sp>
-      <p:sp>
-        <p:nvSpPr>
-          <p:cNvPr id="19" name="TextBox 18"/>
-          <p:cNvSpPr txBox="1"/>
-          <p:nvPr/>
-        </p:nvSpPr>
-        <p:spPr>
-          <a:xfrm>
-            <a:off x="3931920" y="4690872"/>
-            <a:ext cx="7955279" cy="457200"/>
-          </a:xfrm>
-          <a:prstGeom prst="rect">
-            <a:avLst/>
-          </a:prstGeom>
-          <a:noFill/>
-        </p:spPr>
-        <p:txBody>
-          <a:bodyPr wrap="square">
-            <a:spAutoFit/>
-          </a:bodyPr>
-          <a:lstStyle/>
-          <a:p>
-            <a:pPr algn="l"/>
-            <a:r>
-              <a:rPr sz="1300" b="0" i="0">
-                <a:solidFill>
-                  <a:srgbClr val="0D1B2A"/>
-                </a:solidFill>
-              </a:rPr>
-              <a:t>ThemeProvider writes CSS variables to document.documentElement — switches instantly</a:t>
-            </a:r>
-          </a:p>
-        </p:txBody>
-      </p:sp>
-      <p:sp>
-        <p:nvSpPr>
-          <p:cNvPr id="18" name="TextBox 17"/>
-          <p:cNvSpPr txBox="1"/>
-          <p:nvPr/>
-        </p:nvSpPr>
-        <p:spPr>
-          <a:xfrm>
-            <a:off x="411480" y="4672584"/>
-            <a:ext cx="3291840" cy="457200"/>
-          </a:xfrm>
-          <a:prstGeom prst="rect">
-            <a:avLst/>
-          </a:prstGeom>
-          <a:noFill/>
-        </p:spPr>
-        <p:txBody>
-          <a:bodyPr wrap="square">
-            <a:spAutoFit/>
-          </a:bodyPr>
-          <a:lstStyle/>
-          <a:p>
-            <a:pPr algn="ctr"/>
-            <a:r>
-              <a:rPr sz="1200" b="1" i="0">
-                <a:solidFill>
-                  <a:srgbClr val="FFFFFF"/>
-                </a:solidFill>
-              </a:rPr>
-              <a:t>CSS Variables</a:t>
-            </a:r>
-          </a:p>
-        </p:txBody>
-      </p:sp>
-      <p:sp>
-        <p:nvSpPr>
-          <p:cNvPr id="17" name="Rectangle 16"/>
-          <p:cNvSpPr/>
-          <p:nvPr/>
-        </p:nvSpPr>
-        <p:spPr>
-          <a:xfrm>
-            <a:off x="365760" y="4599432"/>
-            <a:ext cx="3383280" cy="594360"/>
-          </a:xfrm>
-          <a:prstGeom prst="rect">
-            <a:avLst/>
-          </a:prstGeom>
-          <a:solidFill>
-            <a:srgbClr val="00B4D8"/>
-          </a:solidFill>
-          <a:ln>
-            <a:noFill/>
-          </a:ln>
-        </p:spPr>
-        <p:style>
-          <a:lnRef idx="1">
-            <a:schemeClr val="accent1"/>
-          </a:lnRef>
-          <a:fillRef idx="3">
-            <a:schemeClr val="accent1"/>
-          </a:fillRef>
-          <a:effectRef idx="2">
-            <a:schemeClr val="accent1"/>
-          </a:effectRef>
-          <a:fontRef idx="minor">
-            <a:schemeClr val="lt1"/>
-          </a:fontRef>
-        </p:style>
-        <p:txBody>
-          <a:bodyPr rtlCol="0" anchor="ctr"/>
-          <a:lstStyle/>
-          <a:p>
-            <a:pPr algn="ctr"/>
-          </a:p>
-        </p:txBody>
-      </p:sp>
-      <p:sp>
-        <p:nvSpPr>
-          <p:cNvPr id="16" name="TextBox 15"/>
-          <p:cNvSpPr txBox="1"/>
-          <p:nvPr/>
-        </p:nvSpPr>
-        <p:spPr>
-          <a:xfrm>
-            <a:off x="3931920" y="3941064"/>
-            <a:ext cx="7955279" cy="457200"/>
-          </a:xfrm>
-          <a:prstGeom prst="rect">
-            <a:avLst/>
-          </a:prstGeom>
-          <a:noFill/>
-        </p:spPr>
-        <p:txBody>
-          <a:bodyPr wrap="square">
-            <a:spAutoFit/>
-          </a:bodyPr>
-          <a:lstStyle/>
-          <a:p>
-            <a:pPr algn="l"/>
-            <a:r>
-              <a:rPr sz="1300" b="0" i="0">
-                <a:solidFill>
-                  <a:srgbClr val="0D1B2A"/>
-                </a:solidFill>
-              </a:rPr>
-              <a:t>theme: block in project.yaml — sidebar_bg, accent, badge_bg CSS colour strings</a:t>
-            </a:r>
-          </a:p>
-        </p:txBody>
-      </p:sp>
-      <p:sp>
-        <p:nvSpPr>
-          <p:cNvPr id="15" name="TextBox 14"/>
-          <p:cNvSpPr txBox="1"/>
-          <p:nvPr/>
-        </p:nvSpPr>
-        <p:spPr>
-          <a:xfrm>
-            <a:off x="411480" y="3922776"/>
-            <a:ext cx="3291840" cy="457200"/>
-          </a:xfrm>
-          <a:prstGeom prst="rect">
-            <a:avLst/>
-          </a:prstGeom>
-          <a:noFill/>
-        </p:spPr>
-        <p:txBody>
-          <a:bodyPr wrap="square">
-            <a:spAutoFit/>
-          </a:bodyPr>
-          <a:lstStyle/>
-          <a:p>
-            <a:pPr algn="ctr"/>
-            <a:r>
-              <a:rPr sz="1200" b="1" i="0">
-                <a:solidFill>
-                  <a:srgbClr val="FFFFFF"/>
-                </a:solidFill>
-              </a:rPr>
-              <a:t>Solution Theming</a:t>
-            </a:r>
-          </a:p>
-        </p:txBody>
-      </p:sp>
-      <p:sp>
-        <p:nvSpPr>
-          <p:cNvPr id="14" name="Rectangle 13"/>
-          <p:cNvSpPr/>
-          <p:nvPr/>
-        </p:nvSpPr>
-        <p:spPr>
-          <a:xfrm>
-            <a:off x="365760" y="3849624"/>
-            <a:ext cx="3383280" cy="594360"/>
-          </a:xfrm>
-          <a:prstGeom prst="rect">
-            <a:avLst/>
-          </a:prstGeom>
-          <a:solidFill>
-            <a:srgbClr val="00B4D8"/>
-          </a:solidFill>
-          <a:ln>
-            <a:noFill/>
-          </a:ln>
-        </p:spPr>
-        <p:style>
-          <a:lnRef idx="1">
-            <a:schemeClr val="accent1"/>
-          </a:lnRef>
-          <a:fillRef idx="3">
-            <a:schemeClr val="accent1"/>
-          </a:fillRef>
-          <a:effectRef idx="2">
-            <a:schemeClr val="accent1"/>
-          </a:effectRef>
-          <a:fontRef idx="minor">
-            <a:schemeClr val="lt1"/>
-          </a:fontRef>
-        </p:style>
-        <p:txBody>
-          <a:bodyPr rtlCol="0" anchor="ctr"/>
-          <a:lstStyle/>
-          <a:p>
-            <a:pPr algn="ctr"/>
-          </a:p>
-        </p:txBody>
-      </p:sp>
-      <p:sp>
-        <p:nvSpPr>
-          <p:cNvPr id="13" name="TextBox 12"/>
-          <p:cNvSpPr txBox="1"/>
-          <p:nvPr/>
-        </p:nvSpPr>
-        <p:spPr>
-          <a:xfrm>
-            <a:off x="3931920" y="3191256"/>
-            <a:ext cx="7955279" cy="457200"/>
-          </a:xfrm>
-          <a:prstGeom prst="rect">
-            <a:avLst/>
-          </a:prstGeom>
-          <a:noFill/>
-        </p:spPr>
-        <p:txBody>
-          <a:bodyPr wrap="square">
-            <a:spAutoFit/>
-          </a:bodyPr>
-          <a:lstStyle/>
-          <a:p>
-            <a:pPr algn="l"/>
-            <a:r>
-              <a:rPr sz="1300" b="0" i="0">
-                <a:solidFill>
-                  <a:srgbClr val="0D1B2A"/>
-                </a:solidFill>
-              </a:rPr>
-              <a:t>Backed by POST /agents/hire — optionally add task types (written to tasks.yaml)</a:t>
-            </a:r>
-          </a:p>
-        </p:txBody>
-      </p:sp>
-      <p:sp>
-        <p:nvSpPr>
-          <p:cNvPr id="12" name="TextBox 11"/>
-          <p:cNvSpPr txBox="1"/>
-          <p:nvPr/>
-        </p:nvSpPr>
-        <p:spPr>
-          <a:xfrm>
-            <a:off x="411480" y="3172968"/>
-            <a:ext cx="3291840" cy="457200"/>
-          </a:xfrm>
-          <a:prstGeom prst="rect">
-            <a:avLst/>
-          </a:prstGeom>
-          <a:noFill/>
-        </p:spPr>
-        <p:txBody>
-          <a:bodyPr wrap="square">
-            <a:spAutoFit/>
-          </a:bodyPr>
-          <a:lstStyle/>
-          <a:p>
-            <a:pPr algn="ctr"/>
-            <a:r>
-              <a:rPr sz="1200" b="1" i="0">
-                <a:solidFill>
-                  <a:srgbClr val="FFFFFF"/>
-                </a:solidFill>
-              </a:rPr>
-              <a:t>API Backed</a:t>
-            </a:r>
-          </a:p>
-        </p:txBody>
-      </p:sp>
-      <p:sp>
-        <p:nvSpPr>
-          <p:cNvPr id="11" name="Rectangle 10"/>
-          <p:cNvSpPr/>
-          <p:nvPr/>
-        </p:nvSpPr>
-        <p:spPr>
-          <a:xfrm>
-            <a:off x="365760" y="3099816"/>
-            <a:ext cx="3383280" cy="594360"/>
-          </a:xfrm>
-          <a:prstGeom prst="rect">
-            <a:avLst/>
-          </a:prstGeom>
-          <a:solidFill>
-            <a:srgbClr val="00B4D8"/>
-          </a:solidFill>
-          <a:ln>
-            <a:noFill/>
-          </a:ln>
-        </p:spPr>
-        <p:style>
-          <a:lnRef idx="1">
-            <a:schemeClr val="accent1"/>
-          </a:lnRef>
-          <a:fillRef idx="3">
-            <a:schemeClr val="accent1"/>
-          </a:fillRef>
-          <a:effectRef idx="2">
-            <a:schemeClr val="accent1"/>
-          </a:effectRef>
-          <a:fontRef idx="minor">
-            <a:schemeClr val="lt1"/>
-          </a:fontRef>
-        </p:style>
-        <p:txBody>
-          <a:bodyPr rtlCol="0" anchor="ctr"/>
-          <a:lstStyle/>
-          <a:p>
-            <a:pPr algn="ctr"/>
-          </a:p>
-        </p:txBody>
-      </p:sp>
-      <p:sp>
-        <p:nvSpPr>
-          <p:cNvPr id="10" name="TextBox 9"/>
-          <p:cNvSpPr txBox="1"/>
-          <p:nvPr/>
-        </p:nvSpPr>
-        <p:spPr>
-          <a:xfrm>
-            <a:off x="3931920" y="2441448"/>
-            <a:ext cx="7955279" cy="457200"/>
-          </a:xfrm>
-          <a:prstGeom prst="rect">
-            <a:avLst/>
-          </a:prstGeom>
-          <a:noFill/>
-        </p:spPr>
-        <p:txBody>
-          <a:bodyPr wrap="square">
-            <a:spAutoFit/>
-          </a:bodyPr>
-          <a:lstStyle/>
-          <a:p>
-            <a:pPr algn="l"/>
-            <a:r>
-              <a:rPr sz="1300" b="0" i="0">
-                <a:solidFill>
-                  <a:srgbClr val="0D1B2A"/>
-                </a:solidFill>
-              </a:rPr>
-              <a:t>Creates HITL proposal — approve on Dashboard — role appears in Agents page immediately</a:t>
-            </a:r>
-          </a:p>
-        </p:txBody>
-      </p:sp>
-      <p:sp>
-        <p:nvSpPr>
-          <p:cNvPr id="9" name="TextBox 8"/>
-          <p:cNvSpPr txBox="1"/>
-          <p:nvPr/>
-        </p:nvSpPr>
-        <p:spPr>
-          <a:xfrm>
-            <a:off x="411480" y="2423160"/>
-            <a:ext cx="3291840" cy="457200"/>
-          </a:xfrm>
-          <a:prstGeom prst="rect">
-            <a:avLst/>
-          </a:prstGeom>
-          <a:noFill/>
-        </p:spPr>
-        <p:txBody>
-          <a:bodyPr wrap="square">
-            <a:spAutoFit/>
-          </a:bodyPr>
-          <a:lstStyle/>
-          <a:p>
-            <a:pPr algn="ctr"/>
-            <a:r>
-              <a:rPr sz="1200" b="1" i="0">
-                <a:solidFill>
-                  <a:srgbClr val="FFFFFF"/>
-                </a:solidFill>
-              </a:rPr>
-              <a:t>HITL Approval</a:t>
-            </a:r>
-          </a:p>
-        </p:txBody>
-      </p:sp>
-      <p:sp>
-        <p:nvSpPr>
-          <p:cNvPr id="8" name="Rectangle 7"/>
-          <p:cNvSpPr/>
-          <p:nvPr/>
-        </p:nvSpPr>
-        <p:spPr>
-          <a:xfrm>
-            <a:off x="365760" y="2350008"/>
-            <a:ext cx="3383280" cy="594360"/>
-          </a:xfrm>
-          <a:prstGeom prst="rect">
-            <a:avLst/>
-          </a:prstGeom>
-          <a:solidFill>
-            <a:srgbClr val="00B4D8"/>
-          </a:solidFill>
-          <a:ln>
-            <a:noFill/>
-          </a:ln>
-        </p:spPr>
-        <p:style>
-          <a:lnRef idx="1">
-            <a:schemeClr val="accent1"/>
-          </a:lnRef>
-          <a:fillRef idx="3">
-            <a:schemeClr val="accent1"/>
-          </a:fillRef>
-          <a:effectRef idx="2">
-            <a:schemeClr val="accent1"/>
-          </a:effectRef>
-          <a:fontRef idx="minor">
-            <a:schemeClr val="lt1"/>
-          </a:fontRef>
-        </p:style>
-        <p:txBody>
-          <a:bodyPr rtlCol="0" anchor="ctr"/>
-          <a:lstStyle/>
-          <a:p>
-            <a:pPr algn="ctr"/>
-          </a:p>
-        </p:txBody>
-      </p:sp>
-      <p:sp>
-        <p:nvSpPr>
-          <p:cNvPr id="7" name="TextBox 6"/>
-          <p:cNvSpPr txBox="1"/>
-          <p:nvPr/>
-        </p:nvSpPr>
-        <p:spPr>
-          <a:xfrm>
-            <a:off x="3931920" y="1691640"/>
-            <a:ext cx="7955279" cy="457200"/>
-          </a:xfrm>
-          <a:prstGeom prst="rect">
-            <a:avLst/>
-          </a:prstGeom>
-          <a:noFill/>
-        </p:spPr>
-        <p:txBody>
-          <a:bodyPr wrap="square">
-            <a:spAutoFit/>
-          </a:bodyPr>
-          <a:lstStyle/>
-          <a:p>
-            <a:pPr algn="l"/>
-            <a:r>
-              <a:rPr sz="1300" b="0" i="0">
-                <a:solidFill>
-                  <a:srgbClr val="0D1B2A"/>
-                </a:solidFill>
-              </a:rPr>
-              <a:t>From the web UI, click Hire Agent — choose icon, name, description, system prompt</a:t>
-            </a:r>
-          </a:p>
-        </p:txBody>
-      </p:sp>
-      <p:sp>
-        <p:nvSpPr>
-          <p:cNvPr id="6" name="TextBox 5"/>
-          <p:cNvSpPr txBox="1"/>
-          <p:nvPr/>
-        </p:nvSpPr>
-        <p:spPr>
-          <a:xfrm>
-            <a:off x="411480" y="1673352"/>
-            <a:ext cx="3291840" cy="457200"/>
-          </a:xfrm>
-          <a:prstGeom prst="rect">
-            <a:avLst/>
-          </a:prstGeom>
-          <a:noFill/>
-        </p:spPr>
-        <p:txBody>
-          <a:bodyPr wrap="square">
-            <a:spAutoFit/>
-          </a:bodyPr>
-          <a:lstStyle/>
-          <a:p>
-            <a:pPr algn="ctr"/>
-            <a:r>
-              <a:rPr sz="1200" b="1" i="0">
-                <a:solidFill>
-                  <a:srgbClr val="FFFFFF"/>
-                </a:solidFill>
-              </a:rPr>
-              <a:t>Hire Agent (Web UI)</a:t>
-            </a:r>
-          </a:p>
-        </p:txBody>
-      </p:sp>
-      <p:sp>
-        <p:nvSpPr>
-          <p:cNvPr id="5" name="Rectangle 4"/>
-          <p:cNvSpPr/>
-          <p:nvPr/>
-        </p:nvSpPr>
-        <p:spPr>
-          <a:xfrm>
-            <a:off x="365760" y="1600200"/>
-            <a:ext cx="3383280" cy="594360"/>
-          </a:xfrm>
-          <a:prstGeom prst="rect">
-            <a:avLst/>
-          </a:prstGeom>
-          <a:solidFill>
-            <a:srgbClr val="00B4D8"/>
-          </a:solidFill>
-          <a:ln>
-            <a:noFill/>
-          </a:ln>
-        </p:spPr>
-        <p:style>
-          <a:lnRef idx="1">
-            <a:schemeClr val="accent1"/>
-          </a:lnRef>
-          <a:fillRef idx="3">
-            <a:schemeClr val="accent1"/>
-          </a:fillRef>
-          <a:effectRef idx="2">
-            <a:schemeClr val="accent1"/>
-          </a:effectRef>
-          <a:fontRef idx="minor">
-            <a:schemeClr val="lt1"/>
-          </a:fontRef>
-        </p:style>
-        <p:txBody>
-          <a:bodyPr rtlCol="0" anchor="ctr"/>
-          <a:lstStyle/>
-          <a:p>
-            <a:pPr algn="ctr"/>
-          </a:p>
-        </p:txBody>
-      </p:sp>
-      <p:sp>
-        <p:nvSpPr>
-          <p:cNvPr id="4" name="TextBox 3"/>
-          <p:cNvSpPr txBox="1"/>
-          <p:nvPr/>
-        </p:nvSpPr>
-        <p:spPr>
-          <a:xfrm>
-            <a:off x="411480" y="804672"/>
-            <a:ext cx="11338560" cy="438912"/>
-          </a:xfrm>
-          <a:prstGeom prst="rect">
-            <a:avLst/>
-          </a:prstGeom>
-          <a:noFill/>
-        </p:spPr>
-        <p:txBody>
-          <a:bodyPr wrap="square">
-            <a:spAutoFit/>
-          </a:bodyPr>
-          <a:lstStyle/>
-          <a:p>
-            <a:pPr algn="l"/>
-            <a:r>
-              <a:rPr sz="1600" b="0" i="0">
-                <a:solidFill>
-                  <a:srgbClr val="00B4D8"/>
-                </a:solidFill>
-              </a:rPr>
-              <a:t>Extend agents and brand the UI without touching code or YAML files</a:t>
-            </a:r>
-          </a:p>
-        </p:txBody>
-      </p:sp>
-      <p:sp>
-        <p:nvSpPr>
-          <p:cNvPr id="3" name="TextBox 2"/>
-          <p:cNvSpPr txBox="1"/>
-          <p:nvPr/>
-        </p:nvSpPr>
-        <p:spPr>
-          <a:xfrm>
-            <a:off x="411480" y="109728"/>
-            <a:ext cx="11338560" cy="731520"/>
-          </a:xfrm>
-          <a:prstGeom prst="rect">
-            <a:avLst/>
-          </a:prstGeom>
-          <a:noFill/>
-        </p:spPr>
-        <p:txBody>
-          <a:bodyPr wrap="square">
-            <a:spAutoFit/>
-          </a:bodyPr>
-          <a:lstStyle/>
-          <a:p>
-            <a:pPr algn="l"/>
-            <a:r>
-              <a:rPr sz="3000" b="1" i="0">
-                <a:solidFill>
-                  <a:srgbClr val="FFFFFF"/>
-                </a:solidFill>
-              </a:rPr>
-              <a:t>Hire Agent &amp; Solution Theming — Runtime Customisation</a:t>
-            </a:r>
-          </a:p>
-        </p:txBody>
-      </p:sp>
-      <p:sp>
-        <p:nvSpPr>
-          <p:cNvPr id="2" name="Rectangle 1"/>
-          <p:cNvSpPr/>
-          <p:nvPr/>
-        </p:nvSpPr>
-        <p:spPr>
-          <a:xfrm>
-            <a:off x="0" y="0"/>
-            <a:ext cx="12188952" cy="1325880"/>
-          </a:xfrm>
-          <a:prstGeom prst="rect">
-            <a:avLst/>
-          </a:prstGeom>
-          <a:solidFill>
-            <a:srgbClr val="0D1B2A"/>
-          </a:solidFill>
-          <a:ln>
-            <a:noFill/>
-          </a:ln>
-        </p:spPr>
-        <p:style>
-          <a:lnRef idx="1">
-            <a:schemeClr val="accent1"/>
-          </a:lnRef>
-          <a:fillRef idx="3">
-            <a:schemeClr val="accent1"/>
-          </a:fillRef>
-          <a:effectRef idx="2">
-            <a:schemeClr val="accent1"/>
-          </a:effectRef>
-          <a:fontRef idx="minor">
-            <a:schemeClr val="lt1"/>
-          </a:fontRef>
-        </p:style>
-        <p:txBody>
-          <a:bodyPr rtlCol="0" anchor="ctr"/>
-          <a:lstStyle/>
-          <a:p>
-            <a:pPr algn="ctr"/>
-          </a:p>
-        </p:txBody>
-      </p:sp>
-    </p:spTree>
-  </p:cSld>
-  <p:clrMapOvr>
-    <a:masterClrMapping/>
-  </p:clrMapOvr>
-</p:sld>
-</file>
-
-<file path=ppt/slides/slide26.xml><?xml version="1.0" encoding="utf-8"?>
 <p:sld xmlns:a="http://schemas.openxmlformats.org/drawingml/2006/main" xmlns:p="http://schemas.openxmlformats.org/presentationml/2006/main" xmlns:r="http://schemas.openxmlformats.org/officeDocument/2006/relationships">
   <p:cSld>
     <p:bg>
@@ -17716,7 +14224,7 @@
                 </a:solidFill>
                 <a:latin typeface="Calibri"/>
               </a:rPr>
-              <a:t>SAGE[ai] — Confidential | March 2026</a:t>
+              <a:t>SAGE[ai] — Open Source (Apache 2.0) | github.com/Sumanharapanahalli/sage | March 2026</a:t>
             </a:r>
           </a:p>
         </p:txBody>
@@ -17729,7 +14237,7 @@
 </p:sld>
 </file>
 
-<file path=ppt/slides/slide27.xml><?xml version="1.0" encoding="utf-8"?>
+<file path=ppt/slides/slide23.xml><?xml version="1.0" encoding="utf-8"?>
 <p:sld xmlns:a="http://schemas.openxmlformats.org/drawingml/2006/main" xmlns:p="http://schemas.openxmlformats.org/presentationml/2006/main" xmlns:r="http://schemas.openxmlformats.org/officeDocument/2006/relationships">
   <p:cSld>
     <p:bg>
@@ -18824,7 +15332,7 @@
                 </a:solidFill>
                 <a:latin typeface="Calibri"/>
               </a:rPr>
-              <a:t>SAGE[ai] — Confidential | March 2026</a:t>
+              <a:t>SAGE[ai] — Open Source (Apache 2.0) | github.com/Sumanharapanahalli/sage | March 2026</a:t>
             </a:r>
           </a:p>
         </p:txBody>
@@ -18837,7 +15345,7 @@
 </p:sld>
 </file>
 
-<file path=ppt/slides/slide28.xml><?xml version="1.0" encoding="utf-8"?>
+<file path=ppt/slides/slide24.xml><?xml version="1.0" encoding="utf-8"?>
 <p:sld xmlns:a="http://schemas.openxmlformats.org/drawingml/2006/main" xmlns:p="http://schemas.openxmlformats.org/presentationml/2006/main" xmlns:r="http://schemas.openxmlformats.org/officeDocument/2006/relationships">
   <p:cSld>
     <p:bg>
@@ -18927,7 +15435,7 @@
                   <a:srgbClr val="065F46"/>
                 </a:solidFill>
               </a:rPr>
-              <a:t>Platform Completeness — 12+ Integration Phases</a:t>
+              <a:t>Platform Completeness — 136 Endpoints, 27 Pages, 17+ Solutions</a:t>
             </a:r>
           </a:p>
         </p:txBody>
@@ -18961,7 +15469,7 @@
                   <a:srgbClr val="4B5563"/>
                 </a:solidFill>
               </a:rPr>
-              <a:t>From core agent loop to enterprise-grade orchestration — all live</a:t>
+              <a:t>From core agent loop to enterprise-grade orchestration — all open source</a:t>
             </a:r>
           </a:p>
         </p:txBody>
@@ -19677,7 +16185,7 @@
                   <a:srgbClr val="6B7280"/>
                 </a:solidFill>
               </a:rPr>
-              <a:t>SAGE[ai] — Confidential | March 2026</a:t>
+              <a:t>SAGE[ai] — Open Source (Apache 2.0) | github.com/Sumanharapanahalli/sage | March 2026</a:t>
             </a:r>
           </a:p>
         </p:txBody>
@@ -19690,7 +16198,7 @@
 </p:sld>
 </file>
 
-<file path=ppt/slides/slide29.xml><?xml version="1.0" encoding="utf-8"?>
+<file path=ppt/slides/slide25.xml><?xml version="1.0" encoding="utf-8"?>
 <p:sld xmlns:a="http://schemas.openxmlformats.org/drawingml/2006/main" xmlns:p="http://schemas.openxmlformats.org/presentationml/2006/main" xmlns:r="http://schemas.openxmlformats.org/officeDocument/2006/relationships">
   <p:cSld>
     <p:spTree>
@@ -19892,7 +16400,7 @@
                   <a:srgbClr val="00B4D8"/>
                 </a:solidFill>
               </a:rPr>
-              <a:t>Lean development at machine speed.
+              <a:t>Open Source (Apache 2.0). Lean development at machine speed.
 YAML-first. Agent-native. Human-in-the-loop always.</a:t>
             </a:r>
           </a:p>
@@ -19927,7 +16435,7 @@
                   <a:srgbClr val="FFFFFF"/>
                 </a:solidFill>
               </a:rPr>
-              <a:t>github.com/your-org/sage</a:t>
+              <a:t>github.com/Sumanharapanahalli/sage — Star, Fork, Contribute</a:t>
             </a:r>
           </a:p>
         </p:txBody>
@@ -19961,7 +16469,7 @@
                   <a:srgbClr val="FFFFFF"/>
                 </a:solidFill>
               </a:rPr>
-              <a:t>/docs — SETUP.md · USER_GUIDE.md · ADDING_A_PROJECT.md</a:t>
+              <a:t>136 API endpoints · 27 UI pages · 17+ solution templates · 79 E2E tests</a:t>
             </a:r>
           </a:p>
         </p:txBody>
@@ -19995,7 +16503,7 @@
                   <a:srgbClr val="FFFFFF"/>
                 </a:solidFill>
               </a:rPr>
-              <a:t>make test-all — full test suite in under 2 min</a:t>
+              <a:t>Framework is open — solutions are private (SAGE_SOLUTIONS_DIR)</a:t>
             </a:r>
           </a:p>
         </p:txBody>
@@ -21012,7 +17520,7 @@
                   <a:srgbClr val="647487"/>
                 </a:solidFill>
               </a:rPr>
-              <a:t>SAGE[ai] — Confidential | March 2026</a:t>
+              <a:t>SAGE[ai] — Open Source (Apache 2.0) | github.com/Sumanharapanahalli/sage | March 2026</a:t>
             </a:r>
           </a:p>
         </p:txBody>
@@ -21892,7 +18400,7 @@
                   <a:srgbClr val="647487"/>
                 </a:solidFill>
               </a:rPr>
-              <a:t>SAGE[ai] — Confidential | March 2026</a:t>
+              <a:t>SAGE[ai] — Open Source (Apache 2.0) | github.com/Sumanharapanahalli/sage | March 2026</a:t>
             </a:r>
           </a:p>
         </p:txBody>
@@ -22578,7 +19086,7 @@
                   <a:srgbClr val="647487"/>
                 </a:solidFill>
               </a:rPr>
-              <a:t>SAGE[ai] — Confidential | March 2026</a:t>
+              <a:t>SAGE[ai] — Open Source (Apache 2.0) | github.com/Sumanharapanahalli/sage | March 2026</a:t>
             </a:r>
           </a:p>
         </p:txBody>
@@ -23227,7 +19735,7 @@
                   <a:srgbClr val="647487"/>
                 </a:solidFill>
               </a:rPr>
-              <a:t>SAGE[ai] — Confidential | March 2026</a:t>
+              <a:t>SAGE[ai] — Open Source (Apache 2.0) | github.com/Sumanharapanahalli/sage | March 2026</a:t>
             </a:r>
           </a:p>
         </p:txBody>
@@ -24037,7 +20545,7 @@
                   <a:srgbClr val="647487"/>
                 </a:solidFill>
               </a:rPr>
-              <a:t>SAGE[ai] — Confidential | March 2026</a:t>
+              <a:t>SAGE[ai] — Open Source (Apache 2.0) | github.com/Sumanharapanahalli/sage | March 2026</a:t>
             </a:r>
           </a:p>
         </p:txBody>
@@ -25026,7 +21534,7 @@
                   <a:srgbClr val="647487"/>
                 </a:solidFill>
               </a:rPr>
-              <a:t>SAGE[ai] — Confidential | March 2026</a:t>
+              <a:t>SAGE[ai] — Open Source (Apache 2.0) | github.com/Sumanharapanahalli/sage | March 2026</a:t>
             </a:r>
           </a:p>
         </p:txBody>
@@ -25906,7 +22414,7 @@
                   <a:srgbClr val="647487"/>
                 </a:solidFill>
               </a:rPr>
-              <a:t>SAGE[ai] — Confidential | March 2026</a:t>
+              <a:t>SAGE[ai] — Open Source (Apache 2.0) | github.com/Sumanharapanahalli/sage | March 2026</a:t>
             </a:r>
           </a:p>
         </p:txBody>
